--- a/research/paper-arxiv/images/architecture.pptx
+++ b/research/paper-arxiv/images/architecture.pptx
@@ -7,7 +7,7 @@
   <p:sldIdLst>
     <p:sldId id="256" r:id="rId7"/>
   </p:sldIdLst>
-  <p:sldSz cx="12700000" cy="4445000" type="screen4x3"/>
+  <p:sldSz cx="12700000" cy="5969000" type="screen4x3"/>
   <p:notesSz cx="6858000" cy="9144000"/>
   <p:defaultTextStyle>
     <a:defPPr>
@@ -3096,12 +3096,12 @@
         </p:nvSpPr>
         <p:spPr>
           <a:xfrm>
-            <a:off x="152400" y="177800"/>
-            <a:ext cx="1905000" cy="2717800"/>
+            <a:off x="152400" y="508000"/>
+            <a:ext cx="1879600" cy="2768600"/>
           </a:xfrm>
           <a:prstGeom prst="roundRect">
             <a:avLst>
-              <a:gd name="adj" fmla="val 8000"/>
+              <a:gd name="adj" fmla="val 8108"/>
             </a:avLst>
           </a:prstGeom>
           <a:solidFill>
@@ -3142,8 +3142,8 @@
         </p:nvSpPr>
         <p:spPr>
           <a:xfrm>
-            <a:off x="304800" y="225742"/>
-            <a:ext cx="762000" cy="315468"/>
+            <a:off x="304800" y="504825"/>
+            <a:ext cx="762000" cy="411480"/>
           </a:xfrm>
           <a:prstGeom prst="rect">
             <a:avLst/>
@@ -3158,7 +3158,7 @@
           <a:p>
             <a:pPr algn="l"/>
             <a:r>
-              <a:rPr sz="1150" b="1" i="0">
+              <a:rPr sz="1500" b="1" i="0">
                 <a:solidFill>
                   <a:srgbClr val="475569"/>
                 </a:solidFill>
@@ -3177,12 +3177,12 @@
         </p:nvSpPr>
         <p:spPr>
           <a:xfrm>
-            <a:off x="304800" y="533400"/>
-            <a:ext cx="1600200" cy="381000"/>
+            <a:off x="304800" y="914400"/>
+            <a:ext cx="1574800" cy="431800"/>
           </a:xfrm>
           <a:prstGeom prst="roundRect">
             <a:avLst>
-              <a:gd name="adj" fmla="val 23333"/>
+              <a:gd name="adj" fmla="val 20588"/>
             </a:avLst>
           </a:prstGeom>
           <a:solidFill>
@@ -3231,7 +3231,7 @@
         </p:blipFill>
         <p:spPr>
           <a:xfrm>
-            <a:off x="419100" y="635000"/>
+            <a:off x="419100" y="1041400"/>
             <a:ext cx="177800" cy="177800"/>
           </a:xfrm>
           <a:prstGeom prst="rect">
@@ -3247,8 +3247,8 @@
         </p:nvSpPr>
         <p:spPr>
           <a:xfrm>
-            <a:off x="673100" y="633603"/>
-            <a:ext cx="762000" cy="246888"/>
+            <a:off x="673100" y="999871"/>
+            <a:ext cx="762000" cy="356616"/>
           </a:xfrm>
           <a:prstGeom prst="rect">
             <a:avLst/>
@@ -3263,7 +3263,7 @@
           <a:p>
             <a:pPr algn="l"/>
             <a:r>
-              <a:rPr sz="900" b="0" i="0">
+              <a:rPr sz="1300" b="0" i="0">
                 <a:solidFill>
                   <a:srgbClr val="1F2937"/>
                 </a:solidFill>
@@ -3282,8 +3282,8 @@
         </p:nvSpPr>
         <p:spPr>
           <a:xfrm>
-            <a:off x="381000" y="1006602"/>
-            <a:ext cx="1137006" cy="208483"/>
+            <a:off x="330200" y="1432242"/>
+            <a:ext cx="1720469" cy="315468"/>
           </a:xfrm>
           <a:prstGeom prst="rect">
             <a:avLst/>
@@ -3298,7 +3298,7 @@
           <a:p>
             <a:pPr algn="l"/>
             <a:r>
-              <a:rPr sz="760" b="0" i="1">
+              <a:rPr sz="1150" b="0" i="1">
                 <a:solidFill>
                   <a:srgbClr val="64748B"/>
                 </a:solidFill>
@@ -3317,12 +3317,12 @@
         </p:nvSpPr>
         <p:spPr>
           <a:xfrm>
-            <a:off x="304800" y="1219200"/>
-            <a:ext cx="1600200" cy="381000"/>
+            <a:off x="304800" y="1752600"/>
+            <a:ext cx="1574800" cy="711200"/>
           </a:xfrm>
           <a:prstGeom prst="roundRect">
             <a:avLst>
-              <a:gd name="adj" fmla="val 23333"/>
+              <a:gd name="adj" fmla="val 10714"/>
             </a:avLst>
           </a:prstGeom>
           <a:solidFill>
@@ -3330,7 +3330,7 @@
           </a:solidFill>
           <a:ln w="12700">
             <a:solidFill>
-              <a:srgbClr val="E2E8F0"/>
+              <a:srgbClr val="A8D8C0"/>
             </a:solidFill>
           </a:ln>
           <a:effectLst/>
@@ -3357,7 +3357,7 @@
       </p:sp>
       <p:pic>
         <p:nvPicPr>
-          <p:cNvPr id="9" name="Picture 8" descr="tool--334155.256.png"/>
+          <p:cNvPr id="9" name="Picture 8" descr="plug-connected--15795a.256.png"/>
           <p:cNvPicPr>
             <a:picLocks noChangeAspect="1"/>
           </p:cNvPicPr>
@@ -3371,7 +3371,7 @@
         </p:blipFill>
         <p:spPr>
           <a:xfrm>
-            <a:off x="419100" y="1320800"/>
+            <a:off x="406400" y="1879600"/>
             <a:ext cx="177800" cy="177800"/>
           </a:xfrm>
           <a:prstGeom prst="rect">
@@ -3387,8 +3387,8 @@
         </p:nvSpPr>
         <p:spPr>
           <a:xfrm>
-            <a:off x="673100" y="1319403"/>
-            <a:ext cx="762000" cy="246888"/>
+            <a:off x="685800" y="1849438"/>
+            <a:ext cx="885825" cy="342900"/>
           </a:xfrm>
           <a:prstGeom prst="rect">
             <a:avLst/>
@@ -3403,13 +3403,13 @@
           <a:p>
             <a:pPr algn="l"/>
             <a:r>
-              <a:rPr sz="900" b="0" i="0">
+              <a:rPr sz="1250" b="1" i="0">
                 <a:solidFill>
-                  <a:srgbClr val="1F2937"/>
+                  <a:srgbClr val="15795A"/>
                 </a:solidFill>
                 <a:latin typeface="Helvetica Neue"/>
               </a:rPr>
-              <a:t>Tools</a:t>
+              <a:t>two lines</a:t>
             </a:r>
           </a:p>
         </p:txBody>
@@ -3422,8 +3422,8 @@
         </p:nvSpPr>
         <p:spPr>
           <a:xfrm>
-            <a:off x="381000" y="1692402"/>
-            <a:ext cx="1496060" cy="208483"/>
+            <a:off x="381000" y="2179066"/>
+            <a:ext cx="1445666" cy="296266"/>
           </a:xfrm>
           <a:prstGeom prst="rect">
             <a:avLst/>
@@ -3438,274 +3438,7 @@
           <a:p>
             <a:pPr algn="l"/>
             <a:r>
-              <a:rPr sz="760" b="0" i="0">
-                <a:solidFill>
-                  <a:srgbClr val="64748B"/>
-                </a:solidFill>
-                <a:latin typeface="Helvetica Neue"/>
-              </a:rPr>
-              <a:t>DB · shell · files · HTTP</a:t>
-            </a:r>
-          </a:p>
-        </p:txBody>
-      </p:sp>
-      <p:sp>
-        <p:nvSpPr>
-          <p:cNvPr id="12" name="Rounded Rectangle 11"/>
-          <p:cNvSpPr/>
-          <p:nvPr/>
-        </p:nvSpPr>
-        <p:spPr>
-          <a:xfrm>
-            <a:off x="304800" y="1930400"/>
-            <a:ext cx="1600200" cy="787400"/>
-          </a:xfrm>
-          <a:prstGeom prst="roundRect">
-            <a:avLst>
-              <a:gd name="adj" fmla="val 8064"/>
-            </a:avLst>
-          </a:prstGeom>
-          <a:solidFill>
-            <a:srgbClr val="F8FAFC"/>
-          </a:solidFill>
-          <a:ln w="12700">
-            <a:solidFill>
-              <a:srgbClr val="E2E8F0"/>
-            </a:solidFill>
-          </a:ln>
-          <a:effectLst/>
-        </p:spPr>
-        <p:style>
-          <a:lnRef idx="1">
-            <a:schemeClr val="accent1"/>
-          </a:lnRef>
-          <a:fillRef idx="3">
-            <a:schemeClr val="accent1"/>
-          </a:fillRef>
-          <a:effectRef idx="2">
-            <a:schemeClr val="accent1"/>
-          </a:effectRef>
-          <a:fontRef idx="minor">
-            <a:schemeClr val="lt1"/>
-          </a:fontRef>
-        </p:style>
-        <p:txBody>
-          <a:bodyPr rtlCol="0" anchor="ctr"/>
-          <a:lstStyle/>
-          <a:p/>
-        </p:txBody>
-      </p:sp>
-      <p:sp>
-        <p:nvSpPr>
-          <p:cNvPr id="13" name="TextBox 12"/>
-          <p:cNvSpPr txBox="1"/>
-          <p:nvPr/>
-        </p:nvSpPr>
-        <p:spPr>
-          <a:xfrm>
-            <a:off x="431800" y="2025523"/>
-            <a:ext cx="762000" cy="202997"/>
-          </a:xfrm>
-          <a:prstGeom prst="rect">
-            <a:avLst/>
-          </a:prstGeom>
-          <a:noFill/>
-        </p:spPr>
-        <p:txBody>
-          <a:bodyPr wrap="none" lIns="0" rIns="0" tIns="0" bIns="0" anchor="t">
-            <a:spAutoFit/>
-          </a:bodyPr>
-          <a:lstStyle/>
-          <a:p>
-            <a:pPr algn="l"/>
-            <a:r>
-              <a:rPr sz="740" b="0" i="0">
-                <a:solidFill>
-                  <a:srgbClr val="334155"/>
-                </a:solidFill>
-                <a:latin typeface="Menlo"/>
-              </a:rPr>
-              <a:t>tool_use {</a:t>
-            </a:r>
-          </a:p>
-        </p:txBody>
-      </p:sp>
-      <p:sp>
-        <p:nvSpPr>
-          <p:cNvPr id="14" name="TextBox 13"/>
-          <p:cNvSpPr txBox="1"/>
-          <p:nvPr/>
-        </p:nvSpPr>
-        <p:spPr>
-          <a:xfrm>
-            <a:off x="431800" y="2203323"/>
-            <a:ext cx="1281887" cy="202997"/>
-          </a:xfrm>
-          <a:prstGeom prst="rect">
-            <a:avLst/>
-          </a:prstGeom>
-          <a:noFill/>
-        </p:spPr>
-        <p:txBody>
-          <a:bodyPr wrap="none" lIns="0" rIns="0" tIns="0" bIns="0" anchor="t">
-            <a:spAutoFit/>
-          </a:bodyPr>
-          <a:lstStyle/>
-          <a:p>
-            <a:pPr algn="l"/>
-            <a:r>
-              <a:rPr sz="740" b="0" i="0">
-                <a:solidFill>
-                  <a:srgbClr val="334155"/>
-                </a:solidFill>
-                <a:latin typeface="Menlo"/>
-              </a:rPr>
-              <a:t>  name: "execute_sql",</a:t>
-            </a:r>
-          </a:p>
-        </p:txBody>
-      </p:sp>
-      <p:sp>
-        <p:nvSpPr>
-          <p:cNvPr id="15" name="TextBox 14"/>
-          <p:cNvSpPr txBox="1"/>
-          <p:nvPr/>
-        </p:nvSpPr>
-        <p:spPr>
-          <a:xfrm>
-            <a:off x="431800" y="2381123"/>
-            <a:ext cx="932282" cy="202997"/>
-          </a:xfrm>
-          <a:prstGeom prst="rect">
-            <a:avLst/>
-          </a:prstGeom>
-          <a:noFill/>
-        </p:spPr>
-        <p:txBody>
-          <a:bodyPr wrap="none" lIns="0" rIns="0" tIns="0" bIns="0" anchor="t">
-            <a:spAutoFit/>
-          </a:bodyPr>
-          <a:lstStyle/>
-          <a:p>
-            <a:pPr algn="l"/>
-            <a:r>
-              <a:rPr sz="740" b="0" i="0">
-                <a:solidFill>
-                  <a:srgbClr val="334155"/>
-                </a:solidFill>
-                <a:latin typeface="Menlo"/>
-              </a:rPr>
-              <a:t>  arguments: {…}</a:t>
-            </a:r>
-          </a:p>
-        </p:txBody>
-      </p:sp>
-      <p:sp>
-        <p:nvSpPr>
-          <p:cNvPr id="16" name="TextBox 15"/>
-          <p:cNvSpPr txBox="1"/>
-          <p:nvPr/>
-        </p:nvSpPr>
-        <p:spPr>
-          <a:xfrm>
-            <a:off x="304800" y="3013202"/>
-            <a:ext cx="1914957" cy="208483"/>
-          </a:xfrm>
-          <a:prstGeom prst="rect">
-            <a:avLst/>
-          </a:prstGeom>
-          <a:noFill/>
-        </p:spPr>
-        <p:txBody>
-          <a:bodyPr wrap="none" lIns="0" rIns="0" tIns="0" bIns="0" anchor="t">
-            <a:spAutoFit/>
-          </a:bodyPr>
-          <a:lstStyle/>
-          <a:p>
-            <a:pPr algn="l"/>
-            <a:r>
-              <a:rPr sz="760" b="0" i="0">
-                <a:solidFill>
-                  <a:srgbClr val="64748B"/>
-                </a:solidFill>
-                <a:latin typeface="Helvetica Neue"/>
-              </a:rPr>
-              <a:t>14 frameworks · Python / JS / Go</a:t>
-            </a:r>
-          </a:p>
-        </p:txBody>
-      </p:sp>
-      <p:sp>
-        <p:nvSpPr>
-          <p:cNvPr id="17" name="Rounded Rectangle 16"/>
-          <p:cNvSpPr/>
-          <p:nvPr/>
-        </p:nvSpPr>
-        <p:spPr>
-          <a:xfrm>
-            <a:off x="304800" y="3225800"/>
-            <a:ext cx="1600200" cy="279400"/>
-          </a:xfrm>
-          <a:prstGeom prst="roundRect">
-            <a:avLst>
-              <a:gd name="adj" fmla="val 22727"/>
-            </a:avLst>
-          </a:prstGeom>
-          <a:solidFill>
-            <a:srgbClr val="F8FAFC"/>
-          </a:solidFill>
-          <a:ln w="12700">
-            <a:solidFill>
-              <a:srgbClr val="E2E8F0"/>
-            </a:solidFill>
-          </a:ln>
-          <a:effectLst/>
-        </p:spPr>
-        <p:style>
-          <a:lnRef idx="1">
-            <a:schemeClr val="accent1"/>
-          </a:lnRef>
-          <a:fillRef idx="3">
-            <a:schemeClr val="accent1"/>
-          </a:fillRef>
-          <a:effectRef idx="2">
-            <a:schemeClr val="accent1"/>
-          </a:effectRef>
-          <a:fontRef idx="minor">
-            <a:schemeClr val="lt1"/>
-          </a:fontRef>
-        </p:style>
-        <p:txBody>
-          <a:bodyPr rtlCol="0" anchor="ctr"/>
-          <a:lstStyle/>
-          <a:p/>
-        </p:txBody>
-      </p:sp>
-      <p:sp>
-        <p:nvSpPr>
-          <p:cNvPr id="18" name="TextBox 17"/>
-          <p:cNvSpPr txBox="1"/>
-          <p:nvPr/>
-        </p:nvSpPr>
-        <p:spPr>
-          <a:xfrm>
-            <a:off x="406400" y="3275203"/>
-            <a:ext cx="1204722" cy="246888"/>
-          </a:xfrm>
-          <a:prstGeom prst="rect">
-            <a:avLst/>
-          </a:prstGeom>
-          <a:noFill/>
-        </p:spPr>
-        <p:txBody>
-          <a:bodyPr wrap="none" lIns="0" rIns="0" tIns="0" bIns="0" anchor="t">
-            <a:spAutoFit/>
-          </a:bodyPr>
-          <a:lstStyle/>
-          <a:p>
-            <a:pPr algn="l"/>
-            <a:r>
-              <a:rPr sz="900" b="0" i="0">
+              <a:rPr sz="1080" b="0" i="0">
                 <a:solidFill>
                   <a:srgbClr val="334155"/>
                 </a:solidFill>
@@ -3716,16 +3449,167 @@
           </a:p>
         </p:txBody>
       </p:sp>
+      <p:sp>
+        <p:nvSpPr>
+          <p:cNvPr id="12" name="TextBox 11"/>
+          <p:cNvSpPr txBox="1"/>
+          <p:nvPr/>
+        </p:nvSpPr>
+        <p:spPr>
+          <a:xfrm>
+            <a:off x="330200" y="2567940"/>
+            <a:ext cx="1228344" cy="329184"/>
+          </a:xfrm>
+          <a:prstGeom prst="rect">
+            <a:avLst/>
+          </a:prstGeom>
+          <a:noFill/>
+        </p:spPr>
+        <p:txBody>
+          <a:bodyPr wrap="none" lIns="0" rIns="0" tIns="0" bIns="0" anchor="t">
+            <a:spAutoFit/>
+          </a:bodyPr>
+          <a:lstStyle/>
+          <a:p>
+            <a:pPr algn="l"/>
+            <a:r>
+              <a:rPr sz="1200" b="0" i="0">
+                <a:solidFill>
+                  <a:srgbClr val="64748B"/>
+                </a:solidFill>
+                <a:latin typeface="Helvetica Neue"/>
+              </a:rPr>
+              <a:t>14 frameworks</a:t>
+            </a:r>
+          </a:p>
+        </p:txBody>
+      </p:sp>
+      <p:sp>
+        <p:nvSpPr>
+          <p:cNvPr id="13" name="TextBox 12"/>
+          <p:cNvSpPr txBox="1"/>
+          <p:nvPr/>
+        </p:nvSpPr>
+        <p:spPr>
+          <a:xfrm>
+            <a:off x="330200" y="2803842"/>
+            <a:ext cx="1448816" cy="315468"/>
+          </a:xfrm>
+          <a:prstGeom prst="rect">
+            <a:avLst/>
+          </a:prstGeom>
+          <a:noFill/>
+        </p:spPr>
+        <p:txBody>
+          <a:bodyPr wrap="none" lIns="0" rIns="0" tIns="0" bIns="0" anchor="t">
+            <a:spAutoFit/>
+          </a:bodyPr>
+          <a:lstStyle/>
+          <a:p>
+            <a:pPr algn="l"/>
+            <a:r>
+              <a:rPr sz="1150" b="0" i="0">
+                <a:solidFill>
+                  <a:srgbClr val="94A3B8"/>
+                </a:solidFill>
+                <a:latin typeface="Helvetica Neue"/>
+              </a:rPr>
+              <a:t>Python · JS · Go</a:t>
+            </a:r>
+          </a:p>
+        </p:txBody>
+      </p:sp>
+      <p:sp>
+        <p:nvSpPr>
+          <p:cNvPr id="14" name="Rounded Rectangle 13"/>
+          <p:cNvSpPr/>
+          <p:nvPr/>
+        </p:nvSpPr>
+        <p:spPr>
+          <a:xfrm>
+            <a:off x="1701800" y="584200"/>
+            <a:ext cx="190500" cy="190500"/>
+          </a:xfrm>
+          <a:prstGeom prst="roundRect">
+            <a:avLst>
+              <a:gd name="adj" fmla="val 50000"/>
+            </a:avLst>
+          </a:prstGeom>
+          <a:solidFill>
+            <a:srgbClr val="6D3FBF"/>
+          </a:solidFill>
+          <a:ln w="12700">
+            <a:solidFill>
+              <a:srgbClr val="6D3FBF"/>
+            </a:solidFill>
+          </a:ln>
+          <a:effectLst/>
+        </p:spPr>
+        <p:style>
+          <a:lnRef idx="1">
+            <a:schemeClr val="accent1"/>
+          </a:lnRef>
+          <a:fillRef idx="3">
+            <a:schemeClr val="accent1"/>
+          </a:fillRef>
+          <a:effectRef idx="2">
+            <a:schemeClr val="accent1"/>
+          </a:effectRef>
+          <a:fontRef idx="minor">
+            <a:schemeClr val="lt1"/>
+          </a:fontRef>
+        </p:style>
+        <p:txBody>
+          <a:bodyPr rtlCol="0" anchor="ctr"/>
+          <a:lstStyle/>
+          <a:p/>
+        </p:txBody>
+      </p:sp>
+      <p:sp>
+        <p:nvSpPr>
+          <p:cNvPr id="15" name="TextBox 14"/>
+          <p:cNvSpPr txBox="1"/>
+          <p:nvPr/>
+        </p:nvSpPr>
+        <p:spPr>
+          <a:xfrm>
+            <a:off x="1416050" y="504825"/>
+            <a:ext cx="762000" cy="411480"/>
+          </a:xfrm>
+          <a:prstGeom prst="rect">
+            <a:avLst/>
+          </a:prstGeom>
+          <a:noFill/>
+        </p:spPr>
+        <p:txBody>
+          <a:bodyPr wrap="none" lIns="0" rIns="0" tIns="0" bIns="0" anchor="t">
+            <a:spAutoFit/>
+          </a:bodyPr>
+          <a:lstStyle/>
+          <a:p>
+            <a:pPr algn="ctr"/>
+            <a:r>
+              <a:rPr sz="1500" b="1" i="0">
+                <a:solidFill>
+                  <a:srgbClr val="FFFFFF"/>
+                </a:solidFill>
+                <a:latin typeface="Helvetica Neue"/>
+              </a:rPr>
+              <a:t>1</a:t>
+            </a:r>
+          </a:p>
+        </p:txBody>
+      </p:sp>
       <p:cxnSp>
         <p:nvCxnSpPr>
-          <p:cNvPr id="19" name="Connector 18"/>
+          <p:cNvPr id="16" name="Connector 15"/>
           <p:cNvCxnSpPr/>
           <p:nvPr/>
         </p:nvCxnSpPr>
         <p:spPr>
           <a:xfrm>
-            <a:off x="2082800" y="1524000"/>
-            <a:ext cx="330200" cy="0"/>
+            <a:off x="2082800" y="1270000"/>
+            <a:ext cx="177800" cy="0"/>
           </a:xfrm>
           <a:prstGeom prst="line">
             <a:avLst/>
@@ -3753,53 +3637,18 @@
       </p:cxnSp>
       <p:sp>
         <p:nvSpPr>
-          <p:cNvPr id="20" name="TextBox 19"/>
-          <p:cNvSpPr txBox="1"/>
-          <p:nvPr/>
-        </p:nvSpPr>
-        <p:spPr>
-          <a:xfrm>
-            <a:off x="1866900" y="1317244"/>
-            <a:ext cx="762000" cy="197510"/>
-          </a:xfrm>
-          <a:prstGeom prst="rect">
-            <a:avLst/>
-          </a:prstGeom>
-          <a:noFill/>
-        </p:spPr>
-        <p:txBody>
-          <a:bodyPr wrap="none" lIns="0" rIns="0" tIns="0" bIns="0" anchor="t">
-            <a:spAutoFit/>
-          </a:bodyPr>
-          <a:lstStyle/>
-          <a:p>
-            <a:pPr algn="ctr"/>
-            <a:r>
-              <a:rPr sz="720" b="0" i="0">
-                <a:solidFill>
-                  <a:srgbClr val="64748B"/>
-                </a:solidFill>
-                <a:latin typeface="Helvetica Neue"/>
-              </a:rPr>
-              <a:t>tool_use</a:t>
-            </a:r>
-          </a:p>
-        </p:txBody>
-      </p:sp>
-      <p:sp>
-        <p:nvSpPr>
-          <p:cNvPr id="21" name="Rounded Rectangle 20"/>
+          <p:cNvPr id="17" name="Rounded Rectangle 16"/>
           <p:cNvSpPr/>
           <p:nvPr/>
         </p:nvSpPr>
         <p:spPr>
           <a:xfrm>
-            <a:off x="2463800" y="177800"/>
-            <a:ext cx="7569200" cy="3327400"/>
+            <a:off x="2336800" y="508000"/>
+            <a:ext cx="7874000" cy="2768600"/>
           </a:xfrm>
           <a:prstGeom prst="roundRect">
             <a:avLst>
-              <a:gd name="adj" fmla="val 4580"/>
+              <a:gd name="adj" fmla="val 5504"/>
             </a:avLst>
           </a:prstGeom>
           <a:solidFill>
@@ -3835,14 +3684,14 @@
       </p:sp>
       <p:sp>
         <p:nvSpPr>
-          <p:cNvPr id="22" name="TextBox 21"/>
+          <p:cNvPr id="18" name="TextBox 17"/>
           <p:cNvSpPr txBox="1"/>
           <p:nvPr/>
         </p:nvSpPr>
         <p:spPr>
           <a:xfrm>
-            <a:off x="2641600" y="263842"/>
-            <a:ext cx="1177163" cy="315468"/>
+            <a:off x="2540000" y="589915"/>
+            <a:ext cx="1740154" cy="466344"/>
           </a:xfrm>
           <a:prstGeom prst="rect">
             <a:avLst/>
@@ -3857,7 +3706,7 @@
           <a:p>
             <a:pPr algn="l"/>
             <a:r>
-              <a:rPr sz="1150" b="1" i="0">
+              <a:rPr sz="1700" b="1" i="0">
                 <a:solidFill>
                   <a:srgbClr val="1F2937"/>
                 </a:solidFill>
@@ -3870,14 +3719,14 @@
       </p:sp>
       <p:sp>
         <p:nvSpPr>
-          <p:cNvPr id="23" name="TextBox 22"/>
+          <p:cNvPr id="19" name="TextBox 18"/>
           <p:cNvSpPr txBox="1"/>
           <p:nvPr/>
         </p:nvSpPr>
         <p:spPr>
           <a:xfrm>
-            <a:off x="2641600" y="505460"/>
-            <a:ext cx="3149600" cy="219456"/>
+            <a:off x="2540000" y="891540"/>
+            <a:ext cx="2267712" cy="329184"/>
           </a:xfrm>
           <a:prstGeom prst="rect">
             <a:avLst/>
@@ -3892,31 +3741,31 @@
           <a:p>
             <a:pPr algn="l"/>
             <a:r>
-              <a:rPr sz="800" b="0" i="1">
+              <a:rPr sz="1200" b="0" i="1">
                 <a:solidFill>
                   <a:srgbClr val="64748B"/>
                 </a:solidFill>
                 <a:latin typeface="Helvetica Neue"/>
               </a:rPr>
-              <a:t>pre-execution mediation — the call has not run yet</a:t>
-            </a:r>
-          </a:p>
-        </p:txBody>
-      </p:sp>
-      <p:sp>
-        <p:nvSpPr>
-          <p:cNvPr id="24" name="Rounded Rectangle 23"/>
+              <a:t>the call has not run yet</a:t>
+            </a:r>
+          </a:p>
+        </p:txBody>
+      </p:sp>
+      <p:sp>
+        <p:nvSpPr>
+          <p:cNvPr id="20" name="Rounded Rectangle 19"/>
           <p:cNvSpPr/>
           <p:nvPr/>
         </p:nvSpPr>
         <p:spPr>
           <a:xfrm>
-            <a:off x="2616200" y="787400"/>
-            <a:ext cx="1676400" cy="1600200"/>
+            <a:off x="2540000" y="1219200"/>
+            <a:ext cx="1778000" cy="1219200"/>
           </a:xfrm>
           <a:prstGeom prst="roundRect">
             <a:avLst>
-              <a:gd name="adj" fmla="val 9523"/>
+              <a:gd name="adj" fmla="val 12500"/>
             </a:avLst>
           </a:prstGeom>
           <a:solidFill>
@@ -3951,7 +3800,7 @@
       </p:sp>
       <p:pic>
         <p:nvPicPr>
-          <p:cNvPr id="25" name="Picture 24" descr="regex--2f4fa8.256.png"/>
+          <p:cNvPr id="21" name="Picture 20" descr="regex--2f4fa8.256.png"/>
           <p:cNvPicPr>
             <a:picLocks noChangeAspect="1"/>
           </p:cNvPicPr>
@@ -3965,7 +3814,7 @@
         </p:blipFill>
         <p:spPr>
           <a:xfrm>
-            <a:off x="2743200" y="889000"/>
+            <a:off x="2667000" y="1320800"/>
             <a:ext cx="190500" cy="190500"/>
           </a:xfrm>
           <a:prstGeom prst="rect">
@@ -3975,14 +3824,14 @@
       </p:pic>
       <p:sp>
         <p:nvSpPr>
-          <p:cNvPr id="26" name="TextBox 25"/>
+          <p:cNvPr id="22" name="TextBox 21"/>
           <p:cNvSpPr txBox="1"/>
           <p:nvPr/>
         </p:nvSpPr>
         <p:spPr>
           <a:xfrm>
-            <a:off x="3022600" y="902652"/>
-            <a:ext cx="897636" cy="260604"/>
+            <a:off x="2946400" y="1308735"/>
+            <a:ext cx="921258" cy="356616"/>
           </a:xfrm>
           <a:prstGeom prst="rect">
             <a:avLst/>
@@ -3997,31 +3846,31 @@
           <a:p>
             <a:pPr algn="l"/>
             <a:r>
-              <a:rPr sz="950" b="1" i="0">
+              <a:rPr sz="1300" b="1" i="0">
                 <a:solidFill>
                   <a:srgbClr val="2F4FA8"/>
                 </a:solidFill>
                 <a:latin typeface="Helvetica Neue"/>
               </a:rPr>
-              <a:t>L1  patterns</a:t>
-            </a:r>
-          </a:p>
-        </p:txBody>
-      </p:sp>
-      <p:sp>
-        <p:nvSpPr>
-          <p:cNvPr id="27" name="Rounded Rectangle 26"/>
+              <a:t>L1  rules</a:t>
+            </a:r>
+          </a:p>
+        </p:txBody>
+      </p:sp>
+      <p:sp>
+        <p:nvSpPr>
+          <p:cNvPr id="23" name="Rounded Rectangle 22"/>
           <p:cNvSpPr/>
           <p:nvPr/>
         </p:nvSpPr>
         <p:spPr>
           <a:xfrm>
-            <a:off x="2717800" y="1193800"/>
-            <a:ext cx="1473200" cy="228600"/>
+            <a:off x="2654300" y="1676400"/>
+            <a:ext cx="1549400" cy="304800"/>
           </a:xfrm>
           <a:prstGeom prst="roundRect">
             <a:avLst>
-              <a:gd name="adj" fmla="val 22222"/>
+              <a:gd name="adj" fmla="val 16666"/>
             </a:avLst>
           </a:prstGeom>
           <a:solidFill>
@@ -4056,14 +3905,14 @@
       </p:sp>
       <p:sp>
         <p:nvSpPr>
-          <p:cNvPr id="28" name="TextBox 27"/>
+          <p:cNvPr id="24" name="TextBox 23"/>
           <p:cNvSpPr txBox="1"/>
           <p:nvPr/>
         </p:nvSpPr>
         <p:spPr>
           <a:xfrm>
-            <a:off x="2794000" y="1250823"/>
-            <a:ext cx="990549" cy="202997"/>
+            <a:off x="2930970" y="1711642"/>
+            <a:ext cx="996061" cy="315468"/>
           </a:xfrm>
           <a:prstGeom prst="rect">
             <a:avLst/>
@@ -4076,29 +3925,29 @@
           </a:bodyPr>
           <a:lstStyle/>
           <a:p>
-            <a:pPr algn="l"/>
-            <a:r>
-              <a:rPr sz="740" b="0" i="0">
+            <a:pPr algn="ctr"/>
+            <a:r>
+              <a:rPr sz="1150" b="0" i="0">
                 <a:solidFill>
                   <a:srgbClr val="1F2937"/>
                 </a:solidFill>
                 <a:latin typeface="Menlo"/>
               </a:rPr>
-              <a:t>sees: call string</a:t>
-            </a:r>
-          </a:p>
-        </p:txBody>
-      </p:sp>
-      <p:sp>
-        <p:nvSpPr>
-          <p:cNvPr id="29" name="TextBox 28"/>
+              <a:t>call string</a:t>
+            </a:r>
+          </a:p>
+        </p:txBody>
+      </p:sp>
+      <p:sp>
+        <p:nvSpPr>
+          <p:cNvPr id="25" name="TextBox 24"/>
           <p:cNvSpPr txBox="1"/>
           <p:nvPr/>
         </p:nvSpPr>
         <p:spPr>
           <a:xfrm>
-            <a:off x="2743200" y="1511681"/>
-            <a:ext cx="1105510" cy="213970"/>
+            <a:off x="2692400" y="2118042"/>
+            <a:ext cx="762000" cy="315468"/>
           </a:xfrm>
           <a:prstGeom prst="rect">
             <a:avLst/>
@@ -4113,13 +3962,153 @@
           <a:p>
             <a:pPr algn="l"/>
             <a:r>
-              <a:rPr sz="780" b="0" i="0">
+              <a:rPr sz="1150" b="0" i="0">
                 <a:solidFill>
                   <a:srgbClr val="64748B"/>
                 </a:solidFill>
                 <a:latin typeface="Helvetica Neue"/>
               </a:rPr>
-              <a:t>22 patterns, &lt;1 ms</a:t>
+              <a:t>&lt;1 ms</a:t>
+            </a:r>
+          </a:p>
+        </p:txBody>
+      </p:sp>
+      <p:cxnSp>
+        <p:nvCxnSpPr>
+          <p:cNvPr id="26" name="Connector 25"/>
+          <p:cNvCxnSpPr/>
+          <p:nvPr/>
+        </p:nvCxnSpPr>
+        <p:spPr>
+          <a:xfrm>
+            <a:off x="4330700" y="1828800"/>
+            <a:ext cx="127000" cy="0"/>
+          </a:xfrm>
+          <a:prstGeom prst="line">
+            <a:avLst/>
+          </a:prstGeom>
+          <a:ln w="20320">
+            <a:solidFill>
+              <a:srgbClr val="94A3B8"/>
+            </a:solidFill>
+          </a:ln>
+        </p:spPr>
+        <p:style>
+          <a:lnRef idx="2">
+            <a:schemeClr val="accent1"/>
+          </a:lnRef>
+          <a:fillRef idx="0">
+            <a:schemeClr val="accent1"/>
+          </a:fillRef>
+          <a:effectRef idx="1">
+            <a:schemeClr val="accent1"/>
+          </a:effectRef>
+          <a:fontRef idx="minor">
+            <a:schemeClr val="tx1"/>
+          </a:fontRef>
+        </p:style>
+      </p:cxnSp>
+      <p:sp>
+        <p:nvSpPr>
+          <p:cNvPr id="27" name="Rounded Rectangle 26"/>
+          <p:cNvSpPr/>
+          <p:nvPr/>
+        </p:nvSpPr>
+        <p:spPr>
+          <a:xfrm>
+            <a:off x="4470400" y="1219200"/>
+            <a:ext cx="1778000" cy="1219200"/>
+          </a:xfrm>
+          <a:prstGeom prst="roundRect">
+            <a:avLst>
+              <a:gd name="adj" fmla="val 12500"/>
+            </a:avLst>
+          </a:prstGeom>
+          <a:solidFill>
+            <a:srgbClr val="F1F5F9"/>
+          </a:solidFill>
+          <a:ln w="12700">
+            <a:solidFill>
+              <a:srgbClr val="CBD5E1"/>
+            </a:solidFill>
+          </a:ln>
+          <a:effectLst/>
+        </p:spPr>
+        <p:style>
+          <a:lnRef idx="1">
+            <a:schemeClr val="accent1"/>
+          </a:lnRef>
+          <a:fillRef idx="3">
+            <a:schemeClr val="accent1"/>
+          </a:fillRef>
+          <a:effectRef idx="2">
+            <a:schemeClr val="accent1"/>
+          </a:effectRef>
+          <a:fontRef idx="minor">
+            <a:schemeClr val="lt1"/>
+          </a:fontRef>
+        </p:style>
+        <p:txBody>
+          <a:bodyPr rtlCol="0" anchor="ctr"/>
+          <a:lstStyle/>
+          <a:p/>
+        </p:txBody>
+      </p:sp>
+      <p:pic>
+        <p:nvPicPr>
+          <p:cNvPr id="28" name="Picture 27" descr="binary-tree--475569.256.png"/>
+          <p:cNvPicPr>
+            <a:picLocks noChangeAspect="1"/>
+          </p:cNvPicPr>
+          <p:nvPr/>
+        </p:nvPicPr>
+        <p:blipFill>
+          <a:blip r:embed="rId5"/>
+          <a:stretch>
+            <a:fillRect/>
+          </a:stretch>
+        </p:blipFill>
+        <p:spPr>
+          <a:xfrm>
+            <a:off x="4597400" y="1320800"/>
+            <a:ext cx="190500" cy="190500"/>
+          </a:xfrm>
+          <a:prstGeom prst="rect">
+            <a:avLst/>
+          </a:prstGeom>
+        </p:spPr>
+      </p:pic>
+      <p:sp>
+        <p:nvSpPr>
+          <p:cNvPr id="29" name="TextBox 28"/>
+          <p:cNvSpPr txBox="1"/>
+          <p:nvPr/>
+        </p:nvSpPr>
+        <p:spPr>
+          <a:xfrm>
+            <a:off x="4876800" y="1308735"/>
+            <a:ext cx="1433068" cy="356616"/>
+          </a:xfrm>
+          <a:prstGeom prst="rect">
+            <a:avLst/>
+          </a:prstGeom>
+          <a:noFill/>
+        </p:spPr>
+        <p:txBody>
+          <a:bodyPr wrap="none" lIns="0" rIns="0" tIns="0" bIns="0" anchor="t">
+            <a:spAutoFit/>
+          </a:bodyPr>
+          <a:lstStyle/>
+          <a:p>
+            <a:pPr algn="l"/>
+            <a:r>
+              <a:rPr sz="1300" b="1" i="0">
+                <a:solidFill>
+                  <a:srgbClr val="475569"/>
+                </a:solidFill>
+                <a:latin typeface="Helvetica Neue"/>
+              </a:rPr>
+              <a:t>L2  classifier</a:t>
             </a:r>
           </a:p>
         </p:txBody>
@@ -4132,12 +4121,12 @@
         </p:nvSpPr>
         <p:spPr>
           <a:xfrm>
-            <a:off x="2717800" y="1752600"/>
-            <a:ext cx="1473200" cy="254000"/>
+            <a:off x="4584700" y="1676400"/>
+            <a:ext cx="1549400" cy="304800"/>
           </a:xfrm>
           <a:prstGeom prst="roundRect">
             <a:avLst>
-              <a:gd name="adj" fmla="val 20000"/>
+              <a:gd name="adj" fmla="val 16666"/>
             </a:avLst>
           </a:prstGeom>
           <a:solidFill>
@@ -4178,8 +4167,8 @@
         </p:nvSpPr>
         <p:spPr>
           <a:xfrm>
-            <a:off x="2824480" y="1813560"/>
-            <a:ext cx="1259840" cy="219456"/>
+            <a:off x="4861370" y="1711642"/>
+            <a:ext cx="996061" cy="315468"/>
           </a:xfrm>
           <a:prstGeom prst="rect">
             <a:avLst/>
@@ -4194,39 +4183,109 @@
           <a:p>
             <a:pPr algn="ctr"/>
             <a:r>
-              <a:rPr sz="800" b="1" i="0">
+              <a:rPr sz="1150" b="0" i="0">
                 <a:solidFill>
-                  <a:srgbClr val="DC2626"/>
+                  <a:srgbClr val="1F2937"/>
+                </a:solidFill>
+                <a:latin typeface="Menlo"/>
+              </a:rPr>
+              <a:t>15 features</a:t>
+            </a:r>
+          </a:p>
+        </p:txBody>
+      </p:sp>
+      <p:sp>
+        <p:nvSpPr>
+          <p:cNvPr id="32" name="TextBox 31"/>
+          <p:cNvSpPr txBox="1"/>
+          <p:nvPr/>
+        </p:nvSpPr>
+        <p:spPr>
+          <a:xfrm>
+            <a:off x="4622800" y="2118042"/>
+            <a:ext cx="762000" cy="315468"/>
+          </a:xfrm>
+          <a:prstGeom prst="rect">
+            <a:avLst/>
+          </a:prstGeom>
+          <a:noFill/>
+        </p:spPr>
+        <p:txBody>
+          <a:bodyPr wrap="none" lIns="0" rIns="0" tIns="0" bIns="0" anchor="t">
+            <a:spAutoFit/>
+          </a:bodyPr>
+          <a:lstStyle/>
+          <a:p>
+            <a:pPr algn="l"/>
+            <a:r>
+              <a:rPr sz="1150" b="0" i="0">
+                <a:solidFill>
+                  <a:srgbClr val="64748B"/>
                 </a:solidFill>
                 <a:latin typeface="Helvetica Neue"/>
               </a:rPr>
-              <a:t>0.4% of real attacks</a:t>
-            </a:r>
-          </a:p>
-        </p:txBody>
-      </p:sp>
-      <p:sp>
-        <p:nvSpPr>
-          <p:cNvPr id="32" name="Rounded Rectangle 31"/>
+              <a:t>&lt;10 ms</a:t>
+            </a:r>
+          </a:p>
+        </p:txBody>
+      </p:sp>
+      <p:cxnSp>
+        <p:nvCxnSpPr>
+          <p:cNvPr id="33" name="Connector 32"/>
+          <p:cNvCxnSpPr/>
+          <p:nvPr/>
+        </p:nvCxnSpPr>
+        <p:spPr>
+          <a:xfrm>
+            <a:off x="6261100" y="1828800"/>
+            <a:ext cx="127000" cy="0"/>
+          </a:xfrm>
+          <a:prstGeom prst="line">
+            <a:avLst/>
+          </a:prstGeom>
+          <a:ln w="20320">
+            <a:solidFill>
+              <a:srgbClr val="94A3B8"/>
+            </a:solidFill>
+          </a:ln>
+        </p:spPr>
+        <p:style>
+          <a:lnRef idx="2">
+            <a:schemeClr val="accent1"/>
+          </a:lnRef>
+          <a:fillRef idx="0">
+            <a:schemeClr val="accent1"/>
+          </a:fillRef>
+          <a:effectRef idx="1">
+            <a:schemeClr val="accent1"/>
+          </a:effectRef>
+          <a:fontRef idx="minor">
+            <a:schemeClr val="tx1"/>
+          </a:fontRef>
+        </p:style>
+      </p:cxnSp>
+      <p:sp>
+        <p:nvSpPr>
+          <p:cNvPr id="34" name="Rounded Rectangle 33"/>
           <p:cNvSpPr/>
           <p:nvPr/>
         </p:nvSpPr>
         <p:spPr>
           <a:xfrm>
-            <a:off x="4470400" y="787400"/>
-            <a:ext cx="1676400" cy="1600200"/>
+            <a:off x="6400800" y="1219200"/>
+            <a:ext cx="1778000" cy="1219200"/>
           </a:xfrm>
           <a:prstGeom prst="roundRect">
             <a:avLst>
-              <a:gd name="adj" fmla="val 9523"/>
+              <a:gd name="adj" fmla="val 12500"/>
             </a:avLst>
           </a:prstGeom>
           <a:solidFill>
-            <a:srgbClr val="F1F5F9"/>
+            <a:srgbClr val="F3EEFB"/>
           </a:solidFill>
           <a:ln w="12700">
             <a:solidFill>
-              <a:srgbClr val="CBD5E1"/>
+              <a:srgbClr val="C7B4EC"/>
             </a:solidFill>
           </a:ln>
           <a:effectLst/>
@@ -4253,21 +4312,21 @@
       </p:sp>
       <p:pic>
         <p:nvPicPr>
-          <p:cNvPr id="33" name="Picture 32" descr="binary-tree--475569.256.png"/>
+          <p:cNvPr id="35" name="Picture 34" descr="bulb--6d3fbf.256.png"/>
           <p:cNvPicPr>
             <a:picLocks noChangeAspect="1"/>
           </p:cNvPicPr>
           <p:nvPr/>
         </p:nvPicPr>
         <p:blipFill>
-          <a:blip r:embed="rId5"/>
+          <a:blip r:embed="rId6"/>
           <a:stretch>
             <a:fillRect/>
           </a:stretch>
         </p:blipFill>
         <p:spPr>
           <a:xfrm>
-            <a:off x="4597400" y="889000"/>
+            <a:off x="6527800" y="1320800"/>
             <a:ext cx="190500" cy="190500"/>
           </a:xfrm>
           <a:prstGeom prst="rect">
@@ -4277,14 +4336,14 @@
       </p:pic>
       <p:sp>
         <p:nvSpPr>
-          <p:cNvPr id="34" name="TextBox 33"/>
+          <p:cNvPr id="36" name="TextBox 35"/>
           <p:cNvSpPr txBox="1"/>
           <p:nvPr/>
         </p:nvSpPr>
         <p:spPr>
           <a:xfrm>
-            <a:off x="4876800" y="902652"/>
-            <a:ext cx="1047242" cy="260604"/>
+            <a:off x="6807200" y="1308735"/>
+            <a:ext cx="921258" cy="356616"/>
           </a:xfrm>
           <a:prstGeom prst="rect">
             <a:avLst/>
@@ -4299,31 +4358,31 @@
           <a:p>
             <a:pPr algn="l"/>
             <a:r>
-              <a:rPr sz="950" b="1" i="0">
+              <a:rPr sz="1300" b="1" i="0">
                 <a:solidFill>
-                  <a:srgbClr val="475569"/>
+                  <a:srgbClr val="6D3FBF"/>
                 </a:solidFill>
                 <a:latin typeface="Helvetica Neue"/>
               </a:rPr>
-              <a:t>L2  classifier</a:t>
-            </a:r>
-          </a:p>
-        </p:txBody>
-      </p:sp>
-      <p:sp>
-        <p:nvSpPr>
-          <p:cNvPr id="35" name="Rounded Rectangle 34"/>
+              <a:t>L3  judge</a:t>
+            </a:r>
+          </a:p>
+        </p:txBody>
+      </p:sp>
+      <p:sp>
+        <p:nvSpPr>
+          <p:cNvPr id="37" name="Rounded Rectangle 36"/>
           <p:cNvSpPr/>
           <p:nvPr/>
         </p:nvSpPr>
         <p:spPr>
           <a:xfrm>
-            <a:off x="4572000" y="1193800"/>
-            <a:ext cx="1473200" cy="228600"/>
+            <a:off x="6515100" y="1676400"/>
+            <a:ext cx="1549400" cy="304800"/>
           </a:xfrm>
           <a:prstGeom prst="roundRect">
             <a:avLst>
-              <a:gd name="adj" fmla="val 22222"/>
+              <a:gd name="adj" fmla="val 16666"/>
             </a:avLst>
           </a:prstGeom>
           <a:solidFill>
@@ -4358,14 +4417,14 @@
       </p:sp>
       <p:sp>
         <p:nvSpPr>
-          <p:cNvPr id="36" name="TextBox 35"/>
+          <p:cNvPr id="38" name="TextBox 37"/>
           <p:cNvSpPr txBox="1"/>
           <p:nvPr/>
         </p:nvSpPr>
         <p:spPr>
           <a:xfrm>
-            <a:off x="4648200" y="1250823"/>
-            <a:ext cx="990549" cy="202997"/>
+            <a:off x="6746494" y="1711642"/>
+            <a:ext cx="1086612" cy="315468"/>
           </a:xfrm>
           <a:prstGeom prst="rect">
             <a:avLst/>
@@ -4378,29 +4437,29 @@
           </a:bodyPr>
           <a:lstStyle/>
           <a:p>
-            <a:pPr algn="l"/>
-            <a:r>
-              <a:rPr sz="740" b="0" i="0">
+            <a:pPr algn="ctr"/>
+            <a:r>
+              <a:rPr sz="1150" b="0" i="0">
                 <a:solidFill>
                   <a:srgbClr val="1F2937"/>
                 </a:solidFill>
                 <a:latin typeface="Menlo"/>
               </a:rPr>
-              <a:t>sees: 15 features</a:t>
-            </a:r>
-          </a:p>
-        </p:txBody>
-      </p:sp>
-      <p:sp>
-        <p:nvSpPr>
-          <p:cNvPr id="37" name="TextBox 36"/>
+              <a:t>full context</a:t>
+            </a:r>
+          </a:p>
+        </p:txBody>
+      </p:sp>
+      <p:sp>
+        <p:nvSpPr>
+          <p:cNvPr id="39" name="TextBox 38"/>
           <p:cNvSpPr txBox="1"/>
           <p:nvPr/>
         </p:nvSpPr>
         <p:spPr>
           <a:xfrm>
-            <a:off x="4597400" y="1511681"/>
-            <a:ext cx="1044092" cy="213970"/>
+            <a:off x="6553200" y="2118042"/>
+            <a:ext cx="762000" cy="315468"/>
           </a:xfrm>
           <a:prstGeom prst="rect">
             <a:avLst/>
@@ -4415,31 +4474,172 @@
           <a:p>
             <a:pPr algn="l"/>
             <a:r>
-              <a:rPr sz="780" b="0" i="0">
+              <a:rPr sz="1150" b="0" i="0">
                 <a:solidFill>
                   <a:srgbClr val="64748B"/>
                 </a:solidFill>
                 <a:latin typeface="Helvetica Neue"/>
               </a:rPr>
-              <a:t>XGBoost / IForest</a:t>
-            </a:r>
-          </a:p>
-        </p:txBody>
-      </p:sp>
-      <p:sp>
-        <p:nvSpPr>
-          <p:cNvPr id="38" name="Rounded Rectangle 37"/>
+              <a:t>1–2 s</a:t>
+            </a:r>
+          </a:p>
+        </p:txBody>
+      </p:sp>
+      <p:cxnSp>
+        <p:nvCxnSpPr>
+          <p:cNvPr id="40" name="Connector 39"/>
+          <p:cNvCxnSpPr/>
+          <p:nvPr/>
+        </p:nvCxnSpPr>
+        <p:spPr>
+          <a:xfrm>
+            <a:off x="8191500" y="1828800"/>
+            <a:ext cx="127000" cy="0"/>
+          </a:xfrm>
+          <a:prstGeom prst="line">
+            <a:avLst/>
+          </a:prstGeom>
+          <a:ln w="20320">
+            <a:solidFill>
+              <a:srgbClr val="94A3B8"/>
+            </a:solidFill>
+          </a:ln>
+        </p:spPr>
+        <p:style>
+          <a:lnRef idx="2">
+            <a:schemeClr val="accent1"/>
+          </a:lnRef>
+          <a:fillRef idx="0">
+            <a:schemeClr val="accent1"/>
+          </a:fillRef>
+          <a:effectRef idx="1">
+            <a:schemeClr val="accent1"/>
+          </a:effectRef>
+          <a:fontRef idx="minor">
+            <a:schemeClr val="tx1"/>
+          </a:fontRef>
+        </p:style>
+      </p:cxnSp>
+      <p:sp>
+        <p:nvSpPr>
+          <p:cNvPr id="41" name="Rounded Rectangle 40"/>
           <p:cNvSpPr/>
           <p:nvPr/>
         </p:nvSpPr>
         <p:spPr>
           <a:xfrm>
-            <a:off x="4572000" y="1752600"/>
-            <a:ext cx="1473200" cy="254000"/>
+            <a:off x="8331200" y="1219200"/>
+            <a:ext cx="1778000" cy="1219200"/>
           </a:xfrm>
           <a:prstGeom prst="roundRect">
             <a:avLst>
-              <a:gd name="adj" fmla="val 20000"/>
+              <a:gd name="adj" fmla="val 12500"/>
+            </a:avLst>
+          </a:prstGeom>
+          <a:solidFill>
+            <a:srgbClr val="EAF6F0"/>
+          </a:solidFill>
+          <a:ln w="12700">
+            <a:solidFill>
+              <a:srgbClr val="A8D8C0"/>
+            </a:solidFill>
+            <a:prstDash val="dash"/>
+          </a:ln>
+          <a:effectLst/>
+        </p:spPr>
+        <p:style>
+          <a:lnRef idx="1">
+            <a:schemeClr val="accent1"/>
+          </a:lnRef>
+          <a:fillRef idx="3">
+            <a:schemeClr val="accent1"/>
+          </a:fillRef>
+          <a:effectRef idx="2">
+            <a:schemeClr val="accent1"/>
+          </a:effectRef>
+          <a:fontRef idx="minor">
+            <a:schemeClr val="lt1"/>
+          </a:fontRef>
+        </p:style>
+        <p:txBody>
+          <a:bodyPr rtlCol="0" anchor="ctr"/>
+          <a:lstStyle/>
+          <a:p/>
+        </p:txBody>
+      </p:sp>
+      <p:pic>
+        <p:nvPicPr>
+          <p:cNvPr id="42" name="Picture 41" descr="route--15795a.256.png"/>
+          <p:cNvPicPr>
+            <a:picLocks noChangeAspect="1"/>
+          </p:cNvPicPr>
+          <p:nvPr/>
+        </p:nvPicPr>
+        <p:blipFill>
+          <a:blip r:embed="rId7"/>
+          <a:stretch>
+            <a:fillRect/>
+          </a:stretch>
+        </p:blipFill>
+        <p:spPr>
+          <a:xfrm>
+            <a:off x="8458200" y="1320800"/>
+            <a:ext cx="190500" cy="190500"/>
+          </a:xfrm>
+          <a:prstGeom prst="rect">
+            <a:avLst/>
+          </a:prstGeom>
+        </p:spPr>
+      </p:pic>
+      <p:sp>
+        <p:nvSpPr>
+          <p:cNvPr id="43" name="TextBox 42"/>
+          <p:cNvSpPr txBox="1"/>
+          <p:nvPr/>
+        </p:nvSpPr>
+        <p:spPr>
+          <a:xfrm>
+            <a:off x="8737600" y="1308735"/>
+            <a:ext cx="1433068" cy="356616"/>
+          </a:xfrm>
+          <a:prstGeom prst="rect">
+            <a:avLst/>
+          </a:prstGeom>
+          <a:noFill/>
+        </p:spPr>
+        <p:txBody>
+          <a:bodyPr wrap="none" lIns="0" rIns="0" tIns="0" bIns="0" anchor="t">
+            <a:spAutoFit/>
+          </a:bodyPr>
+          <a:lstStyle/>
+          <a:p>
+            <a:pPr algn="l"/>
+            <a:r>
+              <a:rPr sz="1300" b="1" i="0">
+                <a:solidFill>
+                  <a:srgbClr val="15795A"/>
+                </a:solidFill>
+                <a:latin typeface="Helvetica Neue"/>
+              </a:rPr>
+              <a:t>Lp  provenance</a:t>
+            </a:r>
+          </a:p>
+        </p:txBody>
+      </p:sp>
+      <p:sp>
+        <p:nvSpPr>
+          <p:cNvPr id="44" name="Rounded Rectangle 43"/>
+          <p:cNvSpPr/>
+          <p:nvPr/>
+        </p:nvSpPr>
+        <p:spPr>
+          <a:xfrm>
+            <a:off x="8445500" y="1676400"/>
+            <a:ext cx="1549400" cy="304800"/>
+          </a:xfrm>
+          <a:prstGeom prst="roundRect">
+            <a:avLst>
+              <a:gd name="adj" fmla="val 16666"/>
             </a:avLst>
           </a:prstGeom>
           <a:solidFill>
@@ -4474,14 +4674,14 @@
       </p:sp>
       <p:sp>
         <p:nvSpPr>
-          <p:cNvPr id="39" name="TextBox 38"/>
+          <p:cNvPr id="45" name="TextBox 44"/>
           <p:cNvSpPr txBox="1"/>
           <p:nvPr/>
         </p:nvSpPr>
         <p:spPr>
           <a:xfrm>
-            <a:off x="4927600" y="1813560"/>
-            <a:ext cx="762000" cy="219456"/>
+            <a:off x="8631618" y="1711642"/>
+            <a:ext cx="1177163" cy="315468"/>
           </a:xfrm>
           <a:prstGeom prst="rect">
             <a:avLst/>
@@ -4496,39 +4696,109 @@
           <a:p>
             <a:pPr algn="ctr"/>
             <a:r>
-              <a:rPr sz="800" b="1" i="0">
+              <a:rPr sz="1150" b="0" i="0">
+                <a:solidFill>
+                  <a:srgbClr val="1F2937"/>
+                </a:solidFill>
+                <a:latin typeface="Menlo"/>
+              </a:rPr>
+              <a:t>channel split</a:t>
+            </a:r>
+          </a:p>
+        </p:txBody>
+      </p:sp>
+      <p:sp>
+        <p:nvSpPr>
+          <p:cNvPr id="46" name="TextBox 45"/>
+          <p:cNvSpPr txBox="1"/>
+          <p:nvPr/>
+        </p:nvSpPr>
+        <p:spPr>
+          <a:xfrm>
+            <a:off x="8483600" y="2118042"/>
+            <a:ext cx="1448816" cy="315468"/>
+          </a:xfrm>
+          <a:prstGeom prst="rect">
+            <a:avLst/>
+          </a:prstGeom>
+          <a:noFill/>
+        </p:spPr>
+        <p:txBody>
+          <a:bodyPr wrap="none" lIns="0" rIns="0" tIns="0" bIns="0" anchor="t">
+            <a:spAutoFit/>
+          </a:bodyPr>
+          <a:lstStyle/>
+          <a:p>
+            <a:pPr algn="l"/>
+            <a:r>
+              <a:rPr sz="1150" b="0" i="0">
                 <a:solidFill>
                   <a:srgbClr val="64748B"/>
                 </a:solidFill>
                 <a:latin typeface="Helvetica Neue"/>
               </a:rPr>
-              <a:t>surface only</a:t>
-            </a:r>
-          </a:p>
-        </p:txBody>
-      </p:sp>
-      <p:sp>
-        <p:nvSpPr>
-          <p:cNvPr id="40" name="Rounded Rectangle 39"/>
+              <a:t>&lt;1 ms · optional</a:t>
+            </a:r>
+          </a:p>
+        </p:txBody>
+      </p:sp>
+      <p:sp>
+        <p:nvSpPr>
+          <p:cNvPr id="47" name="TextBox 46"/>
+          <p:cNvSpPr txBox="1"/>
+          <p:nvPr/>
+        </p:nvSpPr>
+        <p:spPr>
+          <a:xfrm>
+            <a:off x="2540000" y="2578735"/>
+            <a:ext cx="818896" cy="356616"/>
+          </a:xfrm>
+          <a:prstGeom prst="rect">
+            <a:avLst/>
+          </a:prstGeom>
+          <a:noFill/>
+        </p:spPr>
+        <p:txBody>
+          <a:bodyPr wrap="none" lIns="0" rIns="0" tIns="0" bIns="0" anchor="t">
+            <a:spAutoFit/>
+          </a:bodyPr>
+          <a:lstStyle/>
+          <a:p>
+            <a:pPr algn="l"/>
+            <a:r>
+              <a:rPr sz="1300" b="1" i="0">
+                <a:solidFill>
+                  <a:srgbClr val="1F2937"/>
+                </a:solidFill>
+                <a:latin typeface="Helvetica Neue"/>
+              </a:rPr>
+              <a:t>decision</a:t>
+            </a:r>
+          </a:p>
+        </p:txBody>
+      </p:sp>
+      <p:sp>
+        <p:nvSpPr>
+          <p:cNvPr id="48" name="Rounded Rectangle 47"/>
           <p:cNvSpPr/>
           <p:nvPr/>
         </p:nvSpPr>
         <p:spPr>
           <a:xfrm>
-            <a:off x="6324600" y="787400"/>
-            <a:ext cx="1676400" cy="1600200"/>
+            <a:off x="3505200" y="2590800"/>
+            <a:ext cx="1168400" cy="406400"/>
           </a:xfrm>
           <a:prstGeom prst="roundRect">
             <a:avLst>
-              <a:gd name="adj" fmla="val 9523"/>
+              <a:gd name="adj" fmla="val 50000"/>
             </a:avLst>
           </a:prstGeom>
           <a:solidFill>
-            <a:srgbClr val="EAF6F0"/>
+            <a:srgbClr val="DCFCE7"/>
           </a:solidFill>
           <a:ln w="12700">
             <a:solidFill>
-              <a:srgbClr val="A8D8C0"/>
+              <a:srgbClr val="DCFCE7"/>
             </a:solidFill>
           </a:ln>
           <a:effectLst/>
@@ -4553,40 +4823,16 @@
           <a:p/>
         </p:txBody>
       </p:sp>
-      <p:pic>
-        <p:nvPicPr>
-          <p:cNvPr id="41" name="Picture 40" descr="route--15795a.256.png"/>
-          <p:cNvPicPr>
-            <a:picLocks noChangeAspect="1"/>
-          </p:cNvPicPr>
-          <p:nvPr/>
-        </p:nvPicPr>
-        <p:blipFill>
-          <a:blip r:embed="rId6"/>
-          <a:stretch>
-            <a:fillRect/>
-          </a:stretch>
-        </p:blipFill>
-        <p:spPr>
-          <a:xfrm>
-            <a:off x="6451600" y="889000"/>
-            <a:ext cx="190500" cy="190500"/>
-          </a:xfrm>
-          <a:prstGeom prst="rect">
-            <a:avLst/>
-          </a:prstGeom>
-        </p:spPr>
-      </p:pic>
-      <p:sp>
-        <p:nvSpPr>
-          <p:cNvPr id="42" name="TextBox 41"/>
+      <p:sp>
+        <p:nvSpPr>
+          <p:cNvPr id="49" name="TextBox 48"/>
           <p:cNvSpPr txBox="1"/>
           <p:nvPr/>
         </p:nvSpPr>
         <p:spPr>
           <a:xfrm>
-            <a:off x="6731000" y="902652"/>
-            <a:ext cx="1047242" cy="260604"/>
+            <a:off x="3708400" y="2667635"/>
+            <a:ext cx="762000" cy="356616"/>
           </a:xfrm>
           <a:prstGeom prst="rect">
             <a:avLst/>
@@ -4599,33 +4845,230 @@
           </a:bodyPr>
           <a:lstStyle/>
           <a:p>
-            <a:pPr algn="l"/>
-            <a:r>
-              <a:rPr sz="950" b="1" i="0">
+            <a:pPr algn="ctr"/>
+            <a:r>
+              <a:rPr sz="1300" b="1" i="0">
                 <a:solidFill>
-                  <a:srgbClr val="15795A"/>
+                  <a:srgbClr val="16A34A"/>
                 </a:solidFill>
                 <a:latin typeface="Helvetica Neue"/>
               </a:rPr>
-              <a:t>Lp  provenance</a:t>
-            </a:r>
-          </a:p>
-        </p:txBody>
-      </p:sp>
-      <p:sp>
-        <p:nvSpPr>
-          <p:cNvPr id="43" name="Rounded Rectangle 42"/>
+              <a:t>allow</a:t>
+            </a:r>
+          </a:p>
+        </p:txBody>
+      </p:sp>
+      <p:sp>
+        <p:nvSpPr>
+          <p:cNvPr id="50" name="Rounded Rectangle 49"/>
           <p:cNvSpPr/>
           <p:nvPr/>
         </p:nvSpPr>
         <p:spPr>
           <a:xfrm>
-            <a:off x="6426200" y="1193800"/>
-            <a:ext cx="1473200" cy="228600"/>
+            <a:off x="4826000" y="2590800"/>
+            <a:ext cx="1168400" cy="406400"/>
           </a:xfrm>
           <a:prstGeom prst="roundRect">
             <a:avLst>
-              <a:gd name="adj" fmla="val 22222"/>
+              <a:gd name="adj" fmla="val 50000"/>
+            </a:avLst>
+          </a:prstGeom>
+          <a:solidFill>
+            <a:srgbClr val="FEE2E2"/>
+          </a:solidFill>
+          <a:ln w="12700">
+            <a:solidFill>
+              <a:srgbClr val="FEE2E2"/>
+            </a:solidFill>
+          </a:ln>
+          <a:effectLst/>
+        </p:spPr>
+        <p:style>
+          <a:lnRef idx="1">
+            <a:schemeClr val="accent1"/>
+          </a:lnRef>
+          <a:fillRef idx="3">
+            <a:schemeClr val="accent1"/>
+          </a:fillRef>
+          <a:effectRef idx="2">
+            <a:schemeClr val="accent1"/>
+          </a:effectRef>
+          <a:fontRef idx="minor">
+            <a:schemeClr val="lt1"/>
+          </a:fontRef>
+        </p:style>
+        <p:txBody>
+          <a:bodyPr rtlCol="0" anchor="ctr"/>
+          <a:lstStyle/>
+          <a:p/>
+        </p:txBody>
+      </p:sp>
+      <p:sp>
+        <p:nvSpPr>
+          <p:cNvPr id="51" name="TextBox 50"/>
+          <p:cNvSpPr txBox="1"/>
+          <p:nvPr/>
+        </p:nvSpPr>
+        <p:spPr>
+          <a:xfrm>
+            <a:off x="5029200" y="2667635"/>
+            <a:ext cx="762000" cy="356616"/>
+          </a:xfrm>
+          <a:prstGeom prst="rect">
+            <a:avLst/>
+          </a:prstGeom>
+          <a:noFill/>
+        </p:spPr>
+        <p:txBody>
+          <a:bodyPr wrap="none" lIns="0" rIns="0" tIns="0" bIns="0" anchor="t">
+            <a:spAutoFit/>
+          </a:bodyPr>
+          <a:lstStyle/>
+          <a:p>
+            <a:pPr algn="ctr"/>
+            <a:r>
+              <a:rPr sz="1300" b="1" i="0">
+                <a:solidFill>
+                  <a:srgbClr val="DC2626"/>
+                </a:solidFill>
+                <a:latin typeface="Helvetica Neue"/>
+              </a:rPr>
+              <a:t>block</a:t>
+            </a:r>
+          </a:p>
+        </p:txBody>
+      </p:sp>
+      <p:sp>
+        <p:nvSpPr>
+          <p:cNvPr id="52" name="Rounded Rectangle 51"/>
+          <p:cNvSpPr/>
+          <p:nvPr/>
+        </p:nvSpPr>
+        <p:spPr>
+          <a:xfrm>
+            <a:off x="6146800" y="2590800"/>
+            <a:ext cx="1320800" cy="406400"/>
+          </a:xfrm>
+          <a:prstGeom prst="roundRect">
+            <a:avLst>
+              <a:gd name="adj" fmla="val 50000"/>
+            </a:avLst>
+          </a:prstGeom>
+          <a:solidFill>
+            <a:srgbClr val="FEF3C7"/>
+          </a:solidFill>
+          <a:ln w="12700">
+            <a:solidFill>
+              <a:srgbClr val="FEF3C7"/>
+            </a:solidFill>
+          </a:ln>
+          <a:effectLst/>
+        </p:spPr>
+        <p:style>
+          <a:lnRef idx="1">
+            <a:schemeClr val="accent1"/>
+          </a:lnRef>
+          <a:fillRef idx="3">
+            <a:schemeClr val="accent1"/>
+          </a:fillRef>
+          <a:effectRef idx="2">
+            <a:schemeClr val="accent1"/>
+          </a:effectRef>
+          <a:fontRef idx="minor">
+            <a:schemeClr val="lt1"/>
+          </a:fontRef>
+        </p:style>
+        <p:txBody>
+          <a:bodyPr rtlCol="0" anchor="ctr"/>
+          <a:lstStyle/>
+          <a:p/>
+        </p:txBody>
+      </p:sp>
+      <p:sp>
+        <p:nvSpPr>
+          <p:cNvPr id="53" name="TextBox 52"/>
+          <p:cNvSpPr txBox="1"/>
+          <p:nvPr/>
+        </p:nvSpPr>
+        <p:spPr>
+          <a:xfrm>
+            <a:off x="6426200" y="2667635"/>
+            <a:ext cx="762000" cy="356616"/>
+          </a:xfrm>
+          <a:prstGeom prst="rect">
+            <a:avLst/>
+          </a:prstGeom>
+          <a:noFill/>
+        </p:spPr>
+        <p:txBody>
+          <a:bodyPr wrap="none" lIns="0" rIns="0" tIns="0" bIns="0" anchor="t">
+            <a:spAutoFit/>
+          </a:bodyPr>
+          <a:lstStyle/>
+          <a:p>
+            <a:pPr algn="ctr"/>
+            <a:r>
+              <a:rPr sz="1300" b="1" i="0">
+                <a:solidFill>
+                  <a:srgbClr val="D97706"/>
+                </a:solidFill>
+                <a:latin typeface="Helvetica Neue"/>
+              </a:rPr>
+              <a:t>pending</a:t>
+            </a:r>
+          </a:p>
+        </p:txBody>
+      </p:sp>
+      <p:cxnSp>
+        <p:nvCxnSpPr>
+          <p:cNvPr id="54" name="Connector 53"/>
+          <p:cNvCxnSpPr/>
+          <p:nvPr/>
+        </p:nvCxnSpPr>
+        <p:spPr>
+          <a:xfrm>
+            <a:off x="7543800" y="2794000"/>
+            <a:ext cx="254000" cy="0"/>
+          </a:xfrm>
+          <a:prstGeom prst="line">
+            <a:avLst/>
+          </a:prstGeom>
+          <a:ln w="20320">
+            <a:solidFill>
+              <a:srgbClr val="94A3B8"/>
+            </a:solidFill>
+          </a:ln>
+        </p:spPr>
+        <p:style>
+          <a:lnRef idx="2">
+            <a:schemeClr val="accent1"/>
+          </a:lnRef>
+          <a:fillRef idx="0">
+            <a:schemeClr val="accent1"/>
+          </a:fillRef>
+          <a:effectRef idx="1">
+            <a:schemeClr val="accent1"/>
+          </a:effectRef>
+          <a:fontRef idx="minor">
+            <a:schemeClr val="tx1"/>
+          </a:fontRef>
+        </p:style>
+      </p:cxnSp>
+      <p:sp>
+        <p:nvSpPr>
+          <p:cNvPr id="55" name="Rounded Rectangle 54"/>
+          <p:cNvSpPr/>
+          <p:nvPr/>
+        </p:nvSpPr>
+        <p:spPr>
+          <a:xfrm>
+            <a:off x="7874000" y="2590800"/>
+            <a:ext cx="2133600" cy="406400"/>
+          </a:xfrm>
+          <a:prstGeom prst="roundRect">
+            <a:avLst>
+              <a:gd name="adj" fmla="val 21875"/>
             </a:avLst>
           </a:prstGeom>
           <a:solidFill>
@@ -4658,16 +5101,40 @@
           <a:p/>
         </p:txBody>
       </p:sp>
-      <p:sp>
-        <p:nvSpPr>
-          <p:cNvPr id="44" name="TextBox 43"/>
+      <p:pic>
+        <p:nvPicPr>
+          <p:cNvPr id="56" name="Picture 55" descr="user-check--334155.256.png"/>
+          <p:cNvPicPr>
+            <a:picLocks noChangeAspect="1"/>
+          </p:cNvPicPr>
+          <p:nvPr/>
+        </p:nvPicPr>
+        <p:blipFill>
+          <a:blip r:embed="rId8"/>
+          <a:stretch>
+            <a:fillRect/>
+          </a:stretch>
+        </p:blipFill>
+        <p:spPr>
+          <a:xfrm>
+            <a:off x="7988300" y="2705100"/>
+            <a:ext cx="177800" cy="177800"/>
+          </a:xfrm>
+          <a:prstGeom prst="rect">
+            <a:avLst/>
+          </a:prstGeom>
+        </p:spPr>
+      </p:pic>
+      <p:sp>
+        <p:nvSpPr>
+          <p:cNvPr id="57" name="TextBox 56"/>
           <p:cNvSpPr txBox="1"/>
           <p:nvPr/>
         </p:nvSpPr>
         <p:spPr>
           <a:xfrm>
-            <a:off x="6502400" y="1250823"/>
-            <a:ext cx="1107084" cy="202997"/>
+            <a:off x="8242300" y="2668588"/>
+            <a:ext cx="1377950" cy="342900"/>
           </a:xfrm>
           <a:prstGeom prst="rect">
             <a:avLst/>
@@ -4682,27 +5149,73 @@
           <a:p>
             <a:pPr algn="l"/>
             <a:r>
-              <a:rPr sz="740" b="0" i="0">
+              <a:rPr sz="1250" b="0" i="0">
                 <a:solidFill>
                   <a:srgbClr val="1F2937"/>
                 </a:solidFill>
-                <a:latin typeface="Menlo"/>
+                <a:latin typeface="Helvetica Neue"/>
               </a:rPr>
-              <a:t>sees: channel split</a:t>
-            </a:r>
-          </a:p>
-        </p:txBody>
-      </p:sp>
-      <p:sp>
-        <p:nvSpPr>
-          <p:cNvPr id="45" name="TextBox 44"/>
+              <a:t>human approval</a:t>
+            </a:r>
+          </a:p>
+        </p:txBody>
+      </p:sp>
+      <p:sp>
+        <p:nvSpPr>
+          <p:cNvPr id="58" name="Rounded Rectangle 57"/>
+          <p:cNvSpPr/>
+          <p:nvPr/>
+        </p:nvSpPr>
+        <p:spPr>
+          <a:xfrm>
+            <a:off x="9804400" y="2641600"/>
+            <a:ext cx="190500" cy="190500"/>
+          </a:xfrm>
+          <a:prstGeom prst="roundRect">
+            <a:avLst>
+              <a:gd name="adj" fmla="val 50000"/>
+            </a:avLst>
+          </a:prstGeom>
+          <a:solidFill>
+            <a:srgbClr val="6D3FBF"/>
+          </a:solidFill>
+          <a:ln w="12700">
+            <a:solidFill>
+              <a:srgbClr val="6D3FBF"/>
+            </a:solidFill>
+          </a:ln>
+          <a:effectLst/>
+        </p:spPr>
+        <p:style>
+          <a:lnRef idx="1">
+            <a:schemeClr val="accent1"/>
+          </a:lnRef>
+          <a:fillRef idx="3">
+            <a:schemeClr val="accent1"/>
+          </a:fillRef>
+          <a:effectRef idx="2">
+            <a:schemeClr val="accent1"/>
+          </a:effectRef>
+          <a:fontRef idx="minor">
+            <a:schemeClr val="lt1"/>
+          </a:fontRef>
+        </p:style>
+        <p:txBody>
+          <a:bodyPr rtlCol="0" anchor="ctr"/>
+          <a:lstStyle/>
+          <a:p/>
+        </p:txBody>
+      </p:sp>
+      <p:sp>
+        <p:nvSpPr>
+          <p:cNvPr id="59" name="TextBox 58"/>
           <p:cNvSpPr txBox="1"/>
           <p:nvPr/>
         </p:nvSpPr>
         <p:spPr>
           <a:xfrm>
-            <a:off x="6451600" y="1511681"/>
-            <a:ext cx="1044092" cy="213970"/>
+            <a:off x="9518650" y="2562225"/>
+            <a:ext cx="762000" cy="411480"/>
           </a:xfrm>
           <a:prstGeom prst="rect">
             <a:avLst/>
@@ -4715,33 +5228,348 @@
           </a:bodyPr>
           <a:lstStyle/>
           <a:p>
-            <a:pPr algn="l"/>
-            <a:r>
-              <a:rPr sz="780" b="0" i="0">
+            <a:pPr algn="ctr"/>
+            <a:r>
+              <a:rPr sz="1500" b="1" i="0">
                 <a:solidFill>
-                  <a:srgbClr val="64748B"/>
+                  <a:srgbClr val="FFFFFF"/>
                 </a:solidFill>
                 <a:latin typeface="Helvetica Neue"/>
               </a:rPr>
-              <a:t>6 features, &lt;1 ms</a:t>
-            </a:r>
-          </a:p>
-        </p:txBody>
-      </p:sp>
-      <p:sp>
-        <p:nvSpPr>
-          <p:cNvPr id="46" name="Rounded Rectangle 45"/>
+              <a:t>2</a:t>
+            </a:r>
+          </a:p>
+        </p:txBody>
+      </p:sp>
+      <p:cxnSp>
+        <p:nvCxnSpPr>
+          <p:cNvPr id="60" name="Connector 59"/>
+          <p:cNvCxnSpPr/>
+          <p:nvPr/>
+        </p:nvCxnSpPr>
+        <p:spPr>
+          <a:xfrm>
+            <a:off x="4089400" y="3022600"/>
+            <a:ext cx="0" cy="787400"/>
+          </a:xfrm>
+          <a:prstGeom prst="line">
+            <a:avLst/>
+          </a:prstGeom>
+          <a:ln w="22860">
+            <a:solidFill>
+              <a:srgbClr val="16A34A"/>
+            </a:solidFill>
+          </a:ln>
+        </p:spPr>
+        <p:style>
+          <a:lnRef idx="2">
+            <a:schemeClr val="accent1"/>
+          </a:lnRef>
+          <a:fillRef idx="0">
+            <a:schemeClr val="accent1"/>
+          </a:fillRef>
+          <a:effectRef idx="1">
+            <a:schemeClr val="accent1"/>
+          </a:effectRef>
+          <a:fontRef idx="minor">
+            <a:schemeClr val="tx1"/>
+          </a:fontRef>
+        </p:style>
+      </p:cxnSp>
+      <p:cxnSp>
+        <p:nvCxnSpPr>
+          <p:cNvPr id="61" name="Connector 60"/>
+          <p:cNvCxnSpPr/>
+          <p:nvPr/>
+        </p:nvCxnSpPr>
+        <p:spPr>
+          <a:xfrm flipH="1">
+            <a:off x="1092200" y="3810000"/>
+            <a:ext cx="2997200" cy="0"/>
+          </a:xfrm>
+          <a:prstGeom prst="line">
+            <a:avLst/>
+          </a:prstGeom>
+          <a:ln w="22860">
+            <a:solidFill>
+              <a:srgbClr val="16A34A"/>
+            </a:solidFill>
+          </a:ln>
+        </p:spPr>
+        <p:style>
+          <a:lnRef idx="2">
+            <a:schemeClr val="accent1"/>
+          </a:lnRef>
+          <a:fillRef idx="0">
+            <a:schemeClr val="accent1"/>
+          </a:fillRef>
+          <a:effectRef idx="1">
+            <a:schemeClr val="accent1"/>
+          </a:effectRef>
+          <a:fontRef idx="minor">
+            <a:schemeClr val="tx1"/>
+          </a:fontRef>
+        </p:style>
+      </p:cxnSp>
+      <p:cxnSp>
+        <p:nvCxnSpPr>
+          <p:cNvPr id="62" name="Connector 61"/>
+          <p:cNvCxnSpPr/>
+          <p:nvPr/>
+        </p:nvCxnSpPr>
+        <p:spPr>
+          <a:xfrm flipV="1">
+            <a:off x="1092200" y="3327400"/>
+            <a:ext cx="0" cy="482600"/>
+          </a:xfrm>
+          <a:prstGeom prst="line">
+            <a:avLst/>
+          </a:prstGeom>
+          <a:ln w="22860">
+            <a:solidFill>
+              <a:srgbClr val="16A34A"/>
+            </a:solidFill>
+          </a:ln>
+        </p:spPr>
+        <p:style>
+          <a:lnRef idx="2">
+            <a:schemeClr val="accent1"/>
+          </a:lnRef>
+          <a:fillRef idx="0">
+            <a:schemeClr val="accent1"/>
+          </a:fillRef>
+          <a:effectRef idx="1">
+            <a:schemeClr val="accent1"/>
+          </a:effectRef>
+          <a:fontRef idx="minor">
+            <a:schemeClr val="tx1"/>
+          </a:fontRef>
+        </p:style>
+      </p:cxnSp>
+      <p:cxnSp>
+        <p:nvCxnSpPr>
+          <p:cNvPr id="63" name="Connector 62"/>
+          <p:cNvCxnSpPr/>
+          <p:nvPr/>
+        </p:nvCxnSpPr>
+        <p:spPr>
+          <a:xfrm>
+            <a:off x="5410200" y="3022600"/>
+            <a:ext cx="0" cy="1066800"/>
+          </a:xfrm>
+          <a:prstGeom prst="line">
+            <a:avLst/>
+          </a:prstGeom>
+          <a:ln w="27940">
+            <a:solidFill>
+              <a:srgbClr val="DC2626"/>
+            </a:solidFill>
+          </a:ln>
+        </p:spPr>
+        <p:style>
+          <a:lnRef idx="2">
+            <a:schemeClr val="accent1"/>
+          </a:lnRef>
+          <a:fillRef idx="0">
+            <a:schemeClr val="accent1"/>
+          </a:fillRef>
+          <a:effectRef idx="1">
+            <a:schemeClr val="accent1"/>
+          </a:effectRef>
+          <a:fontRef idx="minor">
+            <a:schemeClr val="tx1"/>
+          </a:fontRef>
+        </p:style>
+      </p:cxnSp>
+      <p:cxnSp>
+        <p:nvCxnSpPr>
+          <p:cNvPr id="64" name="Connector 63"/>
+          <p:cNvCxnSpPr/>
+          <p:nvPr/>
+        </p:nvCxnSpPr>
+        <p:spPr>
+          <a:xfrm flipH="1">
+            <a:off x="1397000" y="4089400"/>
+            <a:ext cx="4013200" cy="0"/>
+          </a:xfrm>
+          <a:prstGeom prst="line">
+            <a:avLst/>
+          </a:prstGeom>
+          <a:ln w="27940">
+            <a:solidFill>
+              <a:srgbClr val="DC2626"/>
+            </a:solidFill>
+          </a:ln>
+        </p:spPr>
+        <p:style>
+          <a:lnRef idx="2">
+            <a:schemeClr val="accent1"/>
+          </a:lnRef>
+          <a:fillRef idx="0">
+            <a:schemeClr val="accent1"/>
+          </a:fillRef>
+          <a:effectRef idx="1">
+            <a:schemeClr val="accent1"/>
+          </a:effectRef>
+          <a:fontRef idx="minor">
+            <a:schemeClr val="tx1"/>
+          </a:fontRef>
+        </p:style>
+      </p:cxnSp>
+      <p:cxnSp>
+        <p:nvCxnSpPr>
+          <p:cNvPr id="65" name="Connector 64"/>
+          <p:cNvCxnSpPr/>
+          <p:nvPr/>
+        </p:nvCxnSpPr>
+        <p:spPr>
+          <a:xfrm flipV="1">
+            <a:off x="1397000" y="3327400"/>
+            <a:ext cx="0" cy="762000"/>
+          </a:xfrm>
+          <a:prstGeom prst="line">
+            <a:avLst/>
+          </a:prstGeom>
+          <a:ln w="27940">
+            <a:solidFill>
+              <a:srgbClr val="DC2626"/>
+            </a:solidFill>
+          </a:ln>
+        </p:spPr>
+        <p:style>
+          <a:lnRef idx="2">
+            <a:schemeClr val="accent1"/>
+          </a:lnRef>
+          <a:fillRef idx="0">
+            <a:schemeClr val="accent1"/>
+          </a:fillRef>
+          <a:effectRef idx="1">
+            <a:schemeClr val="accent1"/>
+          </a:effectRef>
+          <a:fontRef idx="minor">
+            <a:schemeClr val="tx1"/>
+          </a:fontRef>
+        </p:style>
+      </p:cxnSp>
+      <p:cxnSp>
+        <p:nvCxnSpPr>
+          <p:cNvPr id="66" name="Connector 65"/>
+          <p:cNvCxnSpPr/>
+          <p:nvPr/>
+        </p:nvCxnSpPr>
+        <p:spPr>
+          <a:xfrm>
+            <a:off x="6807200" y="3022600"/>
+            <a:ext cx="0" cy="1346200"/>
+          </a:xfrm>
+          <a:prstGeom prst="line">
+            <a:avLst/>
+          </a:prstGeom>
+          <a:ln w="22860">
+            <a:solidFill>
+              <a:srgbClr val="D97706"/>
+            </a:solidFill>
+          </a:ln>
+        </p:spPr>
+        <p:style>
+          <a:lnRef idx="2">
+            <a:schemeClr val="accent1"/>
+          </a:lnRef>
+          <a:fillRef idx="0">
+            <a:schemeClr val="accent1"/>
+          </a:fillRef>
+          <a:effectRef idx="1">
+            <a:schemeClr val="accent1"/>
+          </a:effectRef>
+          <a:fontRef idx="minor">
+            <a:schemeClr val="tx1"/>
+          </a:fontRef>
+        </p:style>
+      </p:cxnSp>
+      <p:cxnSp>
+        <p:nvCxnSpPr>
+          <p:cNvPr id="67" name="Connector 66"/>
+          <p:cNvCxnSpPr/>
+          <p:nvPr/>
+        </p:nvCxnSpPr>
+        <p:spPr>
+          <a:xfrm flipH="1">
+            <a:off x="787400" y="4368800"/>
+            <a:ext cx="6019800" cy="0"/>
+          </a:xfrm>
+          <a:prstGeom prst="line">
+            <a:avLst/>
+          </a:prstGeom>
+          <a:ln w="22860">
+            <a:solidFill>
+              <a:srgbClr val="D97706"/>
+            </a:solidFill>
+          </a:ln>
+        </p:spPr>
+        <p:style>
+          <a:lnRef idx="2">
+            <a:schemeClr val="accent1"/>
+          </a:lnRef>
+          <a:fillRef idx="0">
+            <a:schemeClr val="accent1"/>
+          </a:fillRef>
+          <a:effectRef idx="1">
+            <a:schemeClr val="accent1"/>
+          </a:effectRef>
+          <a:fontRef idx="minor">
+            <a:schemeClr val="tx1"/>
+          </a:fontRef>
+        </p:style>
+      </p:cxnSp>
+      <p:cxnSp>
+        <p:nvCxnSpPr>
+          <p:cNvPr id="68" name="Connector 67"/>
+          <p:cNvCxnSpPr/>
+          <p:nvPr/>
+        </p:nvCxnSpPr>
+        <p:spPr>
+          <a:xfrm flipV="1">
+            <a:off x="787400" y="3327400"/>
+            <a:ext cx="0" cy="1041400"/>
+          </a:xfrm>
+          <a:prstGeom prst="line">
+            <a:avLst/>
+          </a:prstGeom>
+          <a:ln w="22860">
+            <a:solidFill>
+              <a:srgbClr val="D97706"/>
+            </a:solidFill>
+          </a:ln>
+        </p:spPr>
+        <p:style>
+          <a:lnRef idx="2">
+            <a:schemeClr val="accent1"/>
+          </a:lnRef>
+          <a:fillRef idx="0">
+            <a:schemeClr val="accent1"/>
+          </a:fillRef>
+          <a:effectRef idx="1">
+            <a:schemeClr val="accent1"/>
+          </a:effectRef>
+          <a:fontRef idx="minor">
+            <a:schemeClr val="tx1"/>
+          </a:fontRef>
+        </p:style>
+      </p:cxnSp>
+      <p:sp>
+        <p:nvSpPr>
+          <p:cNvPr id="69" name="Rounded Rectangle 68"/>
           <p:cNvSpPr/>
           <p:nvPr/>
         </p:nvSpPr>
         <p:spPr>
           <a:xfrm>
-            <a:off x="6426200" y="1752600"/>
-            <a:ext cx="1473200" cy="254000"/>
+            <a:off x="7670800" y="3505200"/>
+            <a:ext cx="4876800" cy="1270000"/>
           </a:xfrm>
           <a:prstGeom prst="roundRect">
             <a:avLst>
-              <a:gd name="adj" fmla="val 20000"/>
+              <a:gd name="adj" fmla="val 8000"/>
             </a:avLst>
           </a:prstGeom>
           <a:solidFill>
@@ -4776,14 +5604,14 @@
       </p:sp>
       <p:sp>
         <p:nvSpPr>
-          <p:cNvPr id="47" name="TextBox 46"/>
+          <p:cNvPr id="70" name="TextBox 69"/>
           <p:cNvSpPr txBox="1"/>
           <p:nvPr/>
         </p:nvSpPr>
         <p:spPr>
           <a:xfrm>
-            <a:off x="6781800" y="1813560"/>
-            <a:ext cx="762000" cy="219456"/>
+            <a:off x="7848600" y="3660140"/>
+            <a:ext cx="762000" cy="329184"/>
           </a:xfrm>
           <a:prstGeom prst="rect">
             <a:avLst/>
@@ -4796,41 +5624,356 @@
           </a:bodyPr>
           <a:lstStyle/>
           <a:p>
-            <a:pPr algn="ctr"/>
-            <a:r>
-              <a:rPr sz="800" b="1" i="0">
+            <a:pPr algn="l"/>
+            <a:r>
+              <a:rPr sz="1200" b="1" i="0">
                 <a:solidFill>
                   <a:srgbClr val="16A34A"/>
                 </a:solidFill>
                 <a:latin typeface="Helvetica Neue"/>
               </a:rPr>
-              <a:t>AUC 0.991</a:t>
-            </a:r>
-          </a:p>
-        </p:txBody>
-      </p:sp>
-      <p:sp>
-        <p:nvSpPr>
-          <p:cNvPr id="48" name="Rounded Rectangle 47"/>
+              <a:t>allow</a:t>
+            </a:r>
+          </a:p>
+        </p:txBody>
+      </p:sp>
+      <p:sp>
+        <p:nvSpPr>
+          <p:cNvPr id="71" name="TextBox 70"/>
+          <p:cNvSpPr txBox="1"/>
+          <p:nvPr/>
+        </p:nvSpPr>
+        <p:spPr>
+          <a:xfrm>
+            <a:off x="8763000" y="3660140"/>
+            <a:ext cx="3968496" cy="329184"/>
+          </a:xfrm>
+          <a:prstGeom prst="rect">
+            <a:avLst/>
+          </a:prstGeom>
+          <a:noFill/>
+        </p:spPr>
+        <p:txBody>
+          <a:bodyPr wrap="none" lIns="0" rIns="0" tIns="0" bIns="0" anchor="t">
+            <a:spAutoFit/>
+          </a:bodyPr>
+          <a:lstStyle/>
+          <a:p>
+            <a:pPr algn="l"/>
+            <a:r>
+              <a:rPr sz="1200" b="0" i="0">
+                <a:solidFill>
+                  <a:srgbClr val="1F2937"/>
+                </a:solidFill>
+                <a:latin typeface="Helvetica Neue"/>
+              </a:rPr>
+              <a:t>the tool runs; its result returns normally</a:t>
+            </a:r>
+          </a:p>
+        </p:txBody>
+      </p:sp>
+      <p:sp>
+        <p:nvSpPr>
+          <p:cNvPr id="72" name="TextBox 71"/>
+          <p:cNvSpPr txBox="1"/>
+          <p:nvPr/>
+        </p:nvSpPr>
+        <p:spPr>
+          <a:xfrm>
+            <a:off x="7848600" y="3990340"/>
+            <a:ext cx="762000" cy="329184"/>
+          </a:xfrm>
+          <a:prstGeom prst="rect">
+            <a:avLst/>
+          </a:prstGeom>
+          <a:noFill/>
+        </p:spPr>
+        <p:txBody>
+          <a:bodyPr wrap="none" lIns="0" rIns="0" tIns="0" bIns="0" anchor="t">
+            <a:spAutoFit/>
+          </a:bodyPr>
+          <a:lstStyle/>
+          <a:p>
+            <a:pPr algn="l"/>
+            <a:r>
+              <a:rPr sz="1200" b="1" i="0">
+                <a:solidFill>
+                  <a:srgbClr val="DC2626"/>
+                </a:solidFill>
+                <a:latin typeface="Helvetica Neue"/>
+              </a:rPr>
+              <a:t>block</a:t>
+            </a:r>
+          </a:p>
+        </p:txBody>
+      </p:sp>
+      <p:sp>
+        <p:nvSpPr>
+          <p:cNvPr id="73" name="TextBox 72"/>
+          <p:cNvSpPr txBox="1"/>
+          <p:nvPr/>
+        </p:nvSpPr>
+        <p:spPr>
+          <a:xfrm>
+            <a:off x="8763000" y="3990340"/>
+            <a:ext cx="3685032" cy="329184"/>
+          </a:xfrm>
+          <a:prstGeom prst="rect">
+            <a:avLst/>
+          </a:prstGeom>
+          <a:noFill/>
+        </p:spPr>
+        <p:txBody>
+          <a:bodyPr wrap="none" lIns="0" rIns="0" tIns="0" bIns="0" anchor="t">
+            <a:spAutoFit/>
+          </a:bodyPr>
+          <a:lstStyle/>
+          <a:p>
+            <a:pPr algn="l"/>
+            <a:r>
+              <a:rPr sz="1200" b="0" i="0">
+                <a:solidFill>
+                  <a:srgbClr val="1F2937"/>
+                </a:solidFill>
+                <a:latin typeface="Helvetica Neue"/>
+              </a:rPr>
+              <a:t>the tool never runs — a refusal returns</a:t>
+            </a:r>
+          </a:p>
+        </p:txBody>
+      </p:sp>
+      <p:sp>
+        <p:nvSpPr>
+          <p:cNvPr id="74" name="TextBox 73"/>
+          <p:cNvSpPr txBox="1"/>
+          <p:nvPr/>
+        </p:nvSpPr>
+        <p:spPr>
+          <a:xfrm>
+            <a:off x="7848600" y="4320540"/>
+            <a:ext cx="762000" cy="329184"/>
+          </a:xfrm>
+          <a:prstGeom prst="rect">
+            <a:avLst/>
+          </a:prstGeom>
+          <a:noFill/>
+        </p:spPr>
+        <p:txBody>
+          <a:bodyPr wrap="none" lIns="0" rIns="0" tIns="0" bIns="0" anchor="t">
+            <a:spAutoFit/>
+          </a:bodyPr>
+          <a:lstStyle/>
+          <a:p>
+            <a:pPr algn="l"/>
+            <a:r>
+              <a:rPr sz="1200" b="1" i="0">
+                <a:solidFill>
+                  <a:srgbClr val="D97706"/>
+                </a:solidFill>
+                <a:latin typeface="Helvetica Neue"/>
+              </a:rPr>
+              <a:t>pending</a:t>
+            </a:r>
+          </a:p>
+        </p:txBody>
+      </p:sp>
+      <p:sp>
+        <p:nvSpPr>
+          <p:cNvPr id="75" name="TextBox 74"/>
+          <p:cNvSpPr txBox="1"/>
+          <p:nvPr/>
+        </p:nvSpPr>
+        <p:spPr>
+          <a:xfrm>
+            <a:off x="8763000" y="4320540"/>
+            <a:ext cx="3779520" cy="329184"/>
+          </a:xfrm>
+          <a:prstGeom prst="rect">
+            <a:avLst/>
+          </a:prstGeom>
+          <a:noFill/>
+        </p:spPr>
+        <p:txBody>
+          <a:bodyPr wrap="none" lIns="0" rIns="0" tIns="0" bIns="0" anchor="t">
+            <a:spAutoFit/>
+          </a:bodyPr>
+          <a:lstStyle/>
+          <a:p>
+            <a:pPr algn="l"/>
+            <a:r>
+              <a:rPr sz="1200" b="0" i="0">
+                <a:solidFill>
+                  <a:srgbClr val="1F2937"/>
+                </a:solidFill>
+                <a:latin typeface="Helvetica Neue"/>
+              </a:rPr>
+              <a:t>the turn suspends until a person decides</a:t>
+            </a:r>
+          </a:p>
+        </p:txBody>
+      </p:sp>
+      <p:sp>
+        <p:nvSpPr>
+          <p:cNvPr id="76" name="TextBox 75"/>
+          <p:cNvSpPr txBox="1"/>
+          <p:nvPr/>
+        </p:nvSpPr>
+        <p:spPr>
+          <a:xfrm>
+            <a:off x="8763000" y="4155440"/>
+            <a:ext cx="2362200" cy="329184"/>
+          </a:xfrm>
+          <a:prstGeom prst="rect">
+            <a:avLst/>
+          </a:prstGeom>
+          <a:noFill/>
+        </p:spPr>
+        <p:txBody>
+          <a:bodyPr wrap="none" lIns="0" rIns="0" tIns="0" bIns="0" anchor="t">
+            <a:spAutoFit/>
+          </a:bodyPr>
+          <a:lstStyle/>
+          <a:p>
+            <a:pPr algn="l"/>
+            <a:r>
+              <a:rPr sz="1200" b="0" i="0">
+                <a:solidFill>
+                  <a:srgbClr val="1F2937"/>
+                </a:solidFill>
+                <a:latin typeface="Helvetica Neue"/>
+              </a:rPr>
+              <a:t>where a tool result would</a:t>
+            </a:r>
+          </a:p>
+        </p:txBody>
+      </p:sp>
+      <p:sp>
+        <p:nvSpPr>
+          <p:cNvPr id="77" name="TextBox 76"/>
+          <p:cNvSpPr txBox="1"/>
+          <p:nvPr/>
+        </p:nvSpPr>
+        <p:spPr>
+          <a:xfrm>
+            <a:off x="152400" y="4940935"/>
+            <a:ext cx="9007856" cy="356616"/>
+          </a:xfrm>
+          <a:prstGeom prst="rect">
+            <a:avLst/>
+          </a:prstGeom>
+          <a:noFill/>
+        </p:spPr>
+        <p:txBody>
+          <a:bodyPr wrap="none" lIns="0" rIns="0" tIns="0" bIns="0" anchor="t">
+            <a:spAutoFit/>
+          </a:bodyPr>
+          <a:lstStyle/>
+          <a:p>
+            <a:pPr algn="l"/>
+            <a:r>
+              <a:rPr sz="1300" b="1" i="0">
+                <a:solidFill>
+                  <a:srgbClr val="15795A"/>
+                </a:solidFill>
+                <a:latin typeface="Helvetica Neue"/>
+              </a:rPr>
+              <a:t>The refusal arrives in-band — which is why a blocked agent explains itself and continues</a:t>
+            </a:r>
+          </a:p>
+        </p:txBody>
+      </p:sp>
+      <p:sp>
+        <p:nvSpPr>
+          <p:cNvPr id="78" name="TextBox 77"/>
+          <p:cNvSpPr txBox="1"/>
+          <p:nvPr/>
+        </p:nvSpPr>
+        <p:spPr>
+          <a:xfrm>
+            <a:off x="152400" y="5169535"/>
+            <a:ext cx="3685032" cy="356616"/>
+          </a:xfrm>
+          <a:prstGeom prst="rect">
+            <a:avLst/>
+          </a:prstGeom>
+          <a:noFill/>
+        </p:spPr>
+        <p:txBody>
+          <a:bodyPr wrap="none" lIns="0" rIns="0" tIns="0" bIns="0" anchor="t">
+            <a:spAutoFit/>
+          </a:bodyPr>
+          <a:lstStyle/>
+          <a:p>
+            <a:pPr algn="l"/>
+            <a:r>
+              <a:rPr sz="1300" b="1" i="0">
+                <a:solidFill>
+                  <a:srgbClr val="15795A"/>
+                </a:solidFill>
+                <a:latin typeface="Helvetica Neue"/>
+              </a:rPr>
+              <a:t>the conversation instead of failing.</a:t>
+            </a:r>
+          </a:p>
+        </p:txBody>
+      </p:sp>
+      <p:cxnSp>
+        <p:nvCxnSpPr>
+          <p:cNvPr id="79" name="Connector 78"/>
+          <p:cNvCxnSpPr/>
+          <p:nvPr/>
+        </p:nvCxnSpPr>
+        <p:spPr>
+          <a:xfrm>
+            <a:off x="10261600" y="1270000"/>
+            <a:ext cx="25400" cy="0"/>
+          </a:xfrm>
+          <a:prstGeom prst="line">
+            <a:avLst/>
+          </a:prstGeom>
+          <a:ln w="17780">
+            <a:solidFill>
+              <a:srgbClr val="94A3B8"/>
+            </a:solidFill>
+          </a:ln>
+        </p:spPr>
+        <p:style>
+          <a:lnRef idx="2">
+            <a:schemeClr val="accent1"/>
+          </a:lnRef>
+          <a:fillRef idx="0">
+            <a:schemeClr val="accent1"/>
+          </a:fillRef>
+          <a:effectRef idx="1">
+            <a:schemeClr val="accent1"/>
+          </a:effectRef>
+          <a:fontRef idx="minor">
+            <a:schemeClr val="tx1"/>
+          </a:fontRef>
+        </p:style>
+      </p:cxnSp>
+      <p:sp>
+        <p:nvSpPr>
+          <p:cNvPr id="80" name="Rounded Rectangle 79"/>
           <p:cNvSpPr/>
           <p:nvPr/>
         </p:nvSpPr>
         <p:spPr>
           <a:xfrm>
-            <a:off x="8178800" y="787400"/>
-            <a:ext cx="1676400" cy="1600200"/>
+            <a:off x="10363200" y="508000"/>
+            <a:ext cx="2184400" cy="1473200"/>
           </a:xfrm>
           <a:prstGeom prst="roundRect">
             <a:avLst>
-              <a:gd name="adj" fmla="val 9523"/>
+              <a:gd name="adj" fmla="val 10344"/>
             </a:avLst>
           </a:prstGeom>
           <a:solidFill>
-            <a:srgbClr val="F3EEFB"/>
+            <a:srgbClr val="FDF1E7"/>
           </a:solidFill>
           <a:ln w="12700">
             <a:solidFill>
-              <a:srgbClr val="C7B4EC"/>
+              <a:srgbClr val="F0C9A0"/>
             </a:solidFill>
           </a:ln>
           <a:effectLst/>
@@ -4855,40 +5998,16 @@
           <a:p/>
         </p:txBody>
       </p:sp>
-      <p:pic>
-        <p:nvPicPr>
-          <p:cNvPr id="49" name="Picture 48" descr="bulb--6d3fbf.256.png"/>
-          <p:cNvPicPr>
-            <a:picLocks noChangeAspect="1"/>
-          </p:cNvPicPr>
-          <p:nvPr/>
-        </p:nvPicPr>
-        <p:blipFill>
-          <a:blip r:embed="rId7"/>
-          <a:stretch>
-            <a:fillRect/>
-          </a:stretch>
-        </p:blipFill>
-        <p:spPr>
-          <a:xfrm>
-            <a:off x="8305800" y="889000"/>
-            <a:ext cx="190500" cy="190500"/>
-          </a:xfrm>
-          <a:prstGeom prst="rect">
-            <a:avLst/>
-          </a:prstGeom>
-        </p:spPr>
-      </p:pic>
-      <p:sp>
-        <p:nvSpPr>
-          <p:cNvPr id="50" name="TextBox 49"/>
+      <p:sp>
+        <p:nvSpPr>
+          <p:cNvPr id="81" name="TextBox 80"/>
           <p:cNvSpPr txBox="1"/>
           <p:nvPr/>
         </p:nvSpPr>
         <p:spPr>
           <a:xfrm>
-            <a:off x="8585200" y="902652"/>
-            <a:ext cx="762000" cy="260604"/>
+            <a:off x="10515600" y="534035"/>
+            <a:ext cx="1433068" cy="356616"/>
           </a:xfrm>
           <a:prstGeom prst="rect">
             <a:avLst/>
@@ -4903,31 +6022,31 @@
           <a:p>
             <a:pPr algn="l"/>
             <a:r>
-              <a:rPr sz="950" b="1" i="0">
+              <a:rPr sz="1300" b="1" i="0">
                 <a:solidFill>
-                  <a:srgbClr val="6D3FBF"/>
+                  <a:srgbClr val="A85F12"/>
                 </a:solidFill>
                 <a:latin typeface="Helvetica Neue"/>
               </a:rPr>
-              <a:t>L3  judge</a:t>
-            </a:r>
-          </a:p>
-        </p:txBody>
-      </p:sp>
-      <p:sp>
-        <p:nvSpPr>
-          <p:cNvPr id="51" name="Rounded Rectangle 50"/>
+              <a:t>Tamper-evident</a:t>
+            </a:r>
+          </a:p>
+        </p:txBody>
+      </p:sp>
+      <p:sp>
+        <p:nvSpPr>
+          <p:cNvPr id="82" name="Rounded Rectangle 81"/>
           <p:cNvSpPr/>
           <p:nvPr/>
         </p:nvSpPr>
         <p:spPr>
           <a:xfrm>
-            <a:off x="8280400" y="1193800"/>
-            <a:ext cx="1473200" cy="228600"/>
+            <a:off x="10490200" y="889000"/>
+            <a:ext cx="1930400" cy="381000"/>
           </a:xfrm>
           <a:prstGeom prst="roundRect">
             <a:avLst>
-              <a:gd name="adj" fmla="val 22222"/>
+              <a:gd name="adj" fmla="val 23333"/>
             </a:avLst>
           </a:prstGeom>
           <a:solidFill>
@@ -4960,16 +6079,40 @@
           <a:p/>
         </p:txBody>
       </p:sp>
-      <p:sp>
-        <p:nvSpPr>
-          <p:cNvPr id="52" name="TextBox 51"/>
+      <p:pic>
+        <p:nvPicPr>
+          <p:cNvPr id="83" name="Picture 82" descr="lock-check--334155.256.png"/>
+          <p:cNvPicPr>
+            <a:picLocks noChangeAspect="1"/>
+          </p:cNvPicPr>
+          <p:nvPr/>
+        </p:nvPicPr>
+        <p:blipFill>
+          <a:blip r:embed="rId9"/>
+          <a:stretch>
+            <a:fillRect/>
+          </a:stretch>
+        </p:blipFill>
+        <p:spPr>
+          <a:xfrm>
+            <a:off x="10604500" y="990600"/>
+            <a:ext cx="177800" cy="177800"/>
+          </a:xfrm>
+          <a:prstGeom prst="rect">
+            <a:avLst/>
+          </a:prstGeom>
+        </p:spPr>
+      </p:pic>
+      <p:sp>
+        <p:nvSpPr>
+          <p:cNvPr id="84" name="TextBox 83"/>
           <p:cNvSpPr txBox="1"/>
           <p:nvPr/>
         </p:nvSpPr>
         <p:spPr>
           <a:xfrm>
-            <a:off x="8356600" y="1250823"/>
-            <a:ext cx="1048817" cy="202997"/>
+            <a:off x="10858500" y="959104"/>
+            <a:ext cx="762000" cy="329184"/>
           </a:xfrm>
           <a:prstGeom prst="rect">
             <a:avLst/>
@@ -4984,27 +6127,73 @@
           <a:p>
             <a:pPr algn="l"/>
             <a:r>
-              <a:rPr sz="740" b="0" i="0">
+              <a:rPr sz="1200" b="0" i="0">
                 <a:solidFill>
                   <a:srgbClr val="1F2937"/>
                 </a:solidFill>
-                <a:latin typeface="Menlo"/>
+                <a:latin typeface="Helvetica Neue"/>
               </a:rPr>
-              <a:t>sees: full context</a:t>
-            </a:r>
-          </a:p>
-        </p:txBody>
-      </p:sp>
-      <p:sp>
-        <p:nvSpPr>
-          <p:cNvPr id="53" name="TextBox 52"/>
+              <a:t>Ed25519</a:t>
+            </a:r>
+          </a:p>
+        </p:txBody>
+      </p:sp>
+      <p:sp>
+        <p:nvSpPr>
+          <p:cNvPr id="85" name="Rounded Rectangle 84"/>
+          <p:cNvSpPr/>
+          <p:nvPr/>
+        </p:nvSpPr>
+        <p:spPr>
+          <a:xfrm>
+            <a:off x="10490200" y="1371600"/>
+            <a:ext cx="1930400" cy="355600"/>
+          </a:xfrm>
+          <a:prstGeom prst="roundRect">
+            <a:avLst>
+              <a:gd name="adj" fmla="val 17857"/>
+            </a:avLst>
+          </a:prstGeom>
+          <a:solidFill>
+            <a:srgbClr val="F8FAFC"/>
+          </a:solidFill>
+          <a:ln w="12700">
+            <a:solidFill>
+              <a:srgbClr val="E2E8F0"/>
+            </a:solidFill>
+          </a:ln>
+          <a:effectLst/>
+        </p:spPr>
+        <p:style>
+          <a:lnRef idx="1">
+            <a:schemeClr val="accent1"/>
+          </a:lnRef>
+          <a:fillRef idx="3">
+            <a:schemeClr val="accent1"/>
+          </a:fillRef>
+          <a:effectRef idx="2">
+            <a:schemeClr val="accent1"/>
+          </a:effectRef>
+          <a:fontRef idx="minor">
+            <a:schemeClr val="lt1"/>
+          </a:fontRef>
+        </p:style>
+        <p:txBody>
+          <a:bodyPr rtlCol="0" anchor="ctr"/>
+          <a:lstStyle/>
+          <a:p/>
+        </p:txBody>
+      </p:sp>
+      <p:sp>
+        <p:nvSpPr>
+          <p:cNvPr id="86" name="TextBox 85"/>
           <p:cNvSpPr txBox="1"/>
           <p:nvPr/>
         </p:nvSpPr>
         <p:spPr>
           <a:xfrm>
-            <a:off x="8305800" y="1511681"/>
-            <a:ext cx="859841" cy="213970"/>
+            <a:off x="10591800" y="1434020"/>
+            <a:ext cx="1177163" cy="315468"/>
           </a:xfrm>
           <a:prstGeom prst="rect">
             <a:avLst/>
@@ -5019,31 +6208,193 @@
           <a:p>
             <a:pPr algn="l"/>
             <a:r>
-              <a:rPr sz="780" b="0" i="0">
+              <a:rPr sz="1150" b="0" i="0">
                 <a:solidFill>
-                  <a:srgbClr val="64748B"/>
+                  <a:srgbClr val="334155"/>
+                </a:solidFill>
+                <a:latin typeface="Menlo"/>
+              </a:rPr>
+              <a:t>SHA-256 chain</a:t>
+            </a:r>
+          </a:p>
+        </p:txBody>
+      </p:sp>
+      <p:sp>
+        <p:nvSpPr>
+          <p:cNvPr id="87" name="Rounded Rectangle 86"/>
+          <p:cNvSpPr/>
+          <p:nvPr/>
+        </p:nvSpPr>
+        <p:spPr>
+          <a:xfrm>
+            <a:off x="12242800" y="584200"/>
+            <a:ext cx="190500" cy="190500"/>
+          </a:xfrm>
+          <a:prstGeom prst="roundRect">
+            <a:avLst>
+              <a:gd name="adj" fmla="val 50000"/>
+            </a:avLst>
+          </a:prstGeom>
+          <a:solidFill>
+            <a:srgbClr val="6D3FBF"/>
+          </a:solidFill>
+          <a:ln w="12700">
+            <a:solidFill>
+              <a:srgbClr val="6D3FBF"/>
+            </a:solidFill>
+          </a:ln>
+          <a:effectLst/>
+        </p:spPr>
+        <p:style>
+          <a:lnRef idx="1">
+            <a:schemeClr val="accent1"/>
+          </a:lnRef>
+          <a:fillRef idx="3">
+            <a:schemeClr val="accent1"/>
+          </a:fillRef>
+          <a:effectRef idx="2">
+            <a:schemeClr val="accent1"/>
+          </a:effectRef>
+          <a:fontRef idx="minor">
+            <a:schemeClr val="lt1"/>
+          </a:fontRef>
+        </p:style>
+        <p:txBody>
+          <a:bodyPr rtlCol="0" anchor="ctr"/>
+          <a:lstStyle/>
+          <a:p/>
+        </p:txBody>
+      </p:sp>
+      <p:sp>
+        <p:nvSpPr>
+          <p:cNvPr id="88" name="TextBox 87"/>
+          <p:cNvSpPr txBox="1"/>
+          <p:nvPr/>
+        </p:nvSpPr>
+        <p:spPr>
+          <a:xfrm>
+            <a:off x="11957050" y="504825"/>
+            <a:ext cx="762000" cy="411480"/>
+          </a:xfrm>
+          <a:prstGeom prst="rect">
+            <a:avLst/>
+          </a:prstGeom>
+          <a:noFill/>
+        </p:spPr>
+        <p:txBody>
+          <a:bodyPr wrap="none" lIns="0" rIns="0" tIns="0" bIns="0" anchor="t">
+            <a:spAutoFit/>
+          </a:bodyPr>
+          <a:lstStyle/>
+          <a:p>
+            <a:pPr algn="ctr"/>
+            <a:r>
+              <a:rPr sz="1500" b="1" i="0">
+                <a:solidFill>
+                  <a:srgbClr val="FFFFFF"/>
                 </a:solidFill>
                 <a:latin typeface="Helvetica Neue"/>
               </a:rPr>
-              <a:t>frontier model</a:t>
-            </a:r>
-          </a:p>
-        </p:txBody>
-      </p:sp>
-      <p:sp>
-        <p:nvSpPr>
-          <p:cNvPr id="54" name="Rounded Rectangle 53"/>
+              <a:t>3</a:t>
+            </a:r>
+          </a:p>
+        </p:txBody>
+      </p:sp>
+      <p:sp>
+        <p:nvSpPr>
+          <p:cNvPr id="89" name="Rounded Rectangle 88"/>
           <p:cNvSpPr/>
           <p:nvPr/>
         </p:nvSpPr>
         <p:spPr>
           <a:xfrm>
-            <a:off x="8280400" y="1752600"/>
-            <a:ext cx="1473200" cy="254000"/>
+            <a:off x="10363200" y="2133600"/>
+            <a:ext cx="2184400" cy="1143000"/>
           </a:xfrm>
           <a:prstGeom prst="roundRect">
             <a:avLst>
-              <a:gd name="adj" fmla="val 20000"/>
+              <a:gd name="adj" fmla="val 13333"/>
+            </a:avLst>
+          </a:prstGeom>
+          <a:solidFill>
+            <a:srgbClr val="EEF2FB"/>
+          </a:solidFill>
+          <a:ln w="12700">
+            <a:solidFill>
+              <a:srgbClr val="AEC0E8"/>
+            </a:solidFill>
+          </a:ln>
+          <a:effectLst/>
+        </p:spPr>
+        <p:style>
+          <a:lnRef idx="1">
+            <a:schemeClr val="accent1"/>
+          </a:lnRef>
+          <a:fillRef idx="3">
+            <a:schemeClr val="accent1"/>
+          </a:fillRef>
+          <a:effectRef idx="2">
+            <a:schemeClr val="accent1"/>
+          </a:effectRef>
+          <a:fontRef idx="minor">
+            <a:schemeClr val="lt1"/>
+          </a:fontRef>
+        </p:style>
+        <p:txBody>
+          <a:bodyPr rtlCol="0" anchor="ctr"/>
+          <a:lstStyle/>
+          <a:p/>
+        </p:txBody>
+      </p:sp>
+      <p:sp>
+        <p:nvSpPr>
+          <p:cNvPr id="90" name="TextBox 89"/>
+          <p:cNvSpPr txBox="1"/>
+          <p:nvPr/>
+        </p:nvSpPr>
+        <p:spPr>
+          <a:xfrm>
+            <a:off x="10515600" y="2159635"/>
+            <a:ext cx="762000" cy="356616"/>
+          </a:xfrm>
+          <a:prstGeom prst="rect">
+            <a:avLst/>
+          </a:prstGeom>
+          <a:noFill/>
+        </p:spPr>
+        <p:txBody>
+          <a:bodyPr wrap="none" lIns="0" rIns="0" tIns="0" bIns="0" anchor="t">
+            <a:spAutoFit/>
+          </a:bodyPr>
+          <a:lstStyle/>
+          <a:p>
+            <a:pPr algn="l"/>
+            <a:r>
+              <a:rPr sz="1300" b="1" i="0">
+                <a:solidFill>
+                  <a:srgbClr val="2F4FA8"/>
+                </a:solidFill>
+                <a:latin typeface="Helvetica Neue"/>
+              </a:rPr>
+              <a:t>Cockpit</a:t>
+            </a:r>
+          </a:p>
+        </p:txBody>
+      </p:sp>
+      <p:sp>
+        <p:nvSpPr>
+          <p:cNvPr id="91" name="Rounded Rectangle 90"/>
+          <p:cNvSpPr/>
+          <p:nvPr/>
+        </p:nvSpPr>
+        <p:spPr>
+          <a:xfrm>
+            <a:off x="10490200" y="2489200"/>
+            <a:ext cx="1930400" cy="381000"/>
+          </a:xfrm>
+          <a:prstGeom prst="roundRect">
+            <a:avLst>
+              <a:gd name="adj" fmla="val 23333"/>
             </a:avLst>
           </a:prstGeom>
           <a:solidFill>
@@ -5076,869 +6427,9 @@
           <a:p/>
         </p:txBody>
       </p:sp>
-      <p:sp>
-        <p:nvSpPr>
-          <p:cNvPr id="55" name="TextBox 54"/>
-          <p:cNvSpPr txBox="1"/>
-          <p:nvPr/>
-        </p:nvSpPr>
-        <p:spPr>
-          <a:xfrm>
-            <a:off x="8387080" y="1813560"/>
-            <a:ext cx="1259840" cy="219456"/>
-          </a:xfrm>
-          <a:prstGeom prst="rect">
-            <a:avLst/>
-          </a:prstGeom>
-          <a:noFill/>
-        </p:spPr>
-        <p:txBody>
-          <a:bodyPr wrap="none" lIns="0" rIns="0" tIns="0" bIns="0" anchor="t">
-            <a:spAutoFit/>
-          </a:bodyPr>
-          <a:lstStyle/>
-          <a:p>
-            <a:pPr algn="ctr"/>
-            <a:r>
-              <a:rPr sz="800" b="1" i="0">
-                <a:solidFill>
-                  <a:srgbClr val="D97706"/>
-                </a:solidFill>
-                <a:latin typeface="Helvetica Neue"/>
-              </a:rPr>
-              <a:t>0.851 bal.acc, 2.3 s</a:t>
-            </a:r>
-          </a:p>
-        </p:txBody>
-      </p:sp>
-      <p:sp>
-        <p:nvSpPr>
-          <p:cNvPr id="56" name="TextBox 55"/>
-          <p:cNvSpPr txBox="1"/>
-          <p:nvPr/>
-        </p:nvSpPr>
-        <p:spPr>
-          <a:xfrm>
-            <a:off x="2616200" y="2431923"/>
-            <a:ext cx="3262986" cy="202997"/>
-          </a:xfrm>
-          <a:prstGeom prst="rect">
-            <a:avLst/>
-          </a:prstGeom>
-          <a:noFill/>
-        </p:spPr>
-        <p:txBody>
-          <a:bodyPr wrap="none" lIns="0" rIns="0" tIns="0" bIns="0" anchor="t">
-            <a:spAutoFit/>
-          </a:bodyPr>
-          <a:lstStyle/>
-          <a:p>
-            <a:pPr algn="l"/>
-            <a:r>
-              <a:rPr sz="740" b="0" i="1">
-                <a:solidFill>
-                  <a:srgbClr val="94A3B8"/>
-                </a:solidFill>
-                <a:latin typeface="Helvetica Neue"/>
-              </a:rPr>
-              <a:t>measured on real agent traffic (the instantiated corpus)</a:t>
-            </a:r>
-          </a:p>
-        </p:txBody>
-      </p:sp>
-      <p:cxnSp>
-        <p:nvCxnSpPr>
-          <p:cNvPr id="57" name="Connector 56"/>
-          <p:cNvCxnSpPr/>
-          <p:nvPr/>
-        </p:nvCxnSpPr>
-        <p:spPr>
-          <a:xfrm>
-            <a:off x="4292600" y="1549400"/>
-            <a:ext cx="177800" cy="0"/>
-          </a:xfrm>
-          <a:prstGeom prst="line">
-            <a:avLst/>
-          </a:prstGeom>
-          <a:ln w="20320">
-            <a:solidFill>
-              <a:srgbClr val="94A3B8"/>
-            </a:solidFill>
-          </a:ln>
-        </p:spPr>
-        <p:style>
-          <a:lnRef idx="2">
-            <a:schemeClr val="accent1"/>
-          </a:lnRef>
-          <a:fillRef idx="0">
-            <a:schemeClr val="accent1"/>
-          </a:fillRef>
-          <a:effectRef idx="1">
-            <a:schemeClr val="accent1"/>
-          </a:effectRef>
-          <a:fontRef idx="minor">
-            <a:schemeClr val="tx1"/>
-          </a:fontRef>
-        </p:style>
-      </p:cxnSp>
-      <p:cxnSp>
-        <p:nvCxnSpPr>
-          <p:cNvPr id="58" name="Connector 57"/>
-          <p:cNvCxnSpPr/>
-          <p:nvPr/>
-        </p:nvCxnSpPr>
-        <p:spPr>
-          <a:xfrm>
-            <a:off x="6146800" y="1549400"/>
-            <a:ext cx="177800" cy="0"/>
-          </a:xfrm>
-          <a:prstGeom prst="line">
-            <a:avLst/>
-          </a:prstGeom>
-          <a:ln w="20320">
-            <a:solidFill>
-              <a:srgbClr val="94A3B8"/>
-            </a:solidFill>
-          </a:ln>
-        </p:spPr>
-        <p:style>
-          <a:lnRef idx="2">
-            <a:schemeClr val="accent1"/>
-          </a:lnRef>
-          <a:fillRef idx="0">
-            <a:schemeClr val="accent1"/>
-          </a:fillRef>
-          <a:effectRef idx="1">
-            <a:schemeClr val="accent1"/>
-          </a:effectRef>
-          <a:fontRef idx="minor">
-            <a:schemeClr val="tx1"/>
-          </a:fontRef>
-        </p:style>
-      </p:cxnSp>
-      <p:cxnSp>
-        <p:nvCxnSpPr>
-          <p:cNvPr id="59" name="Connector 58"/>
-          <p:cNvCxnSpPr/>
-          <p:nvPr/>
-        </p:nvCxnSpPr>
-        <p:spPr>
-          <a:xfrm>
-            <a:off x="8001000" y="1549400"/>
-            <a:ext cx="177800" cy="0"/>
-          </a:xfrm>
-          <a:prstGeom prst="line">
-            <a:avLst/>
-          </a:prstGeom>
-          <a:ln w="20320">
-            <a:solidFill>
-              <a:srgbClr val="94A3B8"/>
-            </a:solidFill>
-          </a:ln>
-        </p:spPr>
-        <p:style>
-          <a:lnRef idx="2">
-            <a:schemeClr val="accent1"/>
-          </a:lnRef>
-          <a:fillRef idx="0">
-            <a:schemeClr val="accent1"/>
-          </a:fillRef>
-          <a:effectRef idx="1">
-            <a:schemeClr val="accent1"/>
-          </a:effectRef>
-          <a:fontRef idx="minor">
-            <a:schemeClr val="tx1"/>
-          </a:fontRef>
-        </p:style>
-      </p:cxnSp>
-      <p:sp>
-        <p:nvSpPr>
-          <p:cNvPr id="60" name="TextBox 59"/>
-          <p:cNvSpPr txBox="1"/>
-          <p:nvPr/>
-        </p:nvSpPr>
-        <p:spPr>
-          <a:xfrm>
-            <a:off x="2641600" y="2600960"/>
-            <a:ext cx="762000" cy="219456"/>
-          </a:xfrm>
-          <a:prstGeom prst="rect">
-            <a:avLst/>
-          </a:prstGeom>
-          <a:noFill/>
-        </p:spPr>
-        <p:txBody>
-          <a:bodyPr wrap="none" lIns="0" rIns="0" tIns="0" bIns="0" anchor="t">
-            <a:spAutoFit/>
-          </a:bodyPr>
-          <a:lstStyle/>
-          <a:p>
-            <a:pPr algn="l"/>
-            <a:r>
-              <a:rPr sz="800" b="1" i="0">
-                <a:solidFill>
-                  <a:srgbClr val="1F2937"/>
-                </a:solidFill>
-                <a:latin typeface="Helvetica Neue"/>
-              </a:rPr>
-              <a:t>decision</a:t>
-            </a:r>
-          </a:p>
-        </p:txBody>
-      </p:sp>
-      <p:sp>
-        <p:nvSpPr>
-          <p:cNvPr id="61" name="Rounded Rectangle 60"/>
-          <p:cNvSpPr/>
-          <p:nvPr/>
-        </p:nvSpPr>
-        <p:spPr>
-          <a:xfrm>
-            <a:off x="2616200" y="2819400"/>
-            <a:ext cx="939800" cy="279400"/>
-          </a:xfrm>
-          <a:prstGeom prst="roundRect">
-            <a:avLst>
-              <a:gd name="adj" fmla="val 50000"/>
-            </a:avLst>
-          </a:prstGeom>
-          <a:solidFill>
-            <a:srgbClr val="DCFCE7"/>
-          </a:solidFill>
-          <a:ln w="12700">
-            <a:solidFill>
-              <a:srgbClr val="DCFCE7"/>
-            </a:solidFill>
-          </a:ln>
-          <a:effectLst/>
-        </p:spPr>
-        <p:style>
-          <a:lnRef idx="1">
-            <a:schemeClr val="accent1"/>
-          </a:lnRef>
-          <a:fillRef idx="3">
-            <a:schemeClr val="accent1"/>
-          </a:fillRef>
-          <a:effectRef idx="2">
-            <a:schemeClr val="accent1"/>
-          </a:effectRef>
-          <a:fontRef idx="minor">
-            <a:schemeClr val="lt1"/>
-          </a:fontRef>
-        </p:style>
-        <p:txBody>
-          <a:bodyPr rtlCol="0" anchor="ctr"/>
-          <a:lstStyle/>
-          <a:p/>
-        </p:txBody>
-      </p:sp>
-      <p:sp>
-        <p:nvSpPr>
-          <p:cNvPr id="62" name="TextBox 61"/>
-          <p:cNvSpPr txBox="1"/>
-          <p:nvPr/>
-        </p:nvSpPr>
-        <p:spPr>
-          <a:xfrm>
-            <a:off x="2705100" y="2873820"/>
-            <a:ext cx="762000" cy="233172"/>
-          </a:xfrm>
-          <a:prstGeom prst="rect">
-            <a:avLst/>
-          </a:prstGeom>
-          <a:noFill/>
-        </p:spPr>
-        <p:txBody>
-          <a:bodyPr wrap="none" lIns="0" rIns="0" tIns="0" bIns="0" anchor="t">
-            <a:spAutoFit/>
-          </a:bodyPr>
-          <a:lstStyle/>
-          <a:p>
-            <a:pPr algn="ctr"/>
-            <a:r>
-              <a:rPr sz="850" b="0" i="0">
-                <a:solidFill>
-                  <a:srgbClr val="16A34A"/>
-                </a:solidFill>
-                <a:latin typeface="Helvetica Neue"/>
-              </a:rPr>
-              <a:t>allow</a:t>
-            </a:r>
-          </a:p>
-        </p:txBody>
-      </p:sp>
-      <p:sp>
-        <p:nvSpPr>
-          <p:cNvPr id="63" name="Rounded Rectangle 62"/>
-          <p:cNvSpPr/>
-          <p:nvPr/>
-        </p:nvSpPr>
-        <p:spPr>
-          <a:xfrm>
-            <a:off x="3657600" y="2819400"/>
-            <a:ext cx="939800" cy="279400"/>
-          </a:xfrm>
-          <a:prstGeom prst="roundRect">
-            <a:avLst>
-              <a:gd name="adj" fmla="val 50000"/>
-            </a:avLst>
-          </a:prstGeom>
-          <a:solidFill>
-            <a:srgbClr val="FEE2E2"/>
-          </a:solidFill>
-          <a:ln w="12700">
-            <a:solidFill>
-              <a:srgbClr val="FEE2E2"/>
-            </a:solidFill>
-          </a:ln>
-          <a:effectLst/>
-        </p:spPr>
-        <p:style>
-          <a:lnRef idx="1">
-            <a:schemeClr val="accent1"/>
-          </a:lnRef>
-          <a:fillRef idx="3">
-            <a:schemeClr val="accent1"/>
-          </a:fillRef>
-          <a:effectRef idx="2">
-            <a:schemeClr val="accent1"/>
-          </a:effectRef>
-          <a:fontRef idx="minor">
-            <a:schemeClr val="lt1"/>
-          </a:fontRef>
-        </p:style>
-        <p:txBody>
-          <a:bodyPr rtlCol="0" anchor="ctr"/>
-          <a:lstStyle/>
-          <a:p/>
-        </p:txBody>
-      </p:sp>
-      <p:sp>
-        <p:nvSpPr>
-          <p:cNvPr id="64" name="TextBox 63"/>
-          <p:cNvSpPr txBox="1"/>
-          <p:nvPr/>
-        </p:nvSpPr>
-        <p:spPr>
-          <a:xfrm>
-            <a:off x="3746500" y="2873820"/>
-            <a:ext cx="762000" cy="233172"/>
-          </a:xfrm>
-          <a:prstGeom prst="rect">
-            <a:avLst/>
-          </a:prstGeom>
-          <a:noFill/>
-        </p:spPr>
-        <p:txBody>
-          <a:bodyPr wrap="none" lIns="0" rIns="0" tIns="0" bIns="0" anchor="t">
-            <a:spAutoFit/>
-          </a:bodyPr>
-          <a:lstStyle/>
-          <a:p>
-            <a:pPr algn="ctr"/>
-            <a:r>
-              <a:rPr sz="850" b="0" i="0">
-                <a:solidFill>
-                  <a:srgbClr val="DC2626"/>
-                </a:solidFill>
-                <a:latin typeface="Helvetica Neue"/>
-              </a:rPr>
-              <a:t>block</a:t>
-            </a:r>
-          </a:p>
-        </p:txBody>
-      </p:sp>
-      <p:sp>
-        <p:nvSpPr>
-          <p:cNvPr id="65" name="Rounded Rectangle 64"/>
-          <p:cNvSpPr/>
-          <p:nvPr/>
-        </p:nvSpPr>
-        <p:spPr>
-          <a:xfrm>
-            <a:off x="4699000" y="2819400"/>
-            <a:ext cx="1143000" cy="279400"/>
-          </a:xfrm>
-          <a:prstGeom prst="roundRect">
-            <a:avLst>
-              <a:gd name="adj" fmla="val 50000"/>
-            </a:avLst>
-          </a:prstGeom>
-          <a:solidFill>
-            <a:srgbClr val="FEF3C7"/>
-          </a:solidFill>
-          <a:ln w="12700">
-            <a:solidFill>
-              <a:srgbClr val="FEF3C7"/>
-            </a:solidFill>
-          </a:ln>
-          <a:effectLst/>
-        </p:spPr>
-        <p:style>
-          <a:lnRef idx="1">
-            <a:schemeClr val="accent1"/>
-          </a:lnRef>
-          <a:fillRef idx="3">
-            <a:schemeClr val="accent1"/>
-          </a:fillRef>
-          <a:effectRef idx="2">
-            <a:schemeClr val="accent1"/>
-          </a:effectRef>
-          <a:fontRef idx="minor">
-            <a:schemeClr val="lt1"/>
-          </a:fontRef>
-        </p:style>
-        <p:txBody>
-          <a:bodyPr rtlCol="0" anchor="ctr"/>
-          <a:lstStyle/>
-          <a:p/>
-        </p:txBody>
-      </p:sp>
-      <p:sp>
-        <p:nvSpPr>
-          <p:cNvPr id="66" name="TextBox 65"/>
-          <p:cNvSpPr txBox="1"/>
-          <p:nvPr/>
-        </p:nvSpPr>
-        <p:spPr>
-          <a:xfrm>
-            <a:off x="4889500" y="2873820"/>
-            <a:ext cx="762000" cy="233172"/>
-          </a:xfrm>
-          <a:prstGeom prst="rect">
-            <a:avLst/>
-          </a:prstGeom>
-          <a:noFill/>
-        </p:spPr>
-        <p:txBody>
-          <a:bodyPr wrap="none" lIns="0" rIns="0" tIns="0" bIns="0" anchor="t">
-            <a:spAutoFit/>
-          </a:bodyPr>
-          <a:lstStyle/>
-          <a:p>
-            <a:pPr algn="ctr"/>
-            <a:r>
-              <a:rPr sz="850" b="0" i="0">
-                <a:solidFill>
-                  <a:srgbClr val="D97706"/>
-                </a:solidFill>
-                <a:latin typeface="Helvetica Neue"/>
-              </a:rPr>
-              <a:t>pending</a:t>
-            </a:r>
-          </a:p>
-        </p:txBody>
-      </p:sp>
-      <p:cxnSp>
-        <p:nvCxnSpPr>
-          <p:cNvPr id="67" name="Connector 66"/>
-          <p:cNvCxnSpPr/>
-          <p:nvPr/>
-        </p:nvCxnSpPr>
-        <p:spPr>
-          <a:xfrm>
-            <a:off x="5867400" y="2959100"/>
-            <a:ext cx="304800" cy="0"/>
-          </a:xfrm>
-          <a:prstGeom prst="line">
-            <a:avLst/>
-          </a:prstGeom>
-          <a:ln w="20320">
-            <a:solidFill>
-              <a:srgbClr val="94A3B8"/>
-            </a:solidFill>
-          </a:ln>
-        </p:spPr>
-        <p:style>
-          <a:lnRef idx="2">
-            <a:schemeClr val="accent1"/>
-          </a:lnRef>
-          <a:fillRef idx="0">
-            <a:schemeClr val="accent1"/>
-          </a:fillRef>
-          <a:effectRef idx="1">
-            <a:schemeClr val="accent1"/>
-          </a:effectRef>
-          <a:fontRef idx="minor">
-            <a:schemeClr val="tx1"/>
-          </a:fontRef>
-        </p:style>
-      </p:cxnSp>
-      <p:sp>
-        <p:nvSpPr>
-          <p:cNvPr id="68" name="Rounded Rectangle 67"/>
-          <p:cNvSpPr/>
-          <p:nvPr/>
-        </p:nvSpPr>
-        <p:spPr>
-          <a:xfrm>
-            <a:off x="6248400" y="2768600"/>
-            <a:ext cx="2032000" cy="381000"/>
-          </a:xfrm>
-          <a:prstGeom prst="roundRect">
-            <a:avLst>
-              <a:gd name="adj" fmla="val 23333"/>
-            </a:avLst>
-          </a:prstGeom>
-          <a:solidFill>
-            <a:srgbClr val="FFFFFF"/>
-          </a:solidFill>
-          <a:ln w="12700">
-            <a:solidFill>
-              <a:srgbClr val="E2E8F0"/>
-            </a:solidFill>
-          </a:ln>
-          <a:effectLst/>
-        </p:spPr>
-        <p:style>
-          <a:lnRef idx="1">
-            <a:schemeClr val="accent1"/>
-          </a:lnRef>
-          <a:fillRef idx="3">
-            <a:schemeClr val="accent1"/>
-          </a:fillRef>
-          <a:effectRef idx="2">
-            <a:schemeClr val="accent1"/>
-          </a:effectRef>
-          <a:fontRef idx="minor">
-            <a:schemeClr val="lt1"/>
-          </a:fontRef>
-        </p:style>
-        <p:txBody>
-          <a:bodyPr rtlCol="0" anchor="ctr"/>
-          <a:lstStyle/>
-          <a:p/>
-        </p:txBody>
-      </p:sp>
       <p:pic>
         <p:nvPicPr>
-          <p:cNvPr id="69" name="Picture 68" descr="user-check--334155.256.png"/>
-          <p:cNvPicPr>
-            <a:picLocks noChangeAspect="1"/>
-          </p:cNvPicPr>
-          <p:nvPr/>
-        </p:nvPicPr>
-        <p:blipFill>
-          <a:blip r:embed="rId8"/>
-          <a:stretch>
-            <a:fillRect/>
-          </a:stretch>
-        </p:blipFill>
-        <p:spPr>
-          <a:xfrm>
-            <a:off x="6362700" y="2870200"/>
-            <a:ext cx="177800" cy="177800"/>
-          </a:xfrm>
-          <a:prstGeom prst="rect">
-            <a:avLst/>
-          </a:prstGeom>
-        </p:spPr>
-      </p:pic>
-      <p:sp>
-        <p:nvSpPr>
-          <p:cNvPr id="70" name="TextBox 69"/>
-          <p:cNvSpPr txBox="1"/>
-          <p:nvPr/>
-        </p:nvSpPr>
-        <p:spPr>
-          <a:xfrm>
-            <a:off x="6616700" y="2873820"/>
-            <a:ext cx="1405509" cy="233172"/>
-          </a:xfrm>
-          <a:prstGeom prst="rect">
-            <a:avLst/>
-          </a:prstGeom>
-          <a:noFill/>
-        </p:spPr>
-        <p:txBody>
-          <a:bodyPr wrap="none" lIns="0" rIns="0" tIns="0" bIns="0" anchor="t">
-            <a:spAutoFit/>
-          </a:bodyPr>
-          <a:lstStyle/>
-          <a:p>
-            <a:pPr algn="l"/>
-            <a:r>
-              <a:rPr sz="850" b="0" i="0">
-                <a:solidFill>
-                  <a:srgbClr val="1F2937"/>
-                </a:solidFill>
-                <a:latin typeface="Helvetica Neue"/>
-              </a:rPr>
-              <a:t>human review, 1 click</a:t>
-            </a:r>
-          </a:p>
-        </p:txBody>
-      </p:sp>
-      <p:sp>
-        <p:nvSpPr>
-          <p:cNvPr id="71" name="TextBox 70"/>
-          <p:cNvSpPr txBox="1"/>
-          <p:nvPr/>
-        </p:nvSpPr>
-        <p:spPr>
-          <a:xfrm>
-            <a:off x="8483600" y="2886202"/>
-            <a:ext cx="897636" cy="208483"/>
-          </a:xfrm>
-          <a:prstGeom prst="rect">
-            <a:avLst/>
-          </a:prstGeom>
-          <a:noFill/>
-        </p:spPr>
-        <p:txBody>
-          <a:bodyPr wrap="none" lIns="0" rIns="0" tIns="0" bIns="0" anchor="t">
-            <a:spAutoFit/>
-          </a:bodyPr>
-          <a:lstStyle/>
-          <a:p>
-            <a:pPr algn="l"/>
-            <a:r>
-              <a:rPr sz="760" b="0" i="1">
-                <a:solidFill>
-                  <a:srgbClr val="64748B"/>
-                </a:solidFill>
-                <a:latin typeface="Helvetica Neue"/>
-              </a:rPr>
-              <a:t>agent suspended</a:t>
-            </a:r>
-          </a:p>
-        </p:txBody>
-      </p:sp>
-      <p:sp>
-        <p:nvSpPr>
-          <p:cNvPr id="72" name="Rounded Rectangle 71"/>
-          <p:cNvSpPr/>
-          <p:nvPr/>
-        </p:nvSpPr>
-        <p:spPr>
-          <a:xfrm>
-            <a:off x="10185400" y="177800"/>
-            <a:ext cx="2362200" cy="1651000"/>
-          </a:xfrm>
-          <a:prstGeom prst="roundRect">
-            <a:avLst>
-              <a:gd name="adj" fmla="val 9230"/>
-            </a:avLst>
-          </a:prstGeom>
-          <a:solidFill>
-            <a:srgbClr val="FDF1E7"/>
-          </a:solidFill>
-          <a:ln w="12700">
-            <a:solidFill>
-              <a:srgbClr val="F0C9A0"/>
-            </a:solidFill>
-          </a:ln>
-          <a:effectLst/>
-        </p:spPr>
-        <p:style>
-          <a:lnRef idx="1">
-            <a:schemeClr val="accent1"/>
-          </a:lnRef>
-          <a:fillRef idx="3">
-            <a:schemeClr val="accent1"/>
-          </a:fillRef>
-          <a:effectRef idx="2">
-            <a:schemeClr val="accent1"/>
-          </a:effectRef>
-          <a:fontRef idx="minor">
-            <a:schemeClr val="lt1"/>
-          </a:fontRef>
-        </p:style>
-        <p:txBody>
-          <a:bodyPr rtlCol="0" anchor="ctr"/>
-          <a:lstStyle/>
-          <a:p/>
-        </p:txBody>
-      </p:sp>
-      <p:sp>
-        <p:nvSpPr>
-          <p:cNvPr id="73" name="TextBox 72"/>
-          <p:cNvSpPr txBox="1"/>
-          <p:nvPr/>
-        </p:nvSpPr>
-        <p:spPr>
-          <a:xfrm>
-            <a:off x="10337800" y="247650"/>
-            <a:ext cx="1574800" cy="274320"/>
-          </a:xfrm>
-          <a:prstGeom prst="rect">
-            <a:avLst/>
-          </a:prstGeom>
-          <a:noFill/>
-        </p:spPr>
-        <p:txBody>
-          <a:bodyPr wrap="none" lIns="0" rIns="0" tIns="0" bIns="0" anchor="t">
-            <a:spAutoFit/>
-          </a:bodyPr>
-          <a:lstStyle/>
-          <a:p>
-            <a:pPr algn="l"/>
-            <a:r>
-              <a:rPr sz="1000" b="1" i="0">
-                <a:solidFill>
-                  <a:srgbClr val="A85F12"/>
-                </a:solidFill>
-                <a:latin typeface="Helvetica Neue"/>
-              </a:rPr>
-              <a:t>Tamper-evident audit</a:t>
-            </a:r>
-          </a:p>
-        </p:txBody>
-      </p:sp>
-      <p:sp>
-        <p:nvSpPr>
-          <p:cNvPr id="74" name="Rounded Rectangle 73"/>
-          <p:cNvSpPr/>
-          <p:nvPr/>
-        </p:nvSpPr>
-        <p:spPr>
-          <a:xfrm>
-            <a:off x="10312400" y="558800"/>
-            <a:ext cx="2108200" cy="330200"/>
-          </a:xfrm>
-          <a:prstGeom prst="roundRect">
-            <a:avLst>
-              <a:gd name="adj" fmla="val 26923"/>
-            </a:avLst>
-          </a:prstGeom>
-          <a:solidFill>
-            <a:srgbClr val="FFFFFF"/>
-          </a:solidFill>
-          <a:ln w="12700">
-            <a:solidFill>
-              <a:srgbClr val="E2E8F0"/>
-            </a:solidFill>
-          </a:ln>
-          <a:effectLst/>
-        </p:spPr>
-        <p:style>
-          <a:lnRef idx="1">
-            <a:schemeClr val="accent1"/>
-          </a:lnRef>
-          <a:fillRef idx="3">
-            <a:schemeClr val="accent1"/>
-          </a:fillRef>
-          <a:effectRef idx="2">
-            <a:schemeClr val="accent1"/>
-          </a:effectRef>
-          <a:fontRef idx="minor">
-            <a:schemeClr val="lt1"/>
-          </a:fontRef>
-        </p:style>
-        <p:txBody>
-          <a:bodyPr rtlCol="0" anchor="ctr"/>
-          <a:lstStyle/>
-          <a:p/>
-        </p:txBody>
-      </p:sp>
-      <p:pic>
-        <p:nvPicPr>
-          <p:cNvPr id="75" name="Picture 74" descr="lock-check--334155.256.png"/>
-          <p:cNvPicPr>
-            <a:picLocks noChangeAspect="1"/>
-          </p:cNvPicPr>
-          <p:nvPr/>
-        </p:nvPicPr>
-        <p:blipFill>
-          <a:blip r:embed="rId9"/>
-          <a:stretch>
-            <a:fillRect/>
-          </a:stretch>
-        </p:blipFill>
-        <p:spPr>
-          <a:xfrm>
-            <a:off x="10426700" y="635000"/>
-            <a:ext cx="177800" cy="177800"/>
-          </a:xfrm>
-          <a:prstGeom prst="rect">
-            <a:avLst/>
-          </a:prstGeom>
-        </p:spPr>
-      </p:pic>
-      <p:sp>
-        <p:nvSpPr>
-          <p:cNvPr id="76" name="TextBox 75"/>
-          <p:cNvSpPr txBox="1"/>
-          <p:nvPr/>
-        </p:nvSpPr>
-        <p:spPr>
-          <a:xfrm>
-            <a:off x="10680700" y="638620"/>
-            <a:ext cx="1137793" cy="233172"/>
-          </a:xfrm>
-          <a:prstGeom prst="rect">
-            <a:avLst/>
-          </a:prstGeom>
-          <a:noFill/>
-        </p:spPr>
-        <p:txBody>
-          <a:bodyPr wrap="none" lIns="0" rIns="0" tIns="0" bIns="0" anchor="t">
-            <a:spAutoFit/>
-          </a:bodyPr>
-          <a:lstStyle/>
-          <a:p>
-            <a:pPr algn="l"/>
-            <a:r>
-              <a:rPr sz="850" b="0" i="0">
-                <a:solidFill>
-                  <a:srgbClr val="1F2937"/>
-                </a:solidFill>
-                <a:latin typeface="Helvetica Neue"/>
-              </a:rPr>
-              <a:t>Ed25519 signature</a:t>
-            </a:r>
-          </a:p>
-        </p:txBody>
-      </p:sp>
-      <p:sp>
-        <p:nvSpPr>
-          <p:cNvPr id="77" name="Rounded Rectangle 76"/>
-          <p:cNvSpPr/>
-          <p:nvPr/>
-        </p:nvSpPr>
-        <p:spPr>
-          <a:xfrm>
-            <a:off x="10312400" y="965200"/>
-            <a:ext cx="2108200" cy="330200"/>
-          </a:xfrm>
-          <a:prstGeom prst="roundRect">
-            <a:avLst>
-              <a:gd name="adj" fmla="val 26923"/>
-            </a:avLst>
-          </a:prstGeom>
-          <a:solidFill>
-            <a:srgbClr val="FFFFFF"/>
-          </a:solidFill>
-          <a:ln w="12700">
-            <a:solidFill>
-              <a:srgbClr val="E2E8F0"/>
-            </a:solidFill>
-          </a:ln>
-          <a:effectLst/>
-        </p:spPr>
-        <p:style>
-          <a:lnRef idx="1">
-            <a:schemeClr val="accent1"/>
-          </a:lnRef>
-          <a:fillRef idx="3">
-            <a:schemeClr val="accent1"/>
-          </a:fillRef>
-          <a:effectRef idx="2">
-            <a:schemeClr val="accent1"/>
-          </a:effectRef>
-          <a:fontRef idx="minor">
-            <a:schemeClr val="lt1"/>
-          </a:fontRef>
-        </p:style>
-        <p:txBody>
-          <a:bodyPr rtlCol="0" anchor="ctr"/>
-          <a:lstStyle/>
-          <a:p/>
-        </p:txBody>
-      </p:sp>
-      <p:pic>
-        <p:nvPicPr>
-          <p:cNvPr id="78" name="Picture 77" descr="database--334155.256.png"/>
+          <p:cNvPr id="92" name="Picture 91" descr="layout-dashboard--334155.256.png"/>
           <p:cNvPicPr>
             <a:picLocks noChangeAspect="1"/>
           </p:cNvPicPr>
@@ -5952,7 +6443,7 @@
         </p:blipFill>
         <p:spPr>
           <a:xfrm>
-            <a:off x="10426700" y="1041400"/>
+            <a:off x="10604500" y="2590800"/>
             <a:ext cx="177800" cy="177800"/>
           </a:xfrm>
           <a:prstGeom prst="rect">
@@ -5962,14 +6453,14 @@
       </p:pic>
       <p:sp>
         <p:nvSpPr>
-          <p:cNvPr id="79" name="TextBox 78"/>
+          <p:cNvPr id="93" name="TextBox 92"/>
           <p:cNvSpPr txBox="1"/>
           <p:nvPr/>
         </p:nvSpPr>
         <p:spPr>
           <a:xfrm>
-            <a:off x="10680700" y="1045020"/>
-            <a:ext cx="1204722" cy="233172"/>
+            <a:off x="10858500" y="2559304"/>
+            <a:ext cx="850392" cy="329184"/>
           </a:xfrm>
           <a:prstGeom prst="rect">
             <a:avLst/>
@@ -5984,73 +6475,27 @@
           <a:p>
             <a:pPr algn="l"/>
             <a:r>
-              <a:rPr sz="850" b="0" i="0">
+              <a:rPr sz="1200" b="0" i="0">
                 <a:solidFill>
                   <a:srgbClr val="1F2937"/>
                 </a:solidFill>
                 <a:latin typeface="Helvetica Neue"/>
               </a:rPr>
-              <a:t>SHA-256 hash chain</a:t>
-            </a:r>
-          </a:p>
-        </p:txBody>
-      </p:sp>
-      <p:sp>
-        <p:nvSpPr>
-          <p:cNvPr id="80" name="Rounded Rectangle 79"/>
-          <p:cNvSpPr/>
-          <p:nvPr/>
-        </p:nvSpPr>
-        <p:spPr>
-          <a:xfrm>
-            <a:off x="10312400" y="1371600"/>
-            <a:ext cx="2108200" cy="304800"/>
-          </a:xfrm>
-          <a:prstGeom prst="roundRect">
-            <a:avLst>
-              <a:gd name="adj" fmla="val 20833"/>
-            </a:avLst>
-          </a:prstGeom>
-          <a:solidFill>
-            <a:srgbClr val="F8FAFC"/>
-          </a:solidFill>
-          <a:ln w="12700">
-            <a:solidFill>
-              <a:srgbClr val="E2E8F0"/>
-            </a:solidFill>
-          </a:ln>
-          <a:effectLst/>
-        </p:spPr>
-        <p:style>
-          <a:lnRef idx="1">
-            <a:schemeClr val="accent1"/>
-          </a:lnRef>
-          <a:fillRef idx="3">
-            <a:schemeClr val="accent1"/>
-          </a:fillRef>
-          <a:effectRef idx="2">
-            <a:schemeClr val="accent1"/>
-          </a:effectRef>
-          <a:fontRef idx="minor">
-            <a:schemeClr val="lt1"/>
-          </a:fontRef>
-        </p:style>
-        <p:txBody>
-          <a:bodyPr rtlCol="0" anchor="ctr"/>
-          <a:lstStyle/>
-          <a:p/>
-        </p:txBody>
-      </p:sp>
-      <p:sp>
-        <p:nvSpPr>
-          <p:cNvPr id="81" name="TextBox 80"/>
+              <a:t>live feed</a:t>
+            </a:r>
+          </a:p>
+        </p:txBody>
+      </p:sp>
+      <p:sp>
+        <p:nvSpPr>
+          <p:cNvPr id="94" name="TextBox 93"/>
           <p:cNvSpPr txBox="1"/>
           <p:nvPr/>
         </p:nvSpPr>
         <p:spPr>
           <a:xfrm>
-            <a:off x="10414000" y="1455776"/>
-            <a:ext cx="1338580" cy="186538"/>
+            <a:off x="10515600" y="2930842"/>
+            <a:ext cx="1629918" cy="315468"/>
           </a:xfrm>
           <a:prstGeom prst="rect">
             <a:avLst/>
@@ -6065,143 +6510,27 @@
           <a:p>
             <a:pPr algn="l"/>
             <a:r>
-              <a:rPr sz="680" b="0" i="0">
-                <a:solidFill>
-                  <a:srgbClr val="334155"/>
-                </a:solidFill>
-                <a:latin typeface="Menlo"/>
-              </a:rPr>
-              <a:t>H(t) = SHA256(d ‖ H(t-1))</a:t>
-            </a:r>
-          </a:p>
-        </p:txBody>
-      </p:sp>
-      <p:sp>
-        <p:nvSpPr>
-          <p:cNvPr id="82" name="Rounded Rectangle 81"/>
-          <p:cNvSpPr/>
-          <p:nvPr/>
-        </p:nvSpPr>
-        <p:spPr>
-          <a:xfrm>
-            <a:off x="10185400" y="1930400"/>
-            <a:ext cx="2362200" cy="1574800"/>
-          </a:xfrm>
-          <a:prstGeom prst="roundRect">
-            <a:avLst>
-              <a:gd name="adj" fmla="val 9677"/>
-            </a:avLst>
-          </a:prstGeom>
-          <a:solidFill>
-            <a:srgbClr val="EEF2FB"/>
-          </a:solidFill>
-          <a:ln w="12700">
-            <a:solidFill>
-              <a:srgbClr val="AEC0E8"/>
-            </a:solidFill>
-          </a:ln>
-          <a:effectLst/>
-        </p:spPr>
-        <p:style>
-          <a:lnRef idx="1">
-            <a:schemeClr val="accent1"/>
-          </a:lnRef>
-          <a:fillRef idx="3">
-            <a:schemeClr val="accent1"/>
-          </a:fillRef>
-          <a:effectRef idx="2">
-            <a:schemeClr val="accent1"/>
-          </a:effectRef>
-          <a:fontRef idx="minor">
-            <a:schemeClr val="lt1"/>
-          </a:fontRef>
-        </p:style>
-        <p:txBody>
-          <a:bodyPr rtlCol="0" anchor="ctr"/>
-          <a:lstStyle/>
-          <a:p/>
-        </p:txBody>
-      </p:sp>
-      <p:sp>
-        <p:nvSpPr>
-          <p:cNvPr id="83" name="TextBox 82"/>
-          <p:cNvSpPr txBox="1"/>
-          <p:nvPr/>
-        </p:nvSpPr>
-        <p:spPr>
-          <a:xfrm>
-            <a:off x="10337800" y="2000250"/>
-            <a:ext cx="1417320" cy="274320"/>
-          </a:xfrm>
-          <a:prstGeom prst="rect">
-            <a:avLst/>
-          </a:prstGeom>
-          <a:noFill/>
-        </p:spPr>
-        <p:txBody>
-          <a:bodyPr wrap="none" lIns="0" rIns="0" tIns="0" bIns="0" anchor="t">
-            <a:spAutoFit/>
-          </a:bodyPr>
-          <a:lstStyle/>
-          <a:p>
-            <a:pPr algn="l"/>
-            <a:r>
-              <a:rPr sz="1000" b="1" i="0">
-                <a:solidFill>
-                  <a:srgbClr val="2F4FA8"/>
-                </a:solidFill>
-                <a:latin typeface="Helvetica Neue"/>
-              </a:rPr>
-              <a:t>Compliance Cockpit</a:t>
-            </a:r>
-          </a:p>
-        </p:txBody>
-      </p:sp>
-      <p:sp>
-        <p:nvSpPr>
-          <p:cNvPr id="84" name="TextBox 83"/>
-          <p:cNvSpPr txBox="1"/>
-          <p:nvPr/>
-        </p:nvSpPr>
-        <p:spPr>
-          <a:xfrm>
-            <a:off x="10312400" y="2197481"/>
-            <a:ext cx="2026768" cy="213970"/>
-          </a:xfrm>
-          <a:prstGeom prst="rect">
-            <a:avLst/>
-          </a:prstGeom>
-          <a:noFill/>
-        </p:spPr>
-        <p:txBody>
-          <a:bodyPr wrap="none" lIns="0" rIns="0" tIns="0" bIns="0" anchor="t">
-            <a:spAutoFit/>
-          </a:bodyPr>
-          <a:lstStyle/>
-          <a:p>
-            <a:pPr algn="l"/>
-            <a:r>
-              <a:rPr sz="780" b="0" i="0">
+              <a:rPr sz="1150" b="0" i="0">
                 <a:solidFill>
                   <a:srgbClr val="64748B"/>
                 </a:solidFill>
                 <a:latin typeface="Helvetica Neue"/>
               </a:rPr>
-              <a:t>live feed · approvals · anomalies</a:t>
-            </a:r>
-          </a:p>
-        </p:txBody>
-      </p:sp>
-      <p:sp>
-        <p:nvSpPr>
-          <p:cNvPr id="85" name="TextBox 84"/>
+              <a:t>approvals · export</a:t>
+            </a:r>
+          </a:p>
+        </p:txBody>
+      </p:sp>
+      <p:sp>
+        <p:nvSpPr>
+          <p:cNvPr id="95" name="TextBox 94"/>
           <p:cNvSpPr txBox="1"/>
           <p:nvPr/>
         </p:nvSpPr>
         <p:spPr>
           <a:xfrm>
-            <a:off x="10312400" y="2375281"/>
-            <a:ext cx="1781099" cy="213970"/>
+            <a:off x="152400" y="5565140"/>
+            <a:ext cx="2173224" cy="329184"/>
           </a:xfrm>
           <a:prstGeom prst="rect">
             <a:avLst/>
@@ -6216,97 +6545,62 @@
           <a:p>
             <a:pPr algn="l"/>
             <a:r>
-              <a:rPr sz="780" b="0" i="0">
+              <a:rPr sz="1200" b="1" i="0">
+                <a:solidFill>
+                  <a:srgbClr val="1F2937"/>
+                </a:solidFill>
+                <a:latin typeface="Helvetica Neue"/>
+              </a:rPr>
+              <a:t>Where an attendee acts:</a:t>
+            </a:r>
+          </a:p>
+        </p:txBody>
+      </p:sp>
+      <p:sp>
+        <p:nvSpPr>
+          <p:cNvPr id="96" name="TextBox 95"/>
+          <p:cNvSpPr txBox="1"/>
+          <p:nvPr/>
+        </p:nvSpPr>
+        <p:spPr>
+          <a:xfrm>
+            <a:off x="2489200" y="5565140"/>
+            <a:ext cx="1795272" cy="329184"/>
+          </a:xfrm>
+          <a:prstGeom prst="rect">
+            <a:avLst/>
+          </a:prstGeom>
+          <a:noFill/>
+        </p:spPr>
+        <p:txBody>
+          <a:bodyPr wrap="none" lIns="0" rIns="0" tIns="0" bIns="0" anchor="t">
+            <a:spAutoFit/>
+          </a:bodyPr>
+          <a:lstStyle/>
+          <a:p>
+            <a:pPr algn="l"/>
+            <a:r>
+              <a:rPr sz="1200" b="0" i="0">
                 <a:solidFill>
                   <a:srgbClr val="64748B"/>
                 </a:solidFill>
                 <a:latin typeface="Helvetica Neue"/>
               </a:rPr>
-              <a:t>violations · costs · sessions</a:t>
-            </a:r>
-          </a:p>
-        </p:txBody>
-      </p:sp>
-      <p:sp>
-        <p:nvSpPr>
-          <p:cNvPr id="86" name="Rounded Rectangle 85"/>
-          <p:cNvSpPr/>
-          <p:nvPr/>
-        </p:nvSpPr>
-        <p:spPr>
-          <a:xfrm>
-            <a:off x="10312400" y="2616200"/>
-            <a:ext cx="2108200" cy="330200"/>
-          </a:xfrm>
-          <a:prstGeom prst="roundRect">
-            <a:avLst>
-              <a:gd name="adj" fmla="val 26923"/>
-            </a:avLst>
-          </a:prstGeom>
-          <a:solidFill>
-            <a:srgbClr val="FFFFFF"/>
-          </a:solidFill>
-          <a:ln w="12700">
-            <a:solidFill>
-              <a:srgbClr val="E2E8F0"/>
-            </a:solidFill>
-          </a:ln>
-          <a:effectLst/>
-        </p:spPr>
-        <p:style>
-          <a:lnRef idx="1">
-            <a:schemeClr val="accent1"/>
-          </a:lnRef>
-          <a:fillRef idx="3">
-            <a:schemeClr val="accent1"/>
-          </a:fillRef>
-          <a:effectRef idx="2">
-            <a:schemeClr val="accent1"/>
-          </a:effectRef>
-          <a:fontRef idx="minor">
-            <a:schemeClr val="lt1"/>
-          </a:fontRef>
-        </p:style>
-        <p:txBody>
-          <a:bodyPr rtlCol="0" anchor="ctr"/>
-          <a:lstStyle/>
-          <a:p/>
-        </p:txBody>
-      </p:sp>
-      <p:pic>
-        <p:nvPicPr>
-          <p:cNvPr id="87" name="Picture 86" descr="file-export--334155.256.png"/>
-          <p:cNvPicPr>
-            <a:picLocks noChangeAspect="1"/>
-          </p:cNvPicPr>
-          <p:nvPr/>
-        </p:nvPicPr>
-        <p:blipFill>
-          <a:blip r:embed="rId11"/>
-          <a:stretch>
-            <a:fillRect/>
-          </a:stretch>
-        </p:blipFill>
-        <p:spPr>
-          <a:xfrm>
-            <a:off x="10426700" y="2692400"/>
-            <a:ext cx="177800" cy="177800"/>
-          </a:xfrm>
-          <a:prstGeom prst="rect">
-            <a:avLst/>
-          </a:prstGeom>
-        </p:spPr>
-      </p:pic>
-      <p:sp>
-        <p:nvSpPr>
-          <p:cNvPr id="88" name="TextBox 87"/>
+              <a:t>1  drives the agent</a:t>
+            </a:r>
+          </a:p>
+        </p:txBody>
+      </p:sp>
+      <p:sp>
+        <p:nvSpPr>
+          <p:cNvPr id="97" name="TextBox 96"/>
           <p:cNvSpPr txBox="1"/>
           <p:nvPr/>
         </p:nvSpPr>
         <p:spPr>
           <a:xfrm>
-            <a:off x="10680700" y="2696020"/>
-            <a:ext cx="1070864" cy="233172"/>
+            <a:off x="4521200" y="5565140"/>
+            <a:ext cx="3118104" cy="329184"/>
           </a:xfrm>
           <a:prstGeom prst="rect">
             <a:avLst/>
@@ -6321,202 +6615,27 @@
           <a:p>
             <a:pPr algn="l"/>
             <a:r>
-              <a:rPr sz="850" b="0" i="0">
-                <a:solidFill>
-                  <a:srgbClr val="1F2937"/>
-                </a:solidFill>
-                <a:latin typeface="Helvetica Neue"/>
-              </a:rPr>
-              <a:t>PDF / CSV export</a:t>
-            </a:r>
-          </a:p>
-        </p:txBody>
-      </p:sp>
-      <p:sp>
-        <p:nvSpPr>
-          <p:cNvPr id="89" name="TextBox 88"/>
-          <p:cNvSpPr txBox="1"/>
-          <p:nvPr/>
-        </p:nvSpPr>
-        <p:spPr>
-          <a:xfrm>
-            <a:off x="10312400" y="3092323"/>
-            <a:ext cx="1981098" cy="202997"/>
-          </a:xfrm>
-          <a:prstGeom prst="rect">
-            <a:avLst/>
-          </a:prstGeom>
-          <a:noFill/>
-        </p:spPr>
-        <p:txBody>
-          <a:bodyPr wrap="none" lIns="0" rIns="0" tIns="0" bIns="0" anchor="t">
-            <a:spAutoFit/>
-          </a:bodyPr>
-          <a:lstStyle/>
-          <a:p>
-            <a:pPr algn="l"/>
-            <a:r>
-              <a:rPr sz="740" b="0" i="1">
-                <a:solidFill>
-                  <a:srgbClr val="94A3B8"/>
-                </a:solidFill>
-                <a:latin typeface="Helvetica Neue"/>
-              </a:rPr>
-              <a:t>every decision, signed and chained</a:t>
-            </a:r>
-          </a:p>
-        </p:txBody>
-      </p:sp>
-      <p:cxnSp>
-        <p:nvCxnSpPr>
-          <p:cNvPr id="90" name="Connector 89"/>
-          <p:cNvCxnSpPr/>
-          <p:nvPr/>
-        </p:nvCxnSpPr>
-        <p:spPr>
-          <a:xfrm>
-            <a:off x="9931400" y="2540000"/>
-            <a:ext cx="228600" cy="0"/>
-          </a:xfrm>
-          <a:prstGeom prst="line">
-            <a:avLst/>
-          </a:prstGeom>
-          <a:ln w="20320">
-            <a:solidFill>
-              <a:srgbClr val="94A3B8"/>
-            </a:solidFill>
-          </a:ln>
-        </p:spPr>
-        <p:style>
-          <a:lnRef idx="2">
-            <a:schemeClr val="accent1"/>
-          </a:lnRef>
-          <a:fillRef idx="0">
-            <a:schemeClr val="accent1"/>
-          </a:fillRef>
-          <a:effectRef idx="1">
-            <a:schemeClr val="accent1"/>
-          </a:effectRef>
-          <a:fontRef idx="minor">
-            <a:schemeClr val="tx1"/>
-          </a:fontRef>
-        </p:style>
-      </p:cxnSp>
-      <p:sp>
-        <p:nvSpPr>
-          <p:cNvPr id="91" name="TextBox 90"/>
-          <p:cNvSpPr txBox="1"/>
-          <p:nvPr/>
-        </p:nvSpPr>
-        <p:spPr>
-          <a:xfrm>
-            <a:off x="9664700" y="2336165"/>
-            <a:ext cx="762000" cy="192024"/>
-          </a:xfrm>
-          <a:prstGeom prst="rect">
-            <a:avLst/>
-          </a:prstGeom>
-          <a:noFill/>
-        </p:spPr>
-        <p:txBody>
-          <a:bodyPr wrap="none" lIns="0" rIns="0" tIns="0" bIns="0" anchor="t">
-            <a:spAutoFit/>
-          </a:bodyPr>
-          <a:lstStyle/>
-          <a:p>
-            <a:pPr algn="ctr"/>
-            <a:r>
-              <a:rPr sz="700" b="0" i="0">
+              <a:rPr sz="1200" b="0" i="0">
                 <a:solidFill>
                   <a:srgbClr val="64748B"/>
                 </a:solidFill>
                 <a:latin typeface="Helvetica Neue"/>
               </a:rPr>
-              <a:t>log trace</a:t>
-            </a:r>
-          </a:p>
-        </p:txBody>
-      </p:sp>
-      <p:sp>
-        <p:nvSpPr>
-          <p:cNvPr id="92" name="Rounded Rectangle 91"/>
-          <p:cNvSpPr/>
-          <p:nvPr/>
-        </p:nvSpPr>
-        <p:spPr>
-          <a:xfrm>
-            <a:off x="152400" y="3708400"/>
-            <a:ext cx="12395200" cy="609600"/>
-          </a:xfrm>
-          <a:prstGeom prst="roundRect">
-            <a:avLst>
-              <a:gd name="adj" fmla="val 18750"/>
-            </a:avLst>
-          </a:prstGeom>
-          <a:solidFill>
-            <a:srgbClr val="EAF6F0"/>
-          </a:solidFill>
-          <a:ln w="12700">
-            <a:solidFill>
-              <a:srgbClr val="A8D8C0"/>
-            </a:solidFill>
-          </a:ln>
-          <a:effectLst/>
-        </p:spPr>
-        <p:style>
-          <a:lnRef idx="1">
-            <a:schemeClr val="accent1"/>
-          </a:lnRef>
-          <a:fillRef idx="3">
-            <a:schemeClr val="accent1"/>
-          </a:fillRef>
-          <a:effectRef idx="2">
-            <a:schemeClr val="accent1"/>
-          </a:effectRef>
-          <a:fontRef idx="minor">
-            <a:schemeClr val="lt1"/>
-          </a:fontRef>
-        </p:style>
-        <p:txBody>
-          <a:bodyPr rtlCol="0" anchor="ctr"/>
-          <a:lstStyle/>
-          <a:p/>
-        </p:txBody>
-      </p:sp>
-      <p:pic>
-        <p:nvPicPr>
-          <p:cNvPr id="93" name="Picture 92" descr="shield-half--15795a.256.png"/>
-          <p:cNvPicPr>
-            <a:picLocks noChangeAspect="1"/>
-          </p:cNvPicPr>
-          <p:nvPr/>
-        </p:nvPicPr>
-        <p:blipFill>
-          <a:blip r:embed="rId12"/>
-          <a:stretch>
-            <a:fillRect/>
-          </a:stretch>
-        </p:blipFill>
-        <p:spPr>
-          <a:xfrm>
-            <a:off x="330200" y="3860800"/>
-            <a:ext cx="203200" cy="203200"/>
-          </a:xfrm>
-          <a:prstGeom prst="rect">
-            <a:avLst/>
-          </a:prstGeom>
-        </p:spPr>
-      </p:pic>
-      <p:sp>
-        <p:nvSpPr>
-          <p:cNvPr id="94" name="TextBox 93"/>
+              <a:t>2  approves or blocks a held call</a:t>
+            </a:r>
+          </a:p>
+        </p:txBody>
+      </p:sp>
+      <p:sp>
+        <p:nvSpPr>
+          <p:cNvPr id="98" name="TextBox 97"/>
           <p:cNvSpPr txBox="1"/>
           <p:nvPr/>
         </p:nvSpPr>
         <p:spPr>
           <a:xfrm>
-            <a:off x="635000" y="3798252"/>
-            <a:ext cx="7480300" cy="260604"/>
+            <a:off x="7620000" y="5565140"/>
+            <a:ext cx="4724400" cy="329184"/>
           </a:xfrm>
           <a:prstGeom prst="rect">
             <a:avLst/>
@@ -6531,48 +6650,13 @@
           <a:p>
             <a:pPr algn="l"/>
             <a:r>
-              <a:rPr sz="950" b="1" i="0">
+              <a:rPr sz="1200" b="0" i="0">
                 <a:solidFill>
-                  <a:srgbClr val="15795A"/>
+                  <a:srgbClr val="64748B"/>
                 </a:solidFill>
                 <a:latin typeface="Helvetica Neue"/>
               </a:rPr>
-              <a:t>The layers differ in what they may observe, not only in cost — and that is what decides the outcome.</a:t>
-            </a:r>
-          </a:p>
-        </p:txBody>
-      </p:sp>
-      <p:sp>
-        <p:nvSpPr>
-          <p:cNvPr id="95" name="TextBox 94"/>
-          <p:cNvSpPr txBox="1"/>
-          <p:nvPr/>
-        </p:nvSpPr>
-        <p:spPr>
-          <a:xfrm>
-            <a:off x="635000" y="4014597"/>
-            <a:ext cx="12324385" cy="235915"/>
-          </a:xfrm>
-          <a:prstGeom prst="rect">
-            <a:avLst/>
-          </a:prstGeom>
-          <a:noFill/>
-        </p:spPr>
-        <p:txBody>
-          <a:bodyPr wrap="none" lIns="0" rIns="0" tIns="0" bIns="0" anchor="t">
-            <a:spAutoFit/>
-          </a:bodyPr>
-          <a:lstStyle/>
-          <a:p>
-            <a:pPr algn="l"/>
-            <a:r>
-              <a:rPr sz="860" b="0" i="0">
-                <a:solidFill>
-                  <a:srgbClr val="0F5B44"/>
-                </a:solidFill>
-                <a:latin typeface="Helvetica Neue"/>
-              </a:rPr>
-              <a:t>A successful indirect injection emits a syntactically ordinary call, so L1 and L2 have nothing to inspect. Lp recovers the signal at L1 cost by asking which turn authorised the call.</a:t>
+              <a:t>3  tampers with the signed log, verification fails</a:t>
             </a:r>
           </a:p>
         </p:txBody>

--- a/research/paper-arxiv/images/architecture.pptx
+++ b/research/paper-arxiv/images/architecture.pptx
@@ -3105,11 +3105,11 @@
             </a:avLst>
           </a:prstGeom>
           <a:solidFill>
-            <a:srgbClr val="F1F5F9"/>
+            <a:srgbClr val="FAFAFA"/>
           </a:solidFill>
           <a:ln w="12700">
             <a:solidFill>
-              <a:srgbClr val="CBD5E1"/>
+              <a:srgbClr val="EBEBEB"/>
             </a:solidFill>
           </a:ln>
           <a:effectLst/>
@@ -3160,7 +3160,7 @@
             <a:r>
               <a:rPr sz="1500" b="1" i="0">
                 <a:solidFill>
-                  <a:srgbClr val="475569"/>
+                  <a:srgbClr val="171717"/>
                 </a:solidFill>
                 <a:latin typeface="Helvetica Neue"/>
               </a:rPr>
@@ -3190,7 +3190,7 @@
           </a:solidFill>
           <a:ln w="12700">
             <a:solidFill>
-              <a:srgbClr val="E2E8F0"/>
+              <a:srgbClr val="F0F0F0"/>
             </a:solidFill>
           </a:ln>
           <a:effectLst/>
@@ -3217,7 +3217,7 @@
       </p:sp>
       <p:pic>
         <p:nvPicPr>
-          <p:cNvPr id="5" name="Picture 4" descr="robot--334155.256.png"/>
+          <p:cNvPr id="5" name="Picture 4" descr="robot--4d4d4d.256.png"/>
           <p:cNvPicPr>
             <a:picLocks noChangeAspect="1"/>
           </p:cNvPicPr>
@@ -3265,7 +3265,7 @@
             <a:r>
               <a:rPr sz="1300" b="0" i="0">
                 <a:solidFill>
-                  <a:srgbClr val="1F2937"/>
+                  <a:srgbClr val="171717"/>
                 </a:solidFill>
                 <a:latin typeface="Helvetica Neue"/>
               </a:rPr>
@@ -3300,7 +3300,7 @@
             <a:r>
               <a:rPr sz="1150" b="0" i="1">
                 <a:solidFill>
-                  <a:srgbClr val="64748B"/>
+                  <a:srgbClr val="4D4D4D"/>
                 </a:solidFill>
                 <a:latin typeface="Helvetica Neue"/>
               </a:rPr>
@@ -3330,7 +3330,7 @@
           </a:solidFill>
           <a:ln w="12700">
             <a:solidFill>
-              <a:srgbClr val="A8D8C0"/>
+              <a:srgbClr val="D3E5FF"/>
             </a:solidFill>
           </a:ln>
           <a:effectLst/>
@@ -3357,7 +3357,7 @@
       </p:sp>
       <p:pic>
         <p:nvPicPr>
-          <p:cNvPr id="9" name="Picture 8" descr="plug-connected--15795a.256.png"/>
+          <p:cNvPr id="9" name="Picture 8" descr="plug-connected--0070f3.256.png"/>
           <p:cNvPicPr>
             <a:picLocks noChangeAspect="1"/>
           </p:cNvPicPr>
@@ -3405,7 +3405,7 @@
             <a:r>
               <a:rPr sz="1250" b="1" i="0">
                 <a:solidFill>
-                  <a:srgbClr val="15795A"/>
+                  <a:srgbClr val="0070F3"/>
                 </a:solidFill>
                 <a:latin typeface="Helvetica Neue"/>
               </a:rPr>
@@ -3440,7 +3440,7 @@
             <a:r>
               <a:rPr sz="1080" b="0" i="0">
                 <a:solidFill>
-                  <a:srgbClr val="334155"/>
+                  <a:srgbClr val="4D4D4D"/>
                 </a:solidFill>
                 <a:latin typeface="Menlo"/>
               </a:rPr>
@@ -3475,7 +3475,7 @@
             <a:r>
               <a:rPr sz="1200" b="0" i="0">
                 <a:solidFill>
-                  <a:srgbClr val="64748B"/>
+                  <a:srgbClr val="4D4D4D"/>
                 </a:solidFill>
                 <a:latin typeface="Helvetica Neue"/>
               </a:rPr>
@@ -3510,7 +3510,7 @@
             <a:r>
               <a:rPr sz="1150" b="0" i="0">
                 <a:solidFill>
-                  <a:srgbClr val="94A3B8"/>
+                  <a:srgbClr val="8A8A8A"/>
                 </a:solidFill>
                 <a:latin typeface="Helvetica Neue"/>
               </a:rPr>
@@ -3536,11 +3536,11 @@
             </a:avLst>
           </a:prstGeom>
           <a:solidFill>
-            <a:srgbClr val="6D3FBF"/>
+            <a:srgbClr val="171717"/>
           </a:solidFill>
           <a:ln w="12700">
             <a:solidFill>
-              <a:srgbClr val="6D3FBF"/>
+              <a:srgbClr val="171717"/>
             </a:solidFill>
           </a:ln>
           <a:effectLst/>
@@ -3616,7 +3616,7 @@
           </a:prstGeom>
           <a:ln w="20320">
             <a:solidFill>
-              <a:srgbClr val="94A3B8"/>
+              <a:srgbClr val="8A8A8A"/>
             </a:solidFill>
           </a:ln>
         </p:spPr>
@@ -3652,11 +3652,11 @@
             </a:avLst>
           </a:prstGeom>
           <a:solidFill>
-            <a:srgbClr val="FBFCFE"/>
+            <a:srgbClr val="FAFAFA"/>
           </a:solidFill>
           <a:ln w="12700">
             <a:solidFill>
-              <a:srgbClr val="B8C4DC"/>
+              <a:srgbClr val="D8D8D8"/>
             </a:solidFill>
             <a:prstDash val="dash"/>
           </a:ln>
@@ -3708,7 +3708,7 @@
             <a:r>
               <a:rPr sz="1700" b="1" i="0">
                 <a:solidFill>
-                  <a:srgbClr val="1F2937"/>
+                  <a:srgbClr val="171717"/>
                 </a:solidFill>
                 <a:latin typeface="Helvetica Neue"/>
               </a:rPr>
@@ -3743,7 +3743,7 @@
             <a:r>
               <a:rPr sz="1200" b="0" i="1">
                 <a:solidFill>
-                  <a:srgbClr val="64748B"/>
+                  <a:srgbClr val="4D4D4D"/>
                 </a:solidFill>
                 <a:latin typeface="Helvetica Neue"/>
               </a:rPr>
@@ -3765,15 +3765,15 @@
           </a:xfrm>
           <a:prstGeom prst="roundRect">
             <a:avLst>
-              <a:gd name="adj" fmla="val 12500"/>
+              <a:gd name="adj" fmla="val 10416"/>
             </a:avLst>
           </a:prstGeom>
           <a:solidFill>
-            <a:srgbClr val="EEF2FB"/>
+            <a:srgbClr val="FFFFFF"/>
           </a:solidFill>
           <a:ln w="12700">
             <a:solidFill>
-              <a:srgbClr val="AEC0E8"/>
+              <a:srgbClr val="EBEBEB"/>
             </a:solidFill>
           </a:ln>
           <a:effectLst/>
@@ -3800,7 +3800,7 @@
       </p:sp>
       <p:pic>
         <p:nvPicPr>
-          <p:cNvPr id="21" name="Picture 20" descr="regex--2f4fa8.256.png"/>
+          <p:cNvPr id="21" name="Picture 20" descr="regex--171717.256.png"/>
           <p:cNvPicPr>
             <a:picLocks noChangeAspect="1"/>
           </p:cNvPicPr>
@@ -3848,7 +3848,7 @@
             <a:r>
               <a:rPr sz="1300" b="1" i="0">
                 <a:solidFill>
-                  <a:srgbClr val="2F4FA8"/>
+                  <a:srgbClr val="171717"/>
                 </a:solidFill>
                 <a:latin typeface="Helvetica Neue"/>
               </a:rPr>
@@ -3878,7 +3878,7 @@
           </a:solidFill>
           <a:ln w="12700">
             <a:solidFill>
-              <a:srgbClr val="E2E8F0"/>
+              <a:srgbClr val="F0F0F0"/>
             </a:solidFill>
           </a:ln>
           <a:effectLst/>
@@ -3929,7 +3929,7 @@
             <a:r>
               <a:rPr sz="1150" b="0" i="0">
                 <a:solidFill>
-                  <a:srgbClr val="1F2937"/>
+                  <a:srgbClr val="171717"/>
                 </a:solidFill>
                 <a:latin typeface="Menlo"/>
               </a:rPr>
@@ -3964,7 +3964,7 @@
             <a:r>
               <a:rPr sz="1150" b="0" i="0">
                 <a:solidFill>
-                  <a:srgbClr val="64748B"/>
+                  <a:srgbClr val="4D4D4D"/>
                 </a:solidFill>
                 <a:latin typeface="Helvetica Neue"/>
               </a:rPr>
@@ -3989,7 +3989,7 @@
           </a:prstGeom>
           <a:ln w="20320">
             <a:solidFill>
-              <a:srgbClr val="94A3B8"/>
+              <a:srgbClr val="8A8A8A"/>
             </a:solidFill>
           </a:ln>
         </p:spPr>
@@ -4021,15 +4021,15 @@
           </a:xfrm>
           <a:prstGeom prst="roundRect">
             <a:avLst>
-              <a:gd name="adj" fmla="val 12500"/>
+              <a:gd name="adj" fmla="val 10416"/>
             </a:avLst>
           </a:prstGeom>
           <a:solidFill>
-            <a:srgbClr val="F1F5F9"/>
+            <a:srgbClr val="FFFFFF"/>
           </a:solidFill>
           <a:ln w="12700">
             <a:solidFill>
-              <a:srgbClr val="CBD5E1"/>
+              <a:srgbClr val="EBEBEB"/>
             </a:solidFill>
           </a:ln>
           <a:effectLst/>
@@ -4056,7 +4056,7 @@
       </p:sp>
       <p:pic>
         <p:nvPicPr>
-          <p:cNvPr id="28" name="Picture 27" descr="binary-tree--475569.256.png"/>
+          <p:cNvPr id="28" name="Picture 27" descr="binary-tree--171717.256.png"/>
           <p:cNvPicPr>
             <a:picLocks noChangeAspect="1"/>
           </p:cNvPicPr>
@@ -4104,7 +4104,7 @@
             <a:r>
               <a:rPr sz="1300" b="1" i="0">
                 <a:solidFill>
-                  <a:srgbClr val="475569"/>
+                  <a:srgbClr val="171717"/>
                 </a:solidFill>
                 <a:latin typeface="Helvetica Neue"/>
               </a:rPr>
@@ -4134,7 +4134,7 @@
           </a:solidFill>
           <a:ln w="12700">
             <a:solidFill>
-              <a:srgbClr val="E2E8F0"/>
+              <a:srgbClr val="F0F0F0"/>
             </a:solidFill>
           </a:ln>
           <a:effectLst/>
@@ -4185,7 +4185,7 @@
             <a:r>
               <a:rPr sz="1150" b="0" i="0">
                 <a:solidFill>
-                  <a:srgbClr val="1F2937"/>
+                  <a:srgbClr val="171717"/>
                 </a:solidFill>
                 <a:latin typeface="Menlo"/>
               </a:rPr>
@@ -4220,7 +4220,7 @@
             <a:r>
               <a:rPr sz="1150" b="0" i="0">
                 <a:solidFill>
-                  <a:srgbClr val="64748B"/>
+                  <a:srgbClr val="4D4D4D"/>
                 </a:solidFill>
                 <a:latin typeface="Helvetica Neue"/>
               </a:rPr>
@@ -4245,7 +4245,7 @@
           </a:prstGeom>
           <a:ln w="20320">
             <a:solidFill>
-              <a:srgbClr val="94A3B8"/>
+              <a:srgbClr val="8A8A8A"/>
             </a:solidFill>
           </a:ln>
         </p:spPr>
@@ -4277,15 +4277,15 @@
           </a:xfrm>
           <a:prstGeom prst="roundRect">
             <a:avLst>
-              <a:gd name="adj" fmla="val 12500"/>
+              <a:gd name="adj" fmla="val 10416"/>
             </a:avLst>
           </a:prstGeom>
           <a:solidFill>
-            <a:srgbClr val="F3EEFB"/>
+            <a:srgbClr val="FFFFFF"/>
           </a:solidFill>
           <a:ln w="12700">
             <a:solidFill>
-              <a:srgbClr val="C7B4EC"/>
+              <a:srgbClr val="EBEBEB"/>
             </a:solidFill>
           </a:ln>
           <a:effectLst/>
@@ -4312,7 +4312,7 @@
       </p:sp>
       <p:pic>
         <p:nvPicPr>
-          <p:cNvPr id="35" name="Picture 34" descr="bulb--6d3fbf.256.png"/>
+          <p:cNvPr id="35" name="Picture 34" descr="bulb--171717.256.png"/>
           <p:cNvPicPr>
             <a:picLocks noChangeAspect="1"/>
           </p:cNvPicPr>
@@ -4360,7 +4360,7 @@
             <a:r>
               <a:rPr sz="1300" b="1" i="0">
                 <a:solidFill>
-                  <a:srgbClr val="6D3FBF"/>
+                  <a:srgbClr val="171717"/>
                 </a:solidFill>
                 <a:latin typeface="Helvetica Neue"/>
               </a:rPr>
@@ -4390,7 +4390,7 @@
           </a:solidFill>
           <a:ln w="12700">
             <a:solidFill>
-              <a:srgbClr val="E2E8F0"/>
+              <a:srgbClr val="F0F0F0"/>
             </a:solidFill>
           </a:ln>
           <a:effectLst/>
@@ -4441,7 +4441,7 @@
             <a:r>
               <a:rPr sz="1150" b="0" i="0">
                 <a:solidFill>
-                  <a:srgbClr val="1F2937"/>
+                  <a:srgbClr val="171717"/>
                 </a:solidFill>
                 <a:latin typeface="Menlo"/>
               </a:rPr>
@@ -4476,7 +4476,7 @@
             <a:r>
               <a:rPr sz="1150" b="0" i="0">
                 <a:solidFill>
-                  <a:srgbClr val="64748B"/>
+                  <a:srgbClr val="4D4D4D"/>
                 </a:solidFill>
                 <a:latin typeface="Helvetica Neue"/>
               </a:rPr>
@@ -4501,7 +4501,7 @@
           </a:prstGeom>
           <a:ln w="20320">
             <a:solidFill>
-              <a:srgbClr val="94A3B8"/>
+              <a:srgbClr val="8A8A8A"/>
             </a:solidFill>
           </a:ln>
         </p:spPr>
@@ -4533,15 +4533,15 @@
           </a:xfrm>
           <a:prstGeom prst="roundRect">
             <a:avLst>
-              <a:gd name="adj" fmla="val 12500"/>
+              <a:gd name="adj" fmla="val 10416"/>
             </a:avLst>
           </a:prstGeom>
           <a:solidFill>
-            <a:srgbClr val="EAF6F0"/>
+            <a:srgbClr val="FFFFFF"/>
           </a:solidFill>
           <a:ln w="12700">
             <a:solidFill>
-              <a:srgbClr val="A8D8C0"/>
+              <a:srgbClr val="D3E5FF"/>
             </a:solidFill>
             <a:prstDash val="dash"/>
           </a:ln>
@@ -4569,7 +4569,7 @@
       </p:sp>
       <p:pic>
         <p:nvPicPr>
-          <p:cNvPr id="42" name="Picture 41" descr="route--15795a.256.png"/>
+          <p:cNvPr id="42" name="Picture 41" descr="route--0070f3.256.png"/>
           <p:cNvPicPr>
             <a:picLocks noChangeAspect="1"/>
           </p:cNvPicPr>
@@ -4617,7 +4617,7 @@
             <a:r>
               <a:rPr sz="1300" b="1" i="0">
                 <a:solidFill>
-                  <a:srgbClr val="15795A"/>
+                  <a:srgbClr val="0070F3"/>
                 </a:solidFill>
                 <a:latin typeface="Helvetica Neue"/>
               </a:rPr>
@@ -4647,7 +4647,7 @@
           </a:solidFill>
           <a:ln w="12700">
             <a:solidFill>
-              <a:srgbClr val="E2E8F0"/>
+              <a:srgbClr val="F0F0F0"/>
             </a:solidFill>
           </a:ln>
           <a:effectLst/>
@@ -4698,7 +4698,7 @@
             <a:r>
               <a:rPr sz="1150" b="0" i="0">
                 <a:solidFill>
-                  <a:srgbClr val="1F2937"/>
+                  <a:srgbClr val="171717"/>
                 </a:solidFill>
                 <a:latin typeface="Menlo"/>
               </a:rPr>
@@ -4733,7 +4733,7 @@
             <a:r>
               <a:rPr sz="1150" b="0" i="0">
                 <a:solidFill>
-                  <a:srgbClr val="64748B"/>
+                  <a:srgbClr val="0070F3"/>
                 </a:solidFill>
                 <a:latin typeface="Helvetica Neue"/>
               </a:rPr>
@@ -4768,7 +4768,7 @@
             <a:r>
               <a:rPr sz="1300" b="1" i="0">
                 <a:solidFill>
-                  <a:srgbClr val="1F2937"/>
+                  <a:srgbClr val="171717"/>
                 </a:solidFill>
                 <a:latin typeface="Helvetica Neue"/>
               </a:rPr>
@@ -4794,11 +4794,11 @@
             </a:avLst>
           </a:prstGeom>
           <a:solidFill>
-            <a:srgbClr val="DCFCE7"/>
+            <a:srgbClr val="D7F2E7"/>
           </a:solidFill>
           <a:ln w="12700">
             <a:solidFill>
-              <a:srgbClr val="DCFCE7"/>
+              <a:srgbClr val="D7F2E7"/>
             </a:solidFill>
           </a:ln>
           <a:effectLst/>
@@ -4849,7 +4849,7 @@
             <a:r>
               <a:rPr sz="1300" b="1" i="0">
                 <a:solidFill>
-                  <a:srgbClr val="16A34A"/>
+                  <a:srgbClr val="0E8A5F"/>
                 </a:solidFill>
                 <a:latin typeface="Helvetica Neue"/>
               </a:rPr>
@@ -4875,11 +4875,11 @@
             </a:avLst>
           </a:prstGeom>
           <a:solidFill>
-            <a:srgbClr val="FEE2E2"/>
+            <a:srgbClr val="FFE3E3"/>
           </a:solidFill>
           <a:ln w="12700">
             <a:solidFill>
-              <a:srgbClr val="FEE2E2"/>
+              <a:srgbClr val="FFE3E3"/>
             </a:solidFill>
           </a:ln>
           <a:effectLst/>
@@ -4930,7 +4930,7 @@
             <a:r>
               <a:rPr sz="1300" b="1" i="0">
                 <a:solidFill>
-                  <a:srgbClr val="DC2626"/>
+                  <a:srgbClr val="D40000"/>
                 </a:solidFill>
                 <a:latin typeface="Helvetica Neue"/>
               </a:rPr>
@@ -4956,11 +4956,11 @@
             </a:avLst>
           </a:prstGeom>
           <a:solidFill>
-            <a:srgbClr val="FEF3C7"/>
+            <a:srgbClr val="FFEFCF"/>
           </a:solidFill>
           <a:ln w="12700">
             <a:solidFill>
-              <a:srgbClr val="FEF3C7"/>
+              <a:srgbClr val="FFEFCF"/>
             </a:solidFill>
           </a:ln>
           <a:effectLst/>
@@ -5011,7 +5011,7 @@
             <a:r>
               <a:rPr sz="1300" b="1" i="0">
                 <a:solidFill>
-                  <a:srgbClr val="D97706"/>
+                  <a:srgbClr val="A96500"/>
                 </a:solidFill>
                 <a:latin typeface="Helvetica Neue"/>
               </a:rPr>
@@ -5036,7 +5036,7 @@
           </a:prstGeom>
           <a:ln w="20320">
             <a:solidFill>
-              <a:srgbClr val="94A3B8"/>
+              <a:srgbClr val="8A8A8A"/>
             </a:solidFill>
           </a:ln>
         </p:spPr>
@@ -5076,7 +5076,7 @@
           </a:solidFill>
           <a:ln w="12700">
             <a:solidFill>
-              <a:srgbClr val="E2E8F0"/>
+              <a:srgbClr val="F0F0F0"/>
             </a:solidFill>
           </a:ln>
           <a:effectLst/>
@@ -5103,7 +5103,7 @@
       </p:sp>
       <p:pic>
         <p:nvPicPr>
-          <p:cNvPr id="56" name="Picture 55" descr="user-check--334155.256.png"/>
+          <p:cNvPr id="56" name="Picture 55" descr="user-check--4d4d4d.256.png"/>
           <p:cNvPicPr>
             <a:picLocks noChangeAspect="1"/>
           </p:cNvPicPr>
@@ -5151,7 +5151,7 @@
             <a:r>
               <a:rPr sz="1250" b="0" i="0">
                 <a:solidFill>
-                  <a:srgbClr val="1F2937"/>
+                  <a:srgbClr val="171717"/>
                 </a:solidFill>
                 <a:latin typeface="Helvetica Neue"/>
               </a:rPr>
@@ -5177,11 +5177,11 @@
             </a:avLst>
           </a:prstGeom>
           <a:solidFill>
-            <a:srgbClr val="6D3FBF"/>
+            <a:srgbClr val="171717"/>
           </a:solidFill>
           <a:ln w="12700">
             <a:solidFill>
-              <a:srgbClr val="6D3FBF"/>
+              <a:srgbClr val="171717"/>
             </a:solidFill>
           </a:ln>
           <a:effectLst/>
@@ -5257,7 +5257,7 @@
           </a:prstGeom>
           <a:ln w="22860">
             <a:solidFill>
-              <a:srgbClr val="16A34A"/>
+              <a:srgbClr val="0E8A5F"/>
             </a:solidFill>
           </a:ln>
         </p:spPr>
@@ -5292,7 +5292,7 @@
           </a:prstGeom>
           <a:ln w="22860">
             <a:solidFill>
-              <a:srgbClr val="16A34A"/>
+              <a:srgbClr val="0E8A5F"/>
             </a:solidFill>
           </a:ln>
         </p:spPr>
@@ -5327,7 +5327,7 @@
           </a:prstGeom>
           <a:ln w="22860">
             <a:solidFill>
-              <a:srgbClr val="16A34A"/>
+              <a:srgbClr val="0E8A5F"/>
             </a:solidFill>
           </a:ln>
         </p:spPr>
@@ -5362,7 +5362,7 @@
           </a:prstGeom>
           <a:ln w="27940">
             <a:solidFill>
-              <a:srgbClr val="DC2626"/>
+              <a:srgbClr val="D40000"/>
             </a:solidFill>
           </a:ln>
         </p:spPr>
@@ -5397,7 +5397,7 @@
           </a:prstGeom>
           <a:ln w="27940">
             <a:solidFill>
-              <a:srgbClr val="DC2626"/>
+              <a:srgbClr val="D40000"/>
             </a:solidFill>
           </a:ln>
         </p:spPr>
@@ -5432,7 +5432,7 @@
           </a:prstGeom>
           <a:ln w="27940">
             <a:solidFill>
-              <a:srgbClr val="DC2626"/>
+              <a:srgbClr val="D40000"/>
             </a:solidFill>
           </a:ln>
         </p:spPr>
@@ -5467,7 +5467,7 @@
           </a:prstGeom>
           <a:ln w="22860">
             <a:solidFill>
-              <a:srgbClr val="D97706"/>
+              <a:srgbClr val="A96500"/>
             </a:solidFill>
           </a:ln>
         </p:spPr>
@@ -5502,7 +5502,7 @@
           </a:prstGeom>
           <a:ln w="22860">
             <a:solidFill>
-              <a:srgbClr val="D97706"/>
+              <a:srgbClr val="A96500"/>
             </a:solidFill>
           </a:ln>
         </p:spPr>
@@ -5537,7 +5537,7 @@
           </a:prstGeom>
           <a:ln w="22860">
             <a:solidFill>
-              <a:srgbClr val="D97706"/>
+              <a:srgbClr val="A96500"/>
             </a:solidFill>
           </a:ln>
         </p:spPr>
@@ -5577,7 +5577,7 @@
           </a:solidFill>
           <a:ln w="12700">
             <a:solidFill>
-              <a:srgbClr val="E2E8F0"/>
+              <a:srgbClr val="F0F0F0"/>
             </a:solidFill>
           </a:ln>
           <a:effectLst/>
@@ -5628,7 +5628,7 @@
             <a:r>
               <a:rPr sz="1200" b="1" i="0">
                 <a:solidFill>
-                  <a:srgbClr val="16A34A"/>
+                  <a:srgbClr val="0E8A5F"/>
                 </a:solidFill>
                 <a:latin typeface="Helvetica Neue"/>
               </a:rPr>
@@ -5663,7 +5663,7 @@
             <a:r>
               <a:rPr sz="1200" b="0" i="0">
                 <a:solidFill>
-                  <a:srgbClr val="1F2937"/>
+                  <a:srgbClr val="171717"/>
                 </a:solidFill>
                 <a:latin typeface="Helvetica Neue"/>
               </a:rPr>
@@ -5698,7 +5698,7 @@
             <a:r>
               <a:rPr sz="1200" b="1" i="0">
                 <a:solidFill>
-                  <a:srgbClr val="DC2626"/>
+                  <a:srgbClr val="D40000"/>
                 </a:solidFill>
                 <a:latin typeface="Helvetica Neue"/>
               </a:rPr>
@@ -5733,7 +5733,7 @@
             <a:r>
               <a:rPr sz="1200" b="0" i="0">
                 <a:solidFill>
-                  <a:srgbClr val="1F2937"/>
+                  <a:srgbClr val="171717"/>
                 </a:solidFill>
                 <a:latin typeface="Helvetica Neue"/>
               </a:rPr>
@@ -5768,7 +5768,7 @@
             <a:r>
               <a:rPr sz="1200" b="1" i="0">
                 <a:solidFill>
-                  <a:srgbClr val="D97706"/>
+                  <a:srgbClr val="A96500"/>
                 </a:solidFill>
                 <a:latin typeface="Helvetica Neue"/>
               </a:rPr>
@@ -5803,7 +5803,7 @@
             <a:r>
               <a:rPr sz="1200" b="0" i="0">
                 <a:solidFill>
-                  <a:srgbClr val="1F2937"/>
+                  <a:srgbClr val="171717"/>
                 </a:solidFill>
                 <a:latin typeface="Helvetica Neue"/>
               </a:rPr>
@@ -5838,7 +5838,7 @@
             <a:r>
               <a:rPr sz="1200" b="0" i="0">
                 <a:solidFill>
-                  <a:srgbClr val="1F2937"/>
+                  <a:srgbClr val="171717"/>
                 </a:solidFill>
                 <a:latin typeface="Helvetica Neue"/>
               </a:rPr>
@@ -5873,7 +5873,7 @@
             <a:r>
               <a:rPr sz="1300" b="1" i="0">
                 <a:solidFill>
-                  <a:srgbClr val="15795A"/>
+                  <a:srgbClr val="171717"/>
                 </a:solidFill>
                 <a:latin typeface="Helvetica Neue"/>
               </a:rPr>
@@ -5908,7 +5908,7 @@
             <a:r>
               <a:rPr sz="1300" b="1" i="0">
                 <a:solidFill>
-                  <a:srgbClr val="15795A"/>
+                  <a:srgbClr val="171717"/>
                 </a:solidFill>
                 <a:latin typeface="Helvetica Neue"/>
               </a:rPr>
@@ -5933,7 +5933,7 @@
           </a:prstGeom>
           <a:ln w="17780">
             <a:solidFill>
-              <a:srgbClr val="94A3B8"/>
+              <a:srgbClr val="8A8A8A"/>
             </a:solidFill>
           </a:ln>
         </p:spPr>
@@ -5969,11 +5969,11 @@
             </a:avLst>
           </a:prstGeom>
           <a:solidFill>
-            <a:srgbClr val="FDF1E7"/>
+            <a:srgbClr val="FFFFFF"/>
           </a:solidFill>
           <a:ln w="12700">
             <a:solidFill>
-              <a:srgbClr val="F0C9A0"/>
+              <a:srgbClr val="EBEBEB"/>
             </a:solidFill>
           </a:ln>
           <a:effectLst/>
@@ -6024,7 +6024,7 @@
             <a:r>
               <a:rPr sz="1300" b="1" i="0">
                 <a:solidFill>
-                  <a:srgbClr val="A85F12"/>
+                  <a:srgbClr val="171717"/>
                 </a:solidFill>
                 <a:latin typeface="Helvetica Neue"/>
               </a:rPr>
@@ -6054,7 +6054,7 @@
           </a:solidFill>
           <a:ln w="12700">
             <a:solidFill>
-              <a:srgbClr val="E2E8F0"/>
+              <a:srgbClr val="F0F0F0"/>
             </a:solidFill>
           </a:ln>
           <a:effectLst/>
@@ -6081,7 +6081,7 @@
       </p:sp>
       <p:pic>
         <p:nvPicPr>
-          <p:cNvPr id="83" name="Picture 82" descr="lock-check--334155.256.png"/>
+          <p:cNvPr id="83" name="Picture 82" descr="lock-check--4d4d4d.256.png"/>
           <p:cNvPicPr>
             <a:picLocks noChangeAspect="1"/>
           </p:cNvPicPr>
@@ -6129,7 +6129,7 @@
             <a:r>
               <a:rPr sz="1200" b="0" i="0">
                 <a:solidFill>
-                  <a:srgbClr val="1F2937"/>
+                  <a:srgbClr val="171717"/>
                 </a:solidFill>
                 <a:latin typeface="Helvetica Neue"/>
               </a:rPr>
@@ -6155,11 +6155,11 @@
             </a:avLst>
           </a:prstGeom>
           <a:solidFill>
-            <a:srgbClr val="F8FAFC"/>
+            <a:srgbClr val="FAFAFA"/>
           </a:solidFill>
           <a:ln w="12700">
             <a:solidFill>
-              <a:srgbClr val="E2E8F0"/>
+              <a:srgbClr val="F0F0F0"/>
             </a:solidFill>
           </a:ln>
           <a:effectLst/>
@@ -6210,7 +6210,7 @@
             <a:r>
               <a:rPr sz="1150" b="0" i="0">
                 <a:solidFill>
-                  <a:srgbClr val="334155"/>
+                  <a:srgbClr val="4D4D4D"/>
                 </a:solidFill>
                 <a:latin typeface="Menlo"/>
               </a:rPr>
@@ -6236,11 +6236,11 @@
             </a:avLst>
           </a:prstGeom>
           <a:solidFill>
-            <a:srgbClr val="6D3FBF"/>
+            <a:srgbClr val="171717"/>
           </a:solidFill>
           <a:ln w="12700">
             <a:solidFill>
-              <a:srgbClr val="6D3FBF"/>
+              <a:srgbClr val="171717"/>
             </a:solidFill>
           </a:ln>
           <a:effectLst/>
@@ -6317,11 +6317,11 @@
             </a:avLst>
           </a:prstGeom>
           <a:solidFill>
-            <a:srgbClr val="EEF2FB"/>
+            <a:srgbClr val="FFFFFF"/>
           </a:solidFill>
           <a:ln w="12700">
             <a:solidFill>
-              <a:srgbClr val="AEC0E8"/>
+              <a:srgbClr val="EBEBEB"/>
             </a:solidFill>
           </a:ln>
           <a:effectLst/>
@@ -6372,7 +6372,7 @@
             <a:r>
               <a:rPr sz="1300" b="1" i="0">
                 <a:solidFill>
-                  <a:srgbClr val="2F4FA8"/>
+                  <a:srgbClr val="171717"/>
                 </a:solidFill>
                 <a:latin typeface="Helvetica Neue"/>
               </a:rPr>
@@ -6402,7 +6402,7 @@
           </a:solidFill>
           <a:ln w="12700">
             <a:solidFill>
-              <a:srgbClr val="E2E8F0"/>
+              <a:srgbClr val="F0F0F0"/>
             </a:solidFill>
           </a:ln>
           <a:effectLst/>
@@ -6429,7 +6429,7 @@
       </p:sp>
       <p:pic>
         <p:nvPicPr>
-          <p:cNvPr id="92" name="Picture 91" descr="layout-dashboard--334155.256.png"/>
+          <p:cNvPr id="92" name="Picture 91" descr="layout-dashboard--4d4d4d.256.png"/>
           <p:cNvPicPr>
             <a:picLocks noChangeAspect="1"/>
           </p:cNvPicPr>
@@ -6477,7 +6477,7 @@
             <a:r>
               <a:rPr sz="1200" b="0" i="0">
                 <a:solidFill>
-                  <a:srgbClr val="1F2937"/>
+                  <a:srgbClr val="171717"/>
                 </a:solidFill>
                 <a:latin typeface="Helvetica Neue"/>
               </a:rPr>
@@ -6512,7 +6512,7 @@
             <a:r>
               <a:rPr sz="1150" b="0" i="0">
                 <a:solidFill>
-                  <a:srgbClr val="64748B"/>
+                  <a:srgbClr val="4D4D4D"/>
                 </a:solidFill>
                 <a:latin typeface="Helvetica Neue"/>
               </a:rPr>
@@ -6547,7 +6547,7 @@
             <a:r>
               <a:rPr sz="1200" b="1" i="0">
                 <a:solidFill>
-                  <a:srgbClr val="1F2937"/>
+                  <a:srgbClr val="171717"/>
                 </a:solidFill>
                 <a:latin typeface="Helvetica Neue"/>
               </a:rPr>
@@ -6582,7 +6582,7 @@
             <a:r>
               <a:rPr sz="1200" b="0" i="0">
                 <a:solidFill>
-                  <a:srgbClr val="64748B"/>
+                  <a:srgbClr val="4D4D4D"/>
                 </a:solidFill>
                 <a:latin typeface="Helvetica Neue"/>
               </a:rPr>
@@ -6617,7 +6617,7 @@
             <a:r>
               <a:rPr sz="1200" b="0" i="0">
                 <a:solidFill>
-                  <a:srgbClr val="64748B"/>
+                  <a:srgbClr val="4D4D4D"/>
                 </a:solidFill>
                 <a:latin typeface="Helvetica Neue"/>
               </a:rPr>
@@ -6652,7 +6652,7 @@
             <a:r>
               <a:rPr sz="1200" b="0" i="0">
                 <a:solidFill>
-                  <a:srgbClr val="64748B"/>
+                  <a:srgbClr val="4D4D4D"/>
                 </a:solidFill>
                 <a:latin typeface="Helvetica Neue"/>
               </a:rPr>

--- a/research/paper-arxiv/images/architecture.pptx
+++ b/research/paper-arxiv/images/architecture.pptx
@@ -3162,7 +3162,7 @@
                 <a:solidFill>
                   <a:srgbClr val="171717"/>
                 </a:solidFill>
-                <a:latin typeface="Helvetica Neue"/>
+                <a:latin typeface="Geist"/>
               </a:rPr>
               <a:t>Agent</a:t>
             </a:r>
@@ -3267,7 +3267,7 @@
                 <a:solidFill>
                   <a:srgbClr val="171717"/>
                 </a:solidFill>
-                <a:latin typeface="Helvetica Neue"/>
+                <a:latin typeface="Geist"/>
               </a:rPr>
               <a:t>LLM</a:t>
             </a:r>
@@ -3302,7 +3302,7 @@
                 <a:solidFill>
                   <a:srgbClr val="4D4D4D"/>
                 </a:solidFill>
-                <a:latin typeface="Helvetica Neue"/>
+                <a:latin typeface="Geist"/>
               </a:rPr>
               <a:t>untrusted principal</a:t>
             </a:r>
@@ -3407,7 +3407,7 @@
                 <a:solidFill>
                   <a:srgbClr val="0070F3"/>
                 </a:solidFill>
-                <a:latin typeface="Helvetica Neue"/>
+                <a:latin typeface="Geist"/>
               </a:rPr>
               <a:t>two lines</a:t>
             </a:r>
@@ -3442,7 +3442,7 @@
                 <a:solidFill>
                   <a:srgbClr val="4D4D4D"/>
                 </a:solidFill>
-                <a:latin typeface="Menlo"/>
+                <a:latin typeface="Geist Mono"/>
               </a:rPr>
               <a:t>agentguard.auto()</a:t>
             </a:r>
@@ -3477,7 +3477,7 @@
                 <a:solidFill>
                   <a:srgbClr val="4D4D4D"/>
                 </a:solidFill>
-                <a:latin typeface="Helvetica Neue"/>
+                <a:latin typeface="Geist"/>
               </a:rPr>
               <a:t>14 frameworks</a:t>
             </a:r>
@@ -3512,7 +3512,7 @@
                 <a:solidFill>
                   <a:srgbClr val="8A8A8A"/>
                 </a:solidFill>
-                <a:latin typeface="Helvetica Neue"/>
+                <a:latin typeface="Geist"/>
               </a:rPr>
               <a:t>Python · JS · Go</a:t>
             </a:r>
@@ -3593,7 +3593,7 @@
                 <a:solidFill>
                   <a:srgbClr val="FFFFFF"/>
                 </a:solidFill>
-                <a:latin typeface="Helvetica Neue"/>
+                <a:latin typeface="Geist"/>
               </a:rPr>
               <a:t>1</a:t>
             </a:r>
@@ -3710,7 +3710,7 @@
                 <a:solidFill>
                   <a:srgbClr val="171717"/>
                 </a:solidFill>
-                <a:latin typeface="Helvetica Neue"/>
+                <a:latin typeface="Geist"/>
               </a:rPr>
               <a:t>Aegis Gateway</a:t>
             </a:r>
@@ -3745,7 +3745,7 @@
                 <a:solidFill>
                   <a:srgbClr val="4D4D4D"/>
                 </a:solidFill>
-                <a:latin typeface="Helvetica Neue"/>
+                <a:latin typeface="Geist"/>
               </a:rPr>
               <a:t>the call has not run yet</a:t>
             </a:r>
@@ -3850,7 +3850,7 @@
                 <a:solidFill>
                   <a:srgbClr val="171717"/>
                 </a:solidFill>
-                <a:latin typeface="Helvetica Neue"/>
+                <a:latin typeface="Geist"/>
               </a:rPr>
               <a:t>L1  rules</a:t>
             </a:r>
@@ -3931,7 +3931,7 @@
                 <a:solidFill>
                   <a:srgbClr val="171717"/>
                 </a:solidFill>
-                <a:latin typeface="Menlo"/>
+                <a:latin typeface="Geist Mono"/>
               </a:rPr>
               <a:t>call string</a:t>
             </a:r>
@@ -3966,7 +3966,7 @@
                 <a:solidFill>
                   <a:srgbClr val="4D4D4D"/>
                 </a:solidFill>
-                <a:latin typeface="Helvetica Neue"/>
+                <a:latin typeface="Geist"/>
               </a:rPr>
               <a:t>&lt;1 ms</a:t>
             </a:r>
@@ -4106,7 +4106,7 @@
                 <a:solidFill>
                   <a:srgbClr val="171717"/>
                 </a:solidFill>
-                <a:latin typeface="Helvetica Neue"/>
+                <a:latin typeface="Geist"/>
               </a:rPr>
               <a:t>L2  classifier</a:t>
             </a:r>
@@ -4187,7 +4187,7 @@
                 <a:solidFill>
                   <a:srgbClr val="171717"/>
                 </a:solidFill>
-                <a:latin typeface="Menlo"/>
+                <a:latin typeface="Geist Mono"/>
               </a:rPr>
               <a:t>15 features</a:t>
             </a:r>
@@ -4222,7 +4222,7 @@
                 <a:solidFill>
                   <a:srgbClr val="4D4D4D"/>
                 </a:solidFill>
-                <a:latin typeface="Helvetica Neue"/>
+                <a:latin typeface="Geist"/>
               </a:rPr>
               <a:t>&lt;10 ms</a:t>
             </a:r>
@@ -4362,7 +4362,7 @@
                 <a:solidFill>
                   <a:srgbClr val="171717"/>
                 </a:solidFill>
-                <a:latin typeface="Helvetica Neue"/>
+                <a:latin typeface="Geist"/>
               </a:rPr>
               <a:t>L3  judge</a:t>
             </a:r>
@@ -4443,7 +4443,7 @@
                 <a:solidFill>
                   <a:srgbClr val="171717"/>
                 </a:solidFill>
-                <a:latin typeface="Menlo"/>
+                <a:latin typeface="Geist Mono"/>
               </a:rPr>
               <a:t>full context</a:t>
             </a:r>
@@ -4478,7 +4478,7 @@
                 <a:solidFill>
                   <a:srgbClr val="4D4D4D"/>
                 </a:solidFill>
-                <a:latin typeface="Helvetica Neue"/>
+                <a:latin typeface="Geist"/>
               </a:rPr>
               <a:t>1–2 s</a:t>
             </a:r>
@@ -4619,7 +4619,7 @@
                 <a:solidFill>
                   <a:srgbClr val="0070F3"/>
                 </a:solidFill>
-                <a:latin typeface="Helvetica Neue"/>
+                <a:latin typeface="Geist"/>
               </a:rPr>
               <a:t>Lp  provenance</a:t>
             </a:r>
@@ -4700,7 +4700,7 @@
                 <a:solidFill>
                   <a:srgbClr val="171717"/>
                 </a:solidFill>
-                <a:latin typeface="Menlo"/>
+                <a:latin typeface="Geist Mono"/>
               </a:rPr>
               <a:t>channel split</a:t>
             </a:r>
@@ -4735,7 +4735,7 @@
                 <a:solidFill>
                   <a:srgbClr val="0070F3"/>
                 </a:solidFill>
-                <a:latin typeface="Helvetica Neue"/>
+                <a:latin typeface="Geist"/>
               </a:rPr>
               <a:t>&lt;1 ms · optional</a:t>
             </a:r>
@@ -4770,7 +4770,7 @@
                 <a:solidFill>
                   <a:srgbClr val="171717"/>
                 </a:solidFill>
-                <a:latin typeface="Helvetica Neue"/>
+                <a:latin typeface="Geist"/>
               </a:rPr>
               <a:t>decision</a:t>
             </a:r>
@@ -4851,7 +4851,7 @@
                 <a:solidFill>
                   <a:srgbClr val="0E8A5F"/>
                 </a:solidFill>
-                <a:latin typeface="Helvetica Neue"/>
+                <a:latin typeface="Geist"/>
               </a:rPr>
               <a:t>allow</a:t>
             </a:r>
@@ -4932,7 +4932,7 @@
                 <a:solidFill>
                   <a:srgbClr val="D40000"/>
                 </a:solidFill>
-                <a:latin typeface="Helvetica Neue"/>
+                <a:latin typeface="Geist"/>
               </a:rPr>
               <a:t>block</a:t>
             </a:r>
@@ -5013,7 +5013,7 @@
                 <a:solidFill>
                   <a:srgbClr val="A96500"/>
                 </a:solidFill>
-                <a:latin typeface="Helvetica Neue"/>
+                <a:latin typeface="Geist"/>
               </a:rPr>
               <a:t>pending</a:t>
             </a:r>
@@ -5153,7 +5153,7 @@
                 <a:solidFill>
                   <a:srgbClr val="171717"/>
                 </a:solidFill>
-                <a:latin typeface="Helvetica Neue"/>
+                <a:latin typeface="Geist"/>
               </a:rPr>
               <a:t>human approval</a:t>
             </a:r>
@@ -5234,7 +5234,7 @@
                 <a:solidFill>
                   <a:srgbClr val="FFFFFF"/>
                 </a:solidFill>
-                <a:latin typeface="Helvetica Neue"/>
+                <a:latin typeface="Geist"/>
               </a:rPr>
               <a:t>2</a:t>
             </a:r>
@@ -5630,7 +5630,7 @@
                 <a:solidFill>
                   <a:srgbClr val="0E8A5F"/>
                 </a:solidFill>
-                <a:latin typeface="Helvetica Neue"/>
+                <a:latin typeface="Geist"/>
               </a:rPr>
               <a:t>allow</a:t>
             </a:r>
@@ -5665,7 +5665,7 @@
                 <a:solidFill>
                   <a:srgbClr val="171717"/>
                 </a:solidFill>
-                <a:latin typeface="Helvetica Neue"/>
+                <a:latin typeface="Geist"/>
               </a:rPr>
               <a:t>the tool runs; its result returns normally</a:t>
             </a:r>
@@ -5700,7 +5700,7 @@
                 <a:solidFill>
                   <a:srgbClr val="D40000"/>
                 </a:solidFill>
-                <a:latin typeface="Helvetica Neue"/>
+                <a:latin typeface="Geist"/>
               </a:rPr>
               <a:t>block</a:t>
             </a:r>
@@ -5735,7 +5735,7 @@
                 <a:solidFill>
                   <a:srgbClr val="171717"/>
                 </a:solidFill>
-                <a:latin typeface="Helvetica Neue"/>
+                <a:latin typeface="Geist"/>
               </a:rPr>
               <a:t>the tool never runs — a refusal returns</a:t>
             </a:r>
@@ -5770,7 +5770,7 @@
                 <a:solidFill>
                   <a:srgbClr val="A96500"/>
                 </a:solidFill>
-                <a:latin typeface="Helvetica Neue"/>
+                <a:latin typeface="Geist"/>
               </a:rPr>
               <a:t>pending</a:t>
             </a:r>
@@ -5805,7 +5805,7 @@
                 <a:solidFill>
                   <a:srgbClr val="171717"/>
                 </a:solidFill>
-                <a:latin typeface="Helvetica Neue"/>
+                <a:latin typeface="Geist"/>
               </a:rPr>
               <a:t>the turn suspends until a person decides</a:t>
             </a:r>
@@ -5840,7 +5840,7 @@
                 <a:solidFill>
                   <a:srgbClr val="171717"/>
                 </a:solidFill>
-                <a:latin typeface="Helvetica Neue"/>
+                <a:latin typeface="Geist"/>
               </a:rPr>
               <a:t>where a tool result would</a:t>
             </a:r>
@@ -5875,7 +5875,7 @@
                 <a:solidFill>
                   <a:srgbClr val="171717"/>
                 </a:solidFill>
-                <a:latin typeface="Helvetica Neue"/>
+                <a:latin typeface="Geist"/>
               </a:rPr>
               <a:t>The refusal arrives in-band — which is why a blocked agent explains itself and continues</a:t>
             </a:r>
@@ -5910,7 +5910,7 @@
                 <a:solidFill>
                   <a:srgbClr val="171717"/>
                 </a:solidFill>
-                <a:latin typeface="Helvetica Neue"/>
+                <a:latin typeface="Geist"/>
               </a:rPr>
               <a:t>the conversation instead of failing.</a:t>
             </a:r>
@@ -6026,7 +6026,7 @@
                 <a:solidFill>
                   <a:srgbClr val="171717"/>
                 </a:solidFill>
-                <a:latin typeface="Helvetica Neue"/>
+                <a:latin typeface="Geist"/>
               </a:rPr>
               <a:t>Tamper-evident</a:t>
             </a:r>
@@ -6131,7 +6131,7 @@
                 <a:solidFill>
                   <a:srgbClr val="171717"/>
                 </a:solidFill>
-                <a:latin typeface="Helvetica Neue"/>
+                <a:latin typeface="Geist"/>
               </a:rPr>
               <a:t>Ed25519</a:t>
             </a:r>
@@ -6212,7 +6212,7 @@
                 <a:solidFill>
                   <a:srgbClr val="4D4D4D"/>
                 </a:solidFill>
-                <a:latin typeface="Menlo"/>
+                <a:latin typeface="Geist Mono"/>
               </a:rPr>
               <a:t>SHA-256 chain</a:t>
             </a:r>
@@ -6293,7 +6293,7 @@
                 <a:solidFill>
                   <a:srgbClr val="FFFFFF"/>
                 </a:solidFill>
-                <a:latin typeface="Helvetica Neue"/>
+                <a:latin typeface="Geist"/>
               </a:rPr>
               <a:t>3</a:t>
             </a:r>
@@ -6374,7 +6374,7 @@
                 <a:solidFill>
                   <a:srgbClr val="171717"/>
                 </a:solidFill>
-                <a:latin typeface="Helvetica Neue"/>
+                <a:latin typeface="Geist"/>
               </a:rPr>
               <a:t>Cockpit</a:t>
             </a:r>
@@ -6479,7 +6479,7 @@
                 <a:solidFill>
                   <a:srgbClr val="171717"/>
                 </a:solidFill>
-                <a:latin typeface="Helvetica Neue"/>
+                <a:latin typeface="Geist"/>
               </a:rPr>
               <a:t>live feed</a:t>
             </a:r>
@@ -6514,7 +6514,7 @@
                 <a:solidFill>
                   <a:srgbClr val="4D4D4D"/>
                 </a:solidFill>
-                <a:latin typeface="Helvetica Neue"/>
+                <a:latin typeface="Geist"/>
               </a:rPr>
               <a:t>approvals · export</a:t>
             </a:r>
@@ -6549,7 +6549,7 @@
                 <a:solidFill>
                   <a:srgbClr val="171717"/>
                 </a:solidFill>
-                <a:latin typeface="Helvetica Neue"/>
+                <a:latin typeface="Geist"/>
               </a:rPr>
               <a:t>Where an attendee acts:</a:t>
             </a:r>
@@ -6584,7 +6584,7 @@
                 <a:solidFill>
                   <a:srgbClr val="4D4D4D"/>
                 </a:solidFill>
-                <a:latin typeface="Helvetica Neue"/>
+                <a:latin typeface="Geist"/>
               </a:rPr>
               <a:t>1  drives the agent</a:t>
             </a:r>
@@ -6619,7 +6619,7 @@
                 <a:solidFill>
                   <a:srgbClr val="4D4D4D"/>
                 </a:solidFill>
-                <a:latin typeface="Helvetica Neue"/>
+                <a:latin typeface="Geist"/>
               </a:rPr>
               <a:t>2  approves or blocks a held call</a:t>
             </a:r>
@@ -6654,7 +6654,7 @@
                 <a:solidFill>
                   <a:srgbClr val="4D4D4D"/>
                 </a:solidFill>
-                <a:latin typeface="Helvetica Neue"/>
+                <a:latin typeface="Geist"/>
               </a:rPr>
               <a:t>3  tampers with the signed log, verification fails</a:t>
             </a:r>

--- a/research/paper-arxiv/images/architecture.pptx
+++ b/research/paper-arxiv/images/architecture.pptx
@@ -4087,7 +4087,7 @@
         <p:spPr>
           <a:xfrm>
             <a:off x="4876800" y="1308735"/>
-            <a:ext cx="1433068" cy="356616"/>
+            <a:ext cx="1330706" cy="356616"/>
           </a:xfrm>
           <a:prstGeom prst="rect">
             <a:avLst/>
@@ -4108,7 +4108,7 @@
                 </a:solidFill>
                 <a:latin typeface="Geist"/>
               </a:rPr>
-              <a:t>L2  classifier</a:t>
+              <a:t>L2  behaviour</a:t>
             </a:r>
           </a:p>
         </p:txBody>
@@ -4167,8 +4167,8 @@
         </p:nvSpPr>
         <p:spPr>
           <a:xfrm>
-            <a:off x="4861370" y="1711642"/>
-            <a:ext cx="996061" cy="315468"/>
+            <a:off x="4770818" y="1711642"/>
+            <a:ext cx="1177163" cy="315468"/>
           </a:xfrm>
           <a:prstGeom prst="rect">
             <a:avLst/>
@@ -4189,7 +4189,7 @@
                 </a:solidFill>
                 <a:latin typeface="Geist Mono"/>
               </a:rPr>
-              <a:t>15 features</a:t>
+              <a:t>agent history</a:t>
             </a:r>
           </a:p>
         </p:txBody>
@@ -4203,7 +4203,7 @@
         <p:spPr>
           <a:xfrm>
             <a:off x="4622800" y="2118042"/>
-            <a:ext cx="762000" cy="315468"/>
+            <a:ext cx="905510" cy="315468"/>
           </a:xfrm>
           <a:prstGeom prst="rect">
             <a:avLst/>
@@ -4224,7 +4224,7 @@
                 </a:solidFill>
                 <a:latin typeface="Geist"/>
               </a:rPr>
-              <a:t>&lt;10 ms</a:t>
+              <a:t>in-process</a:t>
             </a:r>
           </a:p>
         </p:txBody>
@@ -4343,7 +4343,7 @@
         <p:spPr>
           <a:xfrm>
             <a:off x="6807200" y="1308735"/>
-            <a:ext cx="921258" cy="356616"/>
+            <a:ext cx="1125982" cy="356616"/>
           </a:xfrm>
           <a:prstGeom prst="rect">
             <a:avLst/>
@@ -4364,7 +4364,7 @@
                 </a:solidFill>
                 <a:latin typeface="Geist"/>
               </a:rPr>
-              <a:t>L3  judge</a:t>
+              <a:t>L3  auditor</a:t>
             </a:r>
           </a:p>
         </p:txBody>
@@ -4423,8 +4423,8 @@
         </p:nvSpPr>
         <p:spPr>
           <a:xfrm>
-            <a:off x="6746494" y="1711642"/>
-            <a:ext cx="1086612" cy="315468"/>
+            <a:off x="6791770" y="1711642"/>
+            <a:ext cx="996061" cy="315468"/>
           </a:xfrm>
           <a:prstGeom prst="rect">
             <a:avLst/>
@@ -4445,7 +4445,7 @@
                 </a:solidFill>
                 <a:latin typeface="Geist Mono"/>
               </a:rPr>
-              <a:t>full context</a:t>
+              <a:t>stated task</a:t>
             </a:r>
           </a:p>
         </p:txBody>

--- a/research/paper-arxiv/images/architecture.pptx
+++ b/research/paper-arxiv/images/architecture.pptx
@@ -3479,7 +3479,7 @@
                 </a:solidFill>
                 <a:latin typeface="Geist"/>
               </a:rPr>
-              <a:t>14 frameworks</a:t>
+              <a:t>15 frameworks</a:t>
             </a:r>
           </a:p>
         </p:txBody>

--- a/research/paper-arxiv/images/architecture.pptx
+++ b/research/paper-arxiv/images/architecture.pptx
@@ -7,7 +7,7 @@
   <p:sldIdLst>
     <p:sldId id="256" r:id="rId7"/>
   </p:sldIdLst>
-  <p:sldSz cx="12700000" cy="5969000" type="screen4x3"/>
+  <p:sldSz cx="12700000" cy="6451600" type="screen4x3"/>
   <p:notesSz cx="6858000" cy="9144000"/>
   <p:defaultTextStyle>
     <a:defPPr>
@@ -3096,7 +3096,7 @@
         </p:nvSpPr>
         <p:spPr>
           <a:xfrm>
-            <a:off x="152400" y="508000"/>
+            <a:off x="152400" y="457200"/>
             <a:ext cx="1879600" cy="2768600"/>
           </a:xfrm>
           <a:prstGeom prst="roundRect">
@@ -3142,7 +3142,7 @@
         </p:nvSpPr>
         <p:spPr>
           <a:xfrm>
-            <a:off x="304800" y="504825"/>
+            <a:off x="304800" y="454025"/>
             <a:ext cx="762000" cy="411480"/>
           </a:xfrm>
           <a:prstGeom prst="rect">
@@ -3177,7 +3177,7 @@
         </p:nvSpPr>
         <p:spPr>
           <a:xfrm>
-            <a:off x="304800" y="914400"/>
+            <a:off x="304800" y="863600"/>
             <a:ext cx="1574800" cy="431800"/>
           </a:xfrm>
           <a:prstGeom prst="roundRect">
@@ -3231,7 +3231,7 @@
         </p:blipFill>
         <p:spPr>
           <a:xfrm>
-            <a:off x="419100" y="1041400"/>
+            <a:off x="419100" y="990600"/>
             <a:ext cx="177800" cy="177800"/>
           </a:xfrm>
           <a:prstGeom prst="rect">
@@ -3247,7 +3247,7 @@
         </p:nvSpPr>
         <p:spPr>
           <a:xfrm>
-            <a:off x="673100" y="999871"/>
+            <a:off x="673100" y="949071"/>
             <a:ext cx="762000" cy="356616"/>
           </a:xfrm>
           <a:prstGeom prst="rect">
@@ -3282,7 +3282,7 @@
         </p:nvSpPr>
         <p:spPr>
           <a:xfrm>
-            <a:off x="330200" y="1432242"/>
+            <a:off x="330200" y="1381442"/>
             <a:ext cx="1720469" cy="315468"/>
           </a:xfrm>
           <a:prstGeom prst="rect">
@@ -3317,7 +3317,7 @@
         </p:nvSpPr>
         <p:spPr>
           <a:xfrm>
-            <a:off x="304800" y="1752600"/>
+            <a:off x="304800" y="1701800"/>
             <a:ext cx="1574800" cy="711200"/>
           </a:xfrm>
           <a:prstGeom prst="roundRect">
@@ -3371,7 +3371,7 @@
         </p:blipFill>
         <p:spPr>
           <a:xfrm>
-            <a:off x="406400" y="1879600"/>
+            <a:off x="406400" y="1828800"/>
             <a:ext cx="177800" cy="177800"/>
           </a:xfrm>
           <a:prstGeom prst="rect">
@@ -3387,7 +3387,7 @@
         </p:nvSpPr>
         <p:spPr>
           <a:xfrm>
-            <a:off x="685800" y="1849438"/>
+            <a:off x="685800" y="1798638"/>
             <a:ext cx="885825" cy="342900"/>
           </a:xfrm>
           <a:prstGeom prst="rect">
@@ -3422,7 +3422,7 @@
         </p:nvSpPr>
         <p:spPr>
           <a:xfrm>
-            <a:off x="381000" y="2179066"/>
+            <a:off x="381000" y="2128266"/>
             <a:ext cx="1445666" cy="296266"/>
           </a:xfrm>
           <a:prstGeom prst="rect">
@@ -3457,7 +3457,7 @@
         </p:nvSpPr>
         <p:spPr>
           <a:xfrm>
-            <a:off x="330200" y="2567940"/>
+            <a:off x="330200" y="2517140"/>
             <a:ext cx="1228344" cy="329184"/>
           </a:xfrm>
           <a:prstGeom prst="rect">
@@ -3492,7 +3492,7 @@
         </p:nvSpPr>
         <p:spPr>
           <a:xfrm>
-            <a:off x="330200" y="2803842"/>
+            <a:off x="330200" y="2753042"/>
             <a:ext cx="1448816" cy="315468"/>
           </a:xfrm>
           <a:prstGeom prst="rect">
@@ -3527,7 +3527,7 @@
         </p:nvSpPr>
         <p:spPr>
           <a:xfrm>
-            <a:off x="1701800" y="584200"/>
+            <a:off x="1701800" y="533400"/>
             <a:ext cx="190500" cy="190500"/>
           </a:xfrm>
           <a:prstGeom prst="roundRect">
@@ -3573,7 +3573,7 @@
         </p:nvSpPr>
         <p:spPr>
           <a:xfrm>
-            <a:off x="1416050" y="504825"/>
+            <a:off x="1416050" y="454025"/>
             <a:ext cx="762000" cy="411480"/>
           </a:xfrm>
           <a:prstGeom prst="rect">
@@ -3600,21 +3600,137 @@
           </a:p>
         </p:txBody>
       </p:sp>
+      <p:sp>
+        <p:nvSpPr>
+          <p:cNvPr id="16" name="TextBox 15"/>
+          <p:cNvSpPr txBox="1"/>
+          <p:nvPr/>
+        </p:nvSpPr>
+        <p:spPr>
+          <a:xfrm>
+            <a:off x="2133600" y="626745"/>
+            <a:ext cx="1125982" cy="301752"/>
+          </a:xfrm>
+          <a:prstGeom prst="rect">
+            <a:avLst/>
+          </a:prstGeom>
+          <a:noFill/>
+        </p:spPr>
+        <p:txBody>
+          <a:bodyPr wrap="none" lIns="0" rIns="0" tIns="0" bIns="0" anchor="t">
+            <a:spAutoFit/>
+          </a:bodyPr>
+          <a:lstStyle/>
+          <a:p>
+            <a:pPr algn="l"/>
+            <a:r>
+              <a:rPr sz="1100" b="0" i="0">
+                <a:solidFill>
+                  <a:srgbClr val="8A8A8A"/>
+                </a:solidFill>
+                <a:latin typeface="Geist"/>
+              </a:rPr>
+              <a:t>three ways in</a:t>
+            </a:r>
+          </a:p>
+        </p:txBody>
+      </p:sp>
+      <p:sp>
+        <p:nvSpPr>
+          <p:cNvPr id="17" name="Rounded Rectangle 16"/>
+          <p:cNvSpPr/>
+          <p:nvPr/>
+        </p:nvSpPr>
+        <p:spPr>
+          <a:xfrm>
+            <a:off x="2133600" y="965200"/>
+            <a:ext cx="1041400" cy="254000"/>
+          </a:xfrm>
+          <a:prstGeom prst="roundRect">
+            <a:avLst>
+              <a:gd name="adj" fmla="val 20000"/>
+            </a:avLst>
+          </a:prstGeom>
+          <a:solidFill>
+            <a:srgbClr val="FFFFFF"/>
+          </a:solidFill>
+          <a:ln w="12700">
+            <a:solidFill>
+              <a:srgbClr val="171717"/>
+            </a:solidFill>
+          </a:ln>
+          <a:effectLst/>
+        </p:spPr>
+        <p:style>
+          <a:lnRef idx="1">
+            <a:schemeClr val="accent1"/>
+          </a:lnRef>
+          <a:fillRef idx="3">
+            <a:schemeClr val="accent1"/>
+          </a:fillRef>
+          <a:effectRef idx="2">
+            <a:schemeClr val="accent1"/>
+          </a:effectRef>
+          <a:fontRef idx="minor">
+            <a:schemeClr val="lt1"/>
+          </a:fontRef>
+        </p:style>
+        <p:txBody>
+          <a:bodyPr rtlCol="0" anchor="ctr"/>
+          <a:lstStyle/>
+          <a:p/>
+        </p:txBody>
+      </p:sp>
+      <p:sp>
+        <p:nvSpPr>
+          <p:cNvPr id="18" name="TextBox 17"/>
+          <p:cNvSpPr txBox="1"/>
+          <p:nvPr/>
+        </p:nvSpPr>
+        <p:spPr>
+          <a:xfrm>
+            <a:off x="2240915" y="989648"/>
+            <a:ext cx="826770" cy="288036"/>
+          </a:xfrm>
+          <a:prstGeom prst="rect">
+            <a:avLst/>
+          </a:prstGeom>
+          <a:noFill/>
+        </p:spPr>
+        <p:txBody>
+          <a:bodyPr wrap="none" lIns="0" rIns="0" tIns="0" bIns="0" anchor="t">
+            <a:spAutoFit/>
+          </a:bodyPr>
+          <a:lstStyle/>
+          <a:p>
+            <a:pPr algn="ctr"/>
+            <a:r>
+              <a:rPr sz="1050" b="0" i="0">
+                <a:solidFill>
+                  <a:srgbClr val="171717"/>
+                </a:solidFill>
+                <a:latin typeface="Geist Mono"/>
+              </a:rPr>
+              <a:t>SDK auto()</a:t>
+            </a:r>
+          </a:p>
+        </p:txBody>
+      </p:sp>
       <p:cxnSp>
         <p:nvCxnSpPr>
-          <p:cNvPr id="16" name="Connector 15"/>
+          <p:cNvPr id="19" name="Connector 18"/>
           <p:cNvCxnSpPr/>
           <p:nvPr/>
         </p:nvCxnSpPr>
         <p:spPr>
           <a:xfrm>
-            <a:off x="2082800" y="1270000"/>
-            <a:ext cx="177800" cy="0"/>
+            <a:off x="3200400" y="1092200"/>
+            <a:ext cx="38100" cy="0"/>
           </a:xfrm>
           <a:prstGeom prst="line">
             <a:avLst/>
           </a:prstGeom>
-          <a:ln w="20320">
+          <a:ln w="15240">
             <a:solidFill>
               <a:srgbClr val="8A8A8A"/>
             </a:solidFill>
@@ -3637,14 +3753,353 @@
       </p:cxnSp>
       <p:sp>
         <p:nvSpPr>
-          <p:cNvPr id="17" name="Rounded Rectangle 16"/>
+          <p:cNvPr id="20" name="Rounded Rectangle 19"/>
           <p:cNvSpPr/>
           <p:nvPr/>
         </p:nvSpPr>
         <p:spPr>
           <a:xfrm>
-            <a:off x="2336800" y="508000"/>
-            <a:ext cx="7874000" cy="2768600"/>
+            <a:off x="2133600" y="1371600"/>
+            <a:ext cx="1041400" cy="254000"/>
+          </a:xfrm>
+          <a:prstGeom prst="roundRect">
+            <a:avLst>
+              <a:gd name="adj" fmla="val 20000"/>
+            </a:avLst>
+          </a:prstGeom>
+          <a:solidFill>
+            <a:srgbClr val="FFFFFF"/>
+          </a:solidFill>
+          <a:ln w="12700">
+            <a:solidFill>
+              <a:srgbClr val="D8D8D8"/>
+            </a:solidFill>
+            <a:prstDash val="dash"/>
+          </a:ln>
+          <a:effectLst/>
+        </p:spPr>
+        <p:style>
+          <a:lnRef idx="1">
+            <a:schemeClr val="accent1"/>
+          </a:lnRef>
+          <a:fillRef idx="3">
+            <a:schemeClr val="accent1"/>
+          </a:fillRef>
+          <a:effectRef idx="2">
+            <a:schemeClr val="accent1"/>
+          </a:effectRef>
+          <a:fontRef idx="minor">
+            <a:schemeClr val="lt1"/>
+          </a:fontRef>
+        </p:style>
+        <p:txBody>
+          <a:bodyPr rtlCol="0" anchor="ctr"/>
+          <a:lstStyle/>
+          <a:p/>
+        </p:txBody>
+      </p:sp>
+      <p:sp>
+        <p:nvSpPr>
+          <p:cNvPr id="21" name="TextBox 20"/>
+          <p:cNvSpPr txBox="1"/>
+          <p:nvPr/>
+        </p:nvSpPr>
+        <p:spPr>
+          <a:xfrm>
+            <a:off x="2273300" y="1396048"/>
+            <a:ext cx="762000" cy="288036"/>
+          </a:xfrm>
+          <a:prstGeom prst="rect">
+            <a:avLst/>
+          </a:prstGeom>
+          <a:noFill/>
+        </p:spPr>
+        <p:txBody>
+          <a:bodyPr wrap="none" lIns="0" rIns="0" tIns="0" bIns="0" anchor="t">
+            <a:spAutoFit/>
+          </a:bodyPr>
+          <a:lstStyle/>
+          <a:p>
+            <a:pPr algn="ctr"/>
+            <a:r>
+              <a:rPr sz="1050" b="0" i="0">
+                <a:solidFill>
+                  <a:srgbClr val="4D4D4D"/>
+                </a:solidFill>
+                <a:latin typeface="Geist Mono"/>
+              </a:rPr>
+              <a:t>MCP proxy</a:t>
+            </a:r>
+          </a:p>
+        </p:txBody>
+      </p:sp>
+      <p:cxnSp>
+        <p:nvCxnSpPr>
+          <p:cNvPr id="22" name="Connector 21"/>
+          <p:cNvCxnSpPr/>
+          <p:nvPr/>
+        </p:nvCxnSpPr>
+        <p:spPr>
+          <a:xfrm>
+            <a:off x="3200400" y="1498600"/>
+            <a:ext cx="38100" cy="0"/>
+          </a:xfrm>
+          <a:prstGeom prst="line">
+            <a:avLst/>
+          </a:prstGeom>
+          <a:ln w="15240">
+            <a:solidFill>
+              <a:srgbClr val="8A8A8A"/>
+            </a:solidFill>
+          </a:ln>
+        </p:spPr>
+        <p:style>
+          <a:lnRef idx="2">
+            <a:schemeClr val="accent1"/>
+          </a:lnRef>
+          <a:fillRef idx="0">
+            <a:schemeClr val="accent1"/>
+          </a:fillRef>
+          <a:effectRef idx="1">
+            <a:schemeClr val="accent1"/>
+          </a:effectRef>
+          <a:fontRef idx="minor">
+            <a:schemeClr val="tx1"/>
+          </a:fontRef>
+        </p:style>
+      </p:cxnSp>
+      <p:sp>
+        <p:nvSpPr>
+          <p:cNvPr id="23" name="Rounded Rectangle 22"/>
+          <p:cNvSpPr/>
+          <p:nvPr/>
+        </p:nvSpPr>
+        <p:spPr>
+          <a:xfrm>
+            <a:off x="2133600" y="1778000"/>
+            <a:ext cx="1041400" cy="254000"/>
+          </a:xfrm>
+          <a:prstGeom prst="roundRect">
+            <a:avLst>
+              <a:gd name="adj" fmla="val 20000"/>
+            </a:avLst>
+          </a:prstGeom>
+          <a:solidFill>
+            <a:srgbClr val="FFFFFF"/>
+          </a:solidFill>
+          <a:ln w="12700">
+            <a:solidFill>
+              <a:srgbClr val="D8D8D8"/>
+            </a:solidFill>
+            <a:prstDash val="dash"/>
+          </a:ln>
+          <a:effectLst/>
+        </p:spPr>
+        <p:style>
+          <a:lnRef idx="1">
+            <a:schemeClr val="accent1"/>
+          </a:lnRef>
+          <a:fillRef idx="3">
+            <a:schemeClr val="accent1"/>
+          </a:fillRef>
+          <a:effectRef idx="2">
+            <a:schemeClr val="accent1"/>
+          </a:effectRef>
+          <a:fontRef idx="minor">
+            <a:schemeClr val="lt1"/>
+          </a:fontRef>
+        </p:style>
+        <p:txBody>
+          <a:bodyPr rtlCol="0" anchor="ctr"/>
+          <a:lstStyle/>
+          <a:p/>
+        </p:txBody>
+      </p:sp>
+      <p:sp>
+        <p:nvSpPr>
+          <p:cNvPr id="24" name="TextBox 23"/>
+          <p:cNvSpPr txBox="1"/>
+          <p:nvPr/>
+        </p:nvSpPr>
+        <p:spPr>
+          <a:xfrm>
+            <a:off x="2158238" y="1802448"/>
+            <a:ext cx="992124" cy="288036"/>
+          </a:xfrm>
+          <a:prstGeom prst="rect">
+            <a:avLst/>
+          </a:prstGeom>
+          <a:noFill/>
+        </p:spPr>
+        <p:txBody>
+          <a:bodyPr wrap="none" lIns="0" rIns="0" tIns="0" bIns="0" anchor="t">
+            <a:spAutoFit/>
+          </a:bodyPr>
+          <a:lstStyle/>
+          <a:p>
+            <a:pPr algn="ctr"/>
+            <a:r>
+              <a:rPr sz="1050" b="0" i="0">
+                <a:solidFill>
+                  <a:srgbClr val="4D4D4D"/>
+                </a:solidFill>
+                <a:latin typeface="Geist Mono"/>
+              </a:rPr>
+              <a:t>egress proxy</a:t>
+            </a:r>
+          </a:p>
+        </p:txBody>
+      </p:sp>
+      <p:cxnSp>
+        <p:nvCxnSpPr>
+          <p:cNvPr id="25" name="Connector 24"/>
+          <p:cNvCxnSpPr/>
+          <p:nvPr/>
+        </p:nvCxnSpPr>
+        <p:spPr>
+          <a:xfrm>
+            <a:off x="3200400" y="1905000"/>
+            <a:ext cx="38100" cy="0"/>
+          </a:xfrm>
+          <a:prstGeom prst="line">
+            <a:avLst/>
+          </a:prstGeom>
+          <a:ln w="15240">
+            <a:solidFill>
+              <a:srgbClr val="8A8A8A"/>
+            </a:solidFill>
+          </a:ln>
+        </p:spPr>
+        <p:style>
+          <a:lnRef idx="2">
+            <a:schemeClr val="accent1"/>
+          </a:lnRef>
+          <a:fillRef idx="0">
+            <a:schemeClr val="accent1"/>
+          </a:fillRef>
+          <a:effectRef idx="1">
+            <a:schemeClr val="accent1"/>
+          </a:effectRef>
+          <a:fontRef idx="minor">
+            <a:schemeClr val="tx1"/>
+          </a:fontRef>
+        </p:style>
+      </p:cxnSp>
+      <p:cxnSp>
+        <p:nvCxnSpPr>
+          <p:cNvPr id="26" name="Connector 25"/>
+          <p:cNvCxnSpPr/>
+          <p:nvPr/>
+        </p:nvCxnSpPr>
+        <p:spPr>
+          <a:xfrm>
+            <a:off x="2070100" y="1092200"/>
+            <a:ext cx="25400" cy="0"/>
+          </a:xfrm>
+          <a:prstGeom prst="line">
+            <a:avLst/>
+          </a:prstGeom>
+          <a:ln w="17780">
+            <a:solidFill>
+              <a:srgbClr val="8A8A8A"/>
+            </a:solidFill>
+          </a:ln>
+        </p:spPr>
+        <p:style>
+          <a:lnRef idx="2">
+            <a:schemeClr val="accent1"/>
+          </a:lnRef>
+          <a:fillRef idx="0">
+            <a:schemeClr val="accent1"/>
+          </a:fillRef>
+          <a:effectRef idx="1">
+            <a:schemeClr val="accent1"/>
+          </a:effectRef>
+          <a:fontRef idx="minor">
+            <a:schemeClr val="tx1"/>
+          </a:fontRef>
+        </p:style>
+      </p:cxnSp>
+      <p:sp>
+        <p:nvSpPr>
+          <p:cNvPr id="27" name="TextBox 26"/>
+          <p:cNvSpPr txBox="1"/>
+          <p:nvPr/>
+        </p:nvSpPr>
+        <p:spPr>
+          <a:xfrm>
+            <a:off x="2133600" y="2107248"/>
+            <a:ext cx="1157478" cy="288036"/>
+          </a:xfrm>
+          <a:prstGeom prst="rect">
+            <a:avLst/>
+          </a:prstGeom>
+          <a:noFill/>
+        </p:spPr>
+        <p:txBody>
+          <a:bodyPr wrap="none" lIns="0" rIns="0" tIns="0" bIns="0" anchor="t">
+            <a:spAutoFit/>
+          </a:bodyPr>
+          <a:lstStyle/>
+          <a:p>
+            <a:pPr algn="l"/>
+            <a:r>
+              <a:rPr sz="1050" b="0" i="0">
+                <a:solidFill>
+                  <a:srgbClr val="8A8A8A"/>
+                </a:solidFill>
+                <a:latin typeface="Geist"/>
+              </a:rPr>
+              <a:t>proxies decide</a:t>
+            </a:r>
+          </a:p>
+        </p:txBody>
+      </p:sp>
+      <p:sp>
+        <p:nvSpPr>
+          <p:cNvPr id="28" name="TextBox 27"/>
+          <p:cNvSpPr txBox="1"/>
+          <p:nvPr/>
+        </p:nvSpPr>
+        <p:spPr>
+          <a:xfrm>
+            <a:off x="2133600" y="2272348"/>
+            <a:ext cx="1240155" cy="288036"/>
+          </a:xfrm>
+          <a:prstGeom prst="rect">
+            <a:avLst/>
+          </a:prstGeom>
+          <a:noFill/>
+        </p:spPr>
+        <p:txBody>
+          <a:bodyPr wrap="none" lIns="0" rIns="0" tIns="0" bIns="0" anchor="t">
+            <a:spAutoFit/>
+          </a:bodyPr>
+          <a:lstStyle/>
+          <a:p>
+            <a:pPr algn="l"/>
+            <a:r>
+              <a:rPr sz="1050" b="0" i="0">
+                <a:solidFill>
+                  <a:srgbClr val="8A8A8A"/>
+                </a:solidFill>
+                <a:latin typeface="Geist"/>
+              </a:rPr>
+              <a:t>inline; no hold</a:t>
+            </a:r>
+          </a:p>
+        </p:txBody>
+      </p:sp>
+      <p:sp>
+        <p:nvSpPr>
+          <p:cNvPr id="29" name="Rounded Rectangle 28"/>
+          <p:cNvSpPr/>
+          <p:nvPr/>
+        </p:nvSpPr>
+        <p:spPr>
+          <a:xfrm>
+            <a:off x="3276600" y="457200"/>
+            <a:ext cx="6959600" cy="2768600"/>
           </a:xfrm>
           <a:prstGeom prst="roundRect">
             <a:avLst>
@@ -3684,13 +4139,13 @@
       </p:sp>
       <p:sp>
         <p:nvSpPr>
-          <p:cNvPr id="18" name="TextBox 17"/>
+          <p:cNvPr id="30" name="TextBox 29"/>
           <p:cNvSpPr txBox="1"/>
           <p:nvPr/>
         </p:nvSpPr>
         <p:spPr>
           <a:xfrm>
-            <a:off x="2540000" y="589915"/>
+            <a:off x="3479800" y="539115"/>
             <a:ext cx="1740154" cy="466344"/>
           </a:xfrm>
           <a:prstGeom prst="rect">
@@ -3719,13 +4174,13 @@
       </p:sp>
       <p:sp>
         <p:nvSpPr>
-          <p:cNvPr id="19" name="TextBox 18"/>
+          <p:cNvPr id="31" name="TextBox 30"/>
           <p:cNvSpPr txBox="1"/>
           <p:nvPr/>
         </p:nvSpPr>
         <p:spPr>
           <a:xfrm>
-            <a:off x="2540000" y="891540"/>
+            <a:off x="5181600" y="612140"/>
             <a:ext cx="2267712" cy="329184"/>
           </a:xfrm>
           <a:prstGeom prst="rect">
@@ -3754,18 +4209,2615 @@
       </p:sp>
       <p:sp>
         <p:nvSpPr>
-          <p:cNvPr id="20" name="Rounded Rectangle 19"/>
+          <p:cNvPr id="32" name="TextBox 31"/>
+          <p:cNvSpPr txBox="1"/>
+          <p:nvPr/>
+        </p:nvSpPr>
+        <p:spPr>
+          <a:xfrm>
+            <a:off x="6655054" y="626745"/>
+            <a:ext cx="3377946" cy="301752"/>
+          </a:xfrm>
+          <a:prstGeom prst="rect">
+            <a:avLst/>
+          </a:prstGeom>
+          <a:noFill/>
+        </p:spPr>
+        <p:txBody>
+          <a:bodyPr wrap="none" lIns="0" rIns="0" tIns="0" bIns="0" anchor="t">
+            <a:spAutoFit/>
+          </a:bodyPr>
+          <a:lstStyle/>
+          <a:p>
+            <a:pPr algn="r"/>
+            <a:r>
+              <a:rPr sz="1100" b="0" i="0">
+                <a:solidFill>
+                  <a:srgbClr val="8A8A8A"/>
+                </a:solidFill>
+                <a:latin typeface="Geist"/>
+              </a:rPr>
+              <a:t>layers ordered by what they may observe</a:t>
+            </a:r>
+          </a:p>
+        </p:txBody>
+      </p:sp>
+      <p:sp>
+        <p:nvSpPr>
+          <p:cNvPr id="33" name="Rounded Rectangle 32"/>
           <p:cNvSpPr/>
           <p:nvPr/>
         </p:nvSpPr>
         <p:spPr>
           <a:xfrm>
-            <a:off x="2540000" y="1219200"/>
-            <a:ext cx="1778000" cy="1219200"/>
+            <a:off x="3429000" y="965200"/>
+            <a:ext cx="1270000" cy="1422400"/>
           </a:xfrm>
           <a:prstGeom prst="roundRect">
             <a:avLst>
-              <a:gd name="adj" fmla="val 10416"/>
+              <a:gd name="adj" fmla="val 8000"/>
+            </a:avLst>
+          </a:prstGeom>
+          <a:solidFill>
+            <a:srgbClr val="FFFFFF"/>
+          </a:solidFill>
+          <a:ln w="12700">
+            <a:solidFill>
+              <a:srgbClr val="D8D8D8"/>
+            </a:solidFill>
+          </a:ln>
+          <a:effectLst/>
+        </p:spPr>
+        <p:style>
+          <a:lnRef idx="1">
+            <a:schemeClr val="accent1"/>
+          </a:lnRef>
+          <a:fillRef idx="3">
+            <a:schemeClr val="accent1"/>
+          </a:fillRef>
+          <a:effectRef idx="2">
+            <a:schemeClr val="accent1"/>
+          </a:effectRef>
+          <a:fontRef idx="minor">
+            <a:schemeClr val="lt1"/>
+          </a:fontRef>
+        </p:style>
+        <p:txBody>
+          <a:bodyPr rtlCol="0" anchor="ctr"/>
+          <a:lstStyle/>
+          <a:p/>
+        </p:txBody>
+      </p:sp>
+      <p:pic>
+        <p:nvPicPr>
+          <p:cNvPr id="34" name="Picture 33" descr="regex--171717.256.png"/>
+          <p:cNvPicPr>
+            <a:picLocks noChangeAspect="1"/>
+          </p:cNvPicPr>
+          <p:nvPr/>
+        </p:nvPicPr>
+        <p:blipFill>
+          <a:blip r:embed="rId4"/>
+          <a:stretch>
+            <a:fillRect/>
+          </a:stretch>
+        </p:blipFill>
+        <p:spPr>
+          <a:xfrm>
+            <a:off x="4419600" y="2108200"/>
+            <a:ext cx="165100" cy="165100"/>
+          </a:xfrm>
+          <a:prstGeom prst="rect">
+            <a:avLst/>
+          </a:prstGeom>
+        </p:spPr>
+      </p:pic>
+      <p:sp>
+        <p:nvSpPr>
+          <p:cNvPr id="35" name="TextBox 34"/>
+          <p:cNvSpPr txBox="1"/>
+          <p:nvPr/>
+        </p:nvSpPr>
+        <p:spPr>
+          <a:xfrm>
+            <a:off x="3556000" y="1063942"/>
+            <a:ext cx="814959" cy="315468"/>
+          </a:xfrm>
+          <a:prstGeom prst="rect">
+            <a:avLst/>
+          </a:prstGeom>
+          <a:noFill/>
+        </p:spPr>
+        <p:txBody>
+          <a:bodyPr wrap="none" lIns="0" rIns="0" tIns="0" bIns="0" anchor="t">
+            <a:spAutoFit/>
+          </a:bodyPr>
+          <a:lstStyle/>
+          <a:p>
+            <a:pPr algn="l"/>
+            <a:r>
+              <a:rPr sz="1150" b="1" i="0">
+                <a:solidFill>
+                  <a:srgbClr val="171717"/>
+                </a:solidFill>
+                <a:latin typeface="Geist"/>
+              </a:rPr>
+              <a:t>L1  rules</a:t>
+            </a:r>
+          </a:p>
+        </p:txBody>
+      </p:sp>
+      <p:sp>
+        <p:nvSpPr>
+          <p:cNvPr id="36" name="Rounded Rectangle 35"/>
+          <p:cNvSpPr/>
+          <p:nvPr/>
+        </p:nvSpPr>
+        <p:spPr>
+          <a:xfrm>
+            <a:off x="3530600" y="1397000"/>
+            <a:ext cx="1066800" cy="279400"/>
+          </a:xfrm>
+          <a:prstGeom prst="roundRect">
+            <a:avLst>
+              <a:gd name="adj" fmla="val 18181"/>
+            </a:avLst>
+          </a:prstGeom>
+          <a:solidFill>
+            <a:srgbClr val="FAFAFA"/>
+          </a:solidFill>
+          <a:ln w="12700">
+            <a:solidFill>
+              <a:srgbClr val="F0F0F0"/>
+            </a:solidFill>
+          </a:ln>
+          <a:effectLst/>
+        </p:spPr>
+        <p:style>
+          <a:lnRef idx="1">
+            <a:schemeClr val="accent1"/>
+          </a:lnRef>
+          <a:fillRef idx="3">
+            <a:schemeClr val="accent1"/>
+          </a:fillRef>
+          <a:effectRef idx="2">
+            <a:schemeClr val="accent1"/>
+          </a:effectRef>
+          <a:fontRef idx="minor">
+            <a:schemeClr val="lt1"/>
+          </a:fontRef>
+        </p:style>
+        <p:txBody>
+          <a:bodyPr rtlCol="0" anchor="ctr"/>
+          <a:lstStyle/>
+          <a:p/>
+        </p:txBody>
+      </p:sp>
+      <p:sp>
+        <p:nvSpPr>
+          <p:cNvPr id="37" name="TextBox 36"/>
+          <p:cNvSpPr txBox="1"/>
+          <p:nvPr/>
+        </p:nvSpPr>
+        <p:spPr>
+          <a:xfrm>
+            <a:off x="3609276" y="1434148"/>
+            <a:ext cx="909447" cy="288036"/>
+          </a:xfrm>
+          <a:prstGeom prst="rect">
+            <a:avLst/>
+          </a:prstGeom>
+          <a:noFill/>
+        </p:spPr>
+        <p:txBody>
+          <a:bodyPr wrap="none" lIns="0" rIns="0" tIns="0" bIns="0" anchor="t">
+            <a:spAutoFit/>
+          </a:bodyPr>
+          <a:lstStyle/>
+          <a:p>
+            <a:pPr algn="ctr"/>
+            <a:r>
+              <a:rPr sz="1050" b="0" i="0">
+                <a:solidFill>
+                  <a:srgbClr val="171717"/>
+                </a:solidFill>
+                <a:latin typeface="Geist Mono"/>
+              </a:rPr>
+              <a:t>call string</a:t>
+            </a:r>
+          </a:p>
+        </p:txBody>
+      </p:sp>
+      <p:sp>
+        <p:nvSpPr>
+          <p:cNvPr id="38" name="TextBox 37"/>
+          <p:cNvSpPr txBox="1"/>
+          <p:nvPr/>
+        </p:nvSpPr>
+        <p:spPr>
+          <a:xfrm>
+            <a:off x="3556000" y="1762442"/>
+            <a:ext cx="762000" cy="315468"/>
+          </a:xfrm>
+          <a:prstGeom prst="rect">
+            <a:avLst/>
+          </a:prstGeom>
+          <a:noFill/>
+        </p:spPr>
+        <p:txBody>
+          <a:bodyPr wrap="none" lIns="0" rIns="0" tIns="0" bIns="0" anchor="t">
+            <a:spAutoFit/>
+          </a:bodyPr>
+          <a:lstStyle/>
+          <a:p>
+            <a:pPr algn="l"/>
+            <a:r>
+              <a:rPr sz="1150" b="0" i="0">
+                <a:solidFill>
+                  <a:srgbClr val="4D4D4D"/>
+                </a:solidFill>
+                <a:latin typeface="Geist"/>
+              </a:rPr>
+              <a:t>&lt;1 ms</a:t>
+            </a:r>
+          </a:p>
+        </p:txBody>
+      </p:sp>
+      <p:sp>
+        <p:nvSpPr>
+          <p:cNvPr id="39" name="TextBox 38"/>
+          <p:cNvSpPr txBox="1"/>
+          <p:nvPr/>
+        </p:nvSpPr>
+        <p:spPr>
+          <a:xfrm>
+            <a:off x="3556000" y="2005648"/>
+            <a:ext cx="909447" cy="288036"/>
+          </a:xfrm>
+          <a:prstGeom prst="rect">
+            <a:avLst/>
+          </a:prstGeom>
+          <a:noFill/>
+        </p:spPr>
+        <p:txBody>
+          <a:bodyPr wrap="none" lIns="0" rIns="0" tIns="0" bIns="0" anchor="t">
+            <a:spAutoFit/>
+          </a:bodyPr>
+          <a:lstStyle/>
+          <a:p>
+            <a:pPr algn="l"/>
+            <a:r>
+              <a:rPr sz="1050" b="0" i="0">
+                <a:solidFill>
+                  <a:srgbClr val="8A8A8A"/>
+                </a:solidFill>
+                <a:latin typeface="Geist"/>
+              </a:rPr>
+              <a:t>28 patterns</a:t>
+            </a:r>
+          </a:p>
+        </p:txBody>
+      </p:sp>
+      <p:cxnSp>
+        <p:nvCxnSpPr>
+          <p:cNvPr id="40" name="Connector 39"/>
+          <p:cNvCxnSpPr/>
+          <p:nvPr/>
+        </p:nvCxnSpPr>
+        <p:spPr>
+          <a:xfrm>
+            <a:off x="4711700" y="1536700"/>
+            <a:ext cx="50800" cy="0"/>
+          </a:xfrm>
+          <a:prstGeom prst="line">
+            <a:avLst/>
+          </a:prstGeom>
+          <a:ln w="15240">
+            <a:solidFill>
+              <a:srgbClr val="8A8A8A"/>
+            </a:solidFill>
+          </a:ln>
+        </p:spPr>
+        <p:style>
+          <a:lnRef idx="2">
+            <a:schemeClr val="accent1"/>
+          </a:lnRef>
+          <a:fillRef idx="0">
+            <a:schemeClr val="accent1"/>
+          </a:fillRef>
+          <a:effectRef idx="1">
+            <a:schemeClr val="accent1"/>
+          </a:effectRef>
+          <a:fontRef idx="minor">
+            <a:schemeClr val="tx1"/>
+          </a:fontRef>
+        </p:style>
+      </p:cxnSp>
+      <p:sp>
+        <p:nvSpPr>
+          <p:cNvPr id="41" name="Rounded Rectangle 40"/>
+          <p:cNvSpPr/>
+          <p:nvPr/>
+        </p:nvSpPr>
+        <p:spPr>
+          <a:xfrm>
+            <a:off x="4775200" y="965200"/>
+            <a:ext cx="1270000" cy="1422400"/>
+          </a:xfrm>
+          <a:prstGeom prst="roundRect">
+            <a:avLst>
+              <a:gd name="adj" fmla="val 8000"/>
+            </a:avLst>
+          </a:prstGeom>
+          <a:solidFill>
+            <a:srgbClr val="FFFFFF"/>
+          </a:solidFill>
+          <a:ln w="12700">
+            <a:solidFill>
+              <a:srgbClr val="D8D8D8"/>
+            </a:solidFill>
+          </a:ln>
+          <a:effectLst/>
+        </p:spPr>
+        <p:style>
+          <a:lnRef idx="1">
+            <a:schemeClr val="accent1"/>
+          </a:lnRef>
+          <a:fillRef idx="3">
+            <a:schemeClr val="accent1"/>
+          </a:fillRef>
+          <a:effectRef idx="2">
+            <a:schemeClr val="accent1"/>
+          </a:effectRef>
+          <a:fontRef idx="minor">
+            <a:schemeClr val="lt1"/>
+          </a:fontRef>
+        </p:style>
+        <p:txBody>
+          <a:bodyPr rtlCol="0" anchor="ctr"/>
+          <a:lstStyle/>
+          <a:p/>
+        </p:txBody>
+      </p:sp>
+      <p:pic>
+        <p:nvPicPr>
+          <p:cNvPr id="42" name="Picture 41" descr="binary-tree--171717.256.png"/>
+          <p:cNvPicPr>
+            <a:picLocks noChangeAspect="1"/>
+          </p:cNvPicPr>
+          <p:nvPr/>
+        </p:nvPicPr>
+        <p:blipFill>
+          <a:blip r:embed="rId5"/>
+          <a:stretch>
+            <a:fillRect/>
+          </a:stretch>
+        </p:blipFill>
+        <p:spPr>
+          <a:xfrm>
+            <a:off x="5765800" y="2108200"/>
+            <a:ext cx="165100" cy="165100"/>
+          </a:xfrm>
+          <a:prstGeom prst="rect">
+            <a:avLst/>
+          </a:prstGeom>
+        </p:spPr>
+      </p:pic>
+      <p:sp>
+        <p:nvSpPr>
+          <p:cNvPr id="43" name="TextBox 42"/>
+          <p:cNvSpPr txBox="1"/>
+          <p:nvPr/>
+        </p:nvSpPr>
+        <p:spPr>
+          <a:xfrm>
+            <a:off x="4902200" y="1063942"/>
+            <a:ext cx="1177163" cy="315468"/>
+          </a:xfrm>
+          <a:prstGeom prst="rect">
+            <a:avLst/>
+          </a:prstGeom>
+          <a:noFill/>
+        </p:spPr>
+        <p:txBody>
+          <a:bodyPr wrap="none" lIns="0" rIns="0" tIns="0" bIns="0" anchor="t">
+            <a:spAutoFit/>
+          </a:bodyPr>
+          <a:lstStyle/>
+          <a:p>
+            <a:pPr algn="l"/>
+            <a:r>
+              <a:rPr sz="1150" b="1" i="0">
+                <a:solidFill>
+                  <a:srgbClr val="171717"/>
+                </a:solidFill>
+                <a:latin typeface="Geist"/>
+              </a:rPr>
+              <a:t>L2  behaviour</a:t>
+            </a:r>
+          </a:p>
+        </p:txBody>
+      </p:sp>
+      <p:sp>
+        <p:nvSpPr>
+          <p:cNvPr id="44" name="Rounded Rectangle 43"/>
+          <p:cNvSpPr/>
+          <p:nvPr/>
+        </p:nvSpPr>
+        <p:spPr>
+          <a:xfrm>
+            <a:off x="4876800" y="1397000"/>
+            <a:ext cx="1066800" cy="279400"/>
+          </a:xfrm>
+          <a:prstGeom prst="roundRect">
+            <a:avLst>
+              <a:gd name="adj" fmla="val 18181"/>
+            </a:avLst>
+          </a:prstGeom>
+          <a:solidFill>
+            <a:srgbClr val="FAFAFA"/>
+          </a:solidFill>
+          <a:ln w="12700">
+            <a:solidFill>
+              <a:srgbClr val="F0F0F0"/>
+            </a:solidFill>
+          </a:ln>
+          <a:effectLst/>
+        </p:spPr>
+        <p:style>
+          <a:lnRef idx="1">
+            <a:schemeClr val="accent1"/>
+          </a:lnRef>
+          <a:fillRef idx="3">
+            <a:schemeClr val="accent1"/>
+          </a:fillRef>
+          <a:effectRef idx="2">
+            <a:schemeClr val="accent1"/>
+          </a:effectRef>
+          <a:fontRef idx="minor">
+            <a:schemeClr val="lt1"/>
+          </a:fontRef>
+        </p:style>
+        <p:txBody>
+          <a:bodyPr rtlCol="0" anchor="ctr"/>
+          <a:lstStyle/>
+          <a:p/>
+        </p:txBody>
+      </p:sp>
+      <p:sp>
+        <p:nvSpPr>
+          <p:cNvPr id="45" name="TextBox 44"/>
+          <p:cNvSpPr txBox="1"/>
+          <p:nvPr/>
+        </p:nvSpPr>
+        <p:spPr>
+          <a:xfrm>
+            <a:off x="4872800" y="1434148"/>
+            <a:ext cx="1074801" cy="288036"/>
+          </a:xfrm>
+          <a:prstGeom prst="rect">
+            <a:avLst/>
+          </a:prstGeom>
+          <a:noFill/>
+        </p:spPr>
+        <p:txBody>
+          <a:bodyPr wrap="none" lIns="0" rIns="0" tIns="0" bIns="0" anchor="t">
+            <a:spAutoFit/>
+          </a:bodyPr>
+          <a:lstStyle/>
+          <a:p>
+            <a:pPr algn="ctr"/>
+            <a:r>
+              <a:rPr sz="1050" b="0" i="0">
+                <a:solidFill>
+                  <a:srgbClr val="171717"/>
+                </a:solidFill>
+                <a:latin typeface="Geist Mono"/>
+              </a:rPr>
+              <a:t>agent history</a:t>
+            </a:r>
+          </a:p>
+        </p:txBody>
+      </p:sp>
+      <p:sp>
+        <p:nvSpPr>
+          <p:cNvPr id="46" name="TextBox 45"/>
+          <p:cNvSpPr txBox="1"/>
+          <p:nvPr/>
+        </p:nvSpPr>
+        <p:spPr>
+          <a:xfrm>
+            <a:off x="4902200" y="1762442"/>
+            <a:ext cx="905510" cy="315468"/>
+          </a:xfrm>
+          <a:prstGeom prst="rect">
+            <a:avLst/>
+          </a:prstGeom>
+          <a:noFill/>
+        </p:spPr>
+        <p:txBody>
+          <a:bodyPr wrap="none" lIns="0" rIns="0" tIns="0" bIns="0" anchor="t">
+            <a:spAutoFit/>
+          </a:bodyPr>
+          <a:lstStyle/>
+          <a:p>
+            <a:pPr algn="l"/>
+            <a:r>
+              <a:rPr sz="1150" b="0" i="0">
+                <a:solidFill>
+                  <a:srgbClr val="4D4D4D"/>
+                </a:solidFill>
+                <a:latin typeface="Geist"/>
+              </a:rPr>
+              <a:t>in-process</a:t>
+            </a:r>
+          </a:p>
+        </p:txBody>
+      </p:sp>
+      <p:sp>
+        <p:nvSpPr>
+          <p:cNvPr id="47" name="TextBox 46"/>
+          <p:cNvSpPr txBox="1"/>
+          <p:nvPr/>
+        </p:nvSpPr>
+        <p:spPr>
+          <a:xfrm>
+            <a:off x="4902200" y="2005648"/>
+            <a:ext cx="1074801" cy="288036"/>
+          </a:xfrm>
+          <a:prstGeom prst="rect">
+            <a:avLst/>
+          </a:prstGeom>
+          <a:noFill/>
+        </p:spPr>
+        <p:txBody>
+          <a:bodyPr wrap="none" lIns="0" rIns="0" tIns="0" bIns="0" anchor="t">
+            <a:spAutoFit/>
+          </a:bodyPr>
+          <a:lstStyle/>
+          <a:p>
+            <a:pPr algn="l"/>
+            <a:r>
+              <a:rPr sz="1050" b="0" i="0">
+                <a:solidFill>
+                  <a:srgbClr val="8A8A8A"/>
+                </a:solidFill>
+                <a:latin typeface="Geist"/>
+              </a:rPr>
+              <a:t>never relaxes</a:t>
+            </a:r>
+          </a:p>
+        </p:txBody>
+      </p:sp>
+      <p:cxnSp>
+        <p:nvCxnSpPr>
+          <p:cNvPr id="48" name="Connector 47"/>
+          <p:cNvCxnSpPr/>
+          <p:nvPr/>
+        </p:nvCxnSpPr>
+        <p:spPr>
+          <a:xfrm>
+            <a:off x="6057900" y="1536700"/>
+            <a:ext cx="50800" cy="0"/>
+          </a:xfrm>
+          <a:prstGeom prst="line">
+            <a:avLst/>
+          </a:prstGeom>
+          <a:ln w="15240">
+            <a:solidFill>
+              <a:srgbClr val="8A8A8A"/>
+            </a:solidFill>
+          </a:ln>
+        </p:spPr>
+        <p:style>
+          <a:lnRef idx="2">
+            <a:schemeClr val="accent1"/>
+          </a:lnRef>
+          <a:fillRef idx="0">
+            <a:schemeClr val="accent1"/>
+          </a:fillRef>
+          <a:effectRef idx="1">
+            <a:schemeClr val="accent1"/>
+          </a:effectRef>
+          <a:fontRef idx="minor">
+            <a:schemeClr val="tx1"/>
+          </a:fontRef>
+        </p:style>
+      </p:cxnSp>
+      <p:sp>
+        <p:nvSpPr>
+          <p:cNvPr id="49" name="Rounded Rectangle 48"/>
+          <p:cNvSpPr/>
+          <p:nvPr/>
+        </p:nvSpPr>
+        <p:spPr>
+          <a:xfrm>
+            <a:off x="6121400" y="965200"/>
+            <a:ext cx="1270000" cy="1422400"/>
+          </a:xfrm>
+          <a:prstGeom prst="roundRect">
+            <a:avLst>
+              <a:gd name="adj" fmla="val 8000"/>
+            </a:avLst>
+          </a:prstGeom>
+          <a:solidFill>
+            <a:srgbClr val="FFFFFF"/>
+          </a:solidFill>
+          <a:ln w="15240">
+            <a:solidFill>
+              <a:srgbClr val="0070F3"/>
+            </a:solidFill>
+            <a:prstDash val="dash"/>
+          </a:ln>
+          <a:effectLst/>
+        </p:spPr>
+        <p:style>
+          <a:lnRef idx="1">
+            <a:schemeClr val="accent1"/>
+          </a:lnRef>
+          <a:fillRef idx="3">
+            <a:schemeClr val="accent1"/>
+          </a:fillRef>
+          <a:effectRef idx="2">
+            <a:schemeClr val="accent1"/>
+          </a:effectRef>
+          <a:fontRef idx="minor">
+            <a:schemeClr val="lt1"/>
+          </a:fontRef>
+        </p:style>
+        <p:txBody>
+          <a:bodyPr rtlCol="0" anchor="ctr"/>
+          <a:lstStyle/>
+          <a:p/>
+        </p:txBody>
+      </p:sp>
+      <p:pic>
+        <p:nvPicPr>
+          <p:cNvPr id="50" name="Picture 49" descr="route--0070f3.256.png"/>
+          <p:cNvPicPr>
+            <a:picLocks noChangeAspect="1"/>
+          </p:cNvPicPr>
+          <p:nvPr/>
+        </p:nvPicPr>
+        <p:blipFill>
+          <a:blip r:embed="rId6"/>
+          <a:stretch>
+            <a:fillRect/>
+          </a:stretch>
+        </p:blipFill>
+        <p:spPr>
+          <a:xfrm>
+            <a:off x="7112000" y="2108200"/>
+            <a:ext cx="165100" cy="165100"/>
+          </a:xfrm>
+          <a:prstGeom prst="rect">
+            <a:avLst/>
+          </a:prstGeom>
+        </p:spPr>
+      </p:pic>
+      <p:sp>
+        <p:nvSpPr>
+          <p:cNvPr id="51" name="TextBox 50"/>
+          <p:cNvSpPr txBox="1"/>
+          <p:nvPr/>
+        </p:nvSpPr>
+        <p:spPr>
+          <a:xfrm>
+            <a:off x="6248400" y="1063942"/>
+            <a:ext cx="1177163" cy="315468"/>
+          </a:xfrm>
+          <a:prstGeom prst="rect">
+            <a:avLst/>
+          </a:prstGeom>
+          <a:noFill/>
+        </p:spPr>
+        <p:txBody>
+          <a:bodyPr wrap="none" lIns="0" rIns="0" tIns="0" bIns="0" anchor="t">
+            <a:spAutoFit/>
+          </a:bodyPr>
+          <a:lstStyle/>
+          <a:p>
+            <a:pPr algn="l"/>
+            <a:r>
+              <a:rPr sz="1150" b="1" i="0">
+                <a:solidFill>
+                  <a:srgbClr val="0070F3"/>
+                </a:solidFill>
+                <a:latin typeface="Geist"/>
+              </a:rPr>
+              <a:t>Lp provenance</a:t>
+            </a:r>
+          </a:p>
+        </p:txBody>
+      </p:sp>
+      <p:sp>
+        <p:nvSpPr>
+          <p:cNvPr id="52" name="Rounded Rectangle 51"/>
+          <p:cNvSpPr/>
+          <p:nvPr/>
+        </p:nvSpPr>
+        <p:spPr>
+          <a:xfrm>
+            <a:off x="6223000" y="1397000"/>
+            <a:ext cx="1066800" cy="279400"/>
+          </a:xfrm>
+          <a:prstGeom prst="roundRect">
+            <a:avLst>
+              <a:gd name="adj" fmla="val 18181"/>
+            </a:avLst>
+          </a:prstGeom>
+          <a:solidFill>
+            <a:srgbClr val="FAFAFA"/>
+          </a:solidFill>
+          <a:ln w="12700">
+            <a:solidFill>
+              <a:srgbClr val="F0F0F0"/>
+            </a:solidFill>
+          </a:ln>
+          <a:effectLst/>
+        </p:spPr>
+        <p:style>
+          <a:lnRef idx="1">
+            <a:schemeClr val="accent1"/>
+          </a:lnRef>
+          <a:fillRef idx="3">
+            <a:schemeClr val="accent1"/>
+          </a:fillRef>
+          <a:effectRef idx="2">
+            <a:schemeClr val="accent1"/>
+          </a:effectRef>
+          <a:fontRef idx="minor">
+            <a:schemeClr val="lt1"/>
+          </a:fontRef>
+        </p:style>
+        <p:txBody>
+          <a:bodyPr rtlCol="0" anchor="ctr"/>
+          <a:lstStyle/>
+          <a:p/>
+        </p:txBody>
+      </p:sp>
+      <p:sp>
+        <p:nvSpPr>
+          <p:cNvPr id="53" name="TextBox 52"/>
+          <p:cNvSpPr txBox="1"/>
+          <p:nvPr/>
+        </p:nvSpPr>
+        <p:spPr>
+          <a:xfrm>
+            <a:off x="6219000" y="1434148"/>
+            <a:ext cx="1074801" cy="288036"/>
+          </a:xfrm>
+          <a:prstGeom prst="rect">
+            <a:avLst/>
+          </a:prstGeom>
+          <a:noFill/>
+        </p:spPr>
+        <p:txBody>
+          <a:bodyPr wrap="none" lIns="0" rIns="0" tIns="0" bIns="0" anchor="t">
+            <a:spAutoFit/>
+          </a:bodyPr>
+          <a:lstStyle/>
+          <a:p>
+            <a:pPr algn="ctr"/>
+            <a:r>
+              <a:rPr sz="1050" b="0" i="0">
+                <a:solidFill>
+                  <a:srgbClr val="171717"/>
+                </a:solidFill>
+                <a:latin typeface="Geist Mono"/>
+              </a:rPr>
+              <a:t>channel split</a:t>
+            </a:r>
+          </a:p>
+        </p:txBody>
+      </p:sp>
+      <p:sp>
+        <p:nvSpPr>
+          <p:cNvPr id="54" name="TextBox 53"/>
+          <p:cNvSpPr txBox="1"/>
+          <p:nvPr/>
+        </p:nvSpPr>
+        <p:spPr>
+          <a:xfrm>
+            <a:off x="6248400" y="1762442"/>
+            <a:ext cx="762000" cy="315468"/>
+          </a:xfrm>
+          <a:prstGeom prst="rect">
+            <a:avLst/>
+          </a:prstGeom>
+          <a:noFill/>
+        </p:spPr>
+        <p:txBody>
+          <a:bodyPr wrap="none" lIns="0" rIns="0" tIns="0" bIns="0" anchor="t">
+            <a:spAutoFit/>
+          </a:bodyPr>
+          <a:lstStyle/>
+          <a:p>
+            <a:pPr algn="l"/>
+            <a:r>
+              <a:rPr sz="1150" b="0" i="0">
+                <a:solidFill>
+                  <a:srgbClr val="0070F3"/>
+                </a:solidFill>
+                <a:latin typeface="Geist"/>
+              </a:rPr>
+              <a:t>&lt;1 ms</a:t>
+            </a:r>
+          </a:p>
+        </p:txBody>
+      </p:sp>
+      <p:sp>
+        <p:nvSpPr>
+          <p:cNvPr id="55" name="TextBox 54"/>
+          <p:cNvSpPr txBox="1"/>
+          <p:nvPr/>
+        </p:nvSpPr>
+        <p:spPr>
+          <a:xfrm>
+            <a:off x="6248400" y="2005648"/>
+            <a:ext cx="1157478" cy="288036"/>
+          </a:xfrm>
+          <a:prstGeom prst="rect">
+            <a:avLst/>
+          </a:prstGeom>
+          <a:noFill/>
+        </p:spPr>
+        <p:txBody>
+          <a:bodyPr wrap="none" lIns="0" rIns="0" tIns="0" bIns="0" anchor="t">
+            <a:spAutoFit/>
+          </a:bodyPr>
+          <a:lstStyle/>
+          <a:p>
+            <a:pPr algn="l"/>
+            <a:r>
+              <a:rPr sz="1050" b="0" i="0">
+                <a:solidFill>
+                  <a:srgbClr val="8A8A8A"/>
+                </a:solidFill>
+                <a:latin typeface="Geist"/>
+              </a:rPr>
+              <a:t>session ledger</a:t>
+            </a:r>
+          </a:p>
+        </p:txBody>
+      </p:sp>
+      <p:cxnSp>
+        <p:nvCxnSpPr>
+          <p:cNvPr id="56" name="Connector 55"/>
+          <p:cNvCxnSpPr/>
+          <p:nvPr/>
+        </p:nvCxnSpPr>
+        <p:spPr>
+          <a:xfrm>
+            <a:off x="7404100" y="1536700"/>
+            <a:ext cx="50800" cy="0"/>
+          </a:xfrm>
+          <a:prstGeom prst="line">
+            <a:avLst/>
+          </a:prstGeom>
+          <a:ln w="15240">
+            <a:solidFill>
+              <a:srgbClr val="8A8A8A"/>
+            </a:solidFill>
+          </a:ln>
+        </p:spPr>
+        <p:style>
+          <a:lnRef idx="2">
+            <a:schemeClr val="accent1"/>
+          </a:lnRef>
+          <a:fillRef idx="0">
+            <a:schemeClr val="accent1"/>
+          </a:fillRef>
+          <a:effectRef idx="1">
+            <a:schemeClr val="accent1"/>
+          </a:effectRef>
+          <a:fontRef idx="minor">
+            <a:schemeClr val="tx1"/>
+          </a:fontRef>
+        </p:style>
+      </p:cxnSp>
+      <p:sp>
+        <p:nvSpPr>
+          <p:cNvPr id="57" name="Rounded Rectangle 56"/>
+          <p:cNvSpPr/>
+          <p:nvPr/>
+        </p:nvSpPr>
+        <p:spPr>
+          <a:xfrm>
+            <a:off x="7467600" y="965200"/>
+            <a:ext cx="1270000" cy="1422400"/>
+          </a:xfrm>
+          <a:prstGeom prst="roundRect">
+            <a:avLst>
+              <a:gd name="adj" fmla="val 8000"/>
+            </a:avLst>
+          </a:prstGeom>
+          <a:solidFill>
+            <a:srgbClr val="FFFFFF"/>
+          </a:solidFill>
+          <a:ln w="12700">
+            <a:solidFill>
+              <a:srgbClr val="D8D8D8"/>
+            </a:solidFill>
+            <a:prstDash val="dash"/>
+          </a:ln>
+          <a:effectLst/>
+        </p:spPr>
+        <p:style>
+          <a:lnRef idx="1">
+            <a:schemeClr val="accent1"/>
+          </a:lnRef>
+          <a:fillRef idx="3">
+            <a:schemeClr val="accent1"/>
+          </a:fillRef>
+          <a:effectRef idx="2">
+            <a:schemeClr val="accent1"/>
+          </a:effectRef>
+          <a:fontRef idx="minor">
+            <a:schemeClr val="lt1"/>
+          </a:fontRef>
+        </p:style>
+        <p:txBody>
+          <a:bodyPr rtlCol="0" anchor="ctr"/>
+          <a:lstStyle/>
+          <a:p/>
+        </p:txBody>
+      </p:sp>
+      <p:pic>
+        <p:nvPicPr>
+          <p:cNvPr id="58" name="Picture 57" descr="bulb--171717.256.png"/>
+          <p:cNvPicPr>
+            <a:picLocks noChangeAspect="1"/>
+          </p:cNvPicPr>
+          <p:nvPr/>
+        </p:nvPicPr>
+        <p:blipFill>
+          <a:blip r:embed="rId7"/>
+          <a:stretch>
+            <a:fillRect/>
+          </a:stretch>
+        </p:blipFill>
+        <p:spPr>
+          <a:xfrm>
+            <a:off x="8458200" y="2108200"/>
+            <a:ext cx="165100" cy="165100"/>
+          </a:xfrm>
+          <a:prstGeom prst="rect">
+            <a:avLst/>
+          </a:prstGeom>
+        </p:spPr>
+      </p:pic>
+      <p:sp>
+        <p:nvSpPr>
+          <p:cNvPr id="59" name="TextBox 58"/>
+          <p:cNvSpPr txBox="1"/>
+          <p:nvPr/>
+        </p:nvSpPr>
+        <p:spPr>
+          <a:xfrm>
+            <a:off x="7594600" y="1063942"/>
+            <a:ext cx="996061" cy="315468"/>
+          </a:xfrm>
+          <a:prstGeom prst="rect">
+            <a:avLst/>
+          </a:prstGeom>
+          <a:noFill/>
+        </p:spPr>
+        <p:txBody>
+          <a:bodyPr wrap="none" lIns="0" rIns="0" tIns="0" bIns="0" anchor="t">
+            <a:spAutoFit/>
+          </a:bodyPr>
+          <a:lstStyle/>
+          <a:p>
+            <a:pPr algn="l"/>
+            <a:r>
+              <a:rPr sz="1150" b="1" i="0">
+                <a:solidFill>
+                  <a:srgbClr val="171717"/>
+                </a:solidFill>
+                <a:latin typeface="Geist"/>
+              </a:rPr>
+              <a:t>L3  auditor</a:t>
+            </a:r>
+          </a:p>
+        </p:txBody>
+      </p:sp>
+      <p:sp>
+        <p:nvSpPr>
+          <p:cNvPr id="60" name="Rounded Rectangle 59"/>
+          <p:cNvSpPr/>
+          <p:nvPr/>
+        </p:nvSpPr>
+        <p:spPr>
+          <a:xfrm>
+            <a:off x="7569200" y="1397000"/>
+            <a:ext cx="1066800" cy="279400"/>
+          </a:xfrm>
+          <a:prstGeom prst="roundRect">
+            <a:avLst>
+              <a:gd name="adj" fmla="val 18181"/>
+            </a:avLst>
+          </a:prstGeom>
+          <a:solidFill>
+            <a:srgbClr val="FAFAFA"/>
+          </a:solidFill>
+          <a:ln w="12700">
+            <a:solidFill>
+              <a:srgbClr val="F0F0F0"/>
+            </a:solidFill>
+          </a:ln>
+          <a:effectLst/>
+        </p:spPr>
+        <p:style>
+          <a:lnRef idx="1">
+            <a:schemeClr val="accent1"/>
+          </a:lnRef>
+          <a:fillRef idx="3">
+            <a:schemeClr val="accent1"/>
+          </a:fillRef>
+          <a:effectRef idx="2">
+            <a:schemeClr val="accent1"/>
+          </a:effectRef>
+          <a:fontRef idx="minor">
+            <a:schemeClr val="lt1"/>
+          </a:fontRef>
+        </p:style>
+        <p:txBody>
+          <a:bodyPr rtlCol="0" anchor="ctr"/>
+          <a:lstStyle/>
+          <a:p/>
+        </p:txBody>
+      </p:sp>
+      <p:sp>
+        <p:nvSpPr>
+          <p:cNvPr id="61" name="TextBox 60"/>
+          <p:cNvSpPr txBox="1"/>
+          <p:nvPr/>
+        </p:nvSpPr>
+        <p:spPr>
+          <a:xfrm>
+            <a:off x="7647877" y="1434148"/>
+            <a:ext cx="909447" cy="288036"/>
+          </a:xfrm>
+          <a:prstGeom prst="rect">
+            <a:avLst/>
+          </a:prstGeom>
+          <a:noFill/>
+        </p:spPr>
+        <p:txBody>
+          <a:bodyPr wrap="none" lIns="0" rIns="0" tIns="0" bIns="0" anchor="t">
+            <a:spAutoFit/>
+          </a:bodyPr>
+          <a:lstStyle/>
+          <a:p>
+            <a:pPr algn="ctr"/>
+            <a:r>
+              <a:rPr sz="1050" b="0" i="0">
+                <a:solidFill>
+                  <a:srgbClr val="171717"/>
+                </a:solidFill>
+                <a:latin typeface="Geist Mono"/>
+              </a:rPr>
+              <a:t>stated task</a:t>
+            </a:r>
+          </a:p>
+        </p:txBody>
+      </p:sp>
+      <p:sp>
+        <p:nvSpPr>
+          <p:cNvPr id="62" name="TextBox 61"/>
+          <p:cNvSpPr txBox="1"/>
+          <p:nvPr/>
+        </p:nvSpPr>
+        <p:spPr>
+          <a:xfrm>
+            <a:off x="7594600" y="1762442"/>
+            <a:ext cx="762000" cy="315468"/>
+          </a:xfrm>
+          <a:prstGeom prst="rect">
+            <a:avLst/>
+          </a:prstGeom>
+          <a:noFill/>
+        </p:spPr>
+        <p:txBody>
+          <a:bodyPr wrap="none" lIns="0" rIns="0" tIns="0" bIns="0" anchor="t">
+            <a:spAutoFit/>
+          </a:bodyPr>
+          <a:lstStyle/>
+          <a:p>
+            <a:pPr algn="l"/>
+            <a:r>
+              <a:rPr sz="1150" b="0" i="0">
+                <a:solidFill>
+                  <a:srgbClr val="4D4D4D"/>
+                </a:solidFill>
+                <a:latin typeface="Geist"/>
+              </a:rPr>
+              <a:t>1–2 s</a:t>
+            </a:r>
+          </a:p>
+        </p:txBody>
+      </p:sp>
+      <p:sp>
+        <p:nvSpPr>
+          <p:cNvPr id="63" name="TextBox 62"/>
+          <p:cNvSpPr txBox="1"/>
+          <p:nvPr/>
+        </p:nvSpPr>
+        <p:spPr>
+          <a:xfrm>
+            <a:off x="7594600" y="2005648"/>
+            <a:ext cx="1322832" cy="288036"/>
+          </a:xfrm>
+          <a:prstGeom prst="rect">
+            <a:avLst/>
+          </a:prstGeom>
+          <a:noFill/>
+        </p:spPr>
+        <p:txBody>
+          <a:bodyPr wrap="none" lIns="0" rIns="0" tIns="0" bIns="0" anchor="t">
+            <a:spAutoFit/>
+          </a:bodyPr>
+          <a:lstStyle/>
+          <a:p>
+            <a:pPr algn="l"/>
+            <a:r>
+              <a:rPr sz="1050" b="0" i="0">
+                <a:solidFill>
+                  <a:srgbClr val="8A8A8A"/>
+                </a:solidFill>
+                <a:latin typeface="Geist"/>
+              </a:rPr>
+              <a:t>pre / post check</a:t>
+            </a:r>
+          </a:p>
+        </p:txBody>
+      </p:sp>
+      <p:cxnSp>
+        <p:nvCxnSpPr>
+          <p:cNvPr id="64" name="Connector 63"/>
+          <p:cNvCxnSpPr/>
+          <p:nvPr/>
+        </p:nvCxnSpPr>
+        <p:spPr>
+          <a:xfrm>
+            <a:off x="8750300" y="1536700"/>
+            <a:ext cx="50800" cy="0"/>
+          </a:xfrm>
+          <a:prstGeom prst="line">
+            <a:avLst/>
+          </a:prstGeom>
+          <a:ln w="15240">
+            <a:solidFill>
+              <a:srgbClr val="8A8A8A"/>
+            </a:solidFill>
+          </a:ln>
+        </p:spPr>
+        <p:style>
+          <a:lnRef idx="2">
+            <a:schemeClr val="accent1"/>
+          </a:lnRef>
+          <a:fillRef idx="0">
+            <a:schemeClr val="accent1"/>
+          </a:fillRef>
+          <a:effectRef idx="1">
+            <a:schemeClr val="accent1"/>
+          </a:effectRef>
+          <a:fontRef idx="minor">
+            <a:schemeClr val="tx1"/>
+          </a:fontRef>
+        </p:style>
+      </p:cxnSp>
+      <p:sp>
+        <p:nvSpPr>
+          <p:cNvPr id="65" name="Rounded Rectangle 64"/>
+          <p:cNvSpPr/>
+          <p:nvPr/>
+        </p:nvSpPr>
+        <p:spPr>
+          <a:xfrm>
+            <a:off x="8813800" y="965200"/>
+            <a:ext cx="1270000" cy="1422400"/>
+          </a:xfrm>
+          <a:prstGeom prst="roundRect">
+            <a:avLst>
+              <a:gd name="adj" fmla="val 8000"/>
+            </a:avLst>
+          </a:prstGeom>
+          <a:solidFill>
+            <a:srgbClr val="FFFFFF"/>
+          </a:solidFill>
+          <a:ln w="12700">
+            <a:solidFill>
+              <a:srgbClr val="D8D8D8"/>
+            </a:solidFill>
+          </a:ln>
+          <a:effectLst/>
+        </p:spPr>
+        <p:style>
+          <a:lnRef idx="1">
+            <a:schemeClr val="accent1"/>
+          </a:lnRef>
+          <a:fillRef idx="3">
+            <a:schemeClr val="accent1"/>
+          </a:fillRef>
+          <a:effectRef idx="2">
+            <a:schemeClr val="accent1"/>
+          </a:effectRef>
+          <a:fontRef idx="minor">
+            <a:schemeClr val="lt1"/>
+          </a:fontRef>
+        </p:style>
+        <p:txBody>
+          <a:bodyPr rtlCol="0" anchor="ctr"/>
+          <a:lstStyle/>
+          <a:p/>
+        </p:txBody>
+      </p:sp>
+      <p:pic>
+        <p:nvPicPr>
+          <p:cNvPr id="66" name="Picture 65" descr="scale--171717.256.png"/>
+          <p:cNvPicPr>
+            <a:picLocks noChangeAspect="1"/>
+          </p:cNvPicPr>
+          <p:nvPr/>
+        </p:nvPicPr>
+        <p:blipFill>
+          <a:blip r:embed="rId8"/>
+          <a:stretch>
+            <a:fillRect/>
+          </a:stretch>
+        </p:blipFill>
+        <p:spPr>
+          <a:xfrm>
+            <a:off x="9804400" y="2108200"/>
+            <a:ext cx="165100" cy="165100"/>
+          </a:xfrm>
+          <a:prstGeom prst="rect">
+            <a:avLst/>
+          </a:prstGeom>
+        </p:spPr>
+      </p:pic>
+      <p:sp>
+        <p:nvSpPr>
+          <p:cNvPr id="67" name="TextBox 66"/>
+          <p:cNvSpPr txBox="1"/>
+          <p:nvPr/>
+        </p:nvSpPr>
+        <p:spPr>
+          <a:xfrm>
+            <a:off x="8940800" y="1063942"/>
+            <a:ext cx="905510" cy="315468"/>
+          </a:xfrm>
+          <a:prstGeom prst="rect">
+            <a:avLst/>
+          </a:prstGeom>
+          <a:noFill/>
+        </p:spPr>
+        <p:txBody>
+          <a:bodyPr wrap="none" lIns="0" rIns="0" tIns="0" bIns="0" anchor="t">
+            <a:spAutoFit/>
+          </a:bodyPr>
+          <a:lstStyle/>
+          <a:p>
+            <a:pPr algn="l"/>
+            <a:r>
+              <a:rPr sz="1150" b="1" i="0">
+                <a:solidFill>
+                  <a:srgbClr val="171717"/>
+                </a:solidFill>
+                <a:latin typeface="Geist"/>
+              </a:rPr>
+              <a:t>Policy DSL</a:t>
+            </a:r>
+          </a:p>
+        </p:txBody>
+      </p:sp>
+      <p:sp>
+        <p:nvSpPr>
+          <p:cNvPr id="68" name="Rounded Rectangle 67"/>
+          <p:cNvSpPr/>
+          <p:nvPr/>
+        </p:nvSpPr>
+        <p:spPr>
+          <a:xfrm>
+            <a:off x="8915400" y="1397000"/>
+            <a:ext cx="1066800" cy="279400"/>
+          </a:xfrm>
+          <a:prstGeom prst="roundRect">
+            <a:avLst>
+              <a:gd name="adj" fmla="val 18181"/>
+            </a:avLst>
+          </a:prstGeom>
+          <a:solidFill>
+            <a:srgbClr val="FAFAFA"/>
+          </a:solidFill>
+          <a:ln w="12700">
+            <a:solidFill>
+              <a:srgbClr val="F0F0F0"/>
+            </a:solidFill>
+          </a:ln>
+          <a:effectLst/>
+        </p:spPr>
+        <p:style>
+          <a:lnRef idx="1">
+            <a:schemeClr val="accent1"/>
+          </a:lnRef>
+          <a:fillRef idx="3">
+            <a:schemeClr val="accent1"/>
+          </a:fillRef>
+          <a:effectRef idx="2">
+            <a:schemeClr val="accent1"/>
+          </a:effectRef>
+          <a:fontRef idx="minor">
+            <a:schemeClr val="lt1"/>
+          </a:fontRef>
+        </p:style>
+        <p:txBody>
+          <a:bodyPr rtlCol="0" anchor="ctr"/>
+          <a:lstStyle/>
+          <a:p/>
+        </p:txBody>
+      </p:sp>
+      <p:sp>
+        <p:nvSpPr>
+          <p:cNvPr id="69" name="TextBox 68"/>
+          <p:cNvSpPr txBox="1"/>
+          <p:nvPr/>
+        </p:nvSpPr>
+        <p:spPr>
+          <a:xfrm>
+            <a:off x="9067800" y="1434148"/>
+            <a:ext cx="762000" cy="288036"/>
+          </a:xfrm>
+          <a:prstGeom prst="rect">
+            <a:avLst/>
+          </a:prstGeom>
+          <a:noFill/>
+        </p:spPr>
+        <p:txBody>
+          <a:bodyPr wrap="none" lIns="0" rIns="0" tIns="0" bIns="0" anchor="t">
+            <a:spAutoFit/>
+          </a:bodyPr>
+          <a:lstStyle/>
+          <a:p>
+            <a:pPr algn="ctr"/>
+            <a:r>
+              <a:rPr sz="1050" b="0" i="0">
+                <a:solidFill>
+                  <a:srgbClr val="171717"/>
+                </a:solidFill>
+                <a:latin typeface="Geist Mono"/>
+              </a:rPr>
+              <a:t>all facts</a:t>
+            </a:r>
+          </a:p>
+        </p:txBody>
+      </p:sp>
+      <p:sp>
+        <p:nvSpPr>
+          <p:cNvPr id="70" name="TextBox 69"/>
+          <p:cNvSpPr txBox="1"/>
+          <p:nvPr/>
+        </p:nvSpPr>
+        <p:spPr>
+          <a:xfrm>
+            <a:off x="8940800" y="1762442"/>
+            <a:ext cx="762000" cy="315468"/>
+          </a:xfrm>
+          <a:prstGeom prst="rect">
+            <a:avLst/>
+          </a:prstGeom>
+          <a:noFill/>
+        </p:spPr>
+        <p:txBody>
+          <a:bodyPr wrap="none" lIns="0" rIns="0" tIns="0" bIns="0" anchor="t">
+            <a:spAutoFit/>
+          </a:bodyPr>
+          <a:lstStyle/>
+          <a:p>
+            <a:pPr algn="l"/>
+            <a:r>
+              <a:rPr sz="1150" b="0" i="0">
+                <a:solidFill>
+                  <a:srgbClr val="4D4D4D"/>
+                </a:solidFill>
+                <a:latin typeface="Geist"/>
+              </a:rPr>
+              <a:t>constant</a:t>
+            </a:r>
+          </a:p>
+        </p:txBody>
+      </p:sp>
+      <p:sp>
+        <p:nvSpPr>
+          <p:cNvPr id="71" name="TextBox 70"/>
+          <p:cNvSpPr txBox="1"/>
+          <p:nvPr/>
+        </p:nvSpPr>
+        <p:spPr>
+          <a:xfrm>
+            <a:off x="8940800" y="2005648"/>
+            <a:ext cx="1074801" cy="288036"/>
+          </a:xfrm>
+          <a:prstGeom prst="rect">
+            <a:avLst/>
+          </a:prstGeom>
+          <a:noFill/>
+        </p:spPr>
+        <p:txBody>
+          <a:bodyPr wrap="none" lIns="0" rIns="0" tIns="0" bIns="0" anchor="t">
+            <a:spAutoFit/>
+          </a:bodyPr>
+          <a:lstStyle/>
+          <a:p>
+            <a:pPr algn="l"/>
+            <a:r>
+              <a:rPr sz="1050" b="0" i="0">
+                <a:solidFill>
+                  <a:srgbClr val="8A8A8A"/>
+                </a:solidFill>
+                <a:latin typeface="Geist"/>
+              </a:rPr>
+              <a:t>tightens only</a:t>
+            </a:r>
+          </a:p>
+        </p:txBody>
+      </p:sp>
+      <p:sp>
+        <p:nvSpPr>
+          <p:cNvPr id="72" name="TextBox 71"/>
+          <p:cNvSpPr txBox="1"/>
+          <p:nvPr/>
+        </p:nvSpPr>
+        <p:spPr>
+          <a:xfrm>
+            <a:off x="3479800" y="2667635"/>
+            <a:ext cx="818896" cy="356616"/>
+          </a:xfrm>
+          <a:prstGeom prst="rect">
+            <a:avLst/>
+          </a:prstGeom>
+          <a:noFill/>
+        </p:spPr>
+        <p:txBody>
+          <a:bodyPr wrap="none" lIns="0" rIns="0" tIns="0" bIns="0" anchor="t">
+            <a:spAutoFit/>
+          </a:bodyPr>
+          <a:lstStyle/>
+          <a:p>
+            <a:pPr algn="l"/>
+            <a:r>
+              <a:rPr sz="1300" b="1" i="0">
+                <a:solidFill>
+                  <a:srgbClr val="171717"/>
+                </a:solidFill>
+                <a:latin typeface="Geist"/>
+              </a:rPr>
+              <a:t>decision</a:t>
+            </a:r>
+          </a:p>
+        </p:txBody>
+      </p:sp>
+      <p:sp>
+        <p:nvSpPr>
+          <p:cNvPr id="73" name="Rounded Rectangle 72"/>
+          <p:cNvSpPr/>
+          <p:nvPr/>
+        </p:nvSpPr>
+        <p:spPr>
+          <a:xfrm>
+            <a:off x="4445000" y="2590800"/>
+            <a:ext cx="1168400" cy="406400"/>
+          </a:xfrm>
+          <a:prstGeom prst="roundRect">
+            <a:avLst>
+              <a:gd name="adj" fmla="val 50000"/>
+            </a:avLst>
+          </a:prstGeom>
+          <a:solidFill>
+            <a:srgbClr val="D7F2E7"/>
+          </a:solidFill>
+          <a:ln w="12700">
+            <a:solidFill>
+              <a:srgbClr val="D7F2E7"/>
+            </a:solidFill>
+          </a:ln>
+          <a:effectLst/>
+        </p:spPr>
+        <p:style>
+          <a:lnRef idx="1">
+            <a:schemeClr val="accent1"/>
+          </a:lnRef>
+          <a:fillRef idx="3">
+            <a:schemeClr val="accent1"/>
+          </a:fillRef>
+          <a:effectRef idx="2">
+            <a:schemeClr val="accent1"/>
+          </a:effectRef>
+          <a:fontRef idx="minor">
+            <a:schemeClr val="lt1"/>
+          </a:fontRef>
+        </p:style>
+        <p:txBody>
+          <a:bodyPr rtlCol="0" anchor="ctr"/>
+          <a:lstStyle/>
+          <a:p/>
+        </p:txBody>
+      </p:sp>
+      <p:sp>
+        <p:nvSpPr>
+          <p:cNvPr id="74" name="TextBox 73"/>
+          <p:cNvSpPr txBox="1"/>
+          <p:nvPr/>
+        </p:nvSpPr>
+        <p:spPr>
+          <a:xfrm>
+            <a:off x="4648200" y="2667635"/>
+            <a:ext cx="762000" cy="356616"/>
+          </a:xfrm>
+          <a:prstGeom prst="rect">
+            <a:avLst/>
+          </a:prstGeom>
+          <a:noFill/>
+        </p:spPr>
+        <p:txBody>
+          <a:bodyPr wrap="none" lIns="0" rIns="0" tIns="0" bIns="0" anchor="t">
+            <a:spAutoFit/>
+          </a:bodyPr>
+          <a:lstStyle/>
+          <a:p>
+            <a:pPr algn="ctr"/>
+            <a:r>
+              <a:rPr sz="1300" b="1" i="0">
+                <a:solidFill>
+                  <a:srgbClr val="0E8A5F"/>
+                </a:solidFill>
+                <a:latin typeface="Geist"/>
+              </a:rPr>
+              <a:t>allow</a:t>
+            </a:r>
+          </a:p>
+        </p:txBody>
+      </p:sp>
+      <p:sp>
+        <p:nvSpPr>
+          <p:cNvPr id="75" name="Rounded Rectangle 74"/>
+          <p:cNvSpPr/>
+          <p:nvPr/>
+        </p:nvSpPr>
+        <p:spPr>
+          <a:xfrm>
+            <a:off x="5765800" y="2590800"/>
+            <a:ext cx="1168400" cy="406400"/>
+          </a:xfrm>
+          <a:prstGeom prst="roundRect">
+            <a:avLst>
+              <a:gd name="adj" fmla="val 50000"/>
+            </a:avLst>
+          </a:prstGeom>
+          <a:solidFill>
+            <a:srgbClr val="FFE3E3"/>
+          </a:solidFill>
+          <a:ln w="12700">
+            <a:solidFill>
+              <a:srgbClr val="FFE3E3"/>
+            </a:solidFill>
+          </a:ln>
+          <a:effectLst/>
+        </p:spPr>
+        <p:style>
+          <a:lnRef idx="1">
+            <a:schemeClr val="accent1"/>
+          </a:lnRef>
+          <a:fillRef idx="3">
+            <a:schemeClr val="accent1"/>
+          </a:fillRef>
+          <a:effectRef idx="2">
+            <a:schemeClr val="accent1"/>
+          </a:effectRef>
+          <a:fontRef idx="minor">
+            <a:schemeClr val="lt1"/>
+          </a:fontRef>
+        </p:style>
+        <p:txBody>
+          <a:bodyPr rtlCol="0" anchor="ctr"/>
+          <a:lstStyle/>
+          <a:p/>
+        </p:txBody>
+      </p:sp>
+      <p:sp>
+        <p:nvSpPr>
+          <p:cNvPr id="76" name="TextBox 75"/>
+          <p:cNvSpPr txBox="1"/>
+          <p:nvPr/>
+        </p:nvSpPr>
+        <p:spPr>
+          <a:xfrm>
+            <a:off x="5969000" y="2667635"/>
+            <a:ext cx="762000" cy="356616"/>
+          </a:xfrm>
+          <a:prstGeom prst="rect">
+            <a:avLst/>
+          </a:prstGeom>
+          <a:noFill/>
+        </p:spPr>
+        <p:txBody>
+          <a:bodyPr wrap="none" lIns="0" rIns="0" tIns="0" bIns="0" anchor="t">
+            <a:spAutoFit/>
+          </a:bodyPr>
+          <a:lstStyle/>
+          <a:p>
+            <a:pPr algn="ctr"/>
+            <a:r>
+              <a:rPr sz="1300" b="1" i="0">
+                <a:solidFill>
+                  <a:srgbClr val="D40000"/>
+                </a:solidFill>
+                <a:latin typeface="Geist"/>
+              </a:rPr>
+              <a:t>block</a:t>
+            </a:r>
+          </a:p>
+        </p:txBody>
+      </p:sp>
+      <p:sp>
+        <p:nvSpPr>
+          <p:cNvPr id="77" name="Rounded Rectangle 76"/>
+          <p:cNvSpPr/>
+          <p:nvPr/>
+        </p:nvSpPr>
+        <p:spPr>
+          <a:xfrm>
+            <a:off x="7086600" y="2590800"/>
+            <a:ext cx="1320800" cy="406400"/>
+          </a:xfrm>
+          <a:prstGeom prst="roundRect">
+            <a:avLst>
+              <a:gd name="adj" fmla="val 50000"/>
+            </a:avLst>
+          </a:prstGeom>
+          <a:solidFill>
+            <a:srgbClr val="FFEFCF"/>
+          </a:solidFill>
+          <a:ln w="12700">
+            <a:solidFill>
+              <a:srgbClr val="FFEFCF"/>
+            </a:solidFill>
+          </a:ln>
+          <a:effectLst/>
+        </p:spPr>
+        <p:style>
+          <a:lnRef idx="1">
+            <a:schemeClr val="accent1"/>
+          </a:lnRef>
+          <a:fillRef idx="3">
+            <a:schemeClr val="accent1"/>
+          </a:fillRef>
+          <a:effectRef idx="2">
+            <a:schemeClr val="accent1"/>
+          </a:effectRef>
+          <a:fontRef idx="minor">
+            <a:schemeClr val="lt1"/>
+          </a:fontRef>
+        </p:style>
+        <p:txBody>
+          <a:bodyPr rtlCol="0" anchor="ctr"/>
+          <a:lstStyle/>
+          <a:p/>
+        </p:txBody>
+      </p:sp>
+      <p:sp>
+        <p:nvSpPr>
+          <p:cNvPr id="78" name="TextBox 77"/>
+          <p:cNvSpPr txBox="1"/>
+          <p:nvPr/>
+        </p:nvSpPr>
+        <p:spPr>
+          <a:xfrm>
+            <a:off x="7366000" y="2667635"/>
+            <a:ext cx="762000" cy="356616"/>
+          </a:xfrm>
+          <a:prstGeom prst="rect">
+            <a:avLst/>
+          </a:prstGeom>
+          <a:noFill/>
+        </p:spPr>
+        <p:txBody>
+          <a:bodyPr wrap="none" lIns="0" rIns="0" tIns="0" bIns="0" anchor="t">
+            <a:spAutoFit/>
+          </a:bodyPr>
+          <a:lstStyle/>
+          <a:p>
+            <a:pPr algn="ctr"/>
+            <a:r>
+              <a:rPr sz="1300" b="1" i="0">
+                <a:solidFill>
+                  <a:srgbClr val="A96500"/>
+                </a:solidFill>
+                <a:latin typeface="Geist"/>
+              </a:rPr>
+              <a:t>pending</a:t>
+            </a:r>
+          </a:p>
+        </p:txBody>
+      </p:sp>
+      <p:cxnSp>
+        <p:nvCxnSpPr>
+          <p:cNvPr id="79" name="Connector 78"/>
+          <p:cNvCxnSpPr/>
+          <p:nvPr/>
+        </p:nvCxnSpPr>
+        <p:spPr>
+          <a:xfrm>
+            <a:off x="8483600" y="2794000"/>
+            <a:ext cx="228600" cy="0"/>
+          </a:xfrm>
+          <a:prstGeom prst="line">
+            <a:avLst/>
+          </a:prstGeom>
+          <a:ln w="20320">
+            <a:solidFill>
+              <a:srgbClr val="8A8A8A"/>
+            </a:solidFill>
+          </a:ln>
+        </p:spPr>
+        <p:style>
+          <a:lnRef idx="2">
+            <a:schemeClr val="accent1"/>
+          </a:lnRef>
+          <a:fillRef idx="0">
+            <a:schemeClr val="accent1"/>
+          </a:fillRef>
+          <a:effectRef idx="1">
+            <a:schemeClr val="accent1"/>
+          </a:effectRef>
+          <a:fontRef idx="minor">
+            <a:schemeClr val="tx1"/>
+          </a:fontRef>
+        </p:style>
+      </p:cxnSp>
+      <p:sp>
+        <p:nvSpPr>
+          <p:cNvPr id="80" name="Rounded Rectangle 79"/>
+          <p:cNvSpPr/>
+          <p:nvPr/>
+        </p:nvSpPr>
+        <p:spPr>
+          <a:xfrm>
+            <a:off x="8763000" y="2590800"/>
+            <a:ext cx="1397000" cy="406400"/>
+          </a:xfrm>
+          <a:prstGeom prst="roundRect">
+            <a:avLst>
+              <a:gd name="adj" fmla="val 21875"/>
+            </a:avLst>
+          </a:prstGeom>
+          <a:solidFill>
+            <a:srgbClr val="FFFFFF"/>
+          </a:solidFill>
+          <a:ln w="12700">
+            <a:solidFill>
+              <a:srgbClr val="F0F0F0"/>
+            </a:solidFill>
+          </a:ln>
+          <a:effectLst/>
+        </p:spPr>
+        <p:style>
+          <a:lnRef idx="1">
+            <a:schemeClr val="accent1"/>
+          </a:lnRef>
+          <a:fillRef idx="3">
+            <a:schemeClr val="accent1"/>
+          </a:fillRef>
+          <a:effectRef idx="2">
+            <a:schemeClr val="accent1"/>
+          </a:effectRef>
+          <a:fontRef idx="minor">
+            <a:schemeClr val="lt1"/>
+          </a:fontRef>
+        </p:style>
+        <p:txBody>
+          <a:bodyPr rtlCol="0" anchor="ctr"/>
+          <a:lstStyle/>
+          <a:p/>
+        </p:txBody>
+      </p:sp>
+      <p:pic>
+        <p:nvPicPr>
+          <p:cNvPr id="81" name="Picture 80" descr="user-check--4d4d4d.256.png"/>
+          <p:cNvPicPr>
+            <a:picLocks noChangeAspect="1"/>
+          </p:cNvPicPr>
+          <p:nvPr/>
+        </p:nvPicPr>
+        <p:blipFill>
+          <a:blip r:embed="rId9"/>
+          <a:stretch>
+            <a:fillRect/>
+          </a:stretch>
+        </p:blipFill>
+        <p:spPr>
+          <a:xfrm>
+            <a:off x="8877300" y="2705100"/>
+            <a:ext cx="177800" cy="177800"/>
+          </a:xfrm>
+          <a:prstGeom prst="rect">
+            <a:avLst/>
+          </a:prstGeom>
+        </p:spPr>
+      </p:pic>
+      <p:sp>
+        <p:nvSpPr>
+          <p:cNvPr id="82" name="TextBox 81"/>
+          <p:cNvSpPr txBox="1"/>
+          <p:nvPr/>
+        </p:nvSpPr>
+        <p:spPr>
+          <a:xfrm>
+            <a:off x="9131300" y="2678620"/>
+            <a:ext cx="1267714" cy="315468"/>
+          </a:xfrm>
+          <a:prstGeom prst="rect">
+            <a:avLst/>
+          </a:prstGeom>
+          <a:noFill/>
+        </p:spPr>
+        <p:txBody>
+          <a:bodyPr wrap="none" lIns="0" rIns="0" tIns="0" bIns="0" anchor="t">
+            <a:spAutoFit/>
+          </a:bodyPr>
+          <a:lstStyle/>
+          <a:p>
+            <a:pPr algn="l"/>
+            <a:r>
+              <a:rPr sz="1150" b="0" i="0">
+                <a:solidFill>
+                  <a:srgbClr val="171717"/>
+                </a:solidFill>
+                <a:latin typeface="Geist"/>
+              </a:rPr>
+              <a:t>human approval</a:t>
+            </a:r>
+          </a:p>
+        </p:txBody>
+      </p:sp>
+      <p:sp>
+        <p:nvSpPr>
+          <p:cNvPr id="83" name="Rounded Rectangle 82"/>
+          <p:cNvSpPr/>
+          <p:nvPr/>
+        </p:nvSpPr>
+        <p:spPr>
+          <a:xfrm>
+            <a:off x="10033000" y="2489200"/>
+            <a:ext cx="190500" cy="190500"/>
+          </a:xfrm>
+          <a:prstGeom prst="roundRect">
+            <a:avLst>
+              <a:gd name="adj" fmla="val 50000"/>
+            </a:avLst>
+          </a:prstGeom>
+          <a:solidFill>
+            <a:srgbClr val="171717"/>
+          </a:solidFill>
+          <a:ln w="12700">
+            <a:solidFill>
+              <a:srgbClr val="171717"/>
+            </a:solidFill>
+          </a:ln>
+          <a:effectLst/>
+        </p:spPr>
+        <p:style>
+          <a:lnRef idx="1">
+            <a:schemeClr val="accent1"/>
+          </a:lnRef>
+          <a:fillRef idx="3">
+            <a:schemeClr val="accent1"/>
+          </a:fillRef>
+          <a:effectRef idx="2">
+            <a:schemeClr val="accent1"/>
+          </a:effectRef>
+          <a:fontRef idx="minor">
+            <a:schemeClr val="lt1"/>
+          </a:fontRef>
+        </p:style>
+        <p:txBody>
+          <a:bodyPr rtlCol="0" anchor="ctr"/>
+          <a:lstStyle/>
+          <a:p/>
+        </p:txBody>
+      </p:sp>
+      <p:sp>
+        <p:nvSpPr>
+          <p:cNvPr id="84" name="TextBox 83"/>
+          <p:cNvSpPr txBox="1"/>
+          <p:nvPr/>
+        </p:nvSpPr>
+        <p:spPr>
+          <a:xfrm>
+            <a:off x="9747250" y="2409825"/>
+            <a:ext cx="762000" cy="411480"/>
+          </a:xfrm>
+          <a:prstGeom prst="rect">
+            <a:avLst/>
+          </a:prstGeom>
+          <a:noFill/>
+        </p:spPr>
+        <p:txBody>
+          <a:bodyPr wrap="none" lIns="0" rIns="0" tIns="0" bIns="0" anchor="t">
+            <a:spAutoFit/>
+          </a:bodyPr>
+          <a:lstStyle/>
+          <a:p>
+            <a:pPr algn="ctr"/>
+            <a:r>
+              <a:rPr sz="1500" b="1" i="0">
+                <a:solidFill>
+                  <a:srgbClr val="FFFFFF"/>
+                </a:solidFill>
+                <a:latin typeface="Geist"/>
+              </a:rPr>
+              <a:t>2</a:t>
+            </a:r>
+          </a:p>
+        </p:txBody>
+      </p:sp>
+      <p:cxnSp>
+        <p:nvCxnSpPr>
+          <p:cNvPr id="85" name="Connector 84"/>
+          <p:cNvCxnSpPr/>
+          <p:nvPr/>
+        </p:nvCxnSpPr>
+        <p:spPr>
+          <a:xfrm>
+            <a:off x="5029200" y="3022600"/>
+            <a:ext cx="0" cy="558800"/>
+          </a:xfrm>
+          <a:prstGeom prst="line">
+            <a:avLst/>
+          </a:prstGeom>
+          <a:ln w="22860">
+            <a:solidFill>
+              <a:srgbClr val="0E8A5F"/>
+            </a:solidFill>
+          </a:ln>
+        </p:spPr>
+        <p:style>
+          <a:lnRef idx="2">
+            <a:schemeClr val="accent1"/>
+          </a:lnRef>
+          <a:fillRef idx="0">
+            <a:schemeClr val="accent1"/>
+          </a:fillRef>
+          <a:effectRef idx="1">
+            <a:schemeClr val="accent1"/>
+          </a:effectRef>
+          <a:fontRef idx="minor">
+            <a:schemeClr val="tx1"/>
+          </a:fontRef>
+        </p:style>
+      </p:cxnSp>
+      <p:cxnSp>
+        <p:nvCxnSpPr>
+          <p:cNvPr id="86" name="Connector 85"/>
+          <p:cNvCxnSpPr/>
+          <p:nvPr/>
+        </p:nvCxnSpPr>
+        <p:spPr>
+          <a:xfrm flipH="1">
+            <a:off x="1092200" y="3581400"/>
+            <a:ext cx="3937000" cy="0"/>
+          </a:xfrm>
+          <a:prstGeom prst="line">
+            <a:avLst/>
+          </a:prstGeom>
+          <a:ln w="22860">
+            <a:solidFill>
+              <a:srgbClr val="0E8A5F"/>
+            </a:solidFill>
+          </a:ln>
+        </p:spPr>
+        <p:style>
+          <a:lnRef idx="2">
+            <a:schemeClr val="accent1"/>
+          </a:lnRef>
+          <a:fillRef idx="0">
+            <a:schemeClr val="accent1"/>
+          </a:fillRef>
+          <a:effectRef idx="1">
+            <a:schemeClr val="accent1"/>
+          </a:effectRef>
+          <a:fontRef idx="minor">
+            <a:schemeClr val="tx1"/>
+          </a:fontRef>
+        </p:style>
+      </p:cxnSp>
+      <p:cxnSp>
+        <p:nvCxnSpPr>
+          <p:cNvPr id="87" name="Connector 86"/>
+          <p:cNvCxnSpPr/>
+          <p:nvPr/>
+        </p:nvCxnSpPr>
+        <p:spPr>
+          <a:xfrm flipV="1">
+            <a:off x="1092200" y="3276600"/>
+            <a:ext cx="0" cy="304800"/>
+          </a:xfrm>
+          <a:prstGeom prst="line">
+            <a:avLst/>
+          </a:prstGeom>
+          <a:ln w="22860">
+            <a:solidFill>
+              <a:srgbClr val="0E8A5F"/>
+            </a:solidFill>
+          </a:ln>
+        </p:spPr>
+        <p:style>
+          <a:lnRef idx="2">
+            <a:schemeClr val="accent1"/>
+          </a:lnRef>
+          <a:fillRef idx="0">
+            <a:schemeClr val="accent1"/>
+          </a:fillRef>
+          <a:effectRef idx="1">
+            <a:schemeClr val="accent1"/>
+          </a:effectRef>
+          <a:fontRef idx="minor">
+            <a:schemeClr val="tx1"/>
+          </a:fontRef>
+        </p:style>
+      </p:cxnSp>
+      <p:cxnSp>
+        <p:nvCxnSpPr>
+          <p:cNvPr id="88" name="Connector 87"/>
+          <p:cNvCxnSpPr/>
+          <p:nvPr/>
+        </p:nvCxnSpPr>
+        <p:spPr>
+          <a:xfrm>
+            <a:off x="6350000" y="3022600"/>
+            <a:ext cx="0" cy="787400"/>
+          </a:xfrm>
+          <a:prstGeom prst="line">
+            <a:avLst/>
+          </a:prstGeom>
+          <a:ln w="27940">
+            <a:solidFill>
+              <a:srgbClr val="D40000"/>
+            </a:solidFill>
+          </a:ln>
+        </p:spPr>
+        <p:style>
+          <a:lnRef idx="2">
+            <a:schemeClr val="accent1"/>
+          </a:lnRef>
+          <a:fillRef idx="0">
+            <a:schemeClr val="accent1"/>
+          </a:fillRef>
+          <a:effectRef idx="1">
+            <a:schemeClr val="accent1"/>
+          </a:effectRef>
+          <a:fontRef idx="minor">
+            <a:schemeClr val="tx1"/>
+          </a:fontRef>
+        </p:style>
+      </p:cxnSp>
+      <p:cxnSp>
+        <p:nvCxnSpPr>
+          <p:cNvPr id="89" name="Connector 88"/>
+          <p:cNvCxnSpPr/>
+          <p:nvPr/>
+        </p:nvCxnSpPr>
+        <p:spPr>
+          <a:xfrm flipH="1">
+            <a:off x="1397000" y="3810000"/>
+            <a:ext cx="4953000" cy="0"/>
+          </a:xfrm>
+          <a:prstGeom prst="line">
+            <a:avLst/>
+          </a:prstGeom>
+          <a:ln w="27940">
+            <a:solidFill>
+              <a:srgbClr val="D40000"/>
+            </a:solidFill>
+          </a:ln>
+        </p:spPr>
+        <p:style>
+          <a:lnRef idx="2">
+            <a:schemeClr val="accent1"/>
+          </a:lnRef>
+          <a:fillRef idx="0">
+            <a:schemeClr val="accent1"/>
+          </a:fillRef>
+          <a:effectRef idx="1">
+            <a:schemeClr val="accent1"/>
+          </a:effectRef>
+          <a:fontRef idx="minor">
+            <a:schemeClr val="tx1"/>
+          </a:fontRef>
+        </p:style>
+      </p:cxnSp>
+      <p:cxnSp>
+        <p:nvCxnSpPr>
+          <p:cNvPr id="90" name="Connector 89"/>
+          <p:cNvCxnSpPr/>
+          <p:nvPr/>
+        </p:nvCxnSpPr>
+        <p:spPr>
+          <a:xfrm flipV="1">
+            <a:off x="1397000" y="3276600"/>
+            <a:ext cx="0" cy="533400"/>
+          </a:xfrm>
+          <a:prstGeom prst="line">
+            <a:avLst/>
+          </a:prstGeom>
+          <a:ln w="27940">
+            <a:solidFill>
+              <a:srgbClr val="D40000"/>
+            </a:solidFill>
+          </a:ln>
+        </p:spPr>
+        <p:style>
+          <a:lnRef idx="2">
+            <a:schemeClr val="accent1"/>
+          </a:lnRef>
+          <a:fillRef idx="0">
+            <a:schemeClr val="accent1"/>
+          </a:fillRef>
+          <a:effectRef idx="1">
+            <a:schemeClr val="accent1"/>
+          </a:effectRef>
+          <a:fontRef idx="minor">
+            <a:schemeClr val="tx1"/>
+          </a:fontRef>
+        </p:style>
+      </p:cxnSp>
+      <p:cxnSp>
+        <p:nvCxnSpPr>
+          <p:cNvPr id="91" name="Connector 90"/>
+          <p:cNvCxnSpPr/>
+          <p:nvPr/>
+        </p:nvCxnSpPr>
+        <p:spPr>
+          <a:xfrm>
+            <a:off x="7747000" y="3022600"/>
+            <a:ext cx="0" cy="1016000"/>
+          </a:xfrm>
+          <a:prstGeom prst="line">
+            <a:avLst/>
+          </a:prstGeom>
+          <a:ln w="22860">
+            <a:solidFill>
+              <a:srgbClr val="A96500"/>
+            </a:solidFill>
+          </a:ln>
+        </p:spPr>
+        <p:style>
+          <a:lnRef idx="2">
+            <a:schemeClr val="accent1"/>
+          </a:lnRef>
+          <a:fillRef idx="0">
+            <a:schemeClr val="accent1"/>
+          </a:fillRef>
+          <a:effectRef idx="1">
+            <a:schemeClr val="accent1"/>
+          </a:effectRef>
+          <a:fontRef idx="minor">
+            <a:schemeClr val="tx1"/>
+          </a:fontRef>
+        </p:style>
+      </p:cxnSp>
+      <p:cxnSp>
+        <p:nvCxnSpPr>
+          <p:cNvPr id="92" name="Connector 91"/>
+          <p:cNvCxnSpPr/>
+          <p:nvPr/>
+        </p:nvCxnSpPr>
+        <p:spPr>
+          <a:xfrm flipH="1">
+            <a:off x="787400" y="4038600"/>
+            <a:ext cx="6959600" cy="0"/>
+          </a:xfrm>
+          <a:prstGeom prst="line">
+            <a:avLst/>
+          </a:prstGeom>
+          <a:ln w="22860">
+            <a:solidFill>
+              <a:srgbClr val="A96500"/>
+            </a:solidFill>
+          </a:ln>
+        </p:spPr>
+        <p:style>
+          <a:lnRef idx="2">
+            <a:schemeClr val="accent1"/>
+          </a:lnRef>
+          <a:fillRef idx="0">
+            <a:schemeClr val="accent1"/>
+          </a:fillRef>
+          <a:effectRef idx="1">
+            <a:schemeClr val="accent1"/>
+          </a:effectRef>
+          <a:fontRef idx="minor">
+            <a:schemeClr val="tx1"/>
+          </a:fontRef>
+        </p:style>
+      </p:cxnSp>
+      <p:cxnSp>
+        <p:nvCxnSpPr>
+          <p:cNvPr id="93" name="Connector 92"/>
+          <p:cNvCxnSpPr/>
+          <p:nvPr/>
+        </p:nvCxnSpPr>
+        <p:spPr>
+          <a:xfrm flipV="1">
+            <a:off x="787400" y="3276600"/>
+            <a:ext cx="0" cy="762000"/>
+          </a:xfrm>
+          <a:prstGeom prst="line">
+            <a:avLst/>
+          </a:prstGeom>
+          <a:ln w="22860">
+            <a:solidFill>
+              <a:srgbClr val="A96500"/>
+            </a:solidFill>
+          </a:ln>
+        </p:spPr>
+        <p:style>
+          <a:lnRef idx="2">
+            <a:schemeClr val="accent1"/>
+          </a:lnRef>
+          <a:fillRef idx="0">
+            <a:schemeClr val="accent1"/>
+          </a:fillRef>
+          <a:effectRef idx="1">
+            <a:schemeClr val="accent1"/>
+          </a:effectRef>
+          <a:fontRef idx="minor">
+            <a:schemeClr val="tx1"/>
+          </a:fontRef>
+        </p:style>
+      </p:cxnSp>
+      <p:sp>
+        <p:nvSpPr>
+          <p:cNvPr id="94" name="Rounded Rectangle 93"/>
+          <p:cNvSpPr/>
+          <p:nvPr/>
+        </p:nvSpPr>
+        <p:spPr>
+          <a:xfrm>
+            <a:off x="8128000" y="3327400"/>
+            <a:ext cx="4419600" cy="1092200"/>
+          </a:xfrm>
+          <a:prstGeom prst="roundRect">
+            <a:avLst>
+              <a:gd name="adj" fmla="val 9302"/>
+            </a:avLst>
+          </a:prstGeom>
+          <a:solidFill>
+            <a:srgbClr val="FFFFFF"/>
+          </a:solidFill>
+          <a:ln w="12700">
+            <a:solidFill>
+              <a:srgbClr val="F0F0F0"/>
+            </a:solidFill>
+          </a:ln>
+          <a:effectLst/>
+        </p:spPr>
+        <p:style>
+          <a:lnRef idx="1">
+            <a:schemeClr val="accent1"/>
+          </a:lnRef>
+          <a:fillRef idx="3">
+            <a:schemeClr val="accent1"/>
+          </a:fillRef>
+          <a:effectRef idx="2">
+            <a:schemeClr val="accent1"/>
+          </a:effectRef>
+          <a:fontRef idx="minor">
+            <a:schemeClr val="lt1"/>
+          </a:fontRef>
+        </p:style>
+        <p:txBody>
+          <a:bodyPr rtlCol="0" anchor="ctr"/>
+          <a:lstStyle/>
+          <a:p/>
+        </p:txBody>
+      </p:sp>
+      <p:sp>
+        <p:nvSpPr>
+          <p:cNvPr id="95" name="TextBox 94"/>
+          <p:cNvSpPr txBox="1"/>
+          <p:nvPr/>
+        </p:nvSpPr>
+        <p:spPr>
+          <a:xfrm>
+            <a:off x="8280400" y="3431540"/>
+            <a:ext cx="762000" cy="329184"/>
+          </a:xfrm>
+          <a:prstGeom prst="rect">
+            <a:avLst/>
+          </a:prstGeom>
+          <a:noFill/>
+        </p:spPr>
+        <p:txBody>
+          <a:bodyPr wrap="none" lIns="0" rIns="0" tIns="0" bIns="0" anchor="t">
+            <a:spAutoFit/>
+          </a:bodyPr>
+          <a:lstStyle/>
+          <a:p>
+            <a:pPr algn="l"/>
+            <a:r>
+              <a:rPr sz="1200" b="1" i="0">
+                <a:solidFill>
+                  <a:srgbClr val="0E8A5F"/>
+                </a:solidFill>
+                <a:latin typeface="Geist"/>
+              </a:rPr>
+              <a:t>allow</a:t>
+            </a:r>
+          </a:p>
+        </p:txBody>
+      </p:sp>
+      <p:sp>
+        <p:nvSpPr>
+          <p:cNvPr id="96" name="TextBox 95"/>
+          <p:cNvSpPr txBox="1"/>
+          <p:nvPr/>
+        </p:nvSpPr>
+        <p:spPr>
+          <a:xfrm>
+            <a:off x="9118600" y="3438842"/>
+            <a:ext cx="3803142" cy="315468"/>
+          </a:xfrm>
+          <a:prstGeom prst="rect">
+            <a:avLst/>
+          </a:prstGeom>
+          <a:noFill/>
+        </p:spPr>
+        <p:txBody>
+          <a:bodyPr wrap="none" lIns="0" rIns="0" tIns="0" bIns="0" anchor="t">
+            <a:spAutoFit/>
+          </a:bodyPr>
+          <a:lstStyle/>
+          <a:p>
+            <a:pPr algn="l"/>
+            <a:r>
+              <a:rPr sz="1150" b="0" i="0">
+                <a:solidFill>
+                  <a:srgbClr val="171717"/>
+                </a:solidFill>
+                <a:latin typeface="Geist"/>
+              </a:rPr>
+              <a:t>the tool runs; its result returns normally</a:t>
+            </a:r>
+          </a:p>
+        </p:txBody>
+      </p:sp>
+      <p:sp>
+        <p:nvSpPr>
+          <p:cNvPr id="97" name="TextBox 96"/>
+          <p:cNvSpPr txBox="1"/>
+          <p:nvPr/>
+        </p:nvSpPr>
+        <p:spPr>
+          <a:xfrm>
+            <a:off x="8280400" y="3736340"/>
+            <a:ext cx="762000" cy="329184"/>
+          </a:xfrm>
+          <a:prstGeom prst="rect">
+            <a:avLst/>
+          </a:prstGeom>
+          <a:noFill/>
+        </p:spPr>
+        <p:txBody>
+          <a:bodyPr wrap="none" lIns="0" rIns="0" tIns="0" bIns="0" anchor="t">
+            <a:spAutoFit/>
+          </a:bodyPr>
+          <a:lstStyle/>
+          <a:p>
+            <a:pPr algn="l"/>
+            <a:r>
+              <a:rPr sz="1200" b="1" i="0">
+                <a:solidFill>
+                  <a:srgbClr val="D40000"/>
+                </a:solidFill>
+                <a:latin typeface="Geist"/>
+              </a:rPr>
+              <a:t>block</a:t>
+            </a:r>
+          </a:p>
+        </p:txBody>
+      </p:sp>
+      <p:sp>
+        <p:nvSpPr>
+          <p:cNvPr id="98" name="TextBox 97"/>
+          <p:cNvSpPr txBox="1"/>
+          <p:nvPr/>
+        </p:nvSpPr>
+        <p:spPr>
+          <a:xfrm>
+            <a:off x="9118600" y="3743642"/>
+            <a:ext cx="3531489" cy="315468"/>
+          </a:xfrm>
+          <a:prstGeom prst="rect">
+            <a:avLst/>
+          </a:prstGeom>
+          <a:noFill/>
+        </p:spPr>
+        <p:txBody>
+          <a:bodyPr wrap="none" lIns="0" rIns="0" tIns="0" bIns="0" anchor="t">
+            <a:spAutoFit/>
+          </a:bodyPr>
+          <a:lstStyle/>
+          <a:p>
+            <a:pPr algn="l"/>
+            <a:r>
+              <a:rPr sz="1150" b="0" i="0">
+                <a:solidFill>
+                  <a:srgbClr val="171717"/>
+                </a:solidFill>
+                <a:latin typeface="Geist"/>
+              </a:rPr>
+              <a:t>the tool never runs — a refusal returns</a:t>
+            </a:r>
+          </a:p>
+        </p:txBody>
+      </p:sp>
+      <p:sp>
+        <p:nvSpPr>
+          <p:cNvPr id="99" name="TextBox 98"/>
+          <p:cNvSpPr txBox="1"/>
+          <p:nvPr/>
+        </p:nvSpPr>
+        <p:spPr>
+          <a:xfrm>
+            <a:off x="8280400" y="4041140"/>
+            <a:ext cx="762000" cy="329184"/>
+          </a:xfrm>
+          <a:prstGeom prst="rect">
+            <a:avLst/>
+          </a:prstGeom>
+          <a:noFill/>
+        </p:spPr>
+        <p:txBody>
+          <a:bodyPr wrap="none" lIns="0" rIns="0" tIns="0" bIns="0" anchor="t">
+            <a:spAutoFit/>
+          </a:bodyPr>
+          <a:lstStyle/>
+          <a:p>
+            <a:pPr algn="l"/>
+            <a:r>
+              <a:rPr sz="1200" b="1" i="0">
+                <a:solidFill>
+                  <a:srgbClr val="A96500"/>
+                </a:solidFill>
+                <a:latin typeface="Geist"/>
+              </a:rPr>
+              <a:t>pending</a:t>
+            </a:r>
+          </a:p>
+        </p:txBody>
+      </p:sp>
+      <p:sp>
+        <p:nvSpPr>
+          <p:cNvPr id="100" name="TextBox 99"/>
+          <p:cNvSpPr txBox="1"/>
+          <p:nvPr/>
+        </p:nvSpPr>
+        <p:spPr>
+          <a:xfrm>
+            <a:off x="9118600" y="4048442"/>
+            <a:ext cx="3622040" cy="315468"/>
+          </a:xfrm>
+          <a:prstGeom prst="rect">
+            <a:avLst/>
+          </a:prstGeom>
+          <a:noFill/>
+        </p:spPr>
+        <p:txBody>
+          <a:bodyPr wrap="none" lIns="0" rIns="0" tIns="0" bIns="0" anchor="t">
+            <a:spAutoFit/>
+          </a:bodyPr>
+          <a:lstStyle/>
+          <a:p>
+            <a:pPr algn="l"/>
+            <a:r>
+              <a:rPr sz="1150" b="0" i="0">
+                <a:solidFill>
+                  <a:srgbClr val="171717"/>
+                </a:solidFill>
+                <a:latin typeface="Geist"/>
+              </a:rPr>
+              <a:t>the turn suspends until a person decides</a:t>
+            </a:r>
+          </a:p>
+        </p:txBody>
+      </p:sp>
+      <p:sp>
+        <p:nvSpPr>
+          <p:cNvPr id="101" name="TextBox 100"/>
+          <p:cNvSpPr txBox="1"/>
+          <p:nvPr/>
+        </p:nvSpPr>
+        <p:spPr>
+          <a:xfrm>
+            <a:off x="9118600" y="3896042"/>
+            <a:ext cx="2263775" cy="315468"/>
+          </a:xfrm>
+          <a:prstGeom prst="rect">
+            <a:avLst/>
+          </a:prstGeom>
+          <a:noFill/>
+        </p:spPr>
+        <p:txBody>
+          <a:bodyPr wrap="none" lIns="0" rIns="0" tIns="0" bIns="0" anchor="t">
+            <a:spAutoFit/>
+          </a:bodyPr>
+          <a:lstStyle/>
+          <a:p>
+            <a:pPr algn="l"/>
+            <a:r>
+              <a:rPr sz="1150" b="0" i="0">
+                <a:solidFill>
+                  <a:srgbClr val="171717"/>
+                </a:solidFill>
+                <a:latin typeface="Geist"/>
+              </a:rPr>
+              <a:t>where a tool result would</a:t>
+            </a:r>
+          </a:p>
+        </p:txBody>
+      </p:sp>
+      <p:sp>
+        <p:nvSpPr>
+          <p:cNvPr id="102" name="TextBox 101"/>
+          <p:cNvSpPr txBox="1"/>
+          <p:nvPr/>
+        </p:nvSpPr>
+        <p:spPr>
+          <a:xfrm>
+            <a:off x="152400" y="4440238"/>
+            <a:ext cx="12303125" cy="342900"/>
+          </a:xfrm>
+          <a:prstGeom prst="rect">
+            <a:avLst/>
+          </a:prstGeom>
+          <a:noFill/>
+        </p:spPr>
+        <p:txBody>
+          <a:bodyPr wrap="none" lIns="0" rIns="0" tIns="0" bIns="0" anchor="t">
+            <a:spAutoFit/>
+          </a:bodyPr>
+          <a:lstStyle/>
+          <a:p>
+            <a:pPr algn="l"/>
+            <a:r>
+              <a:rPr sz="1250" b="1" i="0">
+                <a:solidFill>
+                  <a:srgbClr val="171717"/>
+                </a:solidFill>
+                <a:latin typeface="Geist"/>
+              </a:rPr>
+              <a:t>The refusal arrives in-band — which is why a blocked agent explains itself and continues the conversation instead of failing.</a:t>
+            </a:r>
+          </a:p>
+        </p:txBody>
+      </p:sp>
+      <p:sp>
+        <p:nvSpPr>
+          <p:cNvPr id="103" name="Rounded Rectangle 102"/>
+          <p:cNvSpPr/>
+          <p:nvPr/>
+        </p:nvSpPr>
+        <p:spPr>
+          <a:xfrm>
+            <a:off x="152400" y="4800600"/>
+            <a:ext cx="2374900" cy="1168400"/>
+          </a:xfrm>
+          <a:prstGeom prst="roundRect">
+            <a:avLst>
+              <a:gd name="adj" fmla="val 8695"/>
             </a:avLst>
           </a:prstGeom>
           <a:solidFill>
@@ -3800,22 +6852,22 @@
       </p:sp>
       <p:pic>
         <p:nvPicPr>
-          <p:cNvPr id="21" name="Picture 20" descr="regex--171717.256.png"/>
+          <p:cNvPr id="104" name="Picture 103" descr="chart-line--4d4d4d.256.png"/>
           <p:cNvPicPr>
             <a:picLocks noChangeAspect="1"/>
           </p:cNvPicPr>
           <p:nvPr/>
         </p:nvPicPr>
         <p:blipFill>
-          <a:blip r:embed="rId4"/>
+          <a:blip r:embed="rId10"/>
           <a:stretch>
             <a:fillRect/>
           </a:stretch>
         </p:blipFill>
         <p:spPr>
           <a:xfrm>
-            <a:off x="2667000" y="1320800"/>
-            <a:ext cx="190500" cy="190500"/>
+            <a:off x="279400" y="4927600"/>
+            <a:ext cx="177800" cy="177800"/>
           </a:xfrm>
           <a:prstGeom prst="rect">
             <a:avLst/>
@@ -3824,14 +6876,14 @@
       </p:pic>
       <p:sp>
         <p:nvSpPr>
-          <p:cNvPr id="22" name="TextBox 21"/>
+          <p:cNvPr id="105" name="TextBox 104"/>
           <p:cNvSpPr txBox="1"/>
           <p:nvPr/>
         </p:nvSpPr>
         <p:spPr>
           <a:xfrm>
-            <a:off x="2946400" y="1308735"/>
-            <a:ext cx="921258" cy="356616"/>
+            <a:off x="533400" y="4897438"/>
+            <a:ext cx="2165350" cy="342900"/>
           </a:xfrm>
           <a:prstGeom prst="rect">
             <a:avLst/>
@@ -3846,73 +6898,27 @@
           <a:p>
             <a:pPr algn="l"/>
             <a:r>
-              <a:rPr sz="1300" b="1" i="0">
+              <a:rPr sz="1250" b="1" i="0">
                 <a:solidFill>
                   <a:srgbClr val="171717"/>
                 </a:solidFill>
                 <a:latin typeface="Geist"/>
               </a:rPr>
-              <a:t>L1  rules</a:t>
-            </a:r>
-          </a:p>
-        </p:txBody>
-      </p:sp>
-      <p:sp>
-        <p:nvSpPr>
-          <p:cNvPr id="23" name="Rounded Rectangle 22"/>
-          <p:cNvSpPr/>
-          <p:nvPr/>
-        </p:nvSpPr>
-        <p:spPr>
-          <a:xfrm>
-            <a:off x="2654300" y="1676400"/>
-            <a:ext cx="1549400" cy="304800"/>
-          </a:xfrm>
-          <a:prstGeom prst="roundRect">
-            <a:avLst>
-              <a:gd name="adj" fmla="val 16666"/>
-            </a:avLst>
-          </a:prstGeom>
-          <a:solidFill>
-            <a:srgbClr val="FFFFFF"/>
-          </a:solidFill>
-          <a:ln w="12700">
-            <a:solidFill>
-              <a:srgbClr val="F0F0F0"/>
-            </a:solidFill>
-          </a:ln>
-          <a:effectLst/>
-        </p:spPr>
-        <p:style>
-          <a:lnRef idx="1">
-            <a:schemeClr val="accent1"/>
-          </a:lnRef>
-          <a:fillRef idx="3">
-            <a:schemeClr val="accent1"/>
-          </a:fillRef>
-          <a:effectRef idx="2">
-            <a:schemeClr val="accent1"/>
-          </a:effectRef>
-          <a:fontRef idx="minor">
-            <a:schemeClr val="lt1"/>
-          </a:fontRef>
-        </p:style>
-        <p:txBody>
-          <a:bodyPr rtlCol="0" anchor="ctr"/>
-          <a:lstStyle/>
-          <a:p/>
-        </p:txBody>
-      </p:sp>
-      <p:sp>
-        <p:nvSpPr>
-          <p:cNvPr id="24" name="TextBox 23"/>
+              <a:t>Behavioural monitoring</a:t>
+            </a:r>
+          </a:p>
+        </p:txBody>
+      </p:sp>
+      <p:sp>
+        <p:nvSpPr>
+          <p:cNvPr id="106" name="TextBox 105"/>
           <p:cNvSpPr txBox="1"/>
           <p:nvPr/>
         </p:nvSpPr>
         <p:spPr>
           <a:xfrm>
-            <a:off x="2930970" y="1711642"/>
-            <a:ext cx="996061" cy="315468"/>
+            <a:off x="304800" y="5198745"/>
+            <a:ext cx="2078736" cy="301752"/>
           </a:xfrm>
           <a:prstGeom prst="rect">
             <a:avLst/>
@@ -3925,29 +6931,29 @@
           </a:bodyPr>
           <a:lstStyle/>
           <a:p>
-            <a:pPr algn="ctr"/>
-            <a:r>
-              <a:rPr sz="1150" b="0" i="0">
-                <a:solidFill>
-                  <a:srgbClr val="171717"/>
-                </a:solidFill>
-                <a:latin typeface="Geist Mono"/>
+            <a:pPr algn="l"/>
+            <a:r>
+              <a:rPr sz="1100" b="0" i="0">
+                <a:solidFill>
+                  <a:srgbClr val="4D4D4D"/>
+                </a:solidFill>
+                <a:latin typeface="Geist"/>
               </a:rPr>
-              <a:t>call string</a:t>
-            </a:r>
-          </a:p>
-        </p:txBody>
-      </p:sp>
-      <p:sp>
-        <p:nvSpPr>
-          <p:cNvPr id="25" name="TextBox 24"/>
+              <a:t>profile · sliding window</a:t>
+            </a:r>
+          </a:p>
+        </p:txBody>
+      </p:sp>
+      <p:sp>
+        <p:nvSpPr>
+          <p:cNvPr id="107" name="TextBox 106"/>
           <p:cNvSpPr txBox="1"/>
           <p:nvPr/>
         </p:nvSpPr>
         <p:spPr>
           <a:xfrm>
-            <a:off x="2692400" y="2118042"/>
-            <a:ext cx="762000" cy="315468"/>
+            <a:off x="304800" y="5401945"/>
+            <a:ext cx="2338578" cy="301752"/>
           </a:xfrm>
           <a:prstGeom prst="rect">
             <a:avLst/>
@@ -3962,66 +6968,66 @@
           <a:p>
             <a:pPr algn="l"/>
             <a:r>
-              <a:rPr sz="1150" b="0" i="0">
+              <a:rPr sz="1100" b="0" i="0">
                 <a:solidFill>
                   <a:srgbClr val="4D4D4D"/>
                 </a:solidFill>
                 <a:latin typeface="Geist"/>
               </a:rPr>
-              <a:t>&lt;1 ms</a:t>
-            </a:r>
-          </a:p>
-        </p:txBody>
-      </p:sp>
-      <p:cxnSp>
-        <p:nvCxnSpPr>
-          <p:cNvPr id="26" name="Connector 25"/>
-          <p:cNvCxnSpPr/>
-          <p:nvPr/>
-        </p:nvCxnSpPr>
-        <p:spPr>
-          <a:xfrm>
-            <a:off x="4330700" y="1828800"/>
-            <a:ext cx="127000" cy="0"/>
-          </a:xfrm>
-          <a:prstGeom prst="line">
-            <a:avLst/>
-          </a:prstGeom>
-          <a:ln w="20320">
-            <a:solidFill>
-              <a:srgbClr val="8A8A8A"/>
-            </a:solidFill>
-          </a:ln>
-        </p:spPr>
-        <p:style>
-          <a:lnRef idx="2">
-            <a:schemeClr val="accent1"/>
-          </a:lnRef>
-          <a:fillRef idx="0">
-            <a:schemeClr val="accent1"/>
-          </a:fillRef>
-          <a:effectRef idx="1">
-            <a:schemeClr val="accent1"/>
-          </a:effectRef>
-          <a:fontRef idx="minor">
-            <a:schemeClr val="tx1"/>
-          </a:fontRef>
-        </p:style>
-      </p:cxnSp>
-      <p:sp>
-        <p:nvSpPr>
-          <p:cNvPr id="27" name="Rounded Rectangle 26"/>
+              <a:t>IForest · HST · Mahalanobis</a:t>
+            </a:r>
+          </a:p>
+        </p:txBody>
+      </p:sp>
+      <p:sp>
+        <p:nvSpPr>
+          <p:cNvPr id="108" name="TextBox 107"/>
+          <p:cNvSpPr txBox="1"/>
+          <p:nvPr/>
+        </p:nvSpPr>
+        <p:spPr>
+          <a:xfrm>
+            <a:off x="304800" y="5605145"/>
+            <a:ext cx="2771648" cy="301752"/>
+          </a:xfrm>
+          <a:prstGeom prst="rect">
+            <a:avLst/>
+          </a:prstGeom>
+          <a:noFill/>
+        </p:spPr>
+        <p:txBody>
+          <a:bodyPr wrap="none" lIns="0" rIns="0" tIns="0" bIns="0" anchor="t">
+            <a:spAutoFit/>
+          </a:bodyPr>
+          <a:lstStyle/>
+          <a:p>
+            <a:pPr algn="l"/>
+            <a:r>
+              <a:rPr sz="1100" b="0" i="0">
+                <a:solidFill>
+                  <a:srgbClr val="4D4D4D"/>
+                </a:solidFill>
+                <a:latin typeface="Geist"/>
+              </a:rPr>
+              <a:t>ADWIN drift · conformal p-values</a:t>
+            </a:r>
+          </a:p>
+        </p:txBody>
+      </p:sp>
+      <p:sp>
+        <p:nvSpPr>
+          <p:cNvPr id="109" name="Rounded Rectangle 108"/>
           <p:cNvSpPr/>
           <p:nvPr/>
         </p:nvSpPr>
         <p:spPr>
           <a:xfrm>
-            <a:off x="4470400" y="1219200"/>
-            <a:ext cx="1778000" cy="1219200"/>
+            <a:off x="2654300" y="4800600"/>
+            <a:ext cx="2374900" cy="1168400"/>
           </a:xfrm>
           <a:prstGeom prst="roundRect">
             <a:avLst>
-              <a:gd name="adj" fmla="val 10416"/>
+              <a:gd name="adj" fmla="val 8695"/>
             </a:avLst>
           </a:prstGeom>
           <a:solidFill>
@@ -4056,22 +7062,22 @@
       </p:sp>
       <p:pic>
         <p:nvPicPr>
-          <p:cNvPr id="28" name="Picture 27" descr="binary-tree--171717.256.png"/>
+          <p:cNvPr id="110" name="Picture 109" descr="hand-stop--4d4d4d.256.png"/>
           <p:cNvPicPr>
             <a:picLocks noChangeAspect="1"/>
           </p:cNvPicPr>
           <p:nvPr/>
         </p:nvPicPr>
         <p:blipFill>
-          <a:blip r:embed="rId5"/>
+          <a:blip r:embed="rId11"/>
           <a:stretch>
             <a:fillRect/>
           </a:stretch>
         </p:blipFill>
         <p:spPr>
           <a:xfrm>
-            <a:off x="4597400" y="1320800"/>
-            <a:ext cx="190500" cy="190500"/>
+            <a:off x="2781300" y="4927600"/>
+            <a:ext cx="177800" cy="177800"/>
           </a:xfrm>
           <a:prstGeom prst="rect">
             <a:avLst/>
@@ -4080,14 +7086,14 @@
       </p:pic>
       <p:sp>
         <p:nvSpPr>
-          <p:cNvPr id="29" name="TextBox 28"/>
+          <p:cNvPr id="111" name="TextBox 110"/>
           <p:cNvSpPr txBox="1"/>
           <p:nvPr/>
         </p:nvSpPr>
         <p:spPr>
           <a:xfrm>
-            <a:off x="4876800" y="1308735"/>
-            <a:ext cx="1330706" cy="356616"/>
+            <a:off x="3035300" y="4897438"/>
+            <a:ext cx="2165350" cy="342900"/>
           </a:xfrm>
           <a:prstGeom prst="rect">
             <a:avLst/>
@@ -4102,73 +7108,27 @@
           <a:p>
             <a:pPr algn="l"/>
             <a:r>
-              <a:rPr sz="1300" b="1" i="0">
+              <a:rPr sz="1250" b="1" i="0">
                 <a:solidFill>
                   <a:srgbClr val="171717"/>
                 </a:solidFill>
                 <a:latin typeface="Geist"/>
               </a:rPr>
-              <a:t>L2  behaviour</a:t>
-            </a:r>
-          </a:p>
-        </p:txBody>
-      </p:sp>
-      <p:sp>
-        <p:nvSpPr>
-          <p:cNvPr id="30" name="Rounded Rectangle 29"/>
-          <p:cNvSpPr/>
-          <p:nvPr/>
-        </p:nvSpPr>
-        <p:spPr>
-          <a:xfrm>
-            <a:off x="4584700" y="1676400"/>
-            <a:ext cx="1549400" cy="304800"/>
-          </a:xfrm>
-          <a:prstGeom prst="roundRect">
-            <a:avLst>
-              <a:gd name="adj" fmla="val 16666"/>
-            </a:avLst>
-          </a:prstGeom>
-          <a:solidFill>
-            <a:srgbClr val="FFFFFF"/>
-          </a:solidFill>
-          <a:ln w="12700">
-            <a:solidFill>
-              <a:srgbClr val="F0F0F0"/>
-            </a:solidFill>
-          </a:ln>
-          <a:effectLst/>
-        </p:spPr>
-        <p:style>
-          <a:lnRef idx="1">
-            <a:schemeClr val="accent1"/>
-          </a:lnRef>
-          <a:fillRef idx="3">
-            <a:schemeClr val="accent1"/>
-          </a:fillRef>
-          <a:effectRef idx="2">
-            <a:schemeClr val="accent1"/>
-          </a:effectRef>
-          <a:fontRef idx="minor">
-            <a:schemeClr val="lt1"/>
-          </a:fontRef>
-        </p:style>
-        <p:txBody>
-          <a:bodyPr rtlCol="0" anchor="ctr"/>
-          <a:lstStyle/>
-          <a:p/>
-        </p:txBody>
-      </p:sp>
-      <p:sp>
-        <p:nvSpPr>
-          <p:cNvPr id="31" name="TextBox 30"/>
+              <a:t>Containment &amp; recovery</a:t>
+            </a:r>
+          </a:p>
+        </p:txBody>
+      </p:sp>
+      <p:sp>
+        <p:nvSpPr>
+          <p:cNvPr id="112" name="TextBox 111"/>
           <p:cNvSpPr txBox="1"/>
           <p:nvPr/>
         </p:nvSpPr>
         <p:spPr>
           <a:xfrm>
-            <a:off x="4770818" y="1711642"/>
-            <a:ext cx="1177163" cy="315468"/>
+            <a:off x="2806700" y="5198745"/>
+            <a:ext cx="2511806" cy="301752"/>
           </a:xfrm>
           <a:prstGeom prst="rect">
             <a:avLst/>
@@ -4181,29 +7141,29 @@
           </a:bodyPr>
           <a:lstStyle/>
           <a:p>
-            <a:pPr algn="ctr"/>
-            <a:r>
-              <a:rPr sz="1150" b="0" i="0">
-                <a:solidFill>
-                  <a:srgbClr val="171717"/>
-                </a:solidFill>
-                <a:latin typeface="Geist Mono"/>
+            <a:pPr algn="l"/>
+            <a:r>
+              <a:rPr sz="1100" b="0" i="0">
+                <a:solidFill>
+                  <a:srgbClr val="4D4D4D"/>
+                </a:solidFill>
+                <a:latin typeface="Geist"/>
               </a:rPr>
-              <a:t>agent history</a:t>
-            </a:r>
-          </a:p>
-        </p:txBody>
-      </p:sp>
-      <p:sp>
-        <p:nvSpPr>
-          <p:cNvPr id="32" name="TextBox 31"/>
+              <a:t>kill switch (violation count)</a:t>
+            </a:r>
+          </a:p>
+        </p:txBody>
+      </p:sp>
+      <p:sp>
+        <p:nvSpPr>
+          <p:cNvPr id="113" name="TextBox 112"/>
           <p:cNvSpPr txBox="1"/>
           <p:nvPr/>
         </p:nvSpPr>
         <p:spPr>
           <a:xfrm>
-            <a:off x="4622800" y="2118042"/>
-            <a:ext cx="905510" cy="315468"/>
+            <a:off x="2806700" y="5401945"/>
+            <a:ext cx="2425192" cy="301752"/>
           </a:xfrm>
           <a:prstGeom prst="rect">
             <a:avLst/>
@@ -4218,66 +7178,66 @@
           <a:p>
             <a:pPr algn="l"/>
             <a:r>
-              <a:rPr sz="1150" b="0" i="0">
+              <a:rPr sz="1100" b="0" i="0">
                 <a:solidFill>
                   <a:srgbClr val="4D4D4D"/>
                 </a:solidFill>
                 <a:latin typeface="Geist"/>
               </a:rPr>
-              <a:t>in-process</a:t>
-            </a:r>
-          </a:p>
-        </p:txBody>
-      </p:sp>
-      <p:cxnSp>
-        <p:nvCxnSpPr>
-          <p:cNvPr id="33" name="Connector 32"/>
-          <p:cNvCxnSpPr/>
-          <p:nvPr/>
-        </p:nvCxnSpPr>
-        <p:spPr>
-          <a:xfrm>
-            <a:off x="6261100" y="1828800"/>
-            <a:ext cx="127000" cy="0"/>
-          </a:xfrm>
-          <a:prstGeom prst="line">
-            <a:avLst/>
-          </a:prstGeom>
-          <a:ln w="20320">
-            <a:solidFill>
-              <a:srgbClr val="8A8A8A"/>
-            </a:solidFill>
-          </a:ln>
-        </p:spPr>
-        <p:style>
-          <a:lnRef idx="2">
-            <a:schemeClr val="accent1"/>
-          </a:lnRef>
-          <a:fillRef idx="0">
-            <a:schemeClr val="accent1"/>
-          </a:fillRef>
-          <a:effectRef idx="1">
-            <a:schemeClr val="accent1"/>
-          </a:effectRef>
-          <a:fontRef idx="minor">
-            <a:schemeClr val="tx1"/>
-          </a:fontRef>
-        </p:style>
-      </p:cxnSp>
-      <p:sp>
-        <p:nvSpPr>
-          <p:cNvPr id="34" name="Rounded Rectangle 33"/>
+              <a:t>budget guard · effect outbox</a:t>
+            </a:r>
+          </a:p>
+        </p:txBody>
+      </p:sp>
+      <p:sp>
+        <p:nvSpPr>
+          <p:cNvPr id="114" name="TextBox 113"/>
+          <p:cNvSpPr txBox="1"/>
+          <p:nvPr/>
+        </p:nvSpPr>
+        <p:spPr>
+          <a:xfrm>
+            <a:off x="2806700" y="5605145"/>
+            <a:ext cx="2251964" cy="301752"/>
+          </a:xfrm>
+          <a:prstGeom prst="rect">
+            <a:avLst/>
+          </a:prstGeom>
+          <a:noFill/>
+        </p:spPr>
+        <p:txBody>
+          <a:bodyPr wrap="none" lIns="0" rIns="0" tIns="0" bIns="0" anchor="t">
+            <a:spAutoFit/>
+          </a:bodyPr>
+          <a:lstStyle/>
+          <a:p>
+            <a:pPr algn="l"/>
+            <a:r>
+              <a:rPr sz="1100" b="0" i="0">
+                <a:solidFill>
+                  <a:srgbClr val="4D4D4D"/>
+                </a:solidFill>
+                <a:latin typeface="Geist"/>
+              </a:rPr>
+              <a:t>snapshot → saga → rollback</a:t>
+            </a:r>
+          </a:p>
+        </p:txBody>
+      </p:sp>
+      <p:sp>
+        <p:nvSpPr>
+          <p:cNvPr id="115" name="Rounded Rectangle 114"/>
           <p:cNvSpPr/>
           <p:nvPr/>
         </p:nvSpPr>
         <p:spPr>
           <a:xfrm>
-            <a:off x="6400800" y="1219200"/>
-            <a:ext cx="1778000" cy="1219200"/>
+            <a:off x="5156200" y="4800600"/>
+            <a:ext cx="2374900" cy="1168400"/>
           </a:xfrm>
           <a:prstGeom prst="roundRect">
             <a:avLst>
-              <a:gd name="adj" fmla="val 10416"/>
+              <a:gd name="adj" fmla="val 8695"/>
             </a:avLst>
           </a:prstGeom>
           <a:solidFill>
@@ -4312,22 +7272,22 @@
       </p:sp>
       <p:pic>
         <p:nvPicPr>
-          <p:cNvPr id="35" name="Picture 34" descr="bulb--171717.256.png"/>
+          <p:cNvPr id="116" name="Picture 115" descr="shield-half--4d4d4d.256.png"/>
           <p:cNvPicPr>
             <a:picLocks noChangeAspect="1"/>
           </p:cNvPicPr>
           <p:nvPr/>
         </p:nvPicPr>
         <p:blipFill>
-          <a:blip r:embed="rId6"/>
+          <a:blip r:embed="rId12"/>
           <a:stretch>
             <a:fillRect/>
           </a:stretch>
         </p:blipFill>
         <p:spPr>
           <a:xfrm>
-            <a:off x="6527800" y="1320800"/>
-            <a:ext cx="190500" cy="190500"/>
+            <a:off x="5283200" y="4927600"/>
+            <a:ext cx="177800" cy="177800"/>
           </a:xfrm>
           <a:prstGeom prst="rect">
             <a:avLst/>
@@ -4336,14 +7296,14 @@
       </p:pic>
       <p:sp>
         <p:nvSpPr>
-          <p:cNvPr id="36" name="TextBox 35"/>
+          <p:cNvPr id="117" name="TextBox 116"/>
           <p:cNvSpPr txBox="1"/>
           <p:nvPr/>
         </p:nvSpPr>
         <p:spPr>
           <a:xfrm>
-            <a:off x="6807200" y="1308735"/>
-            <a:ext cx="1125982" cy="356616"/>
+            <a:off x="5537200" y="4897438"/>
+            <a:ext cx="984250" cy="342900"/>
           </a:xfrm>
           <a:prstGeom prst="rect">
             <a:avLst/>
@@ -4358,31 +7318,136 @@
           <a:p>
             <a:pPr algn="l"/>
             <a:r>
-              <a:rPr sz="1300" b="1" i="0">
+              <a:rPr sz="1250" b="1" i="0">
                 <a:solidFill>
                   <a:srgbClr val="171717"/>
                 </a:solidFill>
                 <a:latin typeface="Geist"/>
               </a:rPr>
-              <a:t>L3  auditor</a:t>
-            </a:r>
-          </a:p>
-        </p:txBody>
-      </p:sp>
-      <p:sp>
-        <p:nvSpPr>
-          <p:cNvPr id="37" name="Rounded Rectangle 36"/>
+              <a:t>Pre-deploy</a:t>
+            </a:r>
+          </a:p>
+        </p:txBody>
+      </p:sp>
+      <p:sp>
+        <p:nvSpPr>
+          <p:cNvPr id="118" name="TextBox 117"/>
+          <p:cNvSpPr txBox="1"/>
+          <p:nvPr/>
+        </p:nvSpPr>
+        <p:spPr>
+          <a:xfrm>
+            <a:off x="5308600" y="5198745"/>
+            <a:ext cx="2251964" cy="301752"/>
+          </a:xfrm>
+          <a:prstGeom prst="rect">
+            <a:avLst/>
+          </a:prstGeom>
+          <a:noFill/>
+        </p:spPr>
+        <p:txBody>
+          <a:bodyPr wrap="none" lIns="0" rIns="0" tIns="0" bIns="0" anchor="t">
+            <a:spAutoFit/>
+          </a:bodyPr>
+          <a:lstStyle/>
+          <a:p>
+            <a:pPr algn="l"/>
+            <a:r>
+              <a:rPr sz="1100" b="0" i="0">
+                <a:solidFill>
+                  <a:srgbClr val="4D4D4D"/>
+                </a:solidFill>
+                <a:latin typeface="Geist"/>
+              </a:rPr>
+              <a:t>repo scan · 53 OWASP rules</a:t>
+            </a:r>
+          </a:p>
+        </p:txBody>
+      </p:sp>
+      <p:sp>
+        <p:nvSpPr>
+          <p:cNvPr id="119" name="TextBox 118"/>
+          <p:cNvSpPr txBox="1"/>
+          <p:nvPr/>
+        </p:nvSpPr>
+        <p:spPr>
+          <a:xfrm>
+            <a:off x="5308600" y="5401945"/>
+            <a:ext cx="2511806" cy="301752"/>
+          </a:xfrm>
+          <a:prstGeom prst="rect">
+            <a:avLst/>
+          </a:prstGeom>
+          <a:noFill/>
+        </p:spPr>
+        <p:txBody>
+          <a:bodyPr wrap="none" lIns="0" rIns="0" tIns="0" bIns="0" anchor="t">
+            <a:spAutoFit/>
+          </a:bodyPr>
+          <a:lstStyle/>
+          <a:p>
+            <a:pPr algn="l"/>
+            <a:r>
+              <a:rPr sz="1100" b="0" i="0">
+                <a:solidFill>
+                  <a:srgbClr val="4D4D4D"/>
+                </a:solidFill>
+                <a:latin typeface="Geist"/>
+              </a:rPr>
+              <a:t>same policy packs, statically</a:t>
+            </a:r>
+          </a:p>
+        </p:txBody>
+      </p:sp>
+      <p:sp>
+        <p:nvSpPr>
+          <p:cNvPr id="120" name="TextBox 119"/>
+          <p:cNvSpPr txBox="1"/>
+          <p:nvPr/>
+        </p:nvSpPr>
+        <p:spPr>
+          <a:xfrm>
+            <a:off x="5308600" y="5605145"/>
+            <a:ext cx="1992122" cy="301752"/>
+          </a:xfrm>
+          <a:prstGeom prst="rect">
+            <a:avLst/>
+          </a:prstGeom>
+          <a:noFill/>
+        </p:spPr>
+        <p:txBody>
+          <a:bodyPr wrap="none" lIns="0" rIns="0" tIns="0" bIns="0" anchor="t">
+            <a:spAutoFit/>
+          </a:bodyPr>
+          <a:lstStyle/>
+          <a:p>
+            <a:pPr algn="l"/>
+            <a:r>
+              <a:rPr sz="1100" b="0" i="0">
+                <a:solidFill>
+                  <a:srgbClr val="4D4D4D"/>
+                </a:solidFill>
+                <a:latin typeface="Geist"/>
+              </a:rPr>
+              <a:t>code shield · scan diff</a:t>
+            </a:r>
+          </a:p>
+        </p:txBody>
+      </p:sp>
+      <p:sp>
+        <p:nvSpPr>
+          <p:cNvPr id="121" name="Rounded Rectangle 120"/>
           <p:cNvSpPr/>
           <p:nvPr/>
         </p:nvSpPr>
         <p:spPr>
           <a:xfrm>
-            <a:off x="6515100" y="1676400"/>
-            <a:ext cx="1549400" cy="304800"/>
+            <a:off x="7658100" y="4800600"/>
+            <a:ext cx="2374900" cy="1168400"/>
           </a:xfrm>
           <a:prstGeom prst="roundRect">
             <a:avLst>
-              <a:gd name="adj" fmla="val 16666"/>
+              <a:gd name="adj" fmla="val 8695"/>
             </a:avLst>
           </a:prstGeom>
           <a:solidFill>
@@ -4390,7 +7455,7 @@
           </a:solidFill>
           <a:ln w="12700">
             <a:solidFill>
-              <a:srgbClr val="F0F0F0"/>
+              <a:srgbClr val="EBEBEB"/>
             </a:solidFill>
           </a:ln>
           <a:effectLst/>
@@ -4415,16 +7480,40 @@
           <a:p/>
         </p:txBody>
       </p:sp>
-      <p:sp>
-        <p:nvSpPr>
-          <p:cNvPr id="38" name="TextBox 37"/>
+      <p:pic>
+        <p:nvPicPr>
+          <p:cNvPr id="122" name="Picture 121" descr="plug-connected--4d4d4d.256.png"/>
+          <p:cNvPicPr>
+            <a:picLocks noChangeAspect="1"/>
+          </p:cNvPicPr>
+          <p:nvPr/>
+        </p:nvPicPr>
+        <p:blipFill>
+          <a:blip r:embed="rId13"/>
+          <a:stretch>
+            <a:fillRect/>
+          </a:stretch>
+        </p:blipFill>
+        <p:spPr>
+          <a:xfrm>
+            <a:off x="7785100" y="4927600"/>
+            <a:ext cx="177800" cy="177800"/>
+          </a:xfrm>
+          <a:prstGeom prst="rect">
+            <a:avLst/>
+          </a:prstGeom>
+        </p:spPr>
+      </p:pic>
+      <p:sp>
+        <p:nvSpPr>
+          <p:cNvPr id="123" name="TextBox 122"/>
           <p:cNvSpPr txBox="1"/>
           <p:nvPr/>
         </p:nvSpPr>
         <p:spPr>
           <a:xfrm>
-            <a:off x="6791770" y="1711642"/>
-            <a:ext cx="996061" cy="315468"/>
+            <a:off x="8039100" y="4897438"/>
+            <a:ext cx="2066925" cy="342900"/>
           </a:xfrm>
           <a:prstGeom prst="rect">
             <a:avLst/>
@@ -4437,29 +7526,29 @@
           </a:bodyPr>
           <a:lstStyle/>
           <a:p>
-            <a:pPr algn="ctr"/>
-            <a:r>
-              <a:rPr sz="1150" b="0" i="0">
+            <a:pPr algn="l"/>
+            <a:r>
+              <a:rPr sz="1250" b="1" i="0">
                 <a:solidFill>
                   <a:srgbClr val="171717"/>
                 </a:solidFill>
-                <a:latin typeface="Geist Mono"/>
+                <a:latin typeface="Geist"/>
               </a:rPr>
-              <a:t>stated task</a:t>
-            </a:r>
-          </a:p>
-        </p:txBody>
-      </p:sp>
-      <p:sp>
-        <p:nvSpPr>
-          <p:cNvPr id="39" name="TextBox 38"/>
+              <a:t>Connectors &amp; fallback</a:t>
+            </a:r>
+          </a:p>
+        </p:txBody>
+      </p:sp>
+      <p:sp>
+        <p:nvSpPr>
+          <p:cNvPr id="124" name="TextBox 123"/>
           <p:cNvSpPr txBox="1"/>
           <p:nvPr/>
         </p:nvSpPr>
         <p:spPr>
           <a:xfrm>
-            <a:off x="6553200" y="2118042"/>
-            <a:ext cx="762000" cy="315468"/>
+            <a:off x="7810500" y="5198745"/>
+            <a:ext cx="2425192" cy="301752"/>
           </a:xfrm>
           <a:prstGeom prst="rect">
             <a:avLst/>
@@ -4474,66 +7563,101 @@
           <a:p>
             <a:pPr algn="l"/>
             <a:r>
-              <a:rPr sz="1150" b="0" i="0">
+              <a:rPr sz="1100" b="0" i="0">
                 <a:solidFill>
                   <a:srgbClr val="4D4D4D"/>
                 </a:solidFill>
                 <a:latin typeface="Geist"/>
               </a:rPr>
-              <a:t>1–2 s</a:t>
-            </a:r>
-          </a:p>
-        </p:txBody>
-      </p:sp>
-      <p:cxnSp>
-        <p:nvCxnSpPr>
-          <p:cNvPr id="40" name="Connector 39"/>
-          <p:cNvCxnSpPr/>
-          <p:nvPr/>
-        </p:nvCxnSpPr>
-        <p:spPr>
-          <a:xfrm>
-            <a:off x="8191500" y="1828800"/>
-            <a:ext cx="127000" cy="0"/>
-          </a:xfrm>
-          <a:prstGeom prst="line">
-            <a:avLst/>
-          </a:prstGeom>
-          <a:ln w="20320">
-            <a:solidFill>
-              <a:srgbClr val="8A8A8A"/>
-            </a:solidFill>
-          </a:ln>
-        </p:spPr>
-        <p:style>
-          <a:lnRef idx="2">
-            <a:schemeClr val="accent1"/>
-          </a:lnRef>
-          <a:fillRef idx="0">
-            <a:schemeClr val="accent1"/>
-          </a:fillRef>
-          <a:effectRef idx="1">
-            <a:schemeClr val="accent1"/>
-          </a:effectRef>
-          <a:fontRef idx="minor">
-            <a:schemeClr val="tx1"/>
-          </a:fontRef>
-        </p:style>
-      </p:cxnSp>
-      <p:sp>
-        <p:nvSpPr>
-          <p:cNvPr id="41" name="Rounded Rectangle 40"/>
+              <a:t>SIEM · OTLP · webhooks · SSO</a:t>
+            </a:r>
+          </a:p>
+        </p:txBody>
+      </p:sp>
+      <p:sp>
+        <p:nvSpPr>
+          <p:cNvPr id="125" name="TextBox 124"/>
+          <p:cNvSpPr txBox="1"/>
+          <p:nvPr/>
+        </p:nvSpPr>
+        <p:spPr>
+          <a:xfrm>
+            <a:off x="7810500" y="5401945"/>
+            <a:ext cx="2685034" cy="301752"/>
+          </a:xfrm>
+          <a:prstGeom prst="rect">
+            <a:avLst/>
+          </a:prstGeom>
+          <a:noFill/>
+        </p:spPr>
+        <p:txBody>
+          <a:bodyPr wrap="none" lIns="0" rIns="0" tIns="0" bIns="0" anchor="t">
+            <a:spAutoFit/>
+          </a:bodyPr>
+          <a:lstStyle/>
+          <a:p>
+            <a:pPr algn="l"/>
+            <a:r>
+              <a:rPr sz="1100" b="0" i="0">
+                <a:solidFill>
+                  <a:srgbClr val="4D4D4D"/>
+                </a:solidFill>
+                <a:latin typeface="Geist"/>
+              </a:rPr>
+              <a:t>fail open | closed · disk queue</a:t>
+            </a:r>
+          </a:p>
+        </p:txBody>
+      </p:sp>
+      <p:sp>
+        <p:nvSpPr>
+          <p:cNvPr id="126" name="TextBox 125"/>
+          <p:cNvSpPr txBox="1"/>
+          <p:nvPr/>
+        </p:nvSpPr>
+        <p:spPr>
+          <a:xfrm>
+            <a:off x="7810500" y="5605145"/>
+            <a:ext cx="2511806" cy="301752"/>
+          </a:xfrm>
+          <a:prstGeom prst="rect">
+            <a:avLst/>
+          </a:prstGeom>
+          <a:noFill/>
+        </p:spPr>
+        <p:txBody>
+          <a:bodyPr wrap="none" lIns="0" rIns="0" tIns="0" bIns="0" anchor="t">
+            <a:spAutoFit/>
+          </a:bodyPr>
+          <a:lstStyle/>
+          <a:p>
+            <a:pPr algn="l"/>
+            <a:r>
+              <a:rPr sz="1100" b="0" i="0">
+                <a:solidFill>
+                  <a:srgbClr val="4D4D4D"/>
+                </a:solidFill>
+                <a:latin typeface="Geist"/>
+              </a:rPr>
+              <a:t>offline model · AEGIS_OFFLINE</a:t>
+            </a:r>
+          </a:p>
+        </p:txBody>
+      </p:sp>
+      <p:sp>
+        <p:nvSpPr>
+          <p:cNvPr id="127" name="Rounded Rectangle 126"/>
           <p:cNvSpPr/>
           <p:nvPr/>
         </p:nvSpPr>
         <p:spPr>
           <a:xfrm>
-            <a:off x="8331200" y="1219200"/>
-            <a:ext cx="1778000" cy="1219200"/>
+            <a:off x="10160000" y="4800600"/>
+            <a:ext cx="2374900" cy="1168400"/>
           </a:xfrm>
           <a:prstGeom prst="roundRect">
             <a:avLst>
-              <a:gd name="adj" fmla="val 10416"/>
+              <a:gd name="adj" fmla="val 8695"/>
             </a:avLst>
           </a:prstGeom>
           <a:solidFill>
@@ -4541,9 +7665,8 @@
           </a:solidFill>
           <a:ln w="12700">
             <a:solidFill>
-              <a:srgbClr val="D3E5FF"/>
+              <a:srgbClr val="EBEBEB"/>
             </a:solidFill>
-            <a:prstDash val="dash"/>
           </a:ln>
           <a:effectLst/>
         </p:spPr>
@@ -4569,22 +7692,22 @@
       </p:sp>
       <p:pic>
         <p:nvPicPr>
-          <p:cNvPr id="42" name="Picture 41" descr="route--0070f3.256.png"/>
+          <p:cNvPr id="128" name="Picture 127" descr="lock-check--4d4d4d.256.png"/>
           <p:cNvPicPr>
             <a:picLocks noChangeAspect="1"/>
           </p:cNvPicPr>
           <p:nvPr/>
         </p:nvPicPr>
         <p:blipFill>
-          <a:blip r:embed="rId7"/>
+          <a:blip r:embed="rId14"/>
           <a:stretch>
             <a:fillRect/>
           </a:stretch>
         </p:blipFill>
         <p:spPr>
           <a:xfrm>
-            <a:off x="8458200" y="1320800"/>
-            <a:ext cx="190500" cy="190500"/>
+            <a:off x="10287000" y="4927600"/>
+            <a:ext cx="177800" cy="177800"/>
           </a:xfrm>
           <a:prstGeom prst="rect">
             <a:avLst/>
@@ -4593,14 +7716,14 @@
       </p:pic>
       <p:sp>
         <p:nvSpPr>
-          <p:cNvPr id="43" name="TextBox 42"/>
+          <p:cNvPr id="129" name="TextBox 128"/>
           <p:cNvSpPr txBox="1"/>
           <p:nvPr/>
         </p:nvSpPr>
         <p:spPr>
           <a:xfrm>
-            <a:off x="8737600" y="1308735"/>
-            <a:ext cx="1433068" cy="356616"/>
+            <a:off x="10541000" y="4897438"/>
+            <a:ext cx="1673225" cy="342900"/>
           </a:xfrm>
           <a:prstGeom prst="rect">
             <a:avLst/>
@@ -4615,73 +7738,27 @@
           <a:p>
             <a:pPr algn="l"/>
             <a:r>
-              <a:rPr sz="1300" b="1" i="0">
-                <a:solidFill>
-                  <a:srgbClr val="0070F3"/>
+              <a:rPr sz="1250" b="1" i="0">
+                <a:solidFill>
+                  <a:srgbClr val="171717"/>
                 </a:solidFill>
                 <a:latin typeface="Geist"/>
               </a:rPr>
-              <a:t>Lp  provenance</a:t>
-            </a:r>
-          </a:p>
-        </p:txBody>
-      </p:sp>
-      <p:sp>
-        <p:nvSpPr>
-          <p:cNvPr id="44" name="Rounded Rectangle 43"/>
-          <p:cNvSpPr/>
-          <p:nvPr/>
-        </p:nvSpPr>
-        <p:spPr>
-          <a:xfrm>
-            <a:off x="8445500" y="1676400"/>
-            <a:ext cx="1549400" cy="304800"/>
-          </a:xfrm>
-          <a:prstGeom prst="roundRect">
-            <a:avLst>
-              <a:gd name="adj" fmla="val 16666"/>
-            </a:avLst>
-          </a:prstGeom>
-          <a:solidFill>
-            <a:srgbClr val="FFFFFF"/>
-          </a:solidFill>
-          <a:ln w="12700">
-            <a:solidFill>
-              <a:srgbClr val="F0F0F0"/>
-            </a:solidFill>
-          </a:ln>
-          <a:effectLst/>
-        </p:spPr>
-        <p:style>
-          <a:lnRef idx="1">
-            <a:schemeClr val="accent1"/>
-          </a:lnRef>
-          <a:fillRef idx="3">
-            <a:schemeClr val="accent1"/>
-          </a:fillRef>
-          <a:effectRef idx="2">
-            <a:schemeClr val="accent1"/>
-          </a:effectRef>
-          <a:fontRef idx="minor">
-            <a:schemeClr val="lt1"/>
-          </a:fontRef>
-        </p:style>
-        <p:txBody>
-          <a:bodyPr rtlCol="0" anchor="ctr"/>
-          <a:lstStyle/>
-          <a:p/>
-        </p:txBody>
-      </p:sp>
-      <p:sp>
-        <p:nvSpPr>
-          <p:cNvPr id="45" name="TextBox 44"/>
+              <a:t>Audit &amp; integrity</a:t>
+            </a:r>
+          </a:p>
+        </p:txBody>
+      </p:sp>
+      <p:sp>
+        <p:nvSpPr>
+          <p:cNvPr id="130" name="TextBox 129"/>
           <p:cNvSpPr txBox="1"/>
           <p:nvPr/>
         </p:nvSpPr>
         <p:spPr>
           <a:xfrm>
-            <a:off x="8631618" y="1711642"/>
-            <a:ext cx="1177163" cy="315468"/>
+            <a:off x="10312400" y="5198745"/>
+            <a:ext cx="2338578" cy="301752"/>
           </a:xfrm>
           <a:prstGeom prst="rect">
             <a:avLst/>
@@ -4694,29 +7771,29 @@
           </a:bodyPr>
           <a:lstStyle/>
           <a:p>
-            <a:pPr algn="ctr"/>
-            <a:r>
-              <a:rPr sz="1150" b="0" i="0">
-                <a:solidFill>
-                  <a:srgbClr val="171717"/>
-                </a:solidFill>
-                <a:latin typeface="Geist Mono"/>
+            <a:pPr algn="l"/>
+            <a:r>
+              <a:rPr sz="1100" b="0" i="0">
+                <a:solidFill>
+                  <a:srgbClr val="4D4D4D"/>
+                </a:solidFill>
+                <a:latin typeface="Geist"/>
               </a:rPr>
-              <a:t>channel split</a:t>
-            </a:r>
-          </a:p>
-        </p:txBody>
-      </p:sp>
-      <p:sp>
-        <p:nvSpPr>
-          <p:cNvPr id="46" name="TextBox 45"/>
+              <a:t>Ed25519 per-agent signature</a:t>
+            </a:r>
+          </a:p>
+        </p:txBody>
+      </p:sp>
+      <p:sp>
+        <p:nvSpPr>
+          <p:cNvPr id="131" name="TextBox 130"/>
           <p:cNvSpPr txBox="1"/>
           <p:nvPr/>
         </p:nvSpPr>
         <p:spPr>
           <a:xfrm>
-            <a:off x="8483600" y="2118042"/>
-            <a:ext cx="1448816" cy="315468"/>
+            <a:off x="10312400" y="5401945"/>
+            <a:ext cx="2425192" cy="301752"/>
           </a:xfrm>
           <a:prstGeom prst="rect">
             <a:avLst/>
@@ -4731,27 +7808,27 @@
           <a:p>
             <a:pPr algn="l"/>
             <a:r>
-              <a:rPr sz="1150" b="0" i="0">
-                <a:solidFill>
-                  <a:srgbClr val="0070F3"/>
+              <a:rPr sz="1100" b="0" i="0">
+                <a:solidFill>
+                  <a:srgbClr val="4D4D4D"/>
                 </a:solidFill>
                 <a:latin typeface="Geist"/>
               </a:rPr>
-              <a:t>&lt;1 ms · optional</a:t>
-            </a:r>
-          </a:p>
-        </p:txBody>
-      </p:sp>
-      <p:sp>
-        <p:nvSpPr>
-          <p:cNvPr id="47" name="TextBox 46"/>
+              <a:t>SHA-256 chain → Merkle → log</a:t>
+            </a:r>
+          </a:p>
+        </p:txBody>
+      </p:sp>
+      <p:sp>
+        <p:nvSpPr>
+          <p:cNvPr id="132" name="TextBox 131"/>
           <p:cNvSpPr txBox="1"/>
           <p:nvPr/>
         </p:nvSpPr>
         <p:spPr>
           <a:xfrm>
-            <a:off x="2540000" y="2578735"/>
-            <a:ext cx="818896" cy="356616"/>
+            <a:off x="10312400" y="5605145"/>
+            <a:ext cx="2425192" cy="301752"/>
           </a:xfrm>
           <a:prstGeom prst="rect">
             <a:avLst/>
@@ -4766,409 +7843,26 @@
           <a:p>
             <a:pPr algn="l"/>
             <a:r>
-              <a:rPr sz="1300" b="1" i="0">
-                <a:solidFill>
-                  <a:srgbClr val="171717"/>
+              <a:rPr sz="1100" b="0" i="0">
+                <a:solidFill>
+                  <a:srgbClr val="4D4D4D"/>
                 </a:solidFill>
                 <a:latin typeface="Geist"/>
               </a:rPr>
-              <a:t>decision</a:t>
-            </a:r>
-          </a:p>
-        </p:txBody>
-      </p:sp>
-      <p:sp>
-        <p:nvSpPr>
-          <p:cNvPr id="48" name="Rounded Rectangle 47"/>
+              <a:t>witnesses · offline verifier</a:t>
+            </a:r>
+          </a:p>
+        </p:txBody>
+      </p:sp>
+      <p:sp>
+        <p:nvSpPr>
+          <p:cNvPr id="133" name="Rounded Rectangle 132"/>
           <p:cNvSpPr/>
           <p:nvPr/>
         </p:nvSpPr>
         <p:spPr>
           <a:xfrm>
-            <a:off x="3505200" y="2590800"/>
-            <a:ext cx="1168400" cy="406400"/>
-          </a:xfrm>
-          <a:prstGeom prst="roundRect">
-            <a:avLst>
-              <a:gd name="adj" fmla="val 50000"/>
-            </a:avLst>
-          </a:prstGeom>
-          <a:solidFill>
-            <a:srgbClr val="D7F2E7"/>
-          </a:solidFill>
-          <a:ln w="12700">
-            <a:solidFill>
-              <a:srgbClr val="D7F2E7"/>
-            </a:solidFill>
-          </a:ln>
-          <a:effectLst/>
-        </p:spPr>
-        <p:style>
-          <a:lnRef idx="1">
-            <a:schemeClr val="accent1"/>
-          </a:lnRef>
-          <a:fillRef idx="3">
-            <a:schemeClr val="accent1"/>
-          </a:fillRef>
-          <a:effectRef idx="2">
-            <a:schemeClr val="accent1"/>
-          </a:effectRef>
-          <a:fontRef idx="minor">
-            <a:schemeClr val="lt1"/>
-          </a:fontRef>
-        </p:style>
-        <p:txBody>
-          <a:bodyPr rtlCol="0" anchor="ctr"/>
-          <a:lstStyle/>
-          <a:p/>
-        </p:txBody>
-      </p:sp>
-      <p:sp>
-        <p:nvSpPr>
-          <p:cNvPr id="49" name="TextBox 48"/>
-          <p:cNvSpPr txBox="1"/>
-          <p:nvPr/>
-        </p:nvSpPr>
-        <p:spPr>
-          <a:xfrm>
-            <a:off x="3708400" y="2667635"/>
-            <a:ext cx="762000" cy="356616"/>
-          </a:xfrm>
-          <a:prstGeom prst="rect">
-            <a:avLst/>
-          </a:prstGeom>
-          <a:noFill/>
-        </p:spPr>
-        <p:txBody>
-          <a:bodyPr wrap="none" lIns="0" rIns="0" tIns="0" bIns="0" anchor="t">
-            <a:spAutoFit/>
-          </a:bodyPr>
-          <a:lstStyle/>
-          <a:p>
-            <a:pPr algn="ctr"/>
-            <a:r>
-              <a:rPr sz="1300" b="1" i="0">
-                <a:solidFill>
-                  <a:srgbClr val="0E8A5F"/>
-                </a:solidFill>
-                <a:latin typeface="Geist"/>
-              </a:rPr>
-              <a:t>allow</a:t>
-            </a:r>
-          </a:p>
-        </p:txBody>
-      </p:sp>
-      <p:sp>
-        <p:nvSpPr>
-          <p:cNvPr id="50" name="Rounded Rectangle 49"/>
-          <p:cNvSpPr/>
-          <p:nvPr/>
-        </p:nvSpPr>
-        <p:spPr>
-          <a:xfrm>
-            <a:off x="4826000" y="2590800"/>
-            <a:ext cx="1168400" cy="406400"/>
-          </a:xfrm>
-          <a:prstGeom prst="roundRect">
-            <a:avLst>
-              <a:gd name="adj" fmla="val 50000"/>
-            </a:avLst>
-          </a:prstGeom>
-          <a:solidFill>
-            <a:srgbClr val="FFE3E3"/>
-          </a:solidFill>
-          <a:ln w="12700">
-            <a:solidFill>
-              <a:srgbClr val="FFE3E3"/>
-            </a:solidFill>
-          </a:ln>
-          <a:effectLst/>
-        </p:spPr>
-        <p:style>
-          <a:lnRef idx="1">
-            <a:schemeClr val="accent1"/>
-          </a:lnRef>
-          <a:fillRef idx="3">
-            <a:schemeClr val="accent1"/>
-          </a:fillRef>
-          <a:effectRef idx="2">
-            <a:schemeClr val="accent1"/>
-          </a:effectRef>
-          <a:fontRef idx="minor">
-            <a:schemeClr val="lt1"/>
-          </a:fontRef>
-        </p:style>
-        <p:txBody>
-          <a:bodyPr rtlCol="0" anchor="ctr"/>
-          <a:lstStyle/>
-          <a:p/>
-        </p:txBody>
-      </p:sp>
-      <p:sp>
-        <p:nvSpPr>
-          <p:cNvPr id="51" name="TextBox 50"/>
-          <p:cNvSpPr txBox="1"/>
-          <p:nvPr/>
-        </p:nvSpPr>
-        <p:spPr>
-          <a:xfrm>
-            <a:off x="5029200" y="2667635"/>
-            <a:ext cx="762000" cy="356616"/>
-          </a:xfrm>
-          <a:prstGeom prst="rect">
-            <a:avLst/>
-          </a:prstGeom>
-          <a:noFill/>
-        </p:spPr>
-        <p:txBody>
-          <a:bodyPr wrap="none" lIns="0" rIns="0" tIns="0" bIns="0" anchor="t">
-            <a:spAutoFit/>
-          </a:bodyPr>
-          <a:lstStyle/>
-          <a:p>
-            <a:pPr algn="ctr"/>
-            <a:r>
-              <a:rPr sz="1300" b="1" i="0">
-                <a:solidFill>
-                  <a:srgbClr val="D40000"/>
-                </a:solidFill>
-                <a:latin typeface="Geist"/>
-              </a:rPr>
-              <a:t>block</a:t>
-            </a:r>
-          </a:p>
-        </p:txBody>
-      </p:sp>
-      <p:sp>
-        <p:nvSpPr>
-          <p:cNvPr id="52" name="Rounded Rectangle 51"/>
-          <p:cNvSpPr/>
-          <p:nvPr/>
-        </p:nvSpPr>
-        <p:spPr>
-          <a:xfrm>
-            <a:off x="6146800" y="2590800"/>
-            <a:ext cx="1320800" cy="406400"/>
-          </a:xfrm>
-          <a:prstGeom prst="roundRect">
-            <a:avLst>
-              <a:gd name="adj" fmla="val 50000"/>
-            </a:avLst>
-          </a:prstGeom>
-          <a:solidFill>
-            <a:srgbClr val="FFEFCF"/>
-          </a:solidFill>
-          <a:ln w="12700">
-            <a:solidFill>
-              <a:srgbClr val="FFEFCF"/>
-            </a:solidFill>
-          </a:ln>
-          <a:effectLst/>
-        </p:spPr>
-        <p:style>
-          <a:lnRef idx="1">
-            <a:schemeClr val="accent1"/>
-          </a:lnRef>
-          <a:fillRef idx="3">
-            <a:schemeClr val="accent1"/>
-          </a:fillRef>
-          <a:effectRef idx="2">
-            <a:schemeClr val="accent1"/>
-          </a:effectRef>
-          <a:fontRef idx="minor">
-            <a:schemeClr val="lt1"/>
-          </a:fontRef>
-        </p:style>
-        <p:txBody>
-          <a:bodyPr rtlCol="0" anchor="ctr"/>
-          <a:lstStyle/>
-          <a:p/>
-        </p:txBody>
-      </p:sp>
-      <p:sp>
-        <p:nvSpPr>
-          <p:cNvPr id="53" name="TextBox 52"/>
-          <p:cNvSpPr txBox="1"/>
-          <p:nvPr/>
-        </p:nvSpPr>
-        <p:spPr>
-          <a:xfrm>
-            <a:off x="6426200" y="2667635"/>
-            <a:ext cx="762000" cy="356616"/>
-          </a:xfrm>
-          <a:prstGeom prst="rect">
-            <a:avLst/>
-          </a:prstGeom>
-          <a:noFill/>
-        </p:spPr>
-        <p:txBody>
-          <a:bodyPr wrap="none" lIns="0" rIns="0" tIns="0" bIns="0" anchor="t">
-            <a:spAutoFit/>
-          </a:bodyPr>
-          <a:lstStyle/>
-          <a:p>
-            <a:pPr algn="ctr"/>
-            <a:r>
-              <a:rPr sz="1300" b="1" i="0">
-                <a:solidFill>
-                  <a:srgbClr val="A96500"/>
-                </a:solidFill>
-                <a:latin typeface="Geist"/>
-              </a:rPr>
-              <a:t>pending</a:t>
-            </a:r>
-          </a:p>
-        </p:txBody>
-      </p:sp>
-      <p:cxnSp>
-        <p:nvCxnSpPr>
-          <p:cNvPr id="54" name="Connector 53"/>
-          <p:cNvCxnSpPr/>
-          <p:nvPr/>
-        </p:nvCxnSpPr>
-        <p:spPr>
-          <a:xfrm>
-            <a:off x="7543800" y="2794000"/>
-            <a:ext cx="254000" cy="0"/>
-          </a:xfrm>
-          <a:prstGeom prst="line">
-            <a:avLst/>
-          </a:prstGeom>
-          <a:ln w="20320">
-            <a:solidFill>
-              <a:srgbClr val="8A8A8A"/>
-            </a:solidFill>
-          </a:ln>
-        </p:spPr>
-        <p:style>
-          <a:lnRef idx="2">
-            <a:schemeClr val="accent1"/>
-          </a:lnRef>
-          <a:fillRef idx="0">
-            <a:schemeClr val="accent1"/>
-          </a:fillRef>
-          <a:effectRef idx="1">
-            <a:schemeClr val="accent1"/>
-          </a:effectRef>
-          <a:fontRef idx="minor">
-            <a:schemeClr val="tx1"/>
-          </a:fontRef>
-        </p:style>
-      </p:cxnSp>
-      <p:sp>
-        <p:nvSpPr>
-          <p:cNvPr id="55" name="Rounded Rectangle 54"/>
-          <p:cNvSpPr/>
-          <p:nvPr/>
-        </p:nvSpPr>
-        <p:spPr>
-          <a:xfrm>
-            <a:off x="7874000" y="2590800"/>
-            <a:ext cx="2133600" cy="406400"/>
-          </a:xfrm>
-          <a:prstGeom prst="roundRect">
-            <a:avLst>
-              <a:gd name="adj" fmla="val 21875"/>
-            </a:avLst>
-          </a:prstGeom>
-          <a:solidFill>
-            <a:srgbClr val="FFFFFF"/>
-          </a:solidFill>
-          <a:ln w="12700">
-            <a:solidFill>
-              <a:srgbClr val="F0F0F0"/>
-            </a:solidFill>
-          </a:ln>
-          <a:effectLst/>
-        </p:spPr>
-        <p:style>
-          <a:lnRef idx="1">
-            <a:schemeClr val="accent1"/>
-          </a:lnRef>
-          <a:fillRef idx="3">
-            <a:schemeClr val="accent1"/>
-          </a:fillRef>
-          <a:effectRef idx="2">
-            <a:schemeClr val="accent1"/>
-          </a:effectRef>
-          <a:fontRef idx="minor">
-            <a:schemeClr val="lt1"/>
-          </a:fontRef>
-        </p:style>
-        <p:txBody>
-          <a:bodyPr rtlCol="0" anchor="ctr"/>
-          <a:lstStyle/>
-          <a:p/>
-        </p:txBody>
-      </p:sp>
-      <p:pic>
-        <p:nvPicPr>
-          <p:cNvPr id="56" name="Picture 55" descr="user-check--4d4d4d.256.png"/>
-          <p:cNvPicPr>
-            <a:picLocks noChangeAspect="1"/>
-          </p:cNvPicPr>
-          <p:nvPr/>
-        </p:nvPicPr>
-        <p:blipFill>
-          <a:blip r:embed="rId8"/>
-          <a:stretch>
-            <a:fillRect/>
-          </a:stretch>
-        </p:blipFill>
-        <p:spPr>
-          <a:xfrm>
-            <a:off x="7988300" y="2705100"/>
-            <a:ext cx="177800" cy="177800"/>
-          </a:xfrm>
-          <a:prstGeom prst="rect">
-            <a:avLst/>
-          </a:prstGeom>
-        </p:spPr>
-      </p:pic>
-      <p:sp>
-        <p:nvSpPr>
-          <p:cNvPr id="57" name="TextBox 56"/>
-          <p:cNvSpPr txBox="1"/>
-          <p:nvPr/>
-        </p:nvSpPr>
-        <p:spPr>
-          <a:xfrm>
-            <a:off x="8242300" y="2668588"/>
-            <a:ext cx="1377950" cy="342900"/>
-          </a:xfrm>
-          <a:prstGeom prst="rect">
-            <a:avLst/>
-          </a:prstGeom>
-          <a:noFill/>
-        </p:spPr>
-        <p:txBody>
-          <a:bodyPr wrap="none" lIns="0" rIns="0" tIns="0" bIns="0" anchor="t">
-            <a:spAutoFit/>
-          </a:bodyPr>
-          <a:lstStyle/>
-          <a:p>
-            <a:pPr algn="l"/>
-            <a:r>
-              <a:rPr sz="1250" b="0" i="0">
-                <a:solidFill>
-                  <a:srgbClr val="171717"/>
-                </a:solidFill>
-                <a:latin typeface="Geist"/>
-              </a:rPr>
-              <a:t>human approval</a:t>
-            </a:r>
-          </a:p>
-        </p:txBody>
-      </p:sp>
-      <p:sp>
-        <p:nvSpPr>
-          <p:cNvPr id="58" name="Rounded Rectangle 57"/>
-          <p:cNvSpPr/>
-          <p:nvPr/>
-        </p:nvSpPr>
-        <p:spPr>
-          <a:xfrm>
-            <a:off x="9804400" y="2641600"/>
+            <a:off x="12230100" y="4876800"/>
             <a:ext cx="190500" cy="190500"/>
           </a:xfrm>
           <a:prstGeom prst="roundRect">
@@ -5208,13 +7902,13 @@
       </p:sp>
       <p:sp>
         <p:nvSpPr>
-          <p:cNvPr id="59" name="TextBox 58"/>
+          <p:cNvPr id="134" name="TextBox 133"/>
           <p:cNvSpPr txBox="1"/>
           <p:nvPr/>
         </p:nvSpPr>
         <p:spPr>
           <a:xfrm>
-            <a:off x="9518650" y="2562225"/>
+            <a:off x="11944350" y="4797425"/>
             <a:ext cx="762000" cy="411480"/>
           </a:xfrm>
           <a:prstGeom prst="rect">
@@ -5236,28 +7930,28 @@
                 </a:solidFill>
                 <a:latin typeface="Geist"/>
               </a:rPr>
-              <a:t>2</a:t>
+              <a:t>3</a:t>
             </a:r>
           </a:p>
         </p:txBody>
       </p:sp>
       <p:cxnSp>
         <p:nvCxnSpPr>
-          <p:cNvPr id="60" name="Connector 59"/>
+          <p:cNvPr id="135" name="Connector 134"/>
           <p:cNvCxnSpPr/>
           <p:nvPr/>
         </p:nvCxnSpPr>
         <p:spPr>
           <a:xfrm>
-            <a:off x="4089400" y="3022600"/>
-            <a:ext cx="0" cy="787400"/>
+            <a:off x="10261600" y="1219200"/>
+            <a:ext cx="2362200" cy="0"/>
           </a:xfrm>
           <a:prstGeom prst="line">
             <a:avLst/>
           </a:prstGeom>
-          <a:ln w="22860">
+          <a:ln w="15240">
             <a:solidFill>
-              <a:srgbClr val="0E8A5F"/>
+              <a:srgbClr val="8A8A8A"/>
             </a:solidFill>
           </a:ln>
         </p:spPr>
@@ -5278,21 +7972,21 @@
       </p:cxnSp>
       <p:cxnSp>
         <p:nvCxnSpPr>
-          <p:cNvPr id="61" name="Connector 60"/>
+          <p:cNvPr id="136" name="Connector 135"/>
           <p:cNvCxnSpPr/>
           <p:nvPr/>
         </p:nvCxnSpPr>
         <p:spPr>
-          <a:xfrm flipH="1">
-            <a:off x="1092200" y="3810000"/>
-            <a:ext cx="2997200" cy="0"/>
+          <a:xfrm>
+            <a:off x="12623800" y="1219200"/>
+            <a:ext cx="0" cy="4165600"/>
           </a:xfrm>
           <a:prstGeom prst="line">
             <a:avLst/>
           </a:prstGeom>
-          <a:ln w="22860">
+          <a:ln w="15240">
             <a:solidFill>
-              <a:srgbClr val="0E8A5F"/>
+              <a:srgbClr val="8A8A8A"/>
             </a:solidFill>
           </a:ln>
         </p:spPr>
@@ -5313,21 +8007,21 @@
       </p:cxnSp>
       <p:cxnSp>
         <p:nvCxnSpPr>
-          <p:cNvPr id="62" name="Connector 61"/>
+          <p:cNvPr id="137" name="Connector 136"/>
           <p:cNvCxnSpPr/>
           <p:nvPr/>
         </p:nvCxnSpPr>
         <p:spPr>
-          <a:xfrm flipV="1">
-            <a:off x="1092200" y="3327400"/>
-            <a:ext cx="0" cy="482600"/>
+          <a:xfrm flipH="1">
+            <a:off x="12573000" y="5384800"/>
+            <a:ext cx="50800" cy="0"/>
           </a:xfrm>
           <a:prstGeom prst="line">
             <a:avLst/>
           </a:prstGeom>
-          <a:ln w="22860">
+          <a:ln w="15240">
             <a:solidFill>
-              <a:srgbClr val="0E8A5F"/>
+              <a:srgbClr val="8A8A8A"/>
             </a:solidFill>
           </a:ln>
         </p:spPr>
@@ -5346,272 +8040,16 @@
           </a:fontRef>
         </p:style>
       </p:cxnSp>
-      <p:cxnSp>
-        <p:nvCxnSpPr>
-          <p:cNvPr id="63" name="Connector 62"/>
-          <p:cNvCxnSpPr/>
-          <p:nvPr/>
-        </p:nvCxnSpPr>
-        <p:spPr>
-          <a:xfrm>
-            <a:off x="5410200" y="3022600"/>
-            <a:ext cx="0" cy="1066800"/>
-          </a:xfrm>
-          <a:prstGeom prst="line">
-            <a:avLst/>
-          </a:prstGeom>
-          <a:ln w="27940">
-            <a:solidFill>
-              <a:srgbClr val="D40000"/>
-            </a:solidFill>
-          </a:ln>
-        </p:spPr>
-        <p:style>
-          <a:lnRef idx="2">
-            <a:schemeClr val="accent1"/>
-          </a:lnRef>
-          <a:fillRef idx="0">
-            <a:schemeClr val="accent1"/>
-          </a:fillRef>
-          <a:effectRef idx="1">
-            <a:schemeClr val="accent1"/>
-          </a:effectRef>
-          <a:fontRef idx="minor">
-            <a:schemeClr val="tx1"/>
-          </a:fontRef>
-        </p:style>
-      </p:cxnSp>
-      <p:cxnSp>
-        <p:nvCxnSpPr>
-          <p:cNvPr id="64" name="Connector 63"/>
-          <p:cNvCxnSpPr/>
-          <p:nvPr/>
-        </p:nvCxnSpPr>
-        <p:spPr>
-          <a:xfrm flipH="1">
-            <a:off x="1397000" y="4089400"/>
-            <a:ext cx="4013200" cy="0"/>
-          </a:xfrm>
-          <a:prstGeom prst="line">
-            <a:avLst/>
-          </a:prstGeom>
-          <a:ln w="27940">
-            <a:solidFill>
-              <a:srgbClr val="D40000"/>
-            </a:solidFill>
-          </a:ln>
-        </p:spPr>
-        <p:style>
-          <a:lnRef idx="2">
-            <a:schemeClr val="accent1"/>
-          </a:lnRef>
-          <a:fillRef idx="0">
-            <a:schemeClr val="accent1"/>
-          </a:fillRef>
-          <a:effectRef idx="1">
-            <a:schemeClr val="accent1"/>
-          </a:effectRef>
-          <a:fontRef idx="minor">
-            <a:schemeClr val="tx1"/>
-          </a:fontRef>
-        </p:style>
-      </p:cxnSp>
-      <p:cxnSp>
-        <p:nvCxnSpPr>
-          <p:cNvPr id="65" name="Connector 64"/>
-          <p:cNvCxnSpPr/>
-          <p:nvPr/>
-        </p:nvCxnSpPr>
-        <p:spPr>
-          <a:xfrm flipV="1">
-            <a:off x="1397000" y="3327400"/>
-            <a:ext cx="0" cy="762000"/>
-          </a:xfrm>
-          <a:prstGeom prst="line">
-            <a:avLst/>
-          </a:prstGeom>
-          <a:ln w="27940">
-            <a:solidFill>
-              <a:srgbClr val="D40000"/>
-            </a:solidFill>
-          </a:ln>
-        </p:spPr>
-        <p:style>
-          <a:lnRef idx="2">
-            <a:schemeClr val="accent1"/>
-          </a:lnRef>
-          <a:fillRef idx="0">
-            <a:schemeClr val="accent1"/>
-          </a:fillRef>
-          <a:effectRef idx="1">
-            <a:schemeClr val="accent1"/>
-          </a:effectRef>
-          <a:fontRef idx="minor">
-            <a:schemeClr val="tx1"/>
-          </a:fontRef>
-        </p:style>
-      </p:cxnSp>
-      <p:cxnSp>
-        <p:nvCxnSpPr>
-          <p:cNvPr id="66" name="Connector 65"/>
-          <p:cNvCxnSpPr/>
-          <p:nvPr/>
-        </p:nvCxnSpPr>
-        <p:spPr>
-          <a:xfrm>
-            <a:off x="6807200" y="3022600"/>
-            <a:ext cx="0" cy="1346200"/>
-          </a:xfrm>
-          <a:prstGeom prst="line">
-            <a:avLst/>
-          </a:prstGeom>
-          <a:ln w="22860">
-            <a:solidFill>
-              <a:srgbClr val="A96500"/>
-            </a:solidFill>
-          </a:ln>
-        </p:spPr>
-        <p:style>
-          <a:lnRef idx="2">
-            <a:schemeClr val="accent1"/>
-          </a:lnRef>
-          <a:fillRef idx="0">
-            <a:schemeClr val="accent1"/>
-          </a:fillRef>
-          <a:effectRef idx="1">
-            <a:schemeClr val="accent1"/>
-          </a:effectRef>
-          <a:fontRef idx="minor">
-            <a:schemeClr val="tx1"/>
-          </a:fontRef>
-        </p:style>
-      </p:cxnSp>
-      <p:cxnSp>
-        <p:nvCxnSpPr>
-          <p:cNvPr id="67" name="Connector 66"/>
-          <p:cNvCxnSpPr/>
-          <p:nvPr/>
-        </p:nvCxnSpPr>
-        <p:spPr>
-          <a:xfrm flipH="1">
-            <a:off x="787400" y="4368800"/>
-            <a:ext cx="6019800" cy="0"/>
-          </a:xfrm>
-          <a:prstGeom prst="line">
-            <a:avLst/>
-          </a:prstGeom>
-          <a:ln w="22860">
-            <a:solidFill>
-              <a:srgbClr val="A96500"/>
-            </a:solidFill>
-          </a:ln>
-        </p:spPr>
-        <p:style>
-          <a:lnRef idx="2">
-            <a:schemeClr val="accent1"/>
-          </a:lnRef>
-          <a:fillRef idx="0">
-            <a:schemeClr val="accent1"/>
-          </a:fillRef>
-          <a:effectRef idx="1">
-            <a:schemeClr val="accent1"/>
-          </a:effectRef>
-          <a:fontRef idx="minor">
-            <a:schemeClr val="tx1"/>
-          </a:fontRef>
-        </p:style>
-      </p:cxnSp>
-      <p:cxnSp>
-        <p:nvCxnSpPr>
-          <p:cNvPr id="68" name="Connector 67"/>
-          <p:cNvCxnSpPr/>
-          <p:nvPr/>
-        </p:nvCxnSpPr>
-        <p:spPr>
-          <a:xfrm flipV="1">
-            <a:off x="787400" y="3327400"/>
-            <a:ext cx="0" cy="1041400"/>
-          </a:xfrm>
-          <a:prstGeom prst="line">
-            <a:avLst/>
-          </a:prstGeom>
-          <a:ln w="22860">
-            <a:solidFill>
-              <a:srgbClr val="A96500"/>
-            </a:solidFill>
-          </a:ln>
-        </p:spPr>
-        <p:style>
-          <a:lnRef idx="2">
-            <a:schemeClr val="accent1"/>
-          </a:lnRef>
-          <a:fillRef idx="0">
-            <a:schemeClr val="accent1"/>
-          </a:fillRef>
-          <a:effectRef idx="1">
-            <a:schemeClr val="accent1"/>
-          </a:effectRef>
-          <a:fontRef idx="minor">
-            <a:schemeClr val="tx1"/>
-          </a:fontRef>
-        </p:style>
-      </p:cxnSp>
-      <p:sp>
-        <p:nvSpPr>
-          <p:cNvPr id="69" name="Rounded Rectangle 68"/>
-          <p:cNvSpPr/>
-          <p:nvPr/>
-        </p:nvSpPr>
-        <p:spPr>
-          <a:xfrm>
-            <a:off x="7670800" y="3505200"/>
-            <a:ext cx="4876800" cy="1270000"/>
-          </a:xfrm>
-          <a:prstGeom prst="roundRect">
-            <a:avLst>
-              <a:gd name="adj" fmla="val 8000"/>
-            </a:avLst>
-          </a:prstGeom>
-          <a:solidFill>
-            <a:srgbClr val="FFFFFF"/>
-          </a:solidFill>
-          <a:ln w="12700">
-            <a:solidFill>
-              <a:srgbClr val="F0F0F0"/>
-            </a:solidFill>
-          </a:ln>
-          <a:effectLst/>
-        </p:spPr>
-        <p:style>
-          <a:lnRef idx="1">
-            <a:schemeClr val="accent1"/>
-          </a:lnRef>
-          <a:fillRef idx="3">
-            <a:schemeClr val="accent1"/>
-          </a:fillRef>
-          <a:effectRef idx="2">
-            <a:schemeClr val="accent1"/>
-          </a:effectRef>
-          <a:fontRef idx="minor">
-            <a:schemeClr val="lt1"/>
-          </a:fontRef>
-        </p:style>
-        <p:txBody>
-          <a:bodyPr rtlCol="0" anchor="ctr"/>
-          <a:lstStyle/>
-          <a:p/>
-        </p:txBody>
-      </p:sp>
-      <p:sp>
-        <p:nvSpPr>
-          <p:cNvPr id="70" name="TextBox 69"/>
+      <p:sp>
+        <p:nvSpPr>
+          <p:cNvPr id="138" name="TextBox 137"/>
           <p:cNvSpPr txBox="1"/>
           <p:nvPr/>
         </p:nvSpPr>
         <p:spPr>
           <a:xfrm>
-            <a:off x="7848600" y="3660140"/>
-            <a:ext cx="762000" cy="329184"/>
+            <a:off x="10337800" y="989648"/>
+            <a:ext cx="1818894" cy="288036"/>
           </a:xfrm>
           <a:prstGeom prst="rect">
             <a:avLst/>
@@ -5626,27 +8064,27 @@
           <a:p>
             <a:pPr algn="l"/>
             <a:r>
-              <a:rPr sz="1200" b="1" i="0">
-                <a:solidFill>
-                  <a:srgbClr val="0E8A5F"/>
+              <a:rPr sz="1050" b="0" i="0">
+                <a:solidFill>
+                  <a:srgbClr val="8A8A8A"/>
                 </a:solidFill>
                 <a:latin typeface="Geist"/>
               </a:rPr>
-              <a:t>allow</a:t>
-            </a:r>
-          </a:p>
-        </p:txBody>
-      </p:sp>
-      <p:sp>
-        <p:nvSpPr>
-          <p:cNvPr id="71" name="TextBox 70"/>
+              <a:t>every decision, signed</a:t>
+            </a:r>
+          </a:p>
+        </p:txBody>
+      </p:sp>
+      <p:sp>
+        <p:nvSpPr>
+          <p:cNvPr id="139" name="TextBox 138"/>
           <p:cNvSpPr txBox="1"/>
           <p:nvPr/>
         </p:nvSpPr>
         <p:spPr>
           <a:xfrm>
-            <a:off x="8763000" y="3660140"/>
-            <a:ext cx="3968496" cy="329184"/>
+            <a:off x="152400" y="6047740"/>
+            <a:ext cx="2173224" cy="329184"/>
           </a:xfrm>
           <a:prstGeom prst="rect">
             <a:avLst/>
@@ -5661,27 +8099,27 @@
           <a:p>
             <a:pPr algn="l"/>
             <a:r>
-              <a:rPr sz="1200" b="0" i="0">
+              <a:rPr sz="1200" b="1" i="0">
                 <a:solidFill>
                   <a:srgbClr val="171717"/>
                 </a:solidFill>
                 <a:latin typeface="Geist"/>
               </a:rPr>
-              <a:t>the tool runs; its result returns normally</a:t>
-            </a:r>
-          </a:p>
-        </p:txBody>
-      </p:sp>
-      <p:sp>
-        <p:nvSpPr>
-          <p:cNvPr id="72" name="TextBox 71"/>
+              <a:t>Where an attendee acts:</a:t>
+            </a:r>
+          </a:p>
+        </p:txBody>
+      </p:sp>
+      <p:sp>
+        <p:nvSpPr>
+          <p:cNvPr id="140" name="TextBox 139"/>
           <p:cNvSpPr txBox="1"/>
           <p:nvPr/>
         </p:nvSpPr>
         <p:spPr>
           <a:xfrm>
-            <a:off x="7848600" y="3990340"/>
-            <a:ext cx="762000" cy="329184"/>
+            <a:off x="2413000" y="6047740"/>
+            <a:ext cx="1795272" cy="329184"/>
           </a:xfrm>
           <a:prstGeom prst="rect">
             <a:avLst/>
@@ -5696,27 +8134,27 @@
           <a:p>
             <a:pPr algn="l"/>
             <a:r>
-              <a:rPr sz="1200" b="1" i="0">
-                <a:solidFill>
-                  <a:srgbClr val="D40000"/>
+              <a:rPr sz="1200" b="0" i="0">
+                <a:solidFill>
+                  <a:srgbClr val="4D4D4D"/>
                 </a:solidFill>
                 <a:latin typeface="Geist"/>
               </a:rPr>
-              <a:t>block</a:t>
-            </a:r>
-          </a:p>
-        </p:txBody>
-      </p:sp>
-      <p:sp>
-        <p:nvSpPr>
-          <p:cNvPr id="73" name="TextBox 72"/>
+              <a:t>1  drives the agent</a:t>
+            </a:r>
+          </a:p>
+        </p:txBody>
+      </p:sp>
+      <p:sp>
+        <p:nvSpPr>
+          <p:cNvPr id="141" name="TextBox 140"/>
           <p:cNvSpPr txBox="1"/>
           <p:nvPr/>
         </p:nvSpPr>
         <p:spPr>
           <a:xfrm>
-            <a:off x="8763000" y="3990340"/>
-            <a:ext cx="3685032" cy="329184"/>
+            <a:off x="4445000" y="6047740"/>
+            <a:ext cx="3118104" cy="329184"/>
           </a:xfrm>
           <a:prstGeom prst="rect">
             <a:avLst/>
@@ -5733,890 +8171,6 @@
             <a:r>
               <a:rPr sz="1200" b="0" i="0">
                 <a:solidFill>
-                  <a:srgbClr val="171717"/>
-                </a:solidFill>
-                <a:latin typeface="Geist"/>
-              </a:rPr>
-              <a:t>the tool never runs — a refusal returns</a:t>
-            </a:r>
-          </a:p>
-        </p:txBody>
-      </p:sp>
-      <p:sp>
-        <p:nvSpPr>
-          <p:cNvPr id="74" name="TextBox 73"/>
-          <p:cNvSpPr txBox="1"/>
-          <p:nvPr/>
-        </p:nvSpPr>
-        <p:spPr>
-          <a:xfrm>
-            <a:off x="7848600" y="4320540"/>
-            <a:ext cx="762000" cy="329184"/>
-          </a:xfrm>
-          <a:prstGeom prst="rect">
-            <a:avLst/>
-          </a:prstGeom>
-          <a:noFill/>
-        </p:spPr>
-        <p:txBody>
-          <a:bodyPr wrap="none" lIns="0" rIns="0" tIns="0" bIns="0" anchor="t">
-            <a:spAutoFit/>
-          </a:bodyPr>
-          <a:lstStyle/>
-          <a:p>
-            <a:pPr algn="l"/>
-            <a:r>
-              <a:rPr sz="1200" b="1" i="0">
-                <a:solidFill>
-                  <a:srgbClr val="A96500"/>
-                </a:solidFill>
-                <a:latin typeface="Geist"/>
-              </a:rPr>
-              <a:t>pending</a:t>
-            </a:r>
-          </a:p>
-        </p:txBody>
-      </p:sp>
-      <p:sp>
-        <p:nvSpPr>
-          <p:cNvPr id="75" name="TextBox 74"/>
-          <p:cNvSpPr txBox="1"/>
-          <p:nvPr/>
-        </p:nvSpPr>
-        <p:spPr>
-          <a:xfrm>
-            <a:off x="8763000" y="4320540"/>
-            <a:ext cx="3779520" cy="329184"/>
-          </a:xfrm>
-          <a:prstGeom prst="rect">
-            <a:avLst/>
-          </a:prstGeom>
-          <a:noFill/>
-        </p:spPr>
-        <p:txBody>
-          <a:bodyPr wrap="none" lIns="0" rIns="0" tIns="0" bIns="0" anchor="t">
-            <a:spAutoFit/>
-          </a:bodyPr>
-          <a:lstStyle/>
-          <a:p>
-            <a:pPr algn="l"/>
-            <a:r>
-              <a:rPr sz="1200" b="0" i="0">
-                <a:solidFill>
-                  <a:srgbClr val="171717"/>
-                </a:solidFill>
-                <a:latin typeface="Geist"/>
-              </a:rPr>
-              <a:t>the turn suspends until a person decides</a:t>
-            </a:r>
-          </a:p>
-        </p:txBody>
-      </p:sp>
-      <p:sp>
-        <p:nvSpPr>
-          <p:cNvPr id="76" name="TextBox 75"/>
-          <p:cNvSpPr txBox="1"/>
-          <p:nvPr/>
-        </p:nvSpPr>
-        <p:spPr>
-          <a:xfrm>
-            <a:off x="8763000" y="4155440"/>
-            <a:ext cx="2362200" cy="329184"/>
-          </a:xfrm>
-          <a:prstGeom prst="rect">
-            <a:avLst/>
-          </a:prstGeom>
-          <a:noFill/>
-        </p:spPr>
-        <p:txBody>
-          <a:bodyPr wrap="none" lIns="0" rIns="0" tIns="0" bIns="0" anchor="t">
-            <a:spAutoFit/>
-          </a:bodyPr>
-          <a:lstStyle/>
-          <a:p>
-            <a:pPr algn="l"/>
-            <a:r>
-              <a:rPr sz="1200" b="0" i="0">
-                <a:solidFill>
-                  <a:srgbClr val="171717"/>
-                </a:solidFill>
-                <a:latin typeface="Geist"/>
-              </a:rPr>
-              <a:t>where a tool result would</a:t>
-            </a:r>
-          </a:p>
-        </p:txBody>
-      </p:sp>
-      <p:sp>
-        <p:nvSpPr>
-          <p:cNvPr id="77" name="TextBox 76"/>
-          <p:cNvSpPr txBox="1"/>
-          <p:nvPr/>
-        </p:nvSpPr>
-        <p:spPr>
-          <a:xfrm>
-            <a:off x="152400" y="4940935"/>
-            <a:ext cx="9007856" cy="356616"/>
-          </a:xfrm>
-          <a:prstGeom prst="rect">
-            <a:avLst/>
-          </a:prstGeom>
-          <a:noFill/>
-        </p:spPr>
-        <p:txBody>
-          <a:bodyPr wrap="none" lIns="0" rIns="0" tIns="0" bIns="0" anchor="t">
-            <a:spAutoFit/>
-          </a:bodyPr>
-          <a:lstStyle/>
-          <a:p>
-            <a:pPr algn="l"/>
-            <a:r>
-              <a:rPr sz="1300" b="1" i="0">
-                <a:solidFill>
-                  <a:srgbClr val="171717"/>
-                </a:solidFill>
-                <a:latin typeface="Geist"/>
-              </a:rPr>
-              <a:t>The refusal arrives in-band — which is why a blocked agent explains itself and continues</a:t>
-            </a:r>
-          </a:p>
-        </p:txBody>
-      </p:sp>
-      <p:sp>
-        <p:nvSpPr>
-          <p:cNvPr id="78" name="TextBox 77"/>
-          <p:cNvSpPr txBox="1"/>
-          <p:nvPr/>
-        </p:nvSpPr>
-        <p:spPr>
-          <a:xfrm>
-            <a:off x="152400" y="5169535"/>
-            <a:ext cx="3685032" cy="356616"/>
-          </a:xfrm>
-          <a:prstGeom prst="rect">
-            <a:avLst/>
-          </a:prstGeom>
-          <a:noFill/>
-        </p:spPr>
-        <p:txBody>
-          <a:bodyPr wrap="none" lIns="0" rIns="0" tIns="0" bIns="0" anchor="t">
-            <a:spAutoFit/>
-          </a:bodyPr>
-          <a:lstStyle/>
-          <a:p>
-            <a:pPr algn="l"/>
-            <a:r>
-              <a:rPr sz="1300" b="1" i="0">
-                <a:solidFill>
-                  <a:srgbClr val="171717"/>
-                </a:solidFill>
-                <a:latin typeface="Geist"/>
-              </a:rPr>
-              <a:t>the conversation instead of failing.</a:t>
-            </a:r>
-          </a:p>
-        </p:txBody>
-      </p:sp>
-      <p:cxnSp>
-        <p:nvCxnSpPr>
-          <p:cNvPr id="79" name="Connector 78"/>
-          <p:cNvCxnSpPr/>
-          <p:nvPr/>
-        </p:nvCxnSpPr>
-        <p:spPr>
-          <a:xfrm>
-            <a:off x="10261600" y="1270000"/>
-            <a:ext cx="25400" cy="0"/>
-          </a:xfrm>
-          <a:prstGeom prst="line">
-            <a:avLst/>
-          </a:prstGeom>
-          <a:ln w="17780">
-            <a:solidFill>
-              <a:srgbClr val="8A8A8A"/>
-            </a:solidFill>
-          </a:ln>
-        </p:spPr>
-        <p:style>
-          <a:lnRef idx="2">
-            <a:schemeClr val="accent1"/>
-          </a:lnRef>
-          <a:fillRef idx="0">
-            <a:schemeClr val="accent1"/>
-          </a:fillRef>
-          <a:effectRef idx="1">
-            <a:schemeClr val="accent1"/>
-          </a:effectRef>
-          <a:fontRef idx="minor">
-            <a:schemeClr val="tx1"/>
-          </a:fontRef>
-        </p:style>
-      </p:cxnSp>
-      <p:sp>
-        <p:nvSpPr>
-          <p:cNvPr id="80" name="Rounded Rectangle 79"/>
-          <p:cNvSpPr/>
-          <p:nvPr/>
-        </p:nvSpPr>
-        <p:spPr>
-          <a:xfrm>
-            <a:off x="10363200" y="508000"/>
-            <a:ext cx="2184400" cy="1473200"/>
-          </a:xfrm>
-          <a:prstGeom prst="roundRect">
-            <a:avLst>
-              <a:gd name="adj" fmla="val 10344"/>
-            </a:avLst>
-          </a:prstGeom>
-          <a:solidFill>
-            <a:srgbClr val="FFFFFF"/>
-          </a:solidFill>
-          <a:ln w="12700">
-            <a:solidFill>
-              <a:srgbClr val="EBEBEB"/>
-            </a:solidFill>
-          </a:ln>
-          <a:effectLst/>
-        </p:spPr>
-        <p:style>
-          <a:lnRef idx="1">
-            <a:schemeClr val="accent1"/>
-          </a:lnRef>
-          <a:fillRef idx="3">
-            <a:schemeClr val="accent1"/>
-          </a:fillRef>
-          <a:effectRef idx="2">
-            <a:schemeClr val="accent1"/>
-          </a:effectRef>
-          <a:fontRef idx="minor">
-            <a:schemeClr val="lt1"/>
-          </a:fontRef>
-        </p:style>
-        <p:txBody>
-          <a:bodyPr rtlCol="0" anchor="ctr"/>
-          <a:lstStyle/>
-          <a:p/>
-        </p:txBody>
-      </p:sp>
-      <p:sp>
-        <p:nvSpPr>
-          <p:cNvPr id="81" name="TextBox 80"/>
-          <p:cNvSpPr txBox="1"/>
-          <p:nvPr/>
-        </p:nvSpPr>
-        <p:spPr>
-          <a:xfrm>
-            <a:off x="10515600" y="534035"/>
-            <a:ext cx="1433068" cy="356616"/>
-          </a:xfrm>
-          <a:prstGeom prst="rect">
-            <a:avLst/>
-          </a:prstGeom>
-          <a:noFill/>
-        </p:spPr>
-        <p:txBody>
-          <a:bodyPr wrap="none" lIns="0" rIns="0" tIns="0" bIns="0" anchor="t">
-            <a:spAutoFit/>
-          </a:bodyPr>
-          <a:lstStyle/>
-          <a:p>
-            <a:pPr algn="l"/>
-            <a:r>
-              <a:rPr sz="1300" b="1" i="0">
-                <a:solidFill>
-                  <a:srgbClr val="171717"/>
-                </a:solidFill>
-                <a:latin typeface="Geist"/>
-              </a:rPr>
-              <a:t>Tamper-evident</a:t>
-            </a:r>
-          </a:p>
-        </p:txBody>
-      </p:sp>
-      <p:sp>
-        <p:nvSpPr>
-          <p:cNvPr id="82" name="Rounded Rectangle 81"/>
-          <p:cNvSpPr/>
-          <p:nvPr/>
-        </p:nvSpPr>
-        <p:spPr>
-          <a:xfrm>
-            <a:off x="10490200" y="889000"/>
-            <a:ext cx="1930400" cy="381000"/>
-          </a:xfrm>
-          <a:prstGeom prst="roundRect">
-            <a:avLst>
-              <a:gd name="adj" fmla="val 23333"/>
-            </a:avLst>
-          </a:prstGeom>
-          <a:solidFill>
-            <a:srgbClr val="FFFFFF"/>
-          </a:solidFill>
-          <a:ln w="12700">
-            <a:solidFill>
-              <a:srgbClr val="F0F0F0"/>
-            </a:solidFill>
-          </a:ln>
-          <a:effectLst/>
-        </p:spPr>
-        <p:style>
-          <a:lnRef idx="1">
-            <a:schemeClr val="accent1"/>
-          </a:lnRef>
-          <a:fillRef idx="3">
-            <a:schemeClr val="accent1"/>
-          </a:fillRef>
-          <a:effectRef idx="2">
-            <a:schemeClr val="accent1"/>
-          </a:effectRef>
-          <a:fontRef idx="minor">
-            <a:schemeClr val="lt1"/>
-          </a:fontRef>
-        </p:style>
-        <p:txBody>
-          <a:bodyPr rtlCol="0" anchor="ctr"/>
-          <a:lstStyle/>
-          <a:p/>
-        </p:txBody>
-      </p:sp>
-      <p:pic>
-        <p:nvPicPr>
-          <p:cNvPr id="83" name="Picture 82" descr="lock-check--4d4d4d.256.png"/>
-          <p:cNvPicPr>
-            <a:picLocks noChangeAspect="1"/>
-          </p:cNvPicPr>
-          <p:nvPr/>
-        </p:nvPicPr>
-        <p:blipFill>
-          <a:blip r:embed="rId9"/>
-          <a:stretch>
-            <a:fillRect/>
-          </a:stretch>
-        </p:blipFill>
-        <p:spPr>
-          <a:xfrm>
-            <a:off x="10604500" y="990600"/>
-            <a:ext cx="177800" cy="177800"/>
-          </a:xfrm>
-          <a:prstGeom prst="rect">
-            <a:avLst/>
-          </a:prstGeom>
-        </p:spPr>
-      </p:pic>
-      <p:sp>
-        <p:nvSpPr>
-          <p:cNvPr id="84" name="TextBox 83"/>
-          <p:cNvSpPr txBox="1"/>
-          <p:nvPr/>
-        </p:nvSpPr>
-        <p:spPr>
-          <a:xfrm>
-            <a:off x="10858500" y="959104"/>
-            <a:ext cx="762000" cy="329184"/>
-          </a:xfrm>
-          <a:prstGeom prst="rect">
-            <a:avLst/>
-          </a:prstGeom>
-          <a:noFill/>
-        </p:spPr>
-        <p:txBody>
-          <a:bodyPr wrap="none" lIns="0" rIns="0" tIns="0" bIns="0" anchor="t">
-            <a:spAutoFit/>
-          </a:bodyPr>
-          <a:lstStyle/>
-          <a:p>
-            <a:pPr algn="l"/>
-            <a:r>
-              <a:rPr sz="1200" b="0" i="0">
-                <a:solidFill>
-                  <a:srgbClr val="171717"/>
-                </a:solidFill>
-                <a:latin typeface="Geist"/>
-              </a:rPr>
-              <a:t>Ed25519</a:t>
-            </a:r>
-          </a:p>
-        </p:txBody>
-      </p:sp>
-      <p:sp>
-        <p:nvSpPr>
-          <p:cNvPr id="85" name="Rounded Rectangle 84"/>
-          <p:cNvSpPr/>
-          <p:nvPr/>
-        </p:nvSpPr>
-        <p:spPr>
-          <a:xfrm>
-            <a:off x="10490200" y="1371600"/>
-            <a:ext cx="1930400" cy="355600"/>
-          </a:xfrm>
-          <a:prstGeom prst="roundRect">
-            <a:avLst>
-              <a:gd name="adj" fmla="val 17857"/>
-            </a:avLst>
-          </a:prstGeom>
-          <a:solidFill>
-            <a:srgbClr val="FAFAFA"/>
-          </a:solidFill>
-          <a:ln w="12700">
-            <a:solidFill>
-              <a:srgbClr val="F0F0F0"/>
-            </a:solidFill>
-          </a:ln>
-          <a:effectLst/>
-        </p:spPr>
-        <p:style>
-          <a:lnRef idx="1">
-            <a:schemeClr val="accent1"/>
-          </a:lnRef>
-          <a:fillRef idx="3">
-            <a:schemeClr val="accent1"/>
-          </a:fillRef>
-          <a:effectRef idx="2">
-            <a:schemeClr val="accent1"/>
-          </a:effectRef>
-          <a:fontRef idx="minor">
-            <a:schemeClr val="lt1"/>
-          </a:fontRef>
-        </p:style>
-        <p:txBody>
-          <a:bodyPr rtlCol="0" anchor="ctr"/>
-          <a:lstStyle/>
-          <a:p/>
-        </p:txBody>
-      </p:sp>
-      <p:sp>
-        <p:nvSpPr>
-          <p:cNvPr id="86" name="TextBox 85"/>
-          <p:cNvSpPr txBox="1"/>
-          <p:nvPr/>
-        </p:nvSpPr>
-        <p:spPr>
-          <a:xfrm>
-            <a:off x="10591800" y="1434020"/>
-            <a:ext cx="1177163" cy="315468"/>
-          </a:xfrm>
-          <a:prstGeom prst="rect">
-            <a:avLst/>
-          </a:prstGeom>
-          <a:noFill/>
-        </p:spPr>
-        <p:txBody>
-          <a:bodyPr wrap="none" lIns="0" rIns="0" tIns="0" bIns="0" anchor="t">
-            <a:spAutoFit/>
-          </a:bodyPr>
-          <a:lstStyle/>
-          <a:p>
-            <a:pPr algn="l"/>
-            <a:r>
-              <a:rPr sz="1150" b="0" i="0">
-                <a:solidFill>
-                  <a:srgbClr val="4D4D4D"/>
-                </a:solidFill>
-                <a:latin typeface="Geist Mono"/>
-              </a:rPr>
-              <a:t>SHA-256 chain</a:t>
-            </a:r>
-          </a:p>
-        </p:txBody>
-      </p:sp>
-      <p:sp>
-        <p:nvSpPr>
-          <p:cNvPr id="87" name="Rounded Rectangle 86"/>
-          <p:cNvSpPr/>
-          <p:nvPr/>
-        </p:nvSpPr>
-        <p:spPr>
-          <a:xfrm>
-            <a:off x="12242800" y="584200"/>
-            <a:ext cx="190500" cy="190500"/>
-          </a:xfrm>
-          <a:prstGeom prst="roundRect">
-            <a:avLst>
-              <a:gd name="adj" fmla="val 50000"/>
-            </a:avLst>
-          </a:prstGeom>
-          <a:solidFill>
-            <a:srgbClr val="171717"/>
-          </a:solidFill>
-          <a:ln w="12700">
-            <a:solidFill>
-              <a:srgbClr val="171717"/>
-            </a:solidFill>
-          </a:ln>
-          <a:effectLst/>
-        </p:spPr>
-        <p:style>
-          <a:lnRef idx="1">
-            <a:schemeClr val="accent1"/>
-          </a:lnRef>
-          <a:fillRef idx="3">
-            <a:schemeClr val="accent1"/>
-          </a:fillRef>
-          <a:effectRef idx="2">
-            <a:schemeClr val="accent1"/>
-          </a:effectRef>
-          <a:fontRef idx="minor">
-            <a:schemeClr val="lt1"/>
-          </a:fontRef>
-        </p:style>
-        <p:txBody>
-          <a:bodyPr rtlCol="0" anchor="ctr"/>
-          <a:lstStyle/>
-          <a:p/>
-        </p:txBody>
-      </p:sp>
-      <p:sp>
-        <p:nvSpPr>
-          <p:cNvPr id="88" name="TextBox 87"/>
-          <p:cNvSpPr txBox="1"/>
-          <p:nvPr/>
-        </p:nvSpPr>
-        <p:spPr>
-          <a:xfrm>
-            <a:off x="11957050" y="504825"/>
-            <a:ext cx="762000" cy="411480"/>
-          </a:xfrm>
-          <a:prstGeom prst="rect">
-            <a:avLst/>
-          </a:prstGeom>
-          <a:noFill/>
-        </p:spPr>
-        <p:txBody>
-          <a:bodyPr wrap="none" lIns="0" rIns="0" tIns="0" bIns="0" anchor="t">
-            <a:spAutoFit/>
-          </a:bodyPr>
-          <a:lstStyle/>
-          <a:p>
-            <a:pPr algn="ctr"/>
-            <a:r>
-              <a:rPr sz="1500" b="1" i="0">
-                <a:solidFill>
-                  <a:srgbClr val="FFFFFF"/>
-                </a:solidFill>
-                <a:latin typeface="Geist"/>
-              </a:rPr>
-              <a:t>3</a:t>
-            </a:r>
-          </a:p>
-        </p:txBody>
-      </p:sp>
-      <p:sp>
-        <p:nvSpPr>
-          <p:cNvPr id="89" name="Rounded Rectangle 88"/>
-          <p:cNvSpPr/>
-          <p:nvPr/>
-        </p:nvSpPr>
-        <p:spPr>
-          <a:xfrm>
-            <a:off x="10363200" y="2133600"/>
-            <a:ext cx="2184400" cy="1143000"/>
-          </a:xfrm>
-          <a:prstGeom prst="roundRect">
-            <a:avLst>
-              <a:gd name="adj" fmla="val 13333"/>
-            </a:avLst>
-          </a:prstGeom>
-          <a:solidFill>
-            <a:srgbClr val="FFFFFF"/>
-          </a:solidFill>
-          <a:ln w="12700">
-            <a:solidFill>
-              <a:srgbClr val="EBEBEB"/>
-            </a:solidFill>
-          </a:ln>
-          <a:effectLst/>
-        </p:spPr>
-        <p:style>
-          <a:lnRef idx="1">
-            <a:schemeClr val="accent1"/>
-          </a:lnRef>
-          <a:fillRef idx="3">
-            <a:schemeClr val="accent1"/>
-          </a:fillRef>
-          <a:effectRef idx="2">
-            <a:schemeClr val="accent1"/>
-          </a:effectRef>
-          <a:fontRef idx="minor">
-            <a:schemeClr val="lt1"/>
-          </a:fontRef>
-        </p:style>
-        <p:txBody>
-          <a:bodyPr rtlCol="0" anchor="ctr"/>
-          <a:lstStyle/>
-          <a:p/>
-        </p:txBody>
-      </p:sp>
-      <p:sp>
-        <p:nvSpPr>
-          <p:cNvPr id="90" name="TextBox 89"/>
-          <p:cNvSpPr txBox="1"/>
-          <p:nvPr/>
-        </p:nvSpPr>
-        <p:spPr>
-          <a:xfrm>
-            <a:off x="10515600" y="2159635"/>
-            <a:ext cx="762000" cy="356616"/>
-          </a:xfrm>
-          <a:prstGeom prst="rect">
-            <a:avLst/>
-          </a:prstGeom>
-          <a:noFill/>
-        </p:spPr>
-        <p:txBody>
-          <a:bodyPr wrap="none" lIns="0" rIns="0" tIns="0" bIns="0" anchor="t">
-            <a:spAutoFit/>
-          </a:bodyPr>
-          <a:lstStyle/>
-          <a:p>
-            <a:pPr algn="l"/>
-            <a:r>
-              <a:rPr sz="1300" b="1" i="0">
-                <a:solidFill>
-                  <a:srgbClr val="171717"/>
-                </a:solidFill>
-                <a:latin typeface="Geist"/>
-              </a:rPr>
-              <a:t>Cockpit</a:t>
-            </a:r>
-          </a:p>
-        </p:txBody>
-      </p:sp>
-      <p:sp>
-        <p:nvSpPr>
-          <p:cNvPr id="91" name="Rounded Rectangle 90"/>
-          <p:cNvSpPr/>
-          <p:nvPr/>
-        </p:nvSpPr>
-        <p:spPr>
-          <a:xfrm>
-            <a:off x="10490200" y="2489200"/>
-            <a:ext cx="1930400" cy="381000"/>
-          </a:xfrm>
-          <a:prstGeom prst="roundRect">
-            <a:avLst>
-              <a:gd name="adj" fmla="val 23333"/>
-            </a:avLst>
-          </a:prstGeom>
-          <a:solidFill>
-            <a:srgbClr val="FFFFFF"/>
-          </a:solidFill>
-          <a:ln w="12700">
-            <a:solidFill>
-              <a:srgbClr val="F0F0F0"/>
-            </a:solidFill>
-          </a:ln>
-          <a:effectLst/>
-        </p:spPr>
-        <p:style>
-          <a:lnRef idx="1">
-            <a:schemeClr val="accent1"/>
-          </a:lnRef>
-          <a:fillRef idx="3">
-            <a:schemeClr val="accent1"/>
-          </a:fillRef>
-          <a:effectRef idx="2">
-            <a:schemeClr val="accent1"/>
-          </a:effectRef>
-          <a:fontRef idx="minor">
-            <a:schemeClr val="lt1"/>
-          </a:fontRef>
-        </p:style>
-        <p:txBody>
-          <a:bodyPr rtlCol="0" anchor="ctr"/>
-          <a:lstStyle/>
-          <a:p/>
-        </p:txBody>
-      </p:sp>
-      <p:pic>
-        <p:nvPicPr>
-          <p:cNvPr id="92" name="Picture 91" descr="layout-dashboard--4d4d4d.256.png"/>
-          <p:cNvPicPr>
-            <a:picLocks noChangeAspect="1"/>
-          </p:cNvPicPr>
-          <p:nvPr/>
-        </p:nvPicPr>
-        <p:blipFill>
-          <a:blip r:embed="rId10"/>
-          <a:stretch>
-            <a:fillRect/>
-          </a:stretch>
-        </p:blipFill>
-        <p:spPr>
-          <a:xfrm>
-            <a:off x="10604500" y="2590800"/>
-            <a:ext cx="177800" cy="177800"/>
-          </a:xfrm>
-          <a:prstGeom prst="rect">
-            <a:avLst/>
-          </a:prstGeom>
-        </p:spPr>
-      </p:pic>
-      <p:sp>
-        <p:nvSpPr>
-          <p:cNvPr id="93" name="TextBox 92"/>
-          <p:cNvSpPr txBox="1"/>
-          <p:nvPr/>
-        </p:nvSpPr>
-        <p:spPr>
-          <a:xfrm>
-            <a:off x="10858500" y="2559304"/>
-            <a:ext cx="850392" cy="329184"/>
-          </a:xfrm>
-          <a:prstGeom prst="rect">
-            <a:avLst/>
-          </a:prstGeom>
-          <a:noFill/>
-        </p:spPr>
-        <p:txBody>
-          <a:bodyPr wrap="none" lIns="0" rIns="0" tIns="0" bIns="0" anchor="t">
-            <a:spAutoFit/>
-          </a:bodyPr>
-          <a:lstStyle/>
-          <a:p>
-            <a:pPr algn="l"/>
-            <a:r>
-              <a:rPr sz="1200" b="0" i="0">
-                <a:solidFill>
-                  <a:srgbClr val="171717"/>
-                </a:solidFill>
-                <a:latin typeface="Geist"/>
-              </a:rPr>
-              <a:t>live feed</a:t>
-            </a:r>
-          </a:p>
-        </p:txBody>
-      </p:sp>
-      <p:sp>
-        <p:nvSpPr>
-          <p:cNvPr id="94" name="TextBox 93"/>
-          <p:cNvSpPr txBox="1"/>
-          <p:nvPr/>
-        </p:nvSpPr>
-        <p:spPr>
-          <a:xfrm>
-            <a:off x="10515600" y="2930842"/>
-            <a:ext cx="1629918" cy="315468"/>
-          </a:xfrm>
-          <a:prstGeom prst="rect">
-            <a:avLst/>
-          </a:prstGeom>
-          <a:noFill/>
-        </p:spPr>
-        <p:txBody>
-          <a:bodyPr wrap="none" lIns="0" rIns="0" tIns="0" bIns="0" anchor="t">
-            <a:spAutoFit/>
-          </a:bodyPr>
-          <a:lstStyle/>
-          <a:p>
-            <a:pPr algn="l"/>
-            <a:r>
-              <a:rPr sz="1150" b="0" i="0">
-                <a:solidFill>
-                  <a:srgbClr val="4D4D4D"/>
-                </a:solidFill>
-                <a:latin typeface="Geist"/>
-              </a:rPr>
-              <a:t>approvals · export</a:t>
-            </a:r>
-          </a:p>
-        </p:txBody>
-      </p:sp>
-      <p:sp>
-        <p:nvSpPr>
-          <p:cNvPr id="95" name="TextBox 94"/>
-          <p:cNvSpPr txBox="1"/>
-          <p:nvPr/>
-        </p:nvSpPr>
-        <p:spPr>
-          <a:xfrm>
-            <a:off x="152400" y="5565140"/>
-            <a:ext cx="2173224" cy="329184"/>
-          </a:xfrm>
-          <a:prstGeom prst="rect">
-            <a:avLst/>
-          </a:prstGeom>
-          <a:noFill/>
-        </p:spPr>
-        <p:txBody>
-          <a:bodyPr wrap="none" lIns="0" rIns="0" tIns="0" bIns="0" anchor="t">
-            <a:spAutoFit/>
-          </a:bodyPr>
-          <a:lstStyle/>
-          <a:p>
-            <a:pPr algn="l"/>
-            <a:r>
-              <a:rPr sz="1200" b="1" i="0">
-                <a:solidFill>
-                  <a:srgbClr val="171717"/>
-                </a:solidFill>
-                <a:latin typeface="Geist"/>
-              </a:rPr>
-              <a:t>Where an attendee acts:</a:t>
-            </a:r>
-          </a:p>
-        </p:txBody>
-      </p:sp>
-      <p:sp>
-        <p:nvSpPr>
-          <p:cNvPr id="96" name="TextBox 95"/>
-          <p:cNvSpPr txBox="1"/>
-          <p:nvPr/>
-        </p:nvSpPr>
-        <p:spPr>
-          <a:xfrm>
-            <a:off x="2489200" y="5565140"/>
-            <a:ext cx="1795272" cy="329184"/>
-          </a:xfrm>
-          <a:prstGeom prst="rect">
-            <a:avLst/>
-          </a:prstGeom>
-          <a:noFill/>
-        </p:spPr>
-        <p:txBody>
-          <a:bodyPr wrap="none" lIns="0" rIns="0" tIns="0" bIns="0" anchor="t">
-            <a:spAutoFit/>
-          </a:bodyPr>
-          <a:lstStyle/>
-          <a:p>
-            <a:pPr algn="l"/>
-            <a:r>
-              <a:rPr sz="1200" b="0" i="0">
-                <a:solidFill>
-                  <a:srgbClr val="4D4D4D"/>
-                </a:solidFill>
-                <a:latin typeface="Geist"/>
-              </a:rPr>
-              <a:t>1  drives the agent</a:t>
-            </a:r>
-          </a:p>
-        </p:txBody>
-      </p:sp>
-      <p:sp>
-        <p:nvSpPr>
-          <p:cNvPr id="97" name="TextBox 96"/>
-          <p:cNvSpPr txBox="1"/>
-          <p:nvPr/>
-        </p:nvSpPr>
-        <p:spPr>
-          <a:xfrm>
-            <a:off x="4521200" y="5565140"/>
-            <a:ext cx="3118104" cy="329184"/>
-          </a:xfrm>
-          <a:prstGeom prst="rect">
-            <a:avLst/>
-          </a:prstGeom>
-          <a:noFill/>
-        </p:spPr>
-        <p:txBody>
-          <a:bodyPr wrap="none" lIns="0" rIns="0" tIns="0" bIns="0" anchor="t">
-            <a:spAutoFit/>
-          </a:bodyPr>
-          <a:lstStyle/>
-          <a:p>
-            <a:pPr algn="l"/>
-            <a:r>
-              <a:rPr sz="1200" b="0" i="0">
-                <a:solidFill>
                   <a:srgbClr val="4D4D4D"/>
                 </a:solidFill>
                 <a:latin typeface="Geist"/>
@@ -6628,13 +8182,13 @@
       </p:sp>
       <p:sp>
         <p:nvSpPr>
-          <p:cNvPr id="98" name="TextBox 97"/>
+          <p:cNvPr id="142" name="TextBox 141"/>
           <p:cNvSpPr txBox="1"/>
           <p:nvPr/>
         </p:nvSpPr>
         <p:spPr>
           <a:xfrm>
-            <a:off x="7620000" y="5565140"/>
+            <a:off x="7543800" y="6047740"/>
             <a:ext cx="4724400" cy="329184"/>
           </a:xfrm>
           <a:prstGeom prst="rect">
